--- a/docs/soutenance.pptx
+++ b/docs/soutenance.pptx
@@ -29,7 +29,9 @@
     <p:sldId id="274" r:id="rId24"/>
     <p:sldId id="275" r:id="rId25"/>
     <p:sldId id="276" r:id="rId26"/>
+    <p:sldId id="280" r:id="rId31"/>
     <p:sldId id="277" r:id="rId27"/>
+    <p:sldId id="281" r:id="rId32"/>
     <p:sldId id="278" r:id="rId28"/>
     <p:sldId id="279" r:id="rId29"/>
   </p:sldIdLst>
@@ -19576,6 +19578,1039 @@
 </file>
 
 <file path=ppt/slides/slide22.xml><?xml version="1.0" encoding="utf-8"?>
+<p:sld xmlns:a="http://schemas.openxmlformats.org/drawingml/2006/main" xmlns:p="http://schemas.openxmlformats.org/presentationml/2006/main" xmlns:r="http://schemas.openxmlformats.org/officeDocument/2006/relationships">
+  <p:cSld>
+    <p:spTree>
+      <p:nvGrpSpPr>
+        <p:cNvPr id="1" name=""/>
+        <p:cNvGrpSpPr/>
+        <p:nvPr/>
+      </p:nvGrpSpPr>
+      <p:grpSpPr/>
+      <p:sp>
+        <p:nvSpPr>
+          <p:cNvPr id="390" name="Google Shape;390;p21"/>
+          <p:cNvSpPr/>
+          <p:nvPr/>
+        </p:nvSpPr>
+        <p:spPr>
+          <a:xfrm>
+            <a:off x="0" y="0"/>
+            <a:ext cx="9144000" cy="914400"/>
+          </a:xfrm>
+          <a:prstGeom prst="rect">
+            <a:avLst/>
+          </a:prstGeom>
+          <a:solidFill>
+            <a:srgbClr val="134E4A"/>
+          </a:solidFill>
+          <a:ln cap="flat" cmpd="sng" w="12700">
+            <a:solidFill>
+              <a:srgbClr val="134E4A"/>
+            </a:solidFill>
+            <a:prstDash val="solid"/>
+            <a:round/>
+            <a:headEnd len="sm" w="sm" type="none"/>
+            <a:tailEnd len="sm" w="sm" type="none"/>
+          </a:ln>
+        </p:spPr>
+        <p:txBody>
+          <a:bodyPr anchorCtr="0" anchor="ctr" bIns="91425" lIns="91425" spcFirstLastPara="1" rIns="91425" wrap="square" tIns="91425">
+            <a:noAutofit/>
+          </a:bodyPr>
+          <a:lstStyle/>
+          <a:p>
+            <a:pPr indent="0" lvl="0" marL="0" rtl="0" algn="l">
+              <a:spcBef>
+                <a:spcPts val="0"/>
+              </a:spcBef>
+              <a:spcAft>
+                <a:spcPts val="0"/>
+              </a:spcAft>
+              <a:buNone/>
+            </a:pPr>
+            <a:r>
+              <a:t/>
+            </a:r>
+            <a:endParaRPr/>
+          </a:p>
+        </p:txBody>
+      </p:sp>
+      <p:sp>
+        <p:nvSpPr>
+          <p:cNvPr id="391" name="Google Shape;391;p21"/>
+          <p:cNvSpPr/>
+          <p:nvPr/>
+        </p:nvSpPr>
+        <p:spPr>
+          <a:xfrm>
+            <a:off x="0" y="914400"/>
+            <a:ext cx="9144000" cy="45720"/>
+          </a:xfrm>
+          <a:prstGeom prst="rect">
+            <a:avLst/>
+          </a:prstGeom>
+          <a:solidFill>
+            <a:srgbClr val="14B8A6"/>
+          </a:solidFill>
+          <a:ln cap="flat" cmpd="sng" w="12700">
+            <a:solidFill>
+              <a:srgbClr val="14B8A6"/>
+            </a:solidFill>
+            <a:prstDash val="solid"/>
+            <a:round/>
+            <a:headEnd len="sm" w="sm" type="none"/>
+            <a:tailEnd len="sm" w="sm" type="none"/>
+          </a:ln>
+        </p:spPr>
+        <p:txBody>
+          <a:bodyPr anchorCtr="0" anchor="ctr" bIns="91425" lIns="91425" spcFirstLastPara="1" rIns="91425" wrap="square" tIns="91425">
+            <a:noAutofit/>
+          </a:bodyPr>
+          <a:lstStyle/>
+          <a:p>
+            <a:pPr indent="0" lvl="0" marL="0" rtl="0" algn="l">
+              <a:spcBef>
+                <a:spcPts val="0"/>
+              </a:spcBef>
+              <a:spcAft>
+                <a:spcPts val="0"/>
+              </a:spcAft>
+              <a:buNone/>
+            </a:pPr>
+            <a:r>
+              <a:t/>
+            </a:r>
+            <a:endParaRPr/>
+          </a:p>
+        </p:txBody>
+      </p:sp>
+      <p:sp>
+        <p:nvSpPr>
+          <p:cNvPr id="392" name="Google Shape;392;p21"/>
+          <p:cNvSpPr/>
+          <p:nvPr/>
+        </p:nvSpPr>
+        <p:spPr>
+          <a:xfrm>
+            <a:off x="365760" y="54864"/>
+            <a:ext cx="8503920" cy="256032"/>
+          </a:xfrm>
+          <a:prstGeom prst="rect">
+            <a:avLst/>
+          </a:prstGeom>
+          <a:noFill/>
+          <a:ln>
+            <a:noFill/>
+          </a:ln>
+        </p:spPr>
+        <p:txBody>
+          <a:bodyPr anchorCtr="0" anchor="ctr" bIns="0" lIns="0" spcFirstLastPara="1" rIns="0" wrap="square" tIns="0">
+            <a:noAutofit/>
+          </a:bodyPr>
+          <a:lstStyle/>
+          <a:p>
+            <a:pPr indent="0" lvl="0" marL="0" marR="0" rtl="0" algn="r">
+              <a:spcBef>
+                <a:spcPts val="0"/>
+              </a:spcBef>
+              <a:spcAft>
+                <a:spcPts val="0"/>
+              </a:spcAft>
+              <a:buClr>
+                <a:srgbClr val="CCFBF1"/>
+              </a:buClr>
+              <a:buSzPts val="900"/>
+              <a:buFont typeface="Calibri"/>
+              <a:buNone/>
+            </a:pPr>
+            <a:r>
+              <a:rPr b="0" i="0" lang="en-US" sz="900" u="none" cap="none" strike="noStrike">
+                <a:solidFill>
+                  <a:srgbClr val="CCFBF1"/>
+                </a:solidFill>
+                <a:latin typeface="Calibri"/>
+                <a:ea typeface="Calibri"/>
+                <a:cs typeface="Calibri"/>
+                <a:sym typeface="Calibri"/>
+              </a:rPr>
+              <a:t>SAE BUT3 — Chatbot médical RAG</a:t>
+            </a:r>
+            <a:endParaRPr b="0" i="0" sz="900" u="none" cap="none" strike="noStrike">
+              <a:solidFill>
+                <a:schemeClr val="dk1"/>
+              </a:solidFill>
+              <a:latin typeface="Calibri"/>
+              <a:ea typeface="Calibri"/>
+              <a:cs typeface="Calibri"/>
+              <a:sym typeface="Calibri"/>
+            </a:endParaRPr>
+          </a:p>
+        </p:txBody>
+      </p:sp>
+      <p:sp>
+        <p:nvSpPr>
+          <p:cNvPr id="393" name="Google Shape;393;p21"/>
+          <p:cNvSpPr/>
+          <p:nvPr/>
+        </p:nvSpPr>
+        <p:spPr>
+          <a:xfrm>
+            <a:off x="365760" y="256032"/>
+            <a:ext cx="8412480" cy="621792"/>
+          </a:xfrm>
+          <a:prstGeom prst="rect">
+            <a:avLst/>
+          </a:prstGeom>
+          <a:noFill/>
+          <a:ln>
+            <a:noFill/>
+          </a:ln>
+        </p:spPr>
+        <p:txBody>
+          <a:bodyPr anchorCtr="0" anchor="ctr" bIns="0" lIns="0" spcFirstLastPara="1" rIns="0" wrap="square" tIns="0">
+            <a:noAutofit/>
+          </a:bodyPr>
+          <a:lstStyle/>
+          <a:p>
+            <a:pPr indent="0" lvl="0" marL="0" marR="0" rtl="0" algn="l">
+              <a:spcBef>
+                <a:spcPts val="0"/>
+              </a:spcBef>
+              <a:spcAft>
+                <a:spcPts val="0"/>
+              </a:spcAft>
+              <a:buClr>
+                <a:srgbClr val="FFFFFF"/>
+              </a:buClr>
+              <a:buSzPts val="2200"/>
+              <a:buFont typeface="Calibri"/>
+              <a:buNone/>
+            </a:pPr>
+            <a:r>
+              <a:rPr b="1" i="0" lang="en-US" sz="2200" u="none" cap="none" strike="noStrike">
+                <a:solidFill>
+                  <a:srgbClr val="FFFFFF"/>
+                </a:solidFill>
+                <a:latin typeface="Calibri"/>
+                <a:ea typeface="Calibri"/>
+                <a:cs typeface="Calibri"/>
+                <a:sym typeface="Calibri"/>
+              </a:rPr>
+              <a:t>Intégration site + chatbot</a:t>
+            </a:r>
+            <a:endParaRPr b="0" i="0" sz="2200" u="none" cap="none" strike="noStrike">
+              <a:solidFill>
+                <a:schemeClr val="dk1"/>
+              </a:solidFill>
+              <a:latin typeface="Calibri"/>
+              <a:ea typeface="Calibri"/>
+              <a:cs typeface="Calibri"/>
+              <a:sym typeface="Calibri"/>
+            </a:endParaRPr>
+          </a:p>
+        </p:txBody>
+      </p:sp>
+      <p:sp>
+        <p:nvSpPr>
+          <p:cNvPr id="394" name="Google Shape;394;p21"/>
+          <p:cNvSpPr/>
+          <p:nvPr/>
+        </p:nvSpPr>
+        <p:spPr>
+          <a:xfrm>
+            <a:off x="8503920" y="4846320"/>
+            <a:ext cx="502920" cy="228600"/>
+          </a:xfrm>
+          <a:prstGeom prst="rect">
+            <a:avLst/>
+          </a:prstGeom>
+          <a:noFill/>
+          <a:ln>
+            <a:noFill/>
+          </a:ln>
+        </p:spPr>
+        <p:txBody>
+          <a:bodyPr anchorCtr="0" anchor="ctr" bIns="0" lIns="0" spcFirstLastPara="1" rIns="0" wrap="square" tIns="0">
+            <a:noAutofit/>
+          </a:bodyPr>
+          <a:lstStyle/>
+          <a:p>
+            <a:pPr indent="0" lvl="0" marL="0" marR="0" rtl="0" algn="r">
+              <a:spcBef>
+                <a:spcPts val="0"/>
+              </a:spcBef>
+              <a:spcAft>
+                <a:spcPts val="0"/>
+              </a:spcAft>
+              <a:buClr>
+                <a:srgbClr val="14B8A6"/>
+              </a:buClr>
+              <a:buSzPts val="1000"/>
+              <a:buFont typeface="Calibri"/>
+              <a:buNone/>
+            </a:pPr>
+            <a:r>
+              <a:rPr b="0" i="0" lang="en-US" sz="1000" u="none" cap="none" strike="noStrike">
+                <a:solidFill>
+                  <a:srgbClr val="14B8A6"/>
+                </a:solidFill>
+                <a:latin typeface="Calibri"/>
+                <a:ea typeface="Calibri"/>
+                <a:cs typeface="Calibri"/>
+                <a:sym typeface="Calibri"/>
+              </a:rPr>
+              <a:t>22</a:t>
+            </a:r>
+            <a:endParaRPr b="0" i="0" sz="1000" u="none" cap="none" strike="noStrike">
+              <a:solidFill>
+                <a:schemeClr val="dk1"/>
+              </a:solidFill>
+              <a:latin typeface="Calibri"/>
+              <a:ea typeface="Calibri"/>
+              <a:cs typeface="Calibri"/>
+              <a:sym typeface="Calibri"/>
+            </a:endParaRPr>
+          </a:p>
+        </p:txBody>
+      </p:sp>
+      <p:sp>
+        <p:nvSpPr>
+          <p:cNvPr id="395" name="Google Shape;395;p21"/>
+          <p:cNvSpPr/>
+          <p:nvPr/>
+        </p:nvSpPr>
+        <p:spPr>
+          <a:xfrm>
+            <a:off x="457200" y="1051560"/>
+            <a:ext cx="8229600" cy="384048"/>
+          </a:xfrm>
+          <a:prstGeom prst="rect">
+            <a:avLst/>
+          </a:prstGeom>
+          <a:noFill/>
+          <a:ln>
+            <a:noFill/>
+          </a:ln>
+        </p:spPr>
+        <p:txBody>
+          <a:bodyPr anchorCtr="0" anchor="ctr" bIns="0" lIns="0" spcFirstLastPara="1" rIns="0" wrap="square" tIns="0">
+            <a:noAutofit/>
+          </a:bodyPr>
+          <a:lstStyle/>
+          <a:p>
+            <a:pPr indent="0" lvl="0" marL="0" marR="0" rtl="0" algn="l">
+              <a:spcBef>
+                <a:spcPts val="0"/>
+              </a:spcBef>
+              <a:spcAft>
+                <a:spcPts val="0"/>
+              </a:spcAft>
+              <a:buClr>
+                <a:srgbClr val="0F766E"/>
+              </a:buClr>
+              <a:buSzPts val="1600"/>
+              <a:buFont typeface="Calibri"/>
+              <a:buNone/>
+            </a:pPr>
+            <a:r>
+              <a:rPr b="1" i="0" lang="en-US" sz="1600" u="none" cap="none" strike="noStrike">
+                <a:solidFill>
+                  <a:srgbClr val="0F766E"/>
+                </a:solidFill>
+                <a:latin typeface="Calibri"/>
+                <a:ea typeface="Calibri"/>
+                <a:cs typeface="Calibri"/>
+                <a:sym typeface="Calibri"/>
+              </a:rPr>
+              <a:t>L'utilisateur n'arrive jamais sur Streamlit nu</a:t>
+            </a:r>
+            <a:endParaRPr b="0" i="0" sz="1600" u="none" cap="none" strike="noStrike">
+              <a:solidFill>
+                <a:schemeClr val="dk1"/>
+              </a:solidFill>
+              <a:latin typeface="Calibri"/>
+              <a:ea typeface="Calibri"/>
+              <a:cs typeface="Calibri"/>
+              <a:sym typeface="Calibri"/>
+            </a:endParaRPr>
+          </a:p>
+        </p:txBody>
+      </p:sp>
+      <p:sp>
+        <p:nvSpPr>
+          <p:cNvPr id="396" name="Google Shape;396;p21"/>
+          <p:cNvSpPr/>
+          <p:nvPr/>
+        </p:nvSpPr>
+        <p:spPr>
+          <a:xfrm>
+            <a:off x="1828800" y="1536192"/>
+            <a:ext cx="5486400" cy="603504"/>
+          </a:xfrm>
+          <a:prstGeom prst="rect">
+            <a:avLst/>
+          </a:prstGeom>
+          <a:solidFill>
+            <a:srgbClr val="134E4A"/>
+          </a:solidFill>
+          <a:ln cap="flat" cmpd="sng" w="12700">
+            <a:solidFill>
+              <a:srgbClr val="134E4A"/>
+            </a:solidFill>
+            <a:prstDash val="solid"/>
+            <a:round/>
+            <a:headEnd len="sm" w="sm" type="none"/>
+            <a:tailEnd len="sm" w="sm" type="none"/>
+          </a:ln>
+          <a:effectLst>
+            <a:outerShdw blurRad="50800" rotWithShape="0" algn="bl" dir="8100000" dist="12700">
+              <a:srgbClr val="000000">
+                <a:alpha val="10196"/>
+              </a:srgbClr>
+            </a:outerShdw>
+          </a:effectLst>
+        </p:spPr>
+        <p:txBody>
+          <a:bodyPr anchorCtr="0" anchor="ctr" bIns="91425" lIns="91425" spcFirstLastPara="1" rIns="91425" wrap="square" tIns="91425">
+            <a:noAutofit/>
+          </a:bodyPr>
+          <a:lstStyle/>
+          <a:p>
+            <a:pPr indent="0" lvl="0" marL="0" rtl="0" algn="l">
+              <a:spcBef>
+                <a:spcPts val="0"/>
+              </a:spcBef>
+              <a:spcAft>
+                <a:spcPts val="0"/>
+              </a:spcAft>
+              <a:buNone/>
+            </a:pPr>
+            <a:r>
+              <a:t/>
+            </a:r>
+            <a:endParaRPr/>
+          </a:p>
+        </p:txBody>
+      </p:sp>
+      <p:sp>
+        <p:nvSpPr>
+          <p:cNvPr id="397" name="Google Shape;397;p21"/>
+          <p:cNvSpPr/>
+          <p:nvPr/>
+        </p:nvSpPr>
+        <p:spPr>
+          <a:xfrm>
+            <a:off x="1828800" y="1536192"/>
+            <a:ext cx="5486400" cy="603504"/>
+          </a:xfrm>
+          <a:prstGeom prst="rect">
+            <a:avLst/>
+          </a:prstGeom>
+          <a:noFill/>
+          <a:ln>
+            <a:noFill/>
+          </a:ln>
+        </p:spPr>
+        <p:txBody>
+          <a:bodyPr anchorCtr="0" anchor="ctr" bIns="0" lIns="0" spcFirstLastPara="1" rIns="0" wrap="square" tIns="0">
+            <a:noAutofit/>
+          </a:bodyPr>
+          <a:lstStyle/>
+          <a:p>
+            <a:pPr indent="0" lvl="0" marL="0" marR="0" rtl="0" algn="ctr">
+              <a:spcBef>
+                <a:spcPts val="0"/>
+              </a:spcBef>
+              <a:spcAft>
+                <a:spcPts val="0"/>
+              </a:spcAft>
+              <a:buClr>
+                <a:srgbClr val="FFFFFF"/>
+              </a:buClr>
+              <a:buSzPts val="1400"/>
+              <a:buFont typeface="Calibri"/>
+              <a:buNone/>
+            </a:pPr>
+            <a:r>
+              <a:rPr b="1" i="0" lang="en-US" sz="1400" u="none" cap="none" strike="noStrike">
+                <a:solidFill>
+                  <a:srgbClr val="FFFFFF"/>
+                </a:solidFill>
+                <a:latin typeface="Calibri"/>
+                <a:ea typeface="Calibri"/>
+                <a:cs typeface="Calibri"/>
+                <a:sym typeface="Calibri"/>
+              </a:rPr>
+              <a:t>Landing /</a:t>
+            </a:r>
+            <a:r>
+              <a:rPr b="0" i="0" lang="en-US" sz="1200" u="none" cap="none" strike="noStrike">
+                <a:solidFill>
+                  <a:srgbClr val="FFFFFF"/>
+                </a:solidFill>
+                <a:latin typeface="Calibri"/>
+                <a:ea typeface="Calibri"/>
+                <a:cs typeface="Calibri"/>
+                <a:sym typeface="Calibri"/>
+              </a:rPr>
+              <a:t>  —  Site MediGuide (HTML/CSS) — Présentation, sources, disclaimer</a:t>
+            </a:r>
+            <a:endParaRPr b="0" i="0" sz="1400" u="none" cap="none" strike="noStrike">
+              <a:solidFill>
+                <a:schemeClr val="dk1"/>
+              </a:solidFill>
+              <a:latin typeface="Calibri"/>
+              <a:ea typeface="Calibri"/>
+              <a:cs typeface="Calibri"/>
+              <a:sym typeface="Calibri"/>
+            </a:endParaRPr>
+          </a:p>
+        </p:txBody>
+      </p:sp>
+      <p:cxnSp>
+        <p:nvCxnSpPr>
+          <p:cNvPr id="398" name="Google Shape;398;p21"/>
+          <p:cNvCxnSpPr/>
+          <p:nvPr/>
+        </p:nvCxnSpPr>
+        <p:spPr>
+          <a:xfrm>
+            <a:off x="4572000" y="2139696"/>
+            <a:ext cx="0" cy="164592"/>
+          </a:xfrm>
+          <a:prstGeom prst="straightConnector1">
+            <a:avLst/>
+          </a:prstGeom>
+          <a:noFill/>
+          <a:ln cap="flat" cmpd="sng" w="25400">
+            <a:solidFill>
+              <a:srgbClr val="14B8A6"/>
+            </a:solidFill>
+            <a:prstDash val="solid"/>
+            <a:round/>
+            <a:headEnd len="sm" w="sm" type="none"/>
+            <a:tailEnd len="sm" w="sm" type="none"/>
+          </a:ln>
+        </p:spPr>
+      </p:cxnSp>
+      <p:sp>
+        <p:nvSpPr>
+          <p:cNvPr id="399" name="Google Shape;399;p21"/>
+          <p:cNvSpPr/>
+          <p:nvPr/>
+        </p:nvSpPr>
+        <p:spPr>
+          <a:xfrm>
+            <a:off x="1828800" y="2304288"/>
+            <a:ext cx="5486400" cy="603504"/>
+          </a:xfrm>
+          <a:prstGeom prst="rect">
+            <a:avLst/>
+          </a:prstGeom>
+          <a:solidFill>
+            <a:srgbClr val="0D9488"/>
+          </a:solidFill>
+          <a:ln cap="flat" cmpd="sng" w="12700">
+            <a:solidFill>
+              <a:srgbClr val="0D9488"/>
+            </a:solidFill>
+            <a:prstDash val="solid"/>
+            <a:round/>
+            <a:headEnd len="sm" w="sm" type="none"/>
+            <a:tailEnd len="sm" w="sm" type="none"/>
+          </a:ln>
+          <a:effectLst>
+            <a:outerShdw blurRad="50800" rotWithShape="0" algn="bl" dir="8100000" dist="12700">
+              <a:srgbClr val="000000">
+                <a:alpha val="10196"/>
+              </a:srgbClr>
+            </a:outerShdw>
+          </a:effectLst>
+        </p:spPr>
+        <p:txBody>
+          <a:bodyPr anchorCtr="0" anchor="ctr" bIns="91425" lIns="91425" spcFirstLastPara="1" rIns="91425" wrap="square" tIns="91425">
+            <a:noAutofit/>
+          </a:bodyPr>
+          <a:lstStyle/>
+          <a:p>
+            <a:pPr indent="0" lvl="0" marL="0" rtl="0" algn="l">
+              <a:spcBef>
+                <a:spcPts val="0"/>
+              </a:spcBef>
+              <a:spcAft>
+                <a:spcPts val="0"/>
+              </a:spcAft>
+              <a:buNone/>
+            </a:pPr>
+            <a:r>
+              <a:t/>
+            </a:r>
+            <a:endParaRPr/>
+          </a:p>
+        </p:txBody>
+      </p:sp>
+      <p:sp>
+        <p:nvSpPr>
+          <p:cNvPr id="400" name="Google Shape;400;p21"/>
+          <p:cNvSpPr/>
+          <p:nvPr/>
+        </p:nvSpPr>
+        <p:spPr>
+          <a:xfrm>
+            <a:off x="1828800" y="2304288"/>
+            <a:ext cx="5486400" cy="603504"/>
+          </a:xfrm>
+          <a:prstGeom prst="rect">
+            <a:avLst/>
+          </a:prstGeom>
+          <a:noFill/>
+          <a:ln>
+            <a:noFill/>
+          </a:ln>
+        </p:spPr>
+        <p:txBody>
+          <a:bodyPr anchorCtr="0" anchor="ctr" bIns="0" lIns="0" spcFirstLastPara="1" rIns="0" wrap="square" tIns="0">
+            <a:noAutofit/>
+          </a:bodyPr>
+          <a:lstStyle/>
+          <a:p>
+            <a:pPr indent="0" lvl="0" marL="0" marR="0" rtl="0" algn="ctr">
+              <a:spcBef>
+                <a:spcPts val="0"/>
+              </a:spcBef>
+              <a:spcAft>
+                <a:spcPts val="0"/>
+              </a:spcAft>
+              <a:buClr>
+                <a:srgbClr val="FFFFFF"/>
+              </a:buClr>
+              <a:buSzPts val="1400"/>
+              <a:buFont typeface="Calibri"/>
+              <a:buNone/>
+            </a:pPr>
+            <a:r>
+              <a:rPr b="1" i="0" lang="en-US" sz="1400" u="none" cap="none" strike="noStrike">
+                <a:solidFill>
+                  <a:srgbClr val="FFFFFF"/>
+                </a:solidFill>
+                <a:latin typeface="Calibri"/>
+                <a:ea typeface="Calibri"/>
+                <a:cs typeface="Calibri"/>
+                <a:sym typeface="Calibri"/>
+              </a:rPr>
+              <a:t>Page /consulter</a:t>
+            </a:r>
+            <a:r>
+              <a:rPr b="0" i="0" lang="en-US" sz="1200" u="none" cap="none" strike="noStrike">
+                <a:solidFill>
+                  <a:srgbClr val="FFFFFF"/>
+                </a:solidFill>
+                <a:latin typeface="Calibri"/>
+                <a:ea typeface="Calibri"/>
+                <a:cs typeface="Calibri"/>
+                <a:sym typeface="Calibri"/>
+              </a:rPr>
+              <a:t>  —  iframe du chatbot dans le header MediGuide</a:t>
+            </a:r>
+            <a:endParaRPr b="0" i="0" sz="1400" u="none" cap="none" strike="noStrike">
+              <a:solidFill>
+                <a:schemeClr val="dk1"/>
+              </a:solidFill>
+              <a:latin typeface="Calibri"/>
+              <a:ea typeface="Calibri"/>
+              <a:cs typeface="Calibri"/>
+              <a:sym typeface="Calibri"/>
+            </a:endParaRPr>
+          </a:p>
+        </p:txBody>
+      </p:sp>
+      <p:cxnSp>
+        <p:nvCxnSpPr>
+          <p:cNvPr id="401" name="Google Shape;401;p21"/>
+          <p:cNvCxnSpPr/>
+          <p:nvPr/>
+        </p:nvCxnSpPr>
+        <p:spPr>
+          <a:xfrm>
+            <a:off x="4572000" y="2907792"/>
+            <a:ext cx="0" cy="164592"/>
+          </a:xfrm>
+          <a:prstGeom prst="straightConnector1">
+            <a:avLst/>
+          </a:prstGeom>
+          <a:noFill/>
+          <a:ln cap="flat" cmpd="sng" w="25400">
+            <a:solidFill>
+              <a:srgbClr val="14B8A6"/>
+            </a:solidFill>
+            <a:prstDash val="solid"/>
+            <a:round/>
+            <a:headEnd len="sm" w="sm" type="none"/>
+            <a:tailEnd len="sm" w="sm" type="none"/>
+          </a:ln>
+        </p:spPr>
+      </p:cxnSp>
+      <p:sp>
+        <p:nvSpPr>
+          <p:cNvPr id="402" name="Google Shape;402;p21"/>
+          <p:cNvSpPr/>
+          <p:nvPr/>
+        </p:nvSpPr>
+        <p:spPr>
+          <a:xfrm>
+            <a:off x="1828800" y="3072384"/>
+            <a:ext cx="5486400" cy="603504"/>
+          </a:xfrm>
+          <a:prstGeom prst="rect">
+            <a:avLst/>
+          </a:prstGeom>
+          <a:solidFill>
+            <a:srgbClr val="0F766E"/>
+          </a:solidFill>
+          <a:ln cap="flat" cmpd="sng" w="12700">
+            <a:solidFill>
+              <a:srgbClr val="0F766E"/>
+            </a:solidFill>
+            <a:prstDash val="solid"/>
+            <a:round/>
+            <a:headEnd len="sm" w="sm" type="none"/>
+            <a:tailEnd len="sm" w="sm" type="none"/>
+          </a:ln>
+          <a:effectLst>
+            <a:outerShdw blurRad="50800" rotWithShape="0" algn="bl" dir="8100000" dist="12700">
+              <a:srgbClr val="000000">
+                <a:alpha val="10196"/>
+              </a:srgbClr>
+            </a:outerShdw>
+          </a:effectLst>
+        </p:spPr>
+        <p:txBody>
+          <a:bodyPr anchorCtr="0" anchor="ctr" bIns="91425" lIns="91425" spcFirstLastPara="1" rIns="91425" wrap="square" tIns="91425">
+            <a:noAutofit/>
+          </a:bodyPr>
+          <a:lstStyle/>
+          <a:p>
+            <a:pPr indent="0" lvl="0" marL="0" rtl="0" algn="l">
+              <a:spcBef>
+                <a:spcPts val="0"/>
+              </a:spcBef>
+              <a:spcAft>
+                <a:spcPts val="0"/>
+              </a:spcAft>
+              <a:buNone/>
+            </a:pPr>
+            <a:r>
+              <a:t/>
+            </a:r>
+            <a:endParaRPr/>
+          </a:p>
+        </p:txBody>
+      </p:sp>
+      <p:sp>
+        <p:nvSpPr>
+          <p:cNvPr id="403" name="Google Shape;403;p21"/>
+          <p:cNvSpPr/>
+          <p:nvPr/>
+        </p:nvSpPr>
+        <p:spPr>
+          <a:xfrm>
+            <a:off x="1828800" y="3072384"/>
+            <a:ext cx="5486400" cy="603504"/>
+          </a:xfrm>
+          <a:prstGeom prst="rect">
+            <a:avLst/>
+          </a:prstGeom>
+          <a:noFill/>
+          <a:ln>
+            <a:noFill/>
+          </a:ln>
+        </p:spPr>
+        <p:txBody>
+          <a:bodyPr anchorCtr="0" anchor="ctr" bIns="0" lIns="0" spcFirstLastPara="1" rIns="0" wrap="square" tIns="0">
+            <a:noAutofit/>
+          </a:bodyPr>
+          <a:lstStyle/>
+          <a:p>
+            <a:pPr indent="0" lvl="0" marL="0" marR="0" rtl="0" algn="ctr">
+              <a:spcBef>
+                <a:spcPts val="0"/>
+              </a:spcBef>
+              <a:spcAft>
+                <a:spcPts val="0"/>
+              </a:spcAft>
+              <a:buClr>
+                <a:srgbClr val="FFFFFF"/>
+              </a:buClr>
+              <a:buSzPts val="1400"/>
+              <a:buFont typeface="Calibri"/>
+              <a:buNone/>
+            </a:pPr>
+            <a:r>
+              <a:rPr b="1" i="0" lang="en-US" sz="1400" u="none" cap="none" strike="noStrike">
+                <a:solidFill>
+                  <a:srgbClr val="FFFFFF"/>
+                </a:solidFill>
+                <a:latin typeface="Calibri"/>
+                <a:ea typeface="Calibri"/>
+                <a:cs typeface="Calibri"/>
+                <a:sym typeface="Calibri"/>
+              </a:rPr>
+              <a:t>Chatbot /app/</a:t>
+            </a:r>
+            <a:r>
+              <a:rPr b="0" i="0" lang="en-US" sz="1200" u="none" cap="none" strike="noStrike">
+                <a:solidFill>
+                  <a:srgbClr val="FFFFFF"/>
+                </a:solidFill>
+                <a:latin typeface="Calibri"/>
+                <a:ea typeface="Calibri"/>
+                <a:cs typeface="Calibri"/>
+                <a:sym typeface="Calibri"/>
+              </a:rPr>
+              <a:t>  —  Streamlit harmonisé (même palette teal, font Inter)</a:t>
+            </a:r>
+            <a:endParaRPr b="0" i="0" sz="1400" u="none" cap="none" strike="noStrike">
+              <a:solidFill>
+                <a:schemeClr val="dk1"/>
+              </a:solidFill>
+              <a:latin typeface="Calibri"/>
+              <a:ea typeface="Calibri"/>
+              <a:cs typeface="Calibri"/>
+              <a:sym typeface="Calibri"/>
+            </a:endParaRPr>
+          </a:p>
+        </p:txBody>
+      </p:sp>
+      <p:cxnSp>
+        <p:nvCxnSpPr>
+          <p:cNvPr id="404" name="Google Shape;404;p21"/>
+          <p:cNvCxnSpPr/>
+          <p:nvPr/>
+        </p:nvCxnSpPr>
+        <p:spPr>
+          <a:xfrm>
+            <a:off x="4572000" y="3675888"/>
+            <a:ext cx="0" cy="164592"/>
+          </a:xfrm>
+          <a:prstGeom prst="straightConnector1">
+            <a:avLst/>
+          </a:prstGeom>
+          <a:noFill/>
+          <a:ln cap="flat" cmpd="sng" w="25400">
+            <a:solidFill>
+              <a:srgbClr val="14B8A6"/>
+            </a:solidFill>
+            <a:prstDash val="solid"/>
+            <a:round/>
+            <a:headEnd len="sm" w="sm" type="none"/>
+            <a:tailEnd len="sm" w="sm" type="none"/>
+          </a:ln>
+        </p:spPr>
+      </p:cxnSp>
+      <p:sp>
+        <p:nvSpPr>
+          <p:cNvPr id="405" name="Google Shape;405;p21"/>
+          <p:cNvSpPr/>
+          <p:nvPr/>
+        </p:nvSpPr>
+        <p:spPr>
+          <a:xfrm>
+            <a:off x="1828800" y="3840480"/>
+            <a:ext cx="5486400" cy="603504"/>
+          </a:xfrm>
+          <a:prstGeom prst="rect">
+            <a:avLst/>
+          </a:prstGeom>
+          <a:solidFill>
+            <a:srgbClr val="0369A1"/>
+          </a:solidFill>
+          <a:ln cap="flat" cmpd="sng" w="12700">
+            <a:solidFill>
+              <a:srgbClr val="0369A1"/>
+            </a:solidFill>
+            <a:prstDash val="solid"/>
+            <a:round/>
+            <a:headEnd len="sm" w="sm" type="none"/>
+            <a:tailEnd len="sm" w="sm" type="none"/>
+          </a:ln>
+          <a:effectLst>
+            <a:outerShdw blurRad="50800" rotWithShape="0" algn="bl" dir="8100000" dist="12700">
+              <a:srgbClr val="000000">
+                <a:alpha val="10196"/>
+              </a:srgbClr>
+            </a:outerShdw>
+          </a:effectLst>
+        </p:spPr>
+        <p:txBody>
+          <a:bodyPr anchorCtr="0" anchor="ctr" bIns="91425" lIns="91425" spcFirstLastPara="1" rIns="91425" wrap="square" tIns="91425">
+            <a:noAutofit/>
+          </a:bodyPr>
+          <a:lstStyle/>
+          <a:p>
+            <a:pPr indent="0" lvl="0" marL="0" rtl="0" algn="l">
+              <a:spcBef>
+                <a:spcPts val="0"/>
+              </a:spcBef>
+              <a:spcAft>
+                <a:spcPts val="0"/>
+              </a:spcAft>
+              <a:buNone/>
+            </a:pPr>
+            <a:r>
+              <a:t/>
+            </a:r>
+            <a:endParaRPr/>
+          </a:p>
+        </p:txBody>
+      </p:sp>
+      <p:sp>
+        <p:nvSpPr>
+          <p:cNvPr id="406" name="Google Shape;406;p21"/>
+          <p:cNvSpPr/>
+          <p:nvPr/>
+        </p:nvSpPr>
+        <p:spPr>
+          <a:xfrm>
+            <a:off x="1828800" y="3840480"/>
+            <a:ext cx="5486400" cy="603504"/>
+          </a:xfrm>
+          <a:prstGeom prst="rect">
+            <a:avLst/>
+          </a:prstGeom>
+          <a:noFill/>
+          <a:ln>
+            <a:noFill/>
+          </a:ln>
+        </p:spPr>
+        <p:txBody>
+          <a:bodyPr anchorCtr="0" anchor="ctr" bIns="0" lIns="0" spcFirstLastPara="1" rIns="0" wrap="square" tIns="0">
+            <a:noAutofit/>
+          </a:bodyPr>
+          <a:lstStyle/>
+          <a:p>
+            <a:pPr indent="0" lvl="0" marL="0" marR="0" rtl="0" algn="ctr">
+              <a:spcBef>
+                <a:spcPts val="0"/>
+              </a:spcBef>
+              <a:spcAft>
+                <a:spcPts val="0"/>
+              </a:spcAft>
+              <a:buClr>
+                <a:srgbClr val="FFFFFF"/>
+              </a:buClr>
+              <a:buSzPts val="1400"/>
+              <a:buFont typeface="Calibri"/>
+              <a:buNone/>
+            </a:pPr>
+            <a:r>
+              <a:rPr b="1" i="0" lang="en-US" sz="1400" u="none" cap="none" strike="noStrike">
+                <a:solidFill>
+                  <a:srgbClr val="FFFFFF"/>
+                </a:solidFill>
+                <a:latin typeface="Calibri"/>
+                <a:ea typeface="Calibri"/>
+                <a:cs typeface="Calibri"/>
+                <a:sym typeface="Calibri"/>
+              </a:rPr>
+              <a:t>Cohérence visuelle</a:t>
+            </a:r>
+            <a:r>
+              <a:rPr b="0" i="0" lang="en-US" sz="1200" u="none" cap="none" strike="noStrike">
+                <a:solidFill>
+                  <a:srgbClr val="FFFFFF"/>
+                </a:solidFill>
+                <a:latin typeface="Calibri"/>
+                <a:ea typeface="Calibri"/>
+                <a:cs typeface="Calibri"/>
+                <a:sym typeface="Calibri"/>
+              </a:rPr>
+              <a:t>  —  Pages login + chat reprennent le style MediGuide</a:t>
+            </a:r>
+            <a:endParaRPr b="0" i="0" sz="1400" u="none" cap="none" strike="noStrike">
+              <a:solidFill>
+                <a:schemeClr val="dk1"/>
+              </a:solidFill>
+              <a:latin typeface="Calibri"/>
+              <a:ea typeface="Calibri"/>
+              <a:cs typeface="Calibri"/>
+              <a:sym typeface="Calibri"/>
+            </a:endParaRPr>
+          </a:p>
+        </p:txBody>
+      </p:sp>
+      <p:sp>
+        <p:nvSpPr>
+          <p:cNvPr id="407" name="Google Shape;407;p21"/>
+          <p:cNvSpPr/>
+          <p:nvPr/>
+        </p:nvSpPr>
+        <p:spPr>
+          <a:xfrm>
+            <a:off x="457200" y="4754880"/>
+            <a:ext cx="8229600" cy="292608"/>
+          </a:xfrm>
+          <a:prstGeom prst="rect">
+            <a:avLst/>
+          </a:prstGeom>
+          <a:noFill/>
+          <a:ln>
+            <a:noFill/>
+          </a:ln>
+        </p:spPr>
+        <p:txBody>
+          <a:bodyPr anchorCtr="0" anchor="ctr" bIns="0" lIns="0" spcFirstLastPara="1" rIns="0" wrap="square" tIns="0">
+            <a:noAutofit/>
+          </a:bodyPr>
+          <a:lstStyle/>
+          <a:p>
+            <a:pPr indent="0" lvl="0" marL="0" marR="0" rtl="0" algn="ctr">
+              <a:spcBef>
+                <a:spcPts val="0"/>
+              </a:spcBef>
+              <a:spcAft>
+                <a:spcPts val="0"/>
+              </a:spcAft>
+              <a:buClr>
+                <a:srgbClr val="94A3B8"/>
+              </a:buClr>
+              <a:buSzPts val="1200"/>
+              <a:buFont typeface="Calibri"/>
+              <a:buNone/>
+            </a:pPr>
+            <a:r>
+              <a:rPr b="0" i="1" lang="en-US" sz="1200" u="none" cap="none" strike="noStrike">
+                <a:solidFill>
+                  <a:srgbClr val="94A3B8"/>
+                </a:solidFill>
+                <a:latin typeface="Calibri"/>
+                <a:ea typeface="Calibri"/>
+                <a:cs typeface="Calibri"/>
+                <a:sym typeface="Calibri"/>
+              </a:rPr>
+              <a:t>Site MediGuide → bouton « Consulter » → /consulter (iframe /app/) → chatbot dans le contexte de la marque</a:t>
+            </a:r>
+            <a:endParaRPr b="0" i="0" sz="1200" u="none" cap="none" strike="noStrike">
+              <a:solidFill>
+                <a:schemeClr val="dk1"/>
+              </a:solidFill>
+              <a:latin typeface="Calibri"/>
+              <a:ea typeface="Calibri"/>
+              <a:cs typeface="Calibri"/>
+              <a:sym typeface="Calibri"/>
+            </a:endParaRPr>
+          </a:p>
+        </p:txBody>
+      </p:sp>
+    </p:spTree>
+  </p:cSld>
+  <p:clrMapOvr>
+    <a:masterClrMapping/>
+  </p:clrMapOvr>
+</p:sld>
+</file>
+
+<file path=ppt/slides/slide23.xml><?xml version="1.0" encoding="utf-8"?>
 <p:sld xmlns:a="http://schemas.openxmlformats.org/drawingml/2006/main" xmlns:r="http://schemas.openxmlformats.org/officeDocument/2006/relationships" xmlns:mc="http://schemas.openxmlformats.org/markup-compatibility/2006" xmlns:mv="urn:schemas-microsoft-com:mac:vml" xmlns:p="http://schemas.openxmlformats.org/presentationml/2006/main" xmlns:c="http://schemas.openxmlformats.org/drawingml/2006/chart" xmlns:dgm="http://schemas.openxmlformats.org/drawingml/2006/diagram" xmlns:o="urn:schemas-microsoft-com:office:office" xmlns:v="urn:schemas-microsoft-com:vml" xmlns:pvml="urn:schemas-microsoft-com:office:powerpoint" xmlns:com="http://schemas.openxmlformats.org/drawingml/2006/compatibility" xmlns:p14="http://schemas.microsoft.com/office/powerpoint/2010/main" xmlns:p15="http://schemas.microsoft.com/office/powerpoint/2012/main" xmlns:ahyp="http://schemas.microsoft.com/office/drawing/2018/hyperlinkcolor">
   <p:cSld>
     <p:bg>
@@ -19872,7 +20907,7 @@
                 <a:cs typeface="Calibri"/>
                 <a:sym typeface="Calibri"/>
               </a:rPr>
-              <a:t>22</a:t>
+              <a:t>23</a:t>
             </a:r>
             <a:endParaRPr b="0" i="0" sz="1000" u="none" cap="none" strike="noStrike">
               <a:solidFill>
@@ -20779,7 +21814,1040 @@
 </p:sld>
 </file>
 
-<file path=ppt/slides/slide23.xml><?xml version="1.0" encoding="utf-8"?>
+<file path=ppt/slides/slide24.xml><?xml version="1.0" encoding="utf-8"?>
+<p:sld xmlns:a="http://schemas.openxmlformats.org/drawingml/2006/main" xmlns:p="http://schemas.openxmlformats.org/presentationml/2006/main" xmlns:r="http://schemas.openxmlformats.org/officeDocument/2006/relationships">
+  <p:cSld>
+    <p:spTree>
+      <p:nvGrpSpPr>
+        <p:cNvPr id="1" name=""/>
+        <p:cNvGrpSpPr/>
+        <p:nvPr/>
+      </p:nvGrpSpPr>
+      <p:grpSpPr/>
+      <p:sp>
+        <p:nvSpPr>
+          <p:cNvPr id="438" name="Google Shape;438;p23"/>
+          <p:cNvSpPr/>
+          <p:nvPr/>
+        </p:nvSpPr>
+        <p:spPr>
+          <a:xfrm>
+            <a:off x="0" y="0"/>
+            <a:ext cx="9144000" cy="914400"/>
+          </a:xfrm>
+          <a:prstGeom prst="rect">
+            <a:avLst/>
+          </a:prstGeom>
+          <a:solidFill>
+            <a:srgbClr val="134E4A"/>
+          </a:solidFill>
+          <a:ln cap="flat" cmpd="sng" w="12700">
+            <a:solidFill>
+              <a:srgbClr val="134E4A"/>
+            </a:solidFill>
+            <a:prstDash val="solid"/>
+            <a:round/>
+            <a:headEnd len="sm" w="sm" type="none"/>
+            <a:tailEnd len="sm" w="sm" type="none"/>
+          </a:ln>
+        </p:spPr>
+        <p:txBody>
+          <a:bodyPr anchorCtr="0" anchor="ctr" bIns="91425" lIns="91425" spcFirstLastPara="1" rIns="91425" wrap="square" tIns="91425">
+            <a:noAutofit/>
+          </a:bodyPr>
+          <a:lstStyle/>
+          <a:p>
+            <a:pPr indent="0" lvl="0" marL="0" rtl="0" algn="l">
+              <a:spcBef>
+                <a:spcPts val="0"/>
+              </a:spcBef>
+              <a:spcAft>
+                <a:spcPts val="0"/>
+              </a:spcAft>
+              <a:buNone/>
+            </a:pPr>
+            <a:r>
+              <a:t/>
+            </a:r>
+            <a:endParaRPr/>
+          </a:p>
+        </p:txBody>
+      </p:sp>
+      <p:sp>
+        <p:nvSpPr>
+          <p:cNvPr id="439" name="Google Shape;439;p23"/>
+          <p:cNvSpPr/>
+          <p:nvPr/>
+        </p:nvSpPr>
+        <p:spPr>
+          <a:xfrm>
+            <a:off x="0" y="914400"/>
+            <a:ext cx="9144000" cy="45720"/>
+          </a:xfrm>
+          <a:prstGeom prst="rect">
+            <a:avLst/>
+          </a:prstGeom>
+          <a:solidFill>
+            <a:srgbClr val="14B8A6"/>
+          </a:solidFill>
+          <a:ln cap="flat" cmpd="sng" w="12700">
+            <a:solidFill>
+              <a:srgbClr val="14B8A6"/>
+            </a:solidFill>
+            <a:prstDash val="solid"/>
+            <a:round/>
+            <a:headEnd len="sm" w="sm" type="none"/>
+            <a:tailEnd len="sm" w="sm" type="none"/>
+          </a:ln>
+        </p:spPr>
+        <p:txBody>
+          <a:bodyPr anchorCtr="0" anchor="ctr" bIns="91425" lIns="91425" spcFirstLastPara="1" rIns="91425" wrap="square" tIns="91425">
+            <a:noAutofit/>
+          </a:bodyPr>
+          <a:lstStyle/>
+          <a:p>
+            <a:pPr indent="0" lvl="0" marL="0" rtl="0" algn="l">
+              <a:spcBef>
+                <a:spcPts val="0"/>
+              </a:spcBef>
+              <a:spcAft>
+                <a:spcPts val="0"/>
+              </a:spcAft>
+              <a:buNone/>
+            </a:pPr>
+            <a:r>
+              <a:t/>
+            </a:r>
+            <a:endParaRPr/>
+          </a:p>
+        </p:txBody>
+      </p:sp>
+      <p:sp>
+        <p:nvSpPr>
+          <p:cNvPr id="440" name="Google Shape;440;p23"/>
+          <p:cNvSpPr/>
+          <p:nvPr/>
+        </p:nvSpPr>
+        <p:spPr>
+          <a:xfrm>
+            <a:off x="365760" y="54864"/>
+            <a:ext cx="8503920" cy="256032"/>
+          </a:xfrm>
+          <a:prstGeom prst="rect">
+            <a:avLst/>
+          </a:prstGeom>
+          <a:noFill/>
+          <a:ln>
+            <a:noFill/>
+          </a:ln>
+        </p:spPr>
+        <p:txBody>
+          <a:bodyPr anchorCtr="0" anchor="ctr" bIns="0" lIns="0" spcFirstLastPara="1" rIns="0" wrap="square" tIns="0">
+            <a:noAutofit/>
+          </a:bodyPr>
+          <a:lstStyle/>
+          <a:p>
+            <a:pPr indent="0" lvl="0" marL="0" marR="0" rtl="0" algn="r">
+              <a:spcBef>
+                <a:spcPts val="0"/>
+              </a:spcBef>
+              <a:spcAft>
+                <a:spcPts val="0"/>
+              </a:spcAft>
+              <a:buClr>
+                <a:srgbClr val="CCFBF1"/>
+              </a:buClr>
+              <a:buSzPts val="900"/>
+              <a:buFont typeface="Calibri"/>
+              <a:buNone/>
+            </a:pPr>
+            <a:r>
+              <a:rPr b="0" i="0" lang="en-US" sz="900" u="none" cap="none" strike="noStrike">
+                <a:solidFill>
+                  <a:srgbClr val="CCFBF1"/>
+                </a:solidFill>
+                <a:latin typeface="Calibri"/>
+                <a:ea typeface="Calibri"/>
+                <a:cs typeface="Calibri"/>
+                <a:sym typeface="Calibri"/>
+              </a:rPr>
+              <a:t>SAE BUT3 — Chatbot médical RAG</a:t>
+            </a:r>
+            <a:endParaRPr b="0" i="0" sz="900" u="none" cap="none" strike="noStrike">
+              <a:solidFill>
+                <a:schemeClr val="dk1"/>
+              </a:solidFill>
+              <a:latin typeface="Calibri"/>
+              <a:ea typeface="Calibri"/>
+              <a:cs typeface="Calibri"/>
+              <a:sym typeface="Calibri"/>
+            </a:endParaRPr>
+          </a:p>
+        </p:txBody>
+      </p:sp>
+      <p:sp>
+        <p:nvSpPr>
+          <p:cNvPr id="441" name="Google Shape;441;p23"/>
+          <p:cNvSpPr/>
+          <p:nvPr/>
+        </p:nvSpPr>
+        <p:spPr>
+          <a:xfrm>
+            <a:off x="365760" y="256032"/>
+            <a:ext cx="8412480" cy="621792"/>
+          </a:xfrm>
+          <a:prstGeom prst="rect">
+            <a:avLst/>
+          </a:prstGeom>
+          <a:noFill/>
+          <a:ln>
+            <a:noFill/>
+          </a:ln>
+        </p:spPr>
+        <p:txBody>
+          <a:bodyPr anchorCtr="0" anchor="ctr" bIns="0" lIns="0" spcFirstLastPara="1" rIns="0" wrap="square" tIns="0">
+            <a:noAutofit/>
+          </a:bodyPr>
+          <a:lstStyle/>
+          <a:p>
+            <a:pPr indent="0" lvl="0" marL="0" marR="0" rtl="0" algn="l">
+              <a:spcBef>
+                <a:spcPts val="0"/>
+              </a:spcBef>
+              <a:spcAft>
+                <a:spcPts val="0"/>
+              </a:spcAft>
+              <a:buClr>
+                <a:srgbClr val="FFFFFF"/>
+              </a:buClr>
+              <a:buSzPts val="2200"/>
+              <a:buFont typeface="Calibri"/>
+              <a:buNone/>
+            </a:pPr>
+            <a:r>
+              <a:rPr b="1" i="0" lang="en-US" sz="2200" u="none" cap="none" strike="noStrike">
+                <a:solidFill>
+                  <a:srgbClr val="FFFFFF"/>
+                </a:solidFill>
+                <a:latin typeface="Calibri"/>
+                <a:ea typeface="Calibri"/>
+                <a:cs typeface="Calibri"/>
+                <a:sym typeface="Calibri"/>
+              </a:rPr>
+              <a:t>Polish UX — les détails qui comptent</a:t>
+            </a:r>
+            <a:endParaRPr b="0" i="0" sz="2200" u="none" cap="none" strike="noStrike">
+              <a:solidFill>
+                <a:schemeClr val="dk1"/>
+              </a:solidFill>
+              <a:latin typeface="Calibri"/>
+              <a:ea typeface="Calibri"/>
+              <a:cs typeface="Calibri"/>
+              <a:sym typeface="Calibri"/>
+            </a:endParaRPr>
+          </a:p>
+        </p:txBody>
+      </p:sp>
+      <p:sp>
+        <p:nvSpPr>
+          <p:cNvPr id="442" name="Google Shape;442;p23"/>
+          <p:cNvSpPr/>
+          <p:nvPr/>
+        </p:nvSpPr>
+        <p:spPr>
+          <a:xfrm>
+            <a:off x="8503920" y="4846320"/>
+            <a:ext cx="502920" cy="228600"/>
+          </a:xfrm>
+          <a:prstGeom prst="rect">
+            <a:avLst/>
+          </a:prstGeom>
+          <a:noFill/>
+          <a:ln>
+            <a:noFill/>
+          </a:ln>
+        </p:spPr>
+        <p:txBody>
+          <a:bodyPr anchorCtr="0" anchor="ctr" bIns="0" lIns="0" spcFirstLastPara="1" rIns="0" wrap="square" tIns="0">
+            <a:noAutofit/>
+          </a:bodyPr>
+          <a:lstStyle/>
+          <a:p>
+            <a:pPr indent="0" lvl="0" marL="0" marR="0" rtl="0" algn="r">
+              <a:spcBef>
+                <a:spcPts val="0"/>
+              </a:spcBef>
+              <a:spcAft>
+                <a:spcPts val="0"/>
+              </a:spcAft>
+              <a:buClr>
+                <a:srgbClr val="14B8A6"/>
+              </a:buClr>
+              <a:buSzPts val="1000"/>
+              <a:buFont typeface="Calibri"/>
+              <a:buNone/>
+            </a:pPr>
+            <a:r>
+              <a:rPr b="0" i="0" lang="en-US" sz="1000" u="none" cap="none" strike="noStrike">
+                <a:solidFill>
+                  <a:srgbClr val="14B8A6"/>
+                </a:solidFill>
+                <a:latin typeface="Calibri"/>
+                <a:ea typeface="Calibri"/>
+                <a:cs typeface="Calibri"/>
+                <a:sym typeface="Calibri"/>
+              </a:rPr>
+              <a:t>24</a:t>
+            </a:r>
+            <a:endParaRPr b="0" i="0" sz="1000" u="none" cap="none" strike="noStrike">
+              <a:solidFill>
+                <a:schemeClr val="dk1"/>
+              </a:solidFill>
+              <a:latin typeface="Calibri"/>
+              <a:ea typeface="Calibri"/>
+              <a:cs typeface="Calibri"/>
+              <a:sym typeface="Calibri"/>
+            </a:endParaRPr>
+          </a:p>
+        </p:txBody>
+      </p:sp>
+      <p:sp>
+        <p:nvSpPr>
+          <p:cNvPr id="443" name="Google Shape;443;p23"/>
+          <p:cNvSpPr/>
+          <p:nvPr/>
+        </p:nvSpPr>
+        <p:spPr>
+          <a:xfrm>
+            <a:off x="365760" y="1097280"/>
+            <a:ext cx="4114800" cy="1508760"/>
+          </a:xfrm>
+          <a:prstGeom prst="rect">
+            <a:avLst/>
+          </a:prstGeom>
+          <a:solidFill>
+            <a:srgbClr val="134E4A"/>
+          </a:solidFill>
+          <a:ln cap="flat" cmpd="sng" w="12700">
+            <a:solidFill>
+              <a:srgbClr val="134E4A"/>
+            </a:solidFill>
+            <a:prstDash val="solid"/>
+            <a:round/>
+            <a:headEnd len="sm" w="sm" type="none"/>
+            <a:tailEnd len="sm" w="sm" type="none"/>
+          </a:ln>
+          <a:effectLst>
+            <a:outerShdw blurRad="63500" rotWithShape="0" algn="bl" dir="8100000" dist="25400">
+              <a:srgbClr val="000000">
+                <a:alpha val="12156"/>
+              </a:srgbClr>
+            </a:outerShdw>
+          </a:effectLst>
+        </p:spPr>
+        <p:txBody>
+          <a:bodyPr anchorCtr="0" anchor="ctr" bIns="91425" lIns="91425" spcFirstLastPara="1" rIns="91425" wrap="square" tIns="91425">
+            <a:noAutofit/>
+          </a:bodyPr>
+          <a:lstStyle/>
+          <a:p>
+            <a:pPr indent="0" lvl="0" marL="0" rtl="0" algn="l">
+              <a:spcBef>
+                <a:spcPts val="0"/>
+              </a:spcBef>
+              <a:spcAft>
+                <a:spcPts val="0"/>
+              </a:spcAft>
+              <a:buNone/>
+            </a:pPr>
+            <a:r>
+              <a:t/>
+            </a:r>
+            <a:endParaRPr/>
+          </a:p>
+        </p:txBody>
+      </p:sp>
+      <p:sp>
+        <p:nvSpPr>
+          <p:cNvPr id="444" name="Google Shape;444;p23"/>
+          <p:cNvSpPr/>
+          <p:nvPr/>
+        </p:nvSpPr>
+        <p:spPr>
+          <a:xfrm>
+            <a:off x="502920" y="1234440"/>
+            <a:ext cx="3840480" cy="411480"/>
+          </a:xfrm>
+          <a:prstGeom prst="rect">
+            <a:avLst/>
+          </a:prstGeom>
+          <a:noFill/>
+          <a:ln>
+            <a:noFill/>
+          </a:ln>
+        </p:spPr>
+        <p:txBody>
+          <a:bodyPr anchorCtr="0" anchor="ctr" bIns="0" lIns="0" spcFirstLastPara="1" rIns="0" wrap="square" tIns="0">
+            <a:noAutofit/>
+          </a:bodyPr>
+          <a:lstStyle/>
+          <a:p>
+            <a:pPr indent="0" lvl="0" marL="0" marR="0" rtl="0" algn="l">
+              <a:spcBef>
+                <a:spcPts val="0"/>
+              </a:spcBef>
+              <a:spcAft>
+                <a:spcPts val="0"/>
+              </a:spcAft>
+              <a:buClr>
+                <a:srgbClr val="CCFBF1"/>
+              </a:buClr>
+              <a:buSzPts val="1600"/>
+              <a:buFont typeface="Calibri"/>
+              <a:buNone/>
+            </a:pPr>
+            <a:r>
+              <a:rPr b="1" i="0" lang="en-US" sz="1600" u="none" cap="none" strike="noStrike">
+                <a:solidFill>
+                  <a:srgbClr val="CCFBF1"/>
+                </a:solidFill>
+                <a:latin typeface="Calibri"/>
+                <a:ea typeface="Calibri"/>
+                <a:cs typeface="Calibri"/>
+                <a:sym typeface="Calibri"/>
+              </a:rPr>
+              <a:t>🎨 Cohérence visuelle</a:t>
+            </a:r>
+            <a:endParaRPr b="0" i="0" sz="1600" u="none" cap="none" strike="noStrike">
+              <a:solidFill>
+                <a:schemeClr val="dk1"/>
+              </a:solidFill>
+              <a:latin typeface="Calibri"/>
+              <a:ea typeface="Calibri"/>
+              <a:cs typeface="Calibri"/>
+              <a:sym typeface="Calibri"/>
+            </a:endParaRPr>
+          </a:p>
+        </p:txBody>
+      </p:sp>
+      <p:sp>
+        <p:nvSpPr>
+          <p:cNvPr id="445" name="Google Shape;445;p23"/>
+          <p:cNvSpPr/>
+          <p:nvPr/>
+        </p:nvSpPr>
+        <p:spPr>
+          <a:xfrm>
+            <a:off x="502920" y="1691640"/>
+            <a:ext cx="3840480" cy="822960"/>
+          </a:xfrm>
+          <a:prstGeom prst="rect">
+            <a:avLst/>
+          </a:prstGeom>
+          <a:noFill/>
+          <a:ln>
+            <a:noFill/>
+          </a:ln>
+        </p:spPr>
+        <p:txBody>
+          <a:bodyPr anchorCtr="0" anchor="ctr" bIns="0" lIns="0" spcFirstLastPara="1" rIns="0" wrap="square" tIns="0">
+            <a:noAutofit/>
+          </a:bodyPr>
+          <a:lstStyle/>
+          <a:p>
+            <a:pPr indent="0" lvl="0" marL="0" marR="0" rtl="0" algn="l">
+              <a:spcBef>
+                <a:spcPts val="0"/>
+              </a:spcBef>
+              <a:spcAft>
+                <a:spcPts val="0"/>
+              </a:spcAft>
+              <a:buClr>
+                <a:srgbClr val="FFFFFF"/>
+              </a:buClr>
+              <a:buSzPts val="1300"/>
+              <a:buFont typeface="Calibri"/>
+              <a:buNone/>
+            </a:pPr>
+            <a:r>
+              <a:rPr b="0" i="0" lang="en-US" sz="1300" u="none" cap="none" strike="noStrike">
+                <a:solidFill>
+                  <a:srgbClr val="FFFFFF"/>
+                </a:solidFill>
+                <a:latin typeface="Calibri"/>
+                <a:ea typeface="Calibri"/>
+                <a:cs typeface="Calibri"/>
+                <a:sym typeface="Calibri"/>
+              </a:rPr>
+              <a:t>Palette teal &amp; font Inter partagées entre site et chatbot</a:t>
+            </a:r>
+            <a:endParaRPr b="0" i="0" sz="1300" u="none" cap="none" strike="noStrike">
+              <a:solidFill>
+                <a:schemeClr val="dk1"/>
+              </a:solidFill>
+              <a:latin typeface="Calibri"/>
+              <a:ea typeface="Calibri"/>
+              <a:cs typeface="Calibri"/>
+              <a:sym typeface="Calibri"/>
+            </a:endParaRPr>
+          </a:p>
+        </p:txBody>
+      </p:sp>
+      <p:sp>
+        <p:nvSpPr>
+          <p:cNvPr id="446" name="Google Shape;446;p23"/>
+          <p:cNvSpPr/>
+          <p:nvPr/>
+        </p:nvSpPr>
+        <p:spPr>
+          <a:xfrm>
+            <a:off x="4709160" y="1097280"/>
+            <a:ext cx="4114800" cy="1508760"/>
+          </a:xfrm>
+          <a:prstGeom prst="rect">
+            <a:avLst/>
+          </a:prstGeom>
+          <a:solidFill>
+            <a:srgbClr val="0F766E"/>
+          </a:solidFill>
+          <a:ln cap="flat" cmpd="sng" w="12700">
+            <a:solidFill>
+              <a:srgbClr val="0F766E"/>
+            </a:solidFill>
+            <a:prstDash val="solid"/>
+            <a:round/>
+            <a:headEnd len="sm" w="sm" type="none"/>
+            <a:tailEnd len="sm" w="sm" type="none"/>
+          </a:ln>
+          <a:effectLst>
+            <a:outerShdw blurRad="63500" rotWithShape="0" algn="bl" dir="8100000" dist="25400">
+              <a:srgbClr val="000000">
+                <a:alpha val="12156"/>
+              </a:srgbClr>
+            </a:outerShdw>
+          </a:effectLst>
+        </p:spPr>
+        <p:txBody>
+          <a:bodyPr anchorCtr="0" anchor="ctr" bIns="91425" lIns="91425" spcFirstLastPara="1" rIns="91425" wrap="square" tIns="91425">
+            <a:noAutofit/>
+          </a:bodyPr>
+          <a:lstStyle/>
+          <a:p>
+            <a:pPr indent="0" lvl="0" marL="0" rtl="0" algn="l">
+              <a:spcBef>
+                <a:spcPts val="0"/>
+              </a:spcBef>
+              <a:spcAft>
+                <a:spcPts val="0"/>
+              </a:spcAft>
+              <a:buNone/>
+            </a:pPr>
+            <a:r>
+              <a:t/>
+            </a:r>
+            <a:endParaRPr/>
+          </a:p>
+        </p:txBody>
+      </p:sp>
+      <p:sp>
+        <p:nvSpPr>
+          <p:cNvPr id="447" name="Google Shape;447;p23"/>
+          <p:cNvSpPr/>
+          <p:nvPr/>
+        </p:nvSpPr>
+        <p:spPr>
+          <a:xfrm>
+            <a:off x="4846320" y="1234440"/>
+            <a:ext cx="3840480" cy="411480"/>
+          </a:xfrm>
+          <a:prstGeom prst="rect">
+            <a:avLst/>
+          </a:prstGeom>
+          <a:noFill/>
+          <a:ln>
+            <a:noFill/>
+          </a:ln>
+        </p:spPr>
+        <p:txBody>
+          <a:bodyPr anchorCtr="0" anchor="ctr" bIns="0" lIns="0" spcFirstLastPara="1" rIns="0" wrap="square" tIns="0">
+            <a:noAutofit/>
+          </a:bodyPr>
+          <a:lstStyle/>
+          <a:p>
+            <a:pPr indent="0" lvl="0" marL="0" marR="0" rtl="0" algn="l">
+              <a:spcBef>
+                <a:spcPts val="0"/>
+              </a:spcBef>
+              <a:spcAft>
+                <a:spcPts val="0"/>
+              </a:spcAft>
+              <a:buClr>
+                <a:srgbClr val="CCFBF1"/>
+              </a:buClr>
+              <a:buSzPts val="1600"/>
+              <a:buFont typeface="Calibri"/>
+              <a:buNone/>
+            </a:pPr>
+            <a:r>
+              <a:rPr b="1" i="0" lang="en-US" sz="1600" u="none" cap="none" strike="noStrike">
+                <a:solidFill>
+                  <a:srgbClr val="CCFBF1"/>
+                </a:solidFill>
+                <a:latin typeface="Calibri"/>
+                <a:ea typeface="Calibri"/>
+                <a:cs typeface="Calibri"/>
+                <a:sym typeface="Calibri"/>
+              </a:rPr>
+              <a:t>📄 Badges de sources</a:t>
+            </a:r>
+            <a:endParaRPr b="0" i="0" sz="1600" u="none" cap="none" strike="noStrike">
+              <a:solidFill>
+                <a:schemeClr val="dk1"/>
+              </a:solidFill>
+              <a:latin typeface="Calibri"/>
+              <a:ea typeface="Calibri"/>
+              <a:cs typeface="Calibri"/>
+              <a:sym typeface="Calibri"/>
+            </a:endParaRPr>
+          </a:p>
+        </p:txBody>
+      </p:sp>
+      <p:sp>
+        <p:nvSpPr>
+          <p:cNvPr id="448" name="Google Shape;448;p23"/>
+          <p:cNvSpPr/>
+          <p:nvPr/>
+        </p:nvSpPr>
+        <p:spPr>
+          <a:xfrm>
+            <a:off x="4846320" y="1691640"/>
+            <a:ext cx="3840480" cy="822960"/>
+          </a:xfrm>
+          <a:prstGeom prst="rect">
+            <a:avLst/>
+          </a:prstGeom>
+          <a:noFill/>
+          <a:ln>
+            <a:noFill/>
+          </a:ln>
+        </p:spPr>
+        <p:txBody>
+          <a:bodyPr anchorCtr="0" anchor="ctr" bIns="0" lIns="0" spcFirstLastPara="1" rIns="0" wrap="square" tIns="0">
+            <a:noAutofit/>
+          </a:bodyPr>
+          <a:lstStyle/>
+          <a:p>
+            <a:pPr indent="0" lvl="0" marL="0" marR="0" rtl="0" algn="l">
+              <a:spcBef>
+                <a:spcPts val="0"/>
+              </a:spcBef>
+              <a:spcAft>
+                <a:spcPts val="0"/>
+              </a:spcAft>
+              <a:buClr>
+                <a:srgbClr val="FFFFFF"/>
+              </a:buClr>
+              <a:buSzPts val="1300"/>
+              <a:buFont typeface="Calibri"/>
+              <a:buNone/>
+            </a:pPr>
+            <a:r>
+              <a:rPr b="0" i="0" lang="en-US" sz="1300" u="none" cap="none" strike="noStrike">
+                <a:solidFill>
+                  <a:srgbClr val="FFFFFF"/>
+                </a:solidFill>
+                <a:latin typeface="Calibri"/>
+                <a:ea typeface="Calibri"/>
+                <a:cs typeface="Calibri"/>
+                <a:sym typeface="Calibri"/>
+              </a:rPr>
+              <a:t>Chaque réponse affiche « Documents officiels HAS/INCa » ou « Recherche web »</a:t>
+            </a:r>
+            <a:endParaRPr b="0" i="0" sz="1300" u="none" cap="none" strike="noStrike">
+              <a:solidFill>
+                <a:schemeClr val="dk1"/>
+              </a:solidFill>
+              <a:latin typeface="Calibri"/>
+              <a:ea typeface="Calibri"/>
+              <a:cs typeface="Calibri"/>
+              <a:sym typeface="Calibri"/>
+            </a:endParaRPr>
+          </a:p>
+        </p:txBody>
+      </p:sp>
+      <p:sp>
+        <p:nvSpPr>
+          <p:cNvPr id="449" name="Google Shape;449;p23"/>
+          <p:cNvSpPr/>
+          <p:nvPr/>
+        </p:nvSpPr>
+        <p:spPr>
+          <a:xfrm>
+            <a:off x="365760" y="2834640"/>
+            <a:ext cx="4114800" cy="1508760"/>
+          </a:xfrm>
+          <a:prstGeom prst="rect">
+            <a:avLst/>
+          </a:prstGeom>
+          <a:solidFill>
+            <a:srgbClr val="0D9488"/>
+          </a:solidFill>
+          <a:ln cap="flat" cmpd="sng" w="12700">
+            <a:solidFill>
+              <a:srgbClr val="0D9488"/>
+            </a:solidFill>
+            <a:prstDash val="solid"/>
+            <a:round/>
+            <a:headEnd len="sm" w="sm" type="none"/>
+            <a:tailEnd len="sm" w="sm" type="none"/>
+          </a:ln>
+          <a:effectLst>
+            <a:outerShdw blurRad="63500" rotWithShape="0" algn="bl" dir="8100000" dist="25400">
+              <a:srgbClr val="000000">
+                <a:alpha val="12156"/>
+              </a:srgbClr>
+            </a:outerShdw>
+          </a:effectLst>
+        </p:spPr>
+        <p:txBody>
+          <a:bodyPr anchorCtr="0" anchor="ctr" bIns="91425" lIns="91425" spcFirstLastPara="1" rIns="91425" wrap="square" tIns="91425">
+            <a:noAutofit/>
+          </a:bodyPr>
+          <a:lstStyle/>
+          <a:p>
+            <a:pPr indent="0" lvl="0" marL="0" rtl="0" algn="l">
+              <a:spcBef>
+                <a:spcPts val="0"/>
+              </a:spcBef>
+              <a:spcAft>
+                <a:spcPts val="0"/>
+              </a:spcAft>
+              <a:buNone/>
+            </a:pPr>
+            <a:r>
+              <a:t/>
+            </a:r>
+            <a:endParaRPr/>
+          </a:p>
+        </p:txBody>
+      </p:sp>
+      <p:sp>
+        <p:nvSpPr>
+          <p:cNvPr id="450" name="Google Shape;450;p23"/>
+          <p:cNvSpPr/>
+          <p:nvPr/>
+        </p:nvSpPr>
+        <p:spPr>
+          <a:xfrm>
+            <a:off x="502920" y="2971800"/>
+            <a:ext cx="3840480" cy="411480"/>
+          </a:xfrm>
+          <a:prstGeom prst="rect">
+            <a:avLst/>
+          </a:prstGeom>
+          <a:noFill/>
+          <a:ln>
+            <a:noFill/>
+          </a:ln>
+        </p:spPr>
+        <p:txBody>
+          <a:bodyPr anchorCtr="0" anchor="ctr" bIns="0" lIns="0" spcFirstLastPara="1" rIns="0" wrap="square" tIns="0">
+            <a:noAutofit/>
+          </a:bodyPr>
+          <a:lstStyle/>
+          <a:p>
+            <a:pPr indent="0" lvl="0" marL="0" marR="0" rtl="0" algn="l">
+              <a:spcBef>
+                <a:spcPts val="0"/>
+              </a:spcBef>
+              <a:spcAft>
+                <a:spcPts val="0"/>
+              </a:spcAft>
+              <a:buClr>
+                <a:srgbClr val="CCFBF1"/>
+              </a:buClr>
+              <a:buSzPts val="1600"/>
+              <a:buFont typeface="Calibri"/>
+              <a:buNone/>
+            </a:pPr>
+            <a:r>
+              <a:rPr b="1" i="0" lang="en-US" sz="1600" u="none" cap="none" strike="noStrike">
+                <a:solidFill>
+                  <a:srgbClr val="CCFBF1"/>
+                </a:solidFill>
+                <a:latin typeface="Calibri"/>
+                <a:ea typeface="Calibri"/>
+                <a:cs typeface="Calibri"/>
+                <a:sym typeface="Calibri"/>
+              </a:rPr>
+              <a:t>📅 Mes rendez-vous</a:t>
+            </a:r>
+            <a:endParaRPr b="0" i="0" sz="1600" u="none" cap="none" strike="noStrike">
+              <a:solidFill>
+                <a:schemeClr val="dk1"/>
+              </a:solidFill>
+              <a:latin typeface="Calibri"/>
+              <a:ea typeface="Calibri"/>
+              <a:cs typeface="Calibri"/>
+              <a:sym typeface="Calibri"/>
+            </a:endParaRPr>
+          </a:p>
+        </p:txBody>
+      </p:sp>
+      <p:sp>
+        <p:nvSpPr>
+          <p:cNvPr id="451" name="Google Shape;451;p23"/>
+          <p:cNvSpPr/>
+          <p:nvPr/>
+        </p:nvSpPr>
+        <p:spPr>
+          <a:xfrm>
+            <a:off x="502920" y="3429000"/>
+            <a:ext cx="3840480" cy="822960"/>
+          </a:xfrm>
+          <a:prstGeom prst="rect">
+            <a:avLst/>
+          </a:prstGeom>
+          <a:noFill/>
+          <a:ln>
+            <a:noFill/>
+          </a:ln>
+        </p:spPr>
+        <p:txBody>
+          <a:bodyPr anchorCtr="0" anchor="ctr" bIns="0" lIns="0" spcFirstLastPara="1" rIns="0" wrap="square" tIns="0">
+            <a:noAutofit/>
+          </a:bodyPr>
+          <a:lstStyle/>
+          <a:p>
+            <a:pPr indent="0" lvl="0" marL="0" marR="0" rtl="0" algn="l">
+              <a:spcBef>
+                <a:spcPts val="0"/>
+              </a:spcBef>
+              <a:spcAft>
+                <a:spcPts val="0"/>
+              </a:spcAft>
+              <a:buClr>
+                <a:srgbClr val="FFFFFF"/>
+              </a:buClr>
+              <a:buSzPts val="1300"/>
+              <a:buFont typeface="Calibri"/>
+              <a:buNone/>
+            </a:pPr>
+            <a:r>
+              <a:rPr b="0" i="0" lang="en-US" sz="1300" u="none" cap="none" strike="noStrike">
+                <a:solidFill>
+                  <a:srgbClr val="FFFFFF"/>
+                </a:solidFill>
+                <a:latin typeface="Calibri"/>
+                <a:ea typeface="Calibri"/>
+                <a:cs typeface="Calibri"/>
+                <a:sym typeface="Calibri"/>
+              </a:rPr>
+              <a:t>Section permanente dans la sidebar — historique des RDV pris, toujours retrouvable</a:t>
+            </a:r>
+            <a:endParaRPr b="0" i="0" sz="1300" u="none" cap="none" strike="noStrike">
+              <a:solidFill>
+                <a:schemeClr val="dk1"/>
+              </a:solidFill>
+              <a:latin typeface="Calibri"/>
+              <a:ea typeface="Calibri"/>
+              <a:cs typeface="Calibri"/>
+              <a:sym typeface="Calibri"/>
+            </a:endParaRPr>
+          </a:p>
+        </p:txBody>
+      </p:sp>
+      <p:sp>
+        <p:nvSpPr>
+          <p:cNvPr id="452" name="Google Shape;452;p23"/>
+          <p:cNvSpPr/>
+          <p:nvPr/>
+        </p:nvSpPr>
+        <p:spPr>
+          <a:xfrm>
+            <a:off x="4709160" y="2834640"/>
+            <a:ext cx="4114800" cy="1508760"/>
+          </a:xfrm>
+          <a:prstGeom prst="rect">
+            <a:avLst/>
+          </a:prstGeom>
+          <a:solidFill>
+            <a:srgbClr val="0369A1"/>
+          </a:solidFill>
+          <a:ln cap="flat" cmpd="sng" w="12700">
+            <a:solidFill>
+              <a:srgbClr val="0369A1"/>
+            </a:solidFill>
+            <a:prstDash val="solid"/>
+            <a:round/>
+            <a:headEnd len="sm" w="sm" type="none"/>
+            <a:tailEnd len="sm" w="sm" type="none"/>
+          </a:ln>
+          <a:effectLst>
+            <a:outerShdw blurRad="63500" rotWithShape="0" algn="bl" dir="8100000" dist="25400">
+              <a:srgbClr val="000000">
+                <a:alpha val="12156"/>
+              </a:srgbClr>
+            </a:outerShdw>
+          </a:effectLst>
+        </p:spPr>
+        <p:txBody>
+          <a:bodyPr anchorCtr="0" anchor="ctr" bIns="91425" lIns="91425" spcFirstLastPara="1" rIns="91425" wrap="square" tIns="91425">
+            <a:noAutofit/>
+          </a:bodyPr>
+          <a:lstStyle/>
+          <a:p>
+            <a:pPr indent="0" lvl="0" marL="0" rtl="0" algn="l">
+              <a:spcBef>
+                <a:spcPts val="0"/>
+              </a:spcBef>
+              <a:spcAft>
+                <a:spcPts val="0"/>
+              </a:spcAft>
+              <a:buNone/>
+            </a:pPr>
+            <a:r>
+              <a:t/>
+            </a:r>
+            <a:endParaRPr/>
+          </a:p>
+        </p:txBody>
+      </p:sp>
+      <p:sp>
+        <p:nvSpPr>
+          <p:cNvPr id="453" name="Google Shape;453;p23"/>
+          <p:cNvSpPr/>
+          <p:nvPr/>
+        </p:nvSpPr>
+        <p:spPr>
+          <a:xfrm>
+            <a:off x="4846320" y="2971800"/>
+            <a:ext cx="3840480" cy="411480"/>
+          </a:xfrm>
+          <a:prstGeom prst="rect">
+            <a:avLst/>
+          </a:prstGeom>
+          <a:noFill/>
+          <a:ln>
+            <a:noFill/>
+          </a:ln>
+        </p:spPr>
+        <p:txBody>
+          <a:bodyPr anchorCtr="0" anchor="ctr" bIns="0" lIns="0" spcFirstLastPara="1" rIns="0" wrap="square" tIns="0">
+            <a:noAutofit/>
+          </a:bodyPr>
+          <a:lstStyle/>
+          <a:p>
+            <a:pPr indent="0" lvl="0" marL="0" marR="0" rtl="0" algn="l">
+              <a:spcBef>
+                <a:spcPts val="0"/>
+              </a:spcBef>
+              <a:spcAft>
+                <a:spcPts val="0"/>
+              </a:spcAft>
+              <a:buClr>
+                <a:srgbClr val="CCFBF1"/>
+              </a:buClr>
+              <a:buSzPts val="1600"/>
+              <a:buFont typeface="Calibri"/>
+              <a:buNone/>
+            </a:pPr>
+            <a:r>
+              <a:rPr b="1" i="0" lang="en-US" sz="1600" u="none" cap="none" strike="noStrike">
+                <a:solidFill>
+                  <a:srgbClr val="CCFBF1"/>
+                </a:solidFill>
+                <a:latin typeface="Calibri"/>
+                <a:ea typeface="Calibri"/>
+                <a:cs typeface="Calibri"/>
+                <a:sym typeface="Calibri"/>
+              </a:rPr>
+              <a:t>✨ Auto-rename des sessions</a:t>
+            </a:r>
+            <a:endParaRPr b="0" i="0" sz="1600" u="none" cap="none" strike="noStrike">
+              <a:solidFill>
+                <a:schemeClr val="dk1"/>
+              </a:solidFill>
+              <a:latin typeface="Calibri"/>
+              <a:ea typeface="Calibri"/>
+              <a:cs typeface="Calibri"/>
+              <a:sym typeface="Calibri"/>
+            </a:endParaRPr>
+          </a:p>
+        </p:txBody>
+      </p:sp>
+      <p:sp>
+        <p:nvSpPr>
+          <p:cNvPr id="454" name="Google Shape;454;p23"/>
+          <p:cNvSpPr/>
+          <p:nvPr/>
+        </p:nvSpPr>
+        <p:spPr>
+          <a:xfrm>
+            <a:off x="4846320" y="3429000"/>
+            <a:ext cx="3840480" cy="822960"/>
+          </a:xfrm>
+          <a:prstGeom prst="rect">
+            <a:avLst/>
+          </a:prstGeom>
+          <a:noFill/>
+          <a:ln>
+            <a:noFill/>
+          </a:ln>
+        </p:spPr>
+        <p:txBody>
+          <a:bodyPr anchorCtr="0" anchor="ctr" bIns="0" lIns="0" spcFirstLastPara="1" rIns="0" wrap="square" tIns="0">
+            <a:noAutofit/>
+          </a:bodyPr>
+          <a:lstStyle/>
+          <a:p>
+            <a:pPr indent="0" lvl="0" marL="0" marR="0" rtl="0" algn="l">
+              <a:spcBef>
+                <a:spcPts val="0"/>
+              </a:spcBef>
+              <a:spcAft>
+                <a:spcPts val="0"/>
+              </a:spcAft>
+              <a:buClr>
+                <a:srgbClr val="FFFFFF"/>
+              </a:buClr>
+              <a:buSzPts val="1300"/>
+              <a:buFont typeface="Calibri"/>
+              <a:buNone/>
+            </a:pPr>
+            <a:r>
+              <a:rPr b="0" i="0" lang="en-US" sz="1300" u="none" cap="none" strike="noStrike">
+                <a:solidFill>
+                  <a:srgbClr val="FFFFFF"/>
+                </a:solidFill>
+                <a:latin typeface="Calibri"/>
+                <a:ea typeface="Calibri"/>
+                <a:cs typeface="Calibri"/>
+                <a:sym typeface="Calibri"/>
+              </a:rPr>
+              <a:t>Le titre devient les 60 premiers caractères du 1er message — sidebar lisible</a:t>
+            </a:r>
+            <a:endParaRPr b="0" i="0" sz="1300" u="none" cap="none" strike="noStrike">
+              <a:solidFill>
+                <a:schemeClr val="dk1"/>
+              </a:solidFill>
+              <a:latin typeface="Calibri"/>
+              <a:ea typeface="Calibri"/>
+              <a:cs typeface="Calibri"/>
+              <a:sym typeface="Calibri"/>
+            </a:endParaRPr>
+          </a:p>
+        </p:txBody>
+      </p:sp>
+    </p:spTree>
+  </p:cSld>
+  <p:clrMapOvr>
+    <a:masterClrMapping/>
+  </p:clrMapOvr>
+</p:sld>
+</file>
+
+<file path=ppt/slides/slide25.xml><?xml version="1.0" encoding="utf-8"?>
 <p:sld xmlns:a="http://schemas.openxmlformats.org/drawingml/2006/main" xmlns:r="http://schemas.openxmlformats.org/officeDocument/2006/relationships" xmlns:mc="http://schemas.openxmlformats.org/markup-compatibility/2006" xmlns:mv="urn:schemas-microsoft-com:mac:vml" xmlns:p="http://schemas.openxmlformats.org/presentationml/2006/main" xmlns:c="http://schemas.openxmlformats.org/drawingml/2006/chart" xmlns:dgm="http://schemas.openxmlformats.org/drawingml/2006/diagram" xmlns:o="urn:schemas-microsoft-com:office:office" xmlns:v="urn:schemas-microsoft-com:vml" xmlns:pvml="urn:schemas-microsoft-com:office:powerpoint" xmlns:com="http://schemas.openxmlformats.org/drawingml/2006/compatibility" xmlns:p14="http://schemas.microsoft.com/office/powerpoint/2010/main" xmlns:p15="http://schemas.microsoft.com/office/powerpoint/2012/main" xmlns:ahyp="http://schemas.microsoft.com/office/drawing/2018/hyperlinkcolor">
   <p:cSld>
     <p:bg>
@@ -21076,7 +23144,7 @@
                 <a:cs typeface="Calibri"/>
                 <a:sym typeface="Calibri"/>
               </a:rPr>
-              <a:t>23</a:t>
+              <a:t>25</a:t>
             </a:r>
             <a:endParaRPr b="0" i="0" sz="1000" u="none" cap="none" strike="noStrike">
               <a:solidFill>
@@ -21826,7 +23894,7 @@
 </p:sld>
 </file>
 
-<file path=ppt/slides/slide24.xml><?xml version="1.0" encoding="utf-8"?>
+<file path=ppt/slides/slide26.xml><?xml version="1.0" encoding="utf-8"?>
 <p:sld xmlns:a="http://schemas.openxmlformats.org/drawingml/2006/main" xmlns:r="http://schemas.openxmlformats.org/officeDocument/2006/relationships" xmlns:mc="http://schemas.openxmlformats.org/markup-compatibility/2006" xmlns:mv="urn:schemas-microsoft-com:mac:vml" xmlns:p="http://schemas.openxmlformats.org/presentationml/2006/main" xmlns:c="http://schemas.openxmlformats.org/drawingml/2006/chart" xmlns:dgm="http://schemas.openxmlformats.org/drawingml/2006/diagram" xmlns:o="urn:schemas-microsoft-com:office:office" xmlns:v="urn:schemas-microsoft-com:vml" xmlns:pvml="urn:schemas-microsoft-com:office:powerpoint" xmlns:com="http://schemas.openxmlformats.org/drawingml/2006/compatibility" xmlns:p14="http://schemas.microsoft.com/office/powerpoint/2010/main" xmlns:p15="http://schemas.microsoft.com/office/powerpoint/2012/main" xmlns:ahyp="http://schemas.microsoft.com/office/drawing/2018/hyperlinkcolor">
   <p:cSld>
     <p:bg>

--- a/docs/soutenance.pptx
+++ b/docs/soutenance.pptx
@@ -27,6 +27,7 @@
     <p:sldId id="272" r:id="rId22"/>
     <p:sldId id="273" r:id="rId23"/>
     <p:sldId id="274" r:id="rId24"/>
+    <p:sldId id="282" r:id="rId33"/>
     <p:sldId id="275" r:id="rId25"/>
     <p:sldId id="276" r:id="rId26"/>
     <p:sldId id="280" r:id="rId31"/>
@@ -24369,6 +24370,1298 @@
               <a:t>https://sae.amanawebagency.com</a:t>
             </a:r>
             <a:endParaRPr b="0" i="0" sz="1200" u="none" cap="none" strike="noStrike">
+              <a:solidFill>
+                <a:schemeClr val="dk1"/>
+              </a:solidFill>
+              <a:latin typeface="Calibri"/>
+              <a:ea typeface="Calibri"/>
+              <a:cs typeface="Calibri"/>
+              <a:sym typeface="Calibri"/>
+            </a:endParaRPr>
+          </a:p>
+        </p:txBody>
+      </p:sp>
+    </p:spTree>
+  </p:cSld>
+  <p:clrMapOvr>
+    <a:masterClrMapping/>
+  </p:clrMapOvr>
+</p:sld>
+</file>
+
+<file path=ppt/slides/slide27.xml><?xml version="1.0" encoding="utf-8"?>
+<p:sld xmlns:a="http://schemas.openxmlformats.org/drawingml/2006/main" xmlns:p="http://schemas.openxmlformats.org/presentationml/2006/main" xmlns:r="http://schemas.openxmlformats.org/officeDocument/2006/relationships">
+  <p:cSld>
+    <p:spTree>
+      <p:nvGrpSpPr>
+        <p:cNvPr id="1" name=""/>
+        <p:cNvGrpSpPr/>
+        <p:nvPr/>
+      </p:nvGrpSpPr>
+      <p:grpSpPr/>
+      <p:sp>
+        <p:nvSpPr>
+          <p:cNvPr id="341" name="Google Shape;341;p19"/>
+          <p:cNvSpPr/>
+          <p:nvPr/>
+        </p:nvSpPr>
+        <p:spPr>
+          <a:xfrm>
+            <a:off x="0" y="0"/>
+            <a:ext cx="9144000" cy="914400"/>
+          </a:xfrm>
+          <a:prstGeom prst="rect">
+            <a:avLst/>
+          </a:prstGeom>
+          <a:solidFill>
+            <a:srgbClr val="134E4A"/>
+          </a:solidFill>
+          <a:ln cap="flat" cmpd="sng" w="12700">
+            <a:solidFill>
+              <a:srgbClr val="134E4A"/>
+            </a:solidFill>
+            <a:prstDash val="solid"/>
+            <a:round/>
+            <a:headEnd len="sm" w="sm" type="none"/>
+            <a:tailEnd len="sm" w="sm" type="none"/>
+          </a:ln>
+        </p:spPr>
+        <p:txBody>
+          <a:bodyPr anchorCtr="0" anchor="ctr" bIns="91425" lIns="91425" spcFirstLastPara="1" rIns="91425" wrap="square" tIns="91425">
+            <a:noAutofit/>
+          </a:bodyPr>
+          <a:lstStyle/>
+          <a:p>
+            <a:pPr indent="0" lvl="0" marL="0" rtl="0" algn="l">
+              <a:spcBef>
+                <a:spcPts val="0"/>
+              </a:spcBef>
+              <a:spcAft>
+                <a:spcPts val="0"/>
+              </a:spcAft>
+              <a:buNone/>
+            </a:pPr>
+            <a:r>
+              <a:t/>
+            </a:r>
+            <a:endParaRPr/>
+          </a:p>
+        </p:txBody>
+      </p:sp>
+      <p:sp>
+        <p:nvSpPr>
+          <p:cNvPr id="342" name="Google Shape;342;p19"/>
+          <p:cNvSpPr/>
+          <p:nvPr/>
+        </p:nvSpPr>
+        <p:spPr>
+          <a:xfrm>
+            <a:off x="0" y="914400"/>
+            <a:ext cx="9144000" cy="45720"/>
+          </a:xfrm>
+          <a:prstGeom prst="rect">
+            <a:avLst/>
+          </a:prstGeom>
+          <a:solidFill>
+            <a:srgbClr val="14B8A6"/>
+          </a:solidFill>
+          <a:ln cap="flat" cmpd="sng" w="12700">
+            <a:solidFill>
+              <a:srgbClr val="14B8A6"/>
+            </a:solidFill>
+            <a:prstDash val="solid"/>
+            <a:round/>
+            <a:headEnd len="sm" w="sm" type="none"/>
+            <a:tailEnd len="sm" w="sm" type="none"/>
+          </a:ln>
+        </p:spPr>
+        <p:txBody>
+          <a:bodyPr anchorCtr="0" anchor="ctr" bIns="91425" lIns="91425" spcFirstLastPara="1" rIns="91425" wrap="square" tIns="91425">
+            <a:noAutofit/>
+          </a:bodyPr>
+          <a:lstStyle/>
+          <a:p>
+            <a:pPr indent="0" lvl="0" marL="0" rtl="0" algn="l">
+              <a:spcBef>
+                <a:spcPts val="0"/>
+              </a:spcBef>
+              <a:spcAft>
+                <a:spcPts val="0"/>
+              </a:spcAft>
+              <a:buNone/>
+            </a:pPr>
+            <a:r>
+              <a:t/>
+            </a:r>
+            <a:endParaRPr/>
+          </a:p>
+        </p:txBody>
+      </p:sp>
+      <p:sp>
+        <p:nvSpPr>
+          <p:cNvPr id="343" name="Google Shape;343;p19"/>
+          <p:cNvSpPr/>
+          <p:nvPr/>
+        </p:nvSpPr>
+        <p:spPr>
+          <a:xfrm>
+            <a:off x="365760" y="54864"/>
+            <a:ext cx="8503920" cy="256032"/>
+          </a:xfrm>
+          <a:prstGeom prst="rect">
+            <a:avLst/>
+          </a:prstGeom>
+          <a:noFill/>
+          <a:ln>
+            <a:noFill/>
+          </a:ln>
+        </p:spPr>
+        <p:txBody>
+          <a:bodyPr anchorCtr="0" anchor="ctr" bIns="0" lIns="0" spcFirstLastPara="1" rIns="0" wrap="square" tIns="0">
+            <a:noAutofit/>
+          </a:bodyPr>
+          <a:lstStyle/>
+          <a:p>
+            <a:pPr indent="0" lvl="0" marL="0" marR="0" rtl="0" algn="r">
+              <a:spcBef>
+                <a:spcPts val="0"/>
+              </a:spcBef>
+              <a:spcAft>
+                <a:spcPts val="0"/>
+              </a:spcAft>
+              <a:buClr>
+                <a:srgbClr val="CCFBF1"/>
+              </a:buClr>
+              <a:buSzPts val="900"/>
+              <a:buFont typeface="Calibri"/>
+              <a:buNone/>
+            </a:pPr>
+            <a:r>
+              <a:rPr b="0" i="0" lang="en-US" sz="900" u="none" cap="none" strike="noStrike">
+                <a:solidFill>
+                  <a:srgbClr val="CCFBF1"/>
+                </a:solidFill>
+                <a:latin typeface="Calibri"/>
+                <a:ea typeface="Calibri"/>
+                <a:cs typeface="Calibri"/>
+                <a:sym typeface="Calibri"/>
+              </a:rPr>
+              <a:t>SAE BUT3 — Chatbot médical RAG</a:t>
+            </a:r>
+            <a:endParaRPr b="0" i="0" sz="900" u="none" cap="none" strike="noStrike">
+              <a:solidFill>
+                <a:schemeClr val="dk1"/>
+              </a:solidFill>
+              <a:latin typeface="Calibri"/>
+              <a:ea typeface="Calibri"/>
+              <a:cs typeface="Calibri"/>
+              <a:sym typeface="Calibri"/>
+            </a:endParaRPr>
+          </a:p>
+        </p:txBody>
+      </p:sp>
+      <p:sp>
+        <p:nvSpPr>
+          <p:cNvPr id="344" name="Google Shape;344;p19"/>
+          <p:cNvSpPr/>
+          <p:nvPr/>
+        </p:nvSpPr>
+        <p:spPr>
+          <a:xfrm>
+            <a:off x="365760" y="256032"/>
+            <a:ext cx="8412480" cy="621792"/>
+          </a:xfrm>
+          <a:prstGeom prst="rect">
+            <a:avLst/>
+          </a:prstGeom>
+          <a:noFill/>
+          <a:ln>
+            <a:noFill/>
+          </a:ln>
+        </p:spPr>
+        <p:txBody>
+          <a:bodyPr anchorCtr="0" anchor="ctr" bIns="0" lIns="0" spcFirstLastPara="1" rIns="0" wrap="square" tIns="0">
+            <a:noAutofit/>
+          </a:bodyPr>
+          <a:lstStyle/>
+          <a:p>
+            <a:pPr indent="0" lvl="0" marL="0" marR="0" rtl="0" algn="l">
+              <a:spcBef>
+                <a:spcPts val="0"/>
+              </a:spcBef>
+              <a:spcAft>
+                <a:spcPts val="0"/>
+              </a:spcAft>
+              <a:buClr>
+                <a:srgbClr val="FFFFFF"/>
+              </a:buClr>
+              <a:buSzPts val="2200"/>
+              <a:buFont typeface="Calibri"/>
+              <a:buNone/>
+            </a:pPr>
+            <a:r>
+              <a:rPr b="1" i="0" lang="en-US" sz="2200" u="none" cap="none" strike="noStrike">
+                <a:solidFill>
+                  <a:srgbClr val="FFFFFF"/>
+                </a:solidFill>
+                <a:latin typeface="Calibri"/>
+                <a:ea typeface="Calibri"/>
+                <a:cs typeface="Calibri"/>
+                <a:sym typeface="Calibri"/>
+              </a:rPr>
+              <a:t>Bonus++ — Hermes côté praticien (Telegram)</a:t>
+            </a:r>
+            <a:endParaRPr b="0" i="0" sz="2200" u="none" cap="none" strike="noStrike">
+              <a:solidFill>
+                <a:schemeClr val="dk1"/>
+              </a:solidFill>
+              <a:latin typeface="Calibri"/>
+              <a:ea typeface="Calibri"/>
+              <a:cs typeface="Calibri"/>
+              <a:sym typeface="Calibri"/>
+            </a:endParaRPr>
+          </a:p>
+        </p:txBody>
+      </p:sp>
+      <p:sp>
+        <p:nvSpPr>
+          <p:cNvPr id="345" name="Google Shape;345;p19"/>
+          <p:cNvSpPr/>
+          <p:nvPr/>
+        </p:nvSpPr>
+        <p:spPr>
+          <a:xfrm>
+            <a:off x="8503920" y="4846320"/>
+            <a:ext cx="502920" cy="228600"/>
+          </a:xfrm>
+          <a:prstGeom prst="rect">
+            <a:avLst/>
+          </a:prstGeom>
+          <a:noFill/>
+          <a:ln>
+            <a:noFill/>
+          </a:ln>
+        </p:spPr>
+        <p:txBody>
+          <a:bodyPr anchorCtr="0" anchor="ctr" bIns="0" lIns="0" spcFirstLastPara="1" rIns="0" wrap="square" tIns="0">
+            <a:noAutofit/>
+          </a:bodyPr>
+          <a:lstStyle/>
+          <a:p>
+            <a:pPr indent="0" lvl="0" marL="0" marR="0" rtl="0" algn="r">
+              <a:spcBef>
+                <a:spcPts val="0"/>
+              </a:spcBef>
+              <a:spcAft>
+                <a:spcPts val="0"/>
+              </a:spcAft>
+              <a:buClr>
+                <a:srgbClr val="14B8A6"/>
+              </a:buClr>
+              <a:buSzPts val="1000"/>
+              <a:buFont typeface="Calibri"/>
+              <a:buNone/>
+            </a:pPr>
+            <a:r>
+              <a:rPr b="0" i="0" lang="en-US" sz="1000" u="none" cap="none" strike="noStrike">
+                <a:solidFill>
+                  <a:srgbClr val="14B8A6"/>
+                </a:solidFill>
+                <a:latin typeface="Calibri"/>
+                <a:ea typeface="Calibri"/>
+                <a:cs typeface="Calibri"/>
+                <a:sym typeface="Calibri"/>
+              </a:rPr>
+              <a:t>21</a:t>
+            </a:r>
+            <a:endParaRPr b="0" i="0" sz="1000" u="none" cap="none" strike="noStrike">
+              <a:solidFill>
+                <a:schemeClr val="dk1"/>
+              </a:solidFill>
+              <a:latin typeface="Calibri"/>
+              <a:ea typeface="Calibri"/>
+              <a:cs typeface="Calibri"/>
+              <a:sym typeface="Calibri"/>
+            </a:endParaRPr>
+          </a:p>
+        </p:txBody>
+      </p:sp>
+      <p:sp>
+        <p:nvSpPr>
+          <p:cNvPr id="346" name="Google Shape;346;p19"/>
+          <p:cNvSpPr/>
+          <p:nvPr/>
+        </p:nvSpPr>
+        <p:spPr>
+          <a:xfrm>
+            <a:off x="457200" y="1051560"/>
+            <a:ext cx="8229600" cy="365760"/>
+          </a:xfrm>
+          <a:prstGeom prst="rect">
+            <a:avLst/>
+          </a:prstGeom>
+          <a:noFill/>
+          <a:ln>
+            <a:noFill/>
+          </a:ln>
+        </p:spPr>
+        <p:txBody>
+          <a:bodyPr anchorCtr="0" anchor="ctr" bIns="0" lIns="0" spcFirstLastPara="1" rIns="0" wrap="square" tIns="0">
+            <a:noAutofit/>
+          </a:bodyPr>
+          <a:lstStyle/>
+          <a:p>
+            <a:pPr indent="0" lvl="0" marL="0" marR="0" rtl="0" algn="l">
+              <a:spcBef>
+                <a:spcPts val="0"/>
+              </a:spcBef>
+              <a:spcAft>
+                <a:spcPts val="0"/>
+              </a:spcAft>
+              <a:buClr>
+                <a:srgbClr val="0F172A"/>
+              </a:buClr>
+              <a:buSzPts val="1500"/>
+              <a:buFont typeface="Calibri"/>
+              <a:buNone/>
+            </a:pPr>
+            <a:r>
+              <a:rPr b="0" i="0" lang="en-US" sz="1500" u="none" cap="none" strike="noStrike">
+                <a:solidFill>
+                  <a:srgbClr val="0F172A"/>
+                </a:solidFill>
+                <a:latin typeface="Calibri"/>
+                <a:ea typeface="Calibri"/>
+                <a:cs typeface="Calibri"/>
+                <a:sym typeface="Calibri"/>
+              </a:rPr>
+              <a:t>Une fois le RDV pris, le praticien reçoit + peut interagir via son groupe Telegram.</a:t>
+            </a:r>
+            <a:endParaRPr b="0" i="0" sz="1500" u="none" cap="none" strike="noStrike">
+              <a:solidFill>
+                <a:schemeClr val="dk1"/>
+              </a:solidFill>
+              <a:latin typeface="Calibri"/>
+              <a:ea typeface="Calibri"/>
+              <a:cs typeface="Calibri"/>
+              <a:sym typeface="Calibri"/>
+            </a:endParaRPr>
+          </a:p>
+        </p:txBody>
+      </p:sp>
+      <p:sp>
+        <p:nvSpPr>
+          <p:cNvPr id="347" name="Google Shape;347;p19"/>
+          <p:cNvSpPr/>
+          <p:nvPr/>
+        </p:nvSpPr>
+        <p:spPr>
+          <a:xfrm>
+            <a:off x="457200" y="1627632"/>
+            <a:ext cx="475488" cy="475488"/>
+          </a:xfrm>
+          <a:prstGeom prst="ellipse">
+            <a:avLst/>
+          </a:prstGeom>
+          <a:solidFill>
+            <a:srgbClr val="134E4A"/>
+          </a:solidFill>
+          <a:ln cap="flat" cmpd="sng" w="12700">
+            <a:solidFill>
+              <a:srgbClr val="134E4A"/>
+            </a:solidFill>
+            <a:prstDash val="solid"/>
+            <a:round/>
+            <a:headEnd len="sm" w="sm" type="none"/>
+            <a:tailEnd len="sm" w="sm" type="none"/>
+          </a:ln>
+        </p:spPr>
+        <p:txBody>
+          <a:bodyPr anchorCtr="0" anchor="ctr" bIns="91425" lIns="91425" spcFirstLastPara="1" rIns="91425" wrap="square" tIns="91425">
+            <a:noAutofit/>
+          </a:bodyPr>
+          <a:lstStyle/>
+          <a:p>
+            <a:pPr indent="0" lvl="0" marL="0" rtl="0" algn="l">
+              <a:spcBef>
+                <a:spcPts val="0"/>
+              </a:spcBef>
+              <a:spcAft>
+                <a:spcPts val="0"/>
+              </a:spcAft>
+              <a:buNone/>
+            </a:pPr>
+            <a:r>
+              <a:t/>
+            </a:r>
+            <a:endParaRPr/>
+          </a:p>
+        </p:txBody>
+      </p:sp>
+      <p:sp>
+        <p:nvSpPr>
+          <p:cNvPr id="348" name="Google Shape;348;p19"/>
+          <p:cNvSpPr/>
+          <p:nvPr/>
+        </p:nvSpPr>
+        <p:spPr>
+          <a:xfrm>
+            <a:off x="457200" y="1627632"/>
+            <a:ext cx="475488" cy="475488"/>
+          </a:xfrm>
+          <a:prstGeom prst="rect">
+            <a:avLst/>
+          </a:prstGeom>
+          <a:noFill/>
+          <a:ln>
+            <a:noFill/>
+          </a:ln>
+        </p:spPr>
+        <p:txBody>
+          <a:bodyPr anchorCtr="0" anchor="ctr" bIns="0" lIns="0" spcFirstLastPara="1" rIns="0" wrap="square" tIns="0">
+            <a:noAutofit/>
+          </a:bodyPr>
+          <a:lstStyle/>
+          <a:p>
+            <a:pPr indent="0" lvl="0" marL="0" marR="0" rtl="0" algn="ctr">
+              <a:spcBef>
+                <a:spcPts val="0"/>
+              </a:spcBef>
+              <a:spcAft>
+                <a:spcPts val="0"/>
+              </a:spcAft>
+              <a:buClr>
+                <a:srgbClr val="FFFFFF"/>
+              </a:buClr>
+              <a:buSzPts val="1400"/>
+              <a:buFont typeface="Calibri"/>
+              <a:buNone/>
+            </a:pPr>
+            <a:r>
+              <a:rPr b="1" i="0" lang="en-US" sz="1400" u="none" cap="none" strike="noStrike">
+                <a:solidFill>
+                  <a:srgbClr val="FFFFFF"/>
+                </a:solidFill>
+                <a:latin typeface="Calibri"/>
+                <a:ea typeface="Calibri"/>
+                <a:cs typeface="Calibri"/>
+                <a:sym typeface="Calibri"/>
+              </a:rPr>
+              <a:t>1</a:t>
+            </a:r>
+            <a:endParaRPr b="0" i="0" sz="1400" u="none" cap="none" strike="noStrike">
+              <a:solidFill>
+                <a:schemeClr val="dk1"/>
+              </a:solidFill>
+              <a:latin typeface="Calibri"/>
+              <a:ea typeface="Calibri"/>
+              <a:cs typeface="Calibri"/>
+              <a:sym typeface="Calibri"/>
+            </a:endParaRPr>
+          </a:p>
+        </p:txBody>
+      </p:sp>
+      <p:sp>
+        <p:nvSpPr>
+          <p:cNvPr id="349" name="Google Shape;349;p19"/>
+          <p:cNvSpPr/>
+          <p:nvPr/>
+        </p:nvSpPr>
+        <p:spPr>
+          <a:xfrm>
+            <a:off x="1097280" y="1536192"/>
+            <a:ext cx="7589520" cy="749808"/>
+          </a:xfrm>
+          <a:prstGeom prst="rect">
+            <a:avLst/>
+          </a:prstGeom>
+          <a:solidFill>
+            <a:srgbClr val="CCFBF1"/>
+          </a:solidFill>
+          <a:ln cap="flat" cmpd="sng" w="12700">
+            <a:solidFill>
+              <a:srgbClr val="D1FAE5"/>
+            </a:solidFill>
+            <a:prstDash val="solid"/>
+            <a:round/>
+            <a:headEnd len="sm" w="sm" type="none"/>
+            <a:tailEnd len="sm" w="sm" type="none"/>
+          </a:ln>
+        </p:spPr>
+        <p:txBody>
+          <a:bodyPr anchorCtr="0" anchor="ctr" bIns="91425" lIns="91425" spcFirstLastPara="1" rIns="91425" wrap="square" tIns="91425">
+            <a:noAutofit/>
+          </a:bodyPr>
+          <a:lstStyle/>
+          <a:p>
+            <a:pPr indent="0" lvl="0" marL="0" rtl="0" algn="l">
+              <a:spcBef>
+                <a:spcPts val="0"/>
+              </a:spcBef>
+              <a:spcAft>
+                <a:spcPts val="0"/>
+              </a:spcAft>
+              <a:buNone/>
+            </a:pPr>
+            <a:r>
+              <a:t/>
+            </a:r>
+            <a:endParaRPr/>
+          </a:p>
+        </p:txBody>
+      </p:sp>
+      <p:sp>
+        <p:nvSpPr>
+          <p:cNvPr id="350" name="Google Shape;350;p19"/>
+          <p:cNvSpPr/>
+          <p:nvPr/>
+        </p:nvSpPr>
+        <p:spPr>
+          <a:xfrm>
+            <a:off x="1261872" y="1581912"/>
+            <a:ext cx="7315200" cy="329184"/>
+          </a:xfrm>
+          <a:prstGeom prst="rect">
+            <a:avLst/>
+          </a:prstGeom>
+          <a:noFill/>
+          <a:ln>
+            <a:noFill/>
+          </a:ln>
+        </p:spPr>
+        <p:txBody>
+          <a:bodyPr anchorCtr="0" anchor="ctr" bIns="0" lIns="0" spcFirstLastPara="1" rIns="0" wrap="square" tIns="0">
+            <a:noAutofit/>
+          </a:bodyPr>
+          <a:lstStyle/>
+          <a:p>
+            <a:pPr indent="0" lvl="0" marL="0" marR="0" rtl="0" algn="l">
+              <a:spcBef>
+                <a:spcPts val="0"/>
+              </a:spcBef>
+              <a:spcAft>
+                <a:spcPts val="0"/>
+              </a:spcAft>
+              <a:buClr>
+                <a:srgbClr val="0F766E"/>
+              </a:buClr>
+              <a:buSzPts val="1300"/>
+              <a:buFont typeface="Consolas"/>
+              <a:buNone/>
+            </a:pPr>
+            <a:r>
+              <a:rPr b="1" i="0" lang="en-US" sz="1300" u="none" cap="none" strike="noStrike">
+                <a:solidFill>
+                  <a:srgbClr val="0F766E"/>
+                </a:solidFill>
+                <a:latin typeface="Consolas"/>
+                <a:ea typeface="Consolas"/>
+                <a:cs typeface="Consolas"/>
+                <a:sym typeface="Consolas"/>
+              </a:rPr>
+              <a:t>📤 Notif sortante</a:t>
+            </a:r>
+            <a:endParaRPr b="0" i="0" sz="1300" u="none" cap="none" strike="noStrike">
+              <a:solidFill>
+                <a:schemeClr val="dk1"/>
+              </a:solidFill>
+              <a:latin typeface="Calibri"/>
+              <a:ea typeface="Calibri"/>
+              <a:cs typeface="Calibri"/>
+              <a:sym typeface="Calibri"/>
+            </a:endParaRPr>
+          </a:p>
+        </p:txBody>
+      </p:sp>
+      <p:sp>
+        <p:nvSpPr>
+          <p:cNvPr id="351" name="Google Shape;351;p19"/>
+          <p:cNvSpPr/>
+          <p:nvPr/>
+        </p:nvSpPr>
+        <p:spPr>
+          <a:xfrm>
+            <a:off x="1261872" y="1920240"/>
+            <a:ext cx="7315200" cy="329184"/>
+          </a:xfrm>
+          <a:prstGeom prst="rect">
+            <a:avLst/>
+          </a:prstGeom>
+          <a:noFill/>
+          <a:ln>
+            <a:noFill/>
+          </a:ln>
+        </p:spPr>
+        <p:txBody>
+          <a:bodyPr anchorCtr="0" anchor="ctr" bIns="0" lIns="0" spcFirstLastPara="1" rIns="0" wrap="square" tIns="0">
+            <a:noAutofit/>
+          </a:bodyPr>
+          <a:lstStyle/>
+          <a:p>
+            <a:pPr indent="0" lvl="0" marL="0" marR="0" rtl="0" algn="l">
+              <a:spcBef>
+                <a:spcPts val="0"/>
+              </a:spcBef>
+              <a:spcAft>
+                <a:spcPts val="0"/>
+              </a:spcAft>
+              <a:buClr>
+                <a:srgbClr val="475569"/>
+              </a:buClr>
+              <a:buSzPts val="1300"/>
+              <a:buFont typeface="Calibri"/>
+              <a:buNone/>
+            </a:pPr>
+            <a:r>
+              <a:rPr b="0" i="0" lang="en-US" sz="1300" u="none" cap="none" strike="noStrike">
+                <a:solidFill>
+                  <a:srgbClr val="475569"/>
+                </a:solidFill>
+                <a:latin typeface="Calibri"/>
+                <a:ea typeface="Calibri"/>
+                <a:cs typeface="Calibri"/>
+                <a:sym typeface="Calibri"/>
+              </a:rPr>
+              <a:t>Nouvelle réservation → message automatique dans le groupe du Dr.</a:t>
+            </a:r>
+            <a:endParaRPr b="0" i="0" sz="1300" u="none" cap="none" strike="noStrike">
+              <a:solidFill>
+                <a:schemeClr val="dk1"/>
+              </a:solidFill>
+              <a:latin typeface="Calibri"/>
+              <a:ea typeface="Calibri"/>
+              <a:cs typeface="Calibri"/>
+              <a:sym typeface="Calibri"/>
+            </a:endParaRPr>
+          </a:p>
+        </p:txBody>
+      </p:sp>
+      <p:sp>
+        <p:nvSpPr>
+          <p:cNvPr id="352" name="Google Shape;352;p19"/>
+          <p:cNvSpPr/>
+          <p:nvPr/>
+        </p:nvSpPr>
+        <p:spPr>
+          <a:xfrm>
+            <a:off x="457200" y="2587752"/>
+            <a:ext cx="475488" cy="475488"/>
+          </a:xfrm>
+          <a:prstGeom prst="ellipse">
+            <a:avLst/>
+          </a:prstGeom>
+          <a:solidFill>
+            <a:srgbClr val="134E4A"/>
+          </a:solidFill>
+          <a:ln cap="flat" cmpd="sng" w="12700">
+            <a:solidFill>
+              <a:srgbClr val="134E4A"/>
+            </a:solidFill>
+            <a:prstDash val="solid"/>
+            <a:round/>
+            <a:headEnd len="sm" w="sm" type="none"/>
+            <a:tailEnd len="sm" w="sm" type="none"/>
+          </a:ln>
+        </p:spPr>
+        <p:txBody>
+          <a:bodyPr anchorCtr="0" anchor="ctr" bIns="91425" lIns="91425" spcFirstLastPara="1" rIns="91425" wrap="square" tIns="91425">
+            <a:noAutofit/>
+          </a:bodyPr>
+          <a:lstStyle/>
+          <a:p>
+            <a:pPr indent="0" lvl="0" marL="0" rtl="0" algn="l">
+              <a:spcBef>
+                <a:spcPts val="0"/>
+              </a:spcBef>
+              <a:spcAft>
+                <a:spcPts val="0"/>
+              </a:spcAft>
+              <a:buNone/>
+            </a:pPr>
+            <a:r>
+              <a:t/>
+            </a:r>
+            <a:endParaRPr/>
+          </a:p>
+        </p:txBody>
+      </p:sp>
+      <p:sp>
+        <p:nvSpPr>
+          <p:cNvPr id="353" name="Google Shape;353;p19"/>
+          <p:cNvSpPr/>
+          <p:nvPr/>
+        </p:nvSpPr>
+        <p:spPr>
+          <a:xfrm>
+            <a:off x="457200" y="2587752"/>
+            <a:ext cx="475488" cy="475488"/>
+          </a:xfrm>
+          <a:prstGeom prst="rect">
+            <a:avLst/>
+          </a:prstGeom>
+          <a:noFill/>
+          <a:ln>
+            <a:noFill/>
+          </a:ln>
+        </p:spPr>
+        <p:txBody>
+          <a:bodyPr anchorCtr="0" anchor="ctr" bIns="0" lIns="0" spcFirstLastPara="1" rIns="0" wrap="square" tIns="0">
+            <a:noAutofit/>
+          </a:bodyPr>
+          <a:lstStyle/>
+          <a:p>
+            <a:pPr indent="0" lvl="0" marL="0" marR="0" rtl="0" algn="ctr">
+              <a:spcBef>
+                <a:spcPts val="0"/>
+              </a:spcBef>
+              <a:spcAft>
+                <a:spcPts val="0"/>
+              </a:spcAft>
+              <a:buClr>
+                <a:srgbClr val="FFFFFF"/>
+              </a:buClr>
+              <a:buSzPts val="1400"/>
+              <a:buFont typeface="Calibri"/>
+              <a:buNone/>
+            </a:pPr>
+            <a:r>
+              <a:rPr b="1" i="0" lang="en-US" sz="1400" u="none" cap="none" strike="noStrike">
+                <a:solidFill>
+                  <a:srgbClr val="FFFFFF"/>
+                </a:solidFill>
+                <a:latin typeface="Calibri"/>
+                <a:ea typeface="Calibri"/>
+                <a:cs typeface="Calibri"/>
+                <a:sym typeface="Calibri"/>
+              </a:rPr>
+              <a:t>2</a:t>
+            </a:r>
+            <a:endParaRPr b="0" i="0" sz="1400" u="none" cap="none" strike="noStrike">
+              <a:solidFill>
+                <a:schemeClr val="dk1"/>
+              </a:solidFill>
+              <a:latin typeface="Calibri"/>
+              <a:ea typeface="Calibri"/>
+              <a:cs typeface="Calibri"/>
+              <a:sym typeface="Calibri"/>
+            </a:endParaRPr>
+          </a:p>
+        </p:txBody>
+      </p:sp>
+      <p:sp>
+        <p:nvSpPr>
+          <p:cNvPr id="354" name="Google Shape;354;p19"/>
+          <p:cNvSpPr/>
+          <p:nvPr/>
+        </p:nvSpPr>
+        <p:spPr>
+          <a:xfrm>
+            <a:off x="1097280" y="2496312"/>
+            <a:ext cx="7589520" cy="749808"/>
+          </a:xfrm>
+          <a:prstGeom prst="rect">
+            <a:avLst/>
+          </a:prstGeom>
+          <a:solidFill>
+            <a:srgbClr val="FFFFFF"/>
+          </a:solidFill>
+          <a:ln cap="flat" cmpd="sng" w="12700">
+            <a:solidFill>
+              <a:srgbClr val="D1FAE5"/>
+            </a:solidFill>
+            <a:prstDash val="solid"/>
+            <a:round/>
+            <a:headEnd len="sm" w="sm" type="none"/>
+            <a:tailEnd len="sm" w="sm" type="none"/>
+          </a:ln>
+        </p:spPr>
+        <p:txBody>
+          <a:bodyPr anchorCtr="0" anchor="ctr" bIns="91425" lIns="91425" spcFirstLastPara="1" rIns="91425" wrap="square" tIns="91425">
+            <a:noAutofit/>
+          </a:bodyPr>
+          <a:lstStyle/>
+          <a:p>
+            <a:pPr indent="0" lvl="0" marL="0" rtl="0" algn="l">
+              <a:spcBef>
+                <a:spcPts val="0"/>
+              </a:spcBef>
+              <a:spcAft>
+                <a:spcPts val="0"/>
+              </a:spcAft>
+              <a:buNone/>
+            </a:pPr>
+            <a:r>
+              <a:t/>
+            </a:r>
+            <a:endParaRPr/>
+          </a:p>
+        </p:txBody>
+      </p:sp>
+      <p:sp>
+        <p:nvSpPr>
+          <p:cNvPr id="355" name="Google Shape;355;p19"/>
+          <p:cNvSpPr/>
+          <p:nvPr/>
+        </p:nvSpPr>
+        <p:spPr>
+          <a:xfrm>
+            <a:off x="1261872" y="2542032"/>
+            <a:ext cx="7315200" cy="329184"/>
+          </a:xfrm>
+          <a:prstGeom prst="rect">
+            <a:avLst/>
+          </a:prstGeom>
+          <a:noFill/>
+          <a:ln>
+            <a:noFill/>
+          </a:ln>
+        </p:spPr>
+        <p:txBody>
+          <a:bodyPr anchorCtr="0" anchor="ctr" bIns="0" lIns="0" spcFirstLastPara="1" rIns="0" wrap="square" tIns="0">
+            <a:noAutofit/>
+          </a:bodyPr>
+          <a:lstStyle/>
+          <a:p>
+            <a:pPr indent="0" lvl="0" marL="0" marR="0" rtl="0" algn="l">
+              <a:spcBef>
+                <a:spcPts val="0"/>
+              </a:spcBef>
+              <a:spcAft>
+                <a:spcPts val="0"/>
+              </a:spcAft>
+              <a:buClr>
+                <a:srgbClr val="0F766E"/>
+              </a:buClr>
+              <a:buSzPts val="1300"/>
+              <a:buFont typeface="Consolas"/>
+              <a:buNone/>
+            </a:pPr>
+            <a:r>
+              <a:rPr b="1" i="0" lang="en-US" sz="1300" u="none" cap="none" strike="noStrike">
+                <a:solidFill>
+                  <a:srgbClr val="0F766E"/>
+                </a:solidFill>
+                <a:latin typeface="Consolas"/>
+                <a:ea typeface="Consolas"/>
+                <a:cs typeface="Consolas"/>
+                <a:sym typeface="Consolas"/>
+              </a:rPr>
+              <a:t>📥 Commandes entrantes</a:t>
+            </a:r>
+            <a:endParaRPr b="0" i="0" sz="1300" u="none" cap="none" strike="noStrike">
+              <a:solidFill>
+                <a:schemeClr val="dk1"/>
+              </a:solidFill>
+              <a:latin typeface="Calibri"/>
+              <a:ea typeface="Calibri"/>
+              <a:cs typeface="Calibri"/>
+              <a:sym typeface="Calibri"/>
+            </a:endParaRPr>
+          </a:p>
+        </p:txBody>
+      </p:sp>
+      <p:sp>
+        <p:nvSpPr>
+          <p:cNvPr id="356" name="Google Shape;356;p19"/>
+          <p:cNvSpPr/>
+          <p:nvPr/>
+        </p:nvSpPr>
+        <p:spPr>
+          <a:xfrm>
+            <a:off x="1261872" y="2880360"/>
+            <a:ext cx="7315200" cy="329184"/>
+          </a:xfrm>
+          <a:prstGeom prst="rect">
+            <a:avLst/>
+          </a:prstGeom>
+          <a:noFill/>
+          <a:ln>
+            <a:noFill/>
+          </a:ln>
+        </p:spPr>
+        <p:txBody>
+          <a:bodyPr anchorCtr="0" anchor="ctr" bIns="0" lIns="0" spcFirstLastPara="1" rIns="0" wrap="square" tIns="0">
+            <a:noAutofit/>
+          </a:bodyPr>
+          <a:lstStyle/>
+          <a:p>
+            <a:pPr indent="0" lvl="0" marL="0" marR="0" rtl="0" algn="l">
+              <a:spcBef>
+                <a:spcPts val="0"/>
+              </a:spcBef>
+              <a:spcAft>
+                <a:spcPts val="0"/>
+              </a:spcAft>
+              <a:buClr>
+                <a:srgbClr val="475569"/>
+              </a:buClr>
+              <a:buSzPts val="1300"/>
+              <a:buFont typeface="Calibri"/>
+              <a:buNone/>
+            </a:pPr>
+            <a:r>
+              <a:rPr b="0" i="0" lang="en-US" sz="1300" u="none" cap="none" strike="noStrike">
+                <a:solidFill>
+                  <a:srgbClr val="475569"/>
+                </a:solidFill>
+                <a:latin typeface="Calibri"/>
+                <a:ea typeface="Calibri"/>
+                <a:cs typeface="Calibri"/>
+                <a:sym typeface="Calibri"/>
+              </a:rPr>
+              <a:t>/aide  /rdv_aujourdhui  /rdv_demain  /rdv  + langage naturel via Gemini</a:t>
+            </a:r>
+            <a:endParaRPr b="0" i="0" sz="1300" u="none" cap="none" strike="noStrike">
+              <a:solidFill>
+                <a:schemeClr val="dk1"/>
+              </a:solidFill>
+              <a:latin typeface="Calibri"/>
+              <a:ea typeface="Calibri"/>
+              <a:cs typeface="Calibri"/>
+              <a:sym typeface="Calibri"/>
+            </a:endParaRPr>
+          </a:p>
+        </p:txBody>
+      </p:sp>
+      <p:sp>
+        <p:nvSpPr>
+          <p:cNvPr id="357" name="Google Shape;357;p19"/>
+          <p:cNvSpPr/>
+          <p:nvPr/>
+        </p:nvSpPr>
+        <p:spPr>
+          <a:xfrm>
+            <a:off x="457200" y="3547872"/>
+            <a:ext cx="475488" cy="475488"/>
+          </a:xfrm>
+          <a:prstGeom prst="ellipse">
+            <a:avLst/>
+          </a:prstGeom>
+          <a:solidFill>
+            <a:srgbClr val="134E4A"/>
+          </a:solidFill>
+          <a:ln cap="flat" cmpd="sng" w="12700">
+            <a:solidFill>
+              <a:srgbClr val="134E4A"/>
+            </a:solidFill>
+            <a:prstDash val="solid"/>
+            <a:round/>
+            <a:headEnd len="sm" w="sm" type="none"/>
+            <a:tailEnd len="sm" w="sm" type="none"/>
+          </a:ln>
+        </p:spPr>
+        <p:txBody>
+          <a:bodyPr anchorCtr="0" anchor="ctr" bIns="91425" lIns="91425" spcFirstLastPara="1" rIns="91425" wrap="square" tIns="91425">
+            <a:noAutofit/>
+          </a:bodyPr>
+          <a:lstStyle/>
+          <a:p>
+            <a:pPr indent="0" lvl="0" marL="0" rtl="0" algn="l">
+              <a:spcBef>
+                <a:spcPts val="0"/>
+              </a:spcBef>
+              <a:spcAft>
+                <a:spcPts val="0"/>
+              </a:spcAft>
+              <a:buNone/>
+            </a:pPr>
+            <a:r>
+              <a:t/>
+            </a:r>
+            <a:endParaRPr/>
+          </a:p>
+        </p:txBody>
+      </p:sp>
+      <p:sp>
+        <p:nvSpPr>
+          <p:cNvPr id="358" name="Google Shape;358;p19"/>
+          <p:cNvSpPr/>
+          <p:nvPr/>
+        </p:nvSpPr>
+        <p:spPr>
+          <a:xfrm>
+            <a:off x="457200" y="3547872"/>
+            <a:ext cx="475488" cy="475488"/>
+          </a:xfrm>
+          <a:prstGeom prst="rect">
+            <a:avLst/>
+          </a:prstGeom>
+          <a:noFill/>
+          <a:ln>
+            <a:noFill/>
+          </a:ln>
+        </p:spPr>
+        <p:txBody>
+          <a:bodyPr anchorCtr="0" anchor="ctr" bIns="0" lIns="0" spcFirstLastPara="1" rIns="0" wrap="square" tIns="0">
+            <a:noAutofit/>
+          </a:bodyPr>
+          <a:lstStyle/>
+          <a:p>
+            <a:pPr indent="0" lvl="0" marL="0" marR="0" rtl="0" algn="ctr">
+              <a:spcBef>
+                <a:spcPts val="0"/>
+              </a:spcBef>
+              <a:spcAft>
+                <a:spcPts val="0"/>
+              </a:spcAft>
+              <a:buClr>
+                <a:srgbClr val="FFFFFF"/>
+              </a:buClr>
+              <a:buSzPts val="1400"/>
+              <a:buFont typeface="Calibri"/>
+              <a:buNone/>
+            </a:pPr>
+            <a:r>
+              <a:rPr b="1" i="0" lang="en-US" sz="1400" u="none" cap="none" strike="noStrike">
+                <a:solidFill>
+                  <a:srgbClr val="FFFFFF"/>
+                </a:solidFill>
+                <a:latin typeface="Calibri"/>
+                <a:ea typeface="Calibri"/>
+                <a:cs typeface="Calibri"/>
+                <a:sym typeface="Calibri"/>
+              </a:rPr>
+              <a:t>3</a:t>
+            </a:r>
+            <a:endParaRPr b="0" i="0" sz="1400" u="none" cap="none" strike="noStrike">
+              <a:solidFill>
+                <a:schemeClr val="dk1"/>
+              </a:solidFill>
+              <a:latin typeface="Calibri"/>
+              <a:ea typeface="Calibri"/>
+              <a:cs typeface="Calibri"/>
+              <a:sym typeface="Calibri"/>
+            </a:endParaRPr>
+          </a:p>
+        </p:txBody>
+      </p:sp>
+      <p:sp>
+        <p:nvSpPr>
+          <p:cNvPr id="359" name="Google Shape;359;p19"/>
+          <p:cNvSpPr/>
+          <p:nvPr/>
+        </p:nvSpPr>
+        <p:spPr>
+          <a:xfrm>
+            <a:off x="1097280" y="3456432"/>
+            <a:ext cx="7589520" cy="749808"/>
+          </a:xfrm>
+          <a:prstGeom prst="rect">
+            <a:avLst/>
+          </a:prstGeom>
+          <a:solidFill>
+            <a:srgbClr val="CCFBF1"/>
+          </a:solidFill>
+          <a:ln cap="flat" cmpd="sng" w="12700">
+            <a:solidFill>
+              <a:srgbClr val="D1FAE5"/>
+            </a:solidFill>
+            <a:prstDash val="solid"/>
+            <a:round/>
+            <a:headEnd len="sm" w="sm" type="none"/>
+            <a:tailEnd len="sm" w="sm" type="none"/>
+          </a:ln>
+        </p:spPr>
+        <p:txBody>
+          <a:bodyPr anchorCtr="0" anchor="ctr" bIns="91425" lIns="91425" spcFirstLastPara="1" rIns="91425" wrap="square" tIns="91425">
+            <a:noAutofit/>
+          </a:bodyPr>
+          <a:lstStyle/>
+          <a:p>
+            <a:pPr indent="0" lvl="0" marL="0" rtl="0" algn="l">
+              <a:spcBef>
+                <a:spcPts val="0"/>
+              </a:spcBef>
+              <a:spcAft>
+                <a:spcPts val="0"/>
+              </a:spcAft>
+              <a:buNone/>
+            </a:pPr>
+            <a:r>
+              <a:t/>
+            </a:r>
+            <a:endParaRPr/>
+          </a:p>
+        </p:txBody>
+      </p:sp>
+      <p:sp>
+        <p:nvSpPr>
+          <p:cNvPr id="360" name="Google Shape;360;p19"/>
+          <p:cNvSpPr/>
+          <p:nvPr/>
+        </p:nvSpPr>
+        <p:spPr>
+          <a:xfrm>
+            <a:off x="1261872" y="3502152"/>
+            <a:ext cx="7315200" cy="329184"/>
+          </a:xfrm>
+          <a:prstGeom prst="rect">
+            <a:avLst/>
+          </a:prstGeom>
+          <a:noFill/>
+          <a:ln>
+            <a:noFill/>
+          </a:ln>
+        </p:spPr>
+        <p:txBody>
+          <a:bodyPr anchorCtr="0" anchor="ctr" bIns="0" lIns="0" spcFirstLastPara="1" rIns="0" wrap="square" tIns="0">
+            <a:noAutofit/>
+          </a:bodyPr>
+          <a:lstStyle/>
+          <a:p>
+            <a:pPr indent="0" lvl="0" marL="0" marR="0" rtl="0" algn="l">
+              <a:spcBef>
+                <a:spcPts val="0"/>
+              </a:spcBef>
+              <a:spcAft>
+                <a:spcPts val="0"/>
+              </a:spcAft>
+              <a:buClr>
+                <a:srgbClr val="0F766E"/>
+              </a:buClr>
+              <a:buSzPts val="1300"/>
+              <a:buFont typeface="Consolas"/>
+              <a:buNone/>
+            </a:pPr>
+            <a:r>
+              <a:rPr b="1" i="0" lang="en-US" sz="1300" u="none" cap="none" strike="noStrike">
+                <a:solidFill>
+                  <a:srgbClr val="0F766E"/>
+                </a:solidFill>
+                <a:latin typeface="Consolas"/>
+                <a:ea typeface="Consolas"/>
+                <a:cs typeface="Consolas"/>
+                <a:sym typeface="Consolas"/>
+              </a:rPr>
+              <a:t>🔐 Cloisonnement</a:t>
+            </a:r>
+            <a:endParaRPr b="0" i="0" sz="1300" u="none" cap="none" strike="noStrike">
+              <a:solidFill>
+                <a:schemeClr val="dk1"/>
+              </a:solidFill>
+              <a:latin typeface="Calibri"/>
+              <a:ea typeface="Calibri"/>
+              <a:cs typeface="Calibri"/>
+              <a:sym typeface="Calibri"/>
+            </a:endParaRPr>
+          </a:p>
+        </p:txBody>
+      </p:sp>
+      <p:sp>
+        <p:nvSpPr>
+          <p:cNvPr id="361" name="Google Shape;361;p19"/>
+          <p:cNvSpPr/>
+          <p:nvPr/>
+        </p:nvSpPr>
+        <p:spPr>
+          <a:xfrm>
+            <a:off x="1261872" y="3840480"/>
+            <a:ext cx="7315200" cy="329184"/>
+          </a:xfrm>
+          <a:prstGeom prst="rect">
+            <a:avLst/>
+          </a:prstGeom>
+          <a:noFill/>
+          <a:ln>
+            <a:noFill/>
+          </a:ln>
+        </p:spPr>
+        <p:txBody>
+          <a:bodyPr anchorCtr="0" anchor="ctr" bIns="0" lIns="0" spcFirstLastPara="1" rIns="0" wrap="square" tIns="0">
+            <a:noAutofit/>
+          </a:bodyPr>
+          <a:lstStyle/>
+          <a:p>
+            <a:pPr indent="0" lvl="0" marL="0" marR="0" rtl="0" algn="l">
+              <a:spcBef>
+                <a:spcPts val="0"/>
+              </a:spcBef>
+              <a:spcAft>
+                <a:spcPts val="0"/>
+              </a:spcAft>
+              <a:buClr>
+                <a:srgbClr val="475569"/>
+              </a:buClr>
+              <a:buSzPts val="1300"/>
+              <a:buFont typeface="Calibri"/>
+              <a:buNone/>
+            </a:pPr>
+            <a:r>
+              <a:rPr b="0" i="0" lang="en-US" sz="1300" u="none" cap="none" strike="noStrike">
+                <a:solidFill>
+                  <a:srgbClr val="475569"/>
+                </a:solidFill>
+                <a:latin typeface="Calibri"/>
+                <a:ea typeface="Calibri"/>
+                <a:cs typeface="Calibri"/>
+                <a:sym typeface="Calibri"/>
+              </a:rPr>
+              <a:t>1 groupe Telegram = 1 médecin (mapping Doctor.telegram_chat_id)</a:t>
+            </a:r>
+            <a:endParaRPr b="0" i="0" sz="1300" u="none" cap="none" strike="noStrike">
+              <a:solidFill>
+                <a:schemeClr val="dk1"/>
+              </a:solidFill>
+              <a:latin typeface="Calibri"/>
+              <a:ea typeface="Calibri"/>
+              <a:cs typeface="Calibri"/>
+              <a:sym typeface="Calibri"/>
+            </a:endParaRPr>
+          </a:p>
+        </p:txBody>
+      </p:sp>
+      <p:sp>
+        <p:nvSpPr>
+          <p:cNvPr id="362" name="Google Shape;362;p19"/>
+          <p:cNvSpPr/>
+          <p:nvPr/>
+        </p:nvSpPr>
+        <p:spPr>
+          <a:xfrm>
+            <a:off x="457200" y="4480560"/>
+            <a:ext cx="8229600" cy="320040"/>
+          </a:xfrm>
+          <a:prstGeom prst="rect">
+            <a:avLst/>
+          </a:prstGeom>
+          <a:noFill/>
+          <a:ln>
+            <a:noFill/>
+          </a:ln>
+        </p:spPr>
+        <p:txBody>
+          <a:bodyPr anchorCtr="0" anchor="ctr" bIns="0" lIns="0" spcFirstLastPara="1" rIns="0" wrap="square" tIns="0">
+            <a:noAutofit/>
+          </a:bodyPr>
+          <a:lstStyle/>
+          <a:p>
+            <a:pPr indent="0" lvl="0" marL="0" marR="0" rtl="0" algn="l">
+              <a:spcBef>
+                <a:spcPts val="0"/>
+              </a:spcBef>
+              <a:spcAft>
+                <a:spcPts val="0"/>
+              </a:spcAft>
+              <a:buClr>
+                <a:srgbClr val="94A3B8"/>
+              </a:buClr>
+              <a:buSzPts val="1100"/>
+              <a:buFont typeface="Calibri"/>
+              <a:buNone/>
+            </a:pPr>
+            <a:r>
+              <a:rPr b="0" i="1" lang="en-US" sz="1100" u="none" cap="none" strike="noStrike">
+                <a:solidFill>
+                  <a:srgbClr val="94A3B8"/>
+                </a:solidFill>
+                <a:latin typeface="Calibri"/>
+                <a:ea typeface="Calibri"/>
+                <a:cs typeface="Calibri"/>
+                <a:sym typeface="Calibri"/>
+              </a:rPr>
+              <a:t>Démo SAE : 2 groupes (Dr. Lefebvre, Dr. Benyahia). Infra prête pour N praticiens.</a:t>
+            </a:r>
+            <a:endParaRPr b="0" i="0" sz="1100" u="none" cap="none" strike="noStrike">
               <a:solidFill>
                 <a:schemeClr val="dk1"/>
               </a:solidFill>

--- a/docs/soutenance.pptx
+++ b/docs/soutenance.pptx
@@ -17541,6 +17541,1298 @@
 </file>
 
 <file path=ppt/slides/slide20.xml><?xml version="1.0" encoding="utf-8"?>
+<p:sld xmlns:a="http://schemas.openxmlformats.org/drawingml/2006/main" xmlns:p="http://schemas.openxmlformats.org/presentationml/2006/main" xmlns:r="http://schemas.openxmlformats.org/officeDocument/2006/relationships">
+  <p:cSld>
+    <p:spTree>
+      <p:nvGrpSpPr>
+        <p:cNvPr id="1" name=""/>
+        <p:cNvGrpSpPr/>
+        <p:nvPr/>
+      </p:nvGrpSpPr>
+      <p:grpSpPr/>
+      <p:sp>
+        <p:nvSpPr>
+          <p:cNvPr id="341" name="Google Shape;341;p19"/>
+          <p:cNvSpPr/>
+          <p:nvPr/>
+        </p:nvSpPr>
+        <p:spPr>
+          <a:xfrm>
+            <a:off x="0" y="0"/>
+            <a:ext cx="9144000" cy="914400"/>
+          </a:xfrm>
+          <a:prstGeom prst="rect">
+            <a:avLst/>
+          </a:prstGeom>
+          <a:solidFill>
+            <a:srgbClr val="134E4A"/>
+          </a:solidFill>
+          <a:ln cap="flat" cmpd="sng" w="12700">
+            <a:solidFill>
+              <a:srgbClr val="134E4A"/>
+            </a:solidFill>
+            <a:prstDash val="solid"/>
+            <a:round/>
+            <a:headEnd len="sm" w="sm" type="none"/>
+            <a:tailEnd len="sm" w="sm" type="none"/>
+          </a:ln>
+        </p:spPr>
+        <p:txBody>
+          <a:bodyPr anchorCtr="0" anchor="ctr" bIns="91425" lIns="91425" spcFirstLastPara="1" rIns="91425" wrap="square" tIns="91425">
+            <a:noAutofit/>
+          </a:bodyPr>
+          <a:lstStyle/>
+          <a:p>
+            <a:pPr indent="0" lvl="0" marL="0" rtl="0" algn="l">
+              <a:spcBef>
+                <a:spcPts val="0"/>
+              </a:spcBef>
+              <a:spcAft>
+                <a:spcPts val="0"/>
+              </a:spcAft>
+              <a:buNone/>
+            </a:pPr>
+            <a:r>
+              <a:t/>
+            </a:r>
+            <a:endParaRPr/>
+          </a:p>
+        </p:txBody>
+      </p:sp>
+      <p:sp>
+        <p:nvSpPr>
+          <p:cNvPr id="342" name="Google Shape;342;p19"/>
+          <p:cNvSpPr/>
+          <p:nvPr/>
+        </p:nvSpPr>
+        <p:spPr>
+          <a:xfrm>
+            <a:off x="0" y="914400"/>
+            <a:ext cx="9144000" cy="45720"/>
+          </a:xfrm>
+          <a:prstGeom prst="rect">
+            <a:avLst/>
+          </a:prstGeom>
+          <a:solidFill>
+            <a:srgbClr val="14B8A6"/>
+          </a:solidFill>
+          <a:ln cap="flat" cmpd="sng" w="12700">
+            <a:solidFill>
+              <a:srgbClr val="14B8A6"/>
+            </a:solidFill>
+            <a:prstDash val="solid"/>
+            <a:round/>
+            <a:headEnd len="sm" w="sm" type="none"/>
+            <a:tailEnd len="sm" w="sm" type="none"/>
+          </a:ln>
+        </p:spPr>
+        <p:txBody>
+          <a:bodyPr anchorCtr="0" anchor="ctr" bIns="91425" lIns="91425" spcFirstLastPara="1" rIns="91425" wrap="square" tIns="91425">
+            <a:noAutofit/>
+          </a:bodyPr>
+          <a:lstStyle/>
+          <a:p>
+            <a:pPr indent="0" lvl="0" marL="0" rtl="0" algn="l">
+              <a:spcBef>
+                <a:spcPts val="0"/>
+              </a:spcBef>
+              <a:spcAft>
+                <a:spcPts val="0"/>
+              </a:spcAft>
+              <a:buNone/>
+            </a:pPr>
+            <a:r>
+              <a:t/>
+            </a:r>
+            <a:endParaRPr/>
+          </a:p>
+        </p:txBody>
+      </p:sp>
+      <p:sp>
+        <p:nvSpPr>
+          <p:cNvPr id="343" name="Google Shape;343;p19"/>
+          <p:cNvSpPr/>
+          <p:nvPr/>
+        </p:nvSpPr>
+        <p:spPr>
+          <a:xfrm>
+            <a:off x="365760" y="54864"/>
+            <a:ext cx="8503920" cy="256032"/>
+          </a:xfrm>
+          <a:prstGeom prst="rect">
+            <a:avLst/>
+          </a:prstGeom>
+          <a:noFill/>
+          <a:ln>
+            <a:noFill/>
+          </a:ln>
+        </p:spPr>
+        <p:txBody>
+          <a:bodyPr anchorCtr="0" anchor="ctr" bIns="0" lIns="0" spcFirstLastPara="1" rIns="0" wrap="square" tIns="0">
+            <a:noAutofit/>
+          </a:bodyPr>
+          <a:lstStyle/>
+          <a:p>
+            <a:pPr indent="0" lvl="0" marL="0" marR="0" rtl="0" algn="r">
+              <a:spcBef>
+                <a:spcPts val="0"/>
+              </a:spcBef>
+              <a:spcAft>
+                <a:spcPts val="0"/>
+              </a:spcAft>
+              <a:buClr>
+                <a:srgbClr val="CCFBF1"/>
+              </a:buClr>
+              <a:buSzPts val="900"/>
+              <a:buFont typeface="Calibri"/>
+              <a:buNone/>
+            </a:pPr>
+            <a:r>
+              <a:rPr b="0" i="0" lang="en-US" sz="900" u="none" cap="none" strike="noStrike">
+                <a:solidFill>
+                  <a:srgbClr val="CCFBF1"/>
+                </a:solidFill>
+                <a:latin typeface="Calibri"/>
+                <a:ea typeface="Calibri"/>
+                <a:cs typeface="Calibri"/>
+                <a:sym typeface="Calibri"/>
+              </a:rPr>
+              <a:t>SAE BUT3 — Chatbot médical RAG</a:t>
+            </a:r>
+            <a:endParaRPr b="0" i="0" sz="900" u="none" cap="none" strike="noStrike">
+              <a:solidFill>
+                <a:schemeClr val="dk1"/>
+              </a:solidFill>
+              <a:latin typeface="Calibri"/>
+              <a:ea typeface="Calibri"/>
+              <a:cs typeface="Calibri"/>
+              <a:sym typeface="Calibri"/>
+            </a:endParaRPr>
+          </a:p>
+        </p:txBody>
+      </p:sp>
+      <p:sp>
+        <p:nvSpPr>
+          <p:cNvPr id="344" name="Google Shape;344;p19"/>
+          <p:cNvSpPr/>
+          <p:nvPr/>
+        </p:nvSpPr>
+        <p:spPr>
+          <a:xfrm>
+            <a:off x="365760" y="256032"/>
+            <a:ext cx="8412480" cy="621792"/>
+          </a:xfrm>
+          <a:prstGeom prst="rect">
+            <a:avLst/>
+          </a:prstGeom>
+          <a:noFill/>
+          <a:ln>
+            <a:noFill/>
+          </a:ln>
+        </p:spPr>
+        <p:txBody>
+          <a:bodyPr anchorCtr="0" anchor="ctr" bIns="0" lIns="0" spcFirstLastPara="1" rIns="0" wrap="square" tIns="0">
+            <a:noAutofit/>
+          </a:bodyPr>
+          <a:lstStyle/>
+          <a:p>
+            <a:pPr indent="0" lvl="0" marL="0" marR="0" rtl="0" algn="l">
+              <a:spcBef>
+                <a:spcPts val="0"/>
+              </a:spcBef>
+              <a:spcAft>
+                <a:spcPts val="0"/>
+              </a:spcAft>
+              <a:buClr>
+                <a:srgbClr val="FFFFFF"/>
+              </a:buClr>
+              <a:buSzPts val="2200"/>
+              <a:buFont typeface="Calibri"/>
+              <a:buNone/>
+            </a:pPr>
+            <a:r>
+              <a:rPr b="1" i="0" lang="en-US" sz="2200" u="none" cap="none" strike="noStrike">
+                <a:solidFill>
+                  <a:srgbClr val="FFFFFF"/>
+                </a:solidFill>
+                <a:latin typeface="Calibri"/>
+                <a:ea typeface="Calibri"/>
+                <a:cs typeface="Calibri"/>
+                <a:sym typeface="Calibri"/>
+              </a:rPr>
+              <a:t>Bonus++ — Hermes côté praticien (Telegram)</a:t>
+            </a:r>
+            <a:endParaRPr b="0" i="0" sz="2200" u="none" cap="none" strike="noStrike">
+              <a:solidFill>
+                <a:schemeClr val="dk1"/>
+              </a:solidFill>
+              <a:latin typeface="Calibri"/>
+              <a:ea typeface="Calibri"/>
+              <a:cs typeface="Calibri"/>
+              <a:sym typeface="Calibri"/>
+            </a:endParaRPr>
+          </a:p>
+        </p:txBody>
+      </p:sp>
+      <p:sp>
+        <p:nvSpPr>
+          <p:cNvPr id="345" name="Google Shape;345;p19"/>
+          <p:cNvSpPr/>
+          <p:nvPr/>
+        </p:nvSpPr>
+        <p:spPr>
+          <a:xfrm>
+            <a:off x="8503920" y="4846320"/>
+            <a:ext cx="502920" cy="228600"/>
+          </a:xfrm>
+          <a:prstGeom prst="rect">
+            <a:avLst/>
+          </a:prstGeom>
+          <a:noFill/>
+          <a:ln>
+            <a:noFill/>
+          </a:ln>
+        </p:spPr>
+        <p:txBody>
+          <a:bodyPr anchorCtr="0" anchor="ctr" bIns="0" lIns="0" spcFirstLastPara="1" rIns="0" wrap="square" tIns="0">
+            <a:noAutofit/>
+          </a:bodyPr>
+          <a:lstStyle/>
+          <a:p>
+            <a:pPr indent="0" lvl="0" marL="0" marR="0" rtl="0" algn="r">
+              <a:spcBef>
+                <a:spcPts val="0"/>
+              </a:spcBef>
+              <a:spcAft>
+                <a:spcPts val="0"/>
+              </a:spcAft>
+              <a:buClr>
+                <a:srgbClr val="14B8A6"/>
+              </a:buClr>
+              <a:buSzPts val="1000"/>
+              <a:buFont typeface="Calibri"/>
+              <a:buNone/>
+            </a:pPr>
+            <a:r>
+              <a:rPr b="0" i="0" lang="en-US" sz="1000" u="none" cap="none" strike="noStrike">
+                <a:solidFill>
+                  <a:srgbClr val="14B8A6"/>
+                </a:solidFill>
+                <a:latin typeface="Calibri"/>
+                <a:ea typeface="Calibri"/>
+                <a:cs typeface="Calibri"/>
+                <a:sym typeface="Calibri"/>
+              </a:rPr>
+              <a:t>20</a:t>
+            </a:r>
+            <a:endParaRPr b="0" i="0" sz="1000" u="none" cap="none" strike="noStrike">
+              <a:solidFill>
+                <a:schemeClr val="dk1"/>
+              </a:solidFill>
+              <a:latin typeface="Calibri"/>
+              <a:ea typeface="Calibri"/>
+              <a:cs typeface="Calibri"/>
+              <a:sym typeface="Calibri"/>
+            </a:endParaRPr>
+          </a:p>
+        </p:txBody>
+      </p:sp>
+      <p:sp>
+        <p:nvSpPr>
+          <p:cNvPr id="346" name="Google Shape;346;p19"/>
+          <p:cNvSpPr/>
+          <p:nvPr/>
+        </p:nvSpPr>
+        <p:spPr>
+          <a:xfrm>
+            <a:off x="457200" y="1051560"/>
+            <a:ext cx="8229600" cy="365760"/>
+          </a:xfrm>
+          <a:prstGeom prst="rect">
+            <a:avLst/>
+          </a:prstGeom>
+          <a:noFill/>
+          <a:ln>
+            <a:noFill/>
+          </a:ln>
+        </p:spPr>
+        <p:txBody>
+          <a:bodyPr anchorCtr="0" anchor="ctr" bIns="0" lIns="0" spcFirstLastPara="1" rIns="0" wrap="square" tIns="0">
+            <a:noAutofit/>
+          </a:bodyPr>
+          <a:lstStyle/>
+          <a:p>
+            <a:pPr indent="0" lvl="0" marL="0" marR="0" rtl="0" algn="l">
+              <a:spcBef>
+                <a:spcPts val="0"/>
+              </a:spcBef>
+              <a:spcAft>
+                <a:spcPts val="0"/>
+              </a:spcAft>
+              <a:buClr>
+                <a:srgbClr val="0F172A"/>
+              </a:buClr>
+              <a:buSzPts val="1500"/>
+              <a:buFont typeface="Calibri"/>
+              <a:buNone/>
+            </a:pPr>
+            <a:r>
+              <a:rPr b="0" i="0" lang="en-US" sz="1500" u="none" cap="none" strike="noStrike">
+                <a:solidFill>
+                  <a:srgbClr val="0F172A"/>
+                </a:solidFill>
+                <a:latin typeface="Calibri"/>
+                <a:ea typeface="Calibri"/>
+                <a:cs typeface="Calibri"/>
+                <a:sym typeface="Calibri"/>
+              </a:rPr>
+              <a:t>Une fois le RDV pris, le praticien reçoit + peut interagir via son groupe Telegram.</a:t>
+            </a:r>
+            <a:endParaRPr b="0" i="0" sz="1500" u="none" cap="none" strike="noStrike">
+              <a:solidFill>
+                <a:schemeClr val="dk1"/>
+              </a:solidFill>
+              <a:latin typeface="Calibri"/>
+              <a:ea typeface="Calibri"/>
+              <a:cs typeface="Calibri"/>
+              <a:sym typeface="Calibri"/>
+            </a:endParaRPr>
+          </a:p>
+        </p:txBody>
+      </p:sp>
+      <p:sp>
+        <p:nvSpPr>
+          <p:cNvPr id="347" name="Google Shape;347;p19"/>
+          <p:cNvSpPr/>
+          <p:nvPr/>
+        </p:nvSpPr>
+        <p:spPr>
+          <a:xfrm>
+            <a:off x="457200" y="1627632"/>
+            <a:ext cx="475488" cy="475488"/>
+          </a:xfrm>
+          <a:prstGeom prst="ellipse">
+            <a:avLst/>
+          </a:prstGeom>
+          <a:solidFill>
+            <a:srgbClr val="134E4A"/>
+          </a:solidFill>
+          <a:ln cap="flat" cmpd="sng" w="12700">
+            <a:solidFill>
+              <a:srgbClr val="134E4A"/>
+            </a:solidFill>
+            <a:prstDash val="solid"/>
+            <a:round/>
+            <a:headEnd len="sm" w="sm" type="none"/>
+            <a:tailEnd len="sm" w="sm" type="none"/>
+          </a:ln>
+        </p:spPr>
+        <p:txBody>
+          <a:bodyPr anchorCtr="0" anchor="ctr" bIns="91425" lIns="91425" spcFirstLastPara="1" rIns="91425" wrap="square" tIns="91425">
+            <a:noAutofit/>
+          </a:bodyPr>
+          <a:lstStyle/>
+          <a:p>
+            <a:pPr indent="0" lvl="0" marL="0" rtl="0" algn="l">
+              <a:spcBef>
+                <a:spcPts val="0"/>
+              </a:spcBef>
+              <a:spcAft>
+                <a:spcPts val="0"/>
+              </a:spcAft>
+              <a:buNone/>
+            </a:pPr>
+            <a:r>
+              <a:t/>
+            </a:r>
+            <a:endParaRPr/>
+          </a:p>
+        </p:txBody>
+      </p:sp>
+      <p:sp>
+        <p:nvSpPr>
+          <p:cNvPr id="348" name="Google Shape;348;p19"/>
+          <p:cNvSpPr/>
+          <p:nvPr/>
+        </p:nvSpPr>
+        <p:spPr>
+          <a:xfrm>
+            <a:off x="457200" y="1627632"/>
+            <a:ext cx="475488" cy="475488"/>
+          </a:xfrm>
+          <a:prstGeom prst="rect">
+            <a:avLst/>
+          </a:prstGeom>
+          <a:noFill/>
+          <a:ln>
+            <a:noFill/>
+          </a:ln>
+        </p:spPr>
+        <p:txBody>
+          <a:bodyPr anchorCtr="0" anchor="ctr" bIns="0" lIns="0" spcFirstLastPara="1" rIns="0" wrap="square" tIns="0">
+            <a:noAutofit/>
+          </a:bodyPr>
+          <a:lstStyle/>
+          <a:p>
+            <a:pPr indent="0" lvl="0" marL="0" marR="0" rtl="0" algn="ctr">
+              <a:spcBef>
+                <a:spcPts val="0"/>
+              </a:spcBef>
+              <a:spcAft>
+                <a:spcPts val="0"/>
+              </a:spcAft>
+              <a:buClr>
+                <a:srgbClr val="FFFFFF"/>
+              </a:buClr>
+              <a:buSzPts val="1400"/>
+              <a:buFont typeface="Calibri"/>
+              <a:buNone/>
+            </a:pPr>
+            <a:r>
+              <a:rPr b="1" i="0" lang="en-US" sz="1400" u="none" cap="none" strike="noStrike">
+                <a:solidFill>
+                  <a:srgbClr val="FFFFFF"/>
+                </a:solidFill>
+                <a:latin typeface="Calibri"/>
+                <a:ea typeface="Calibri"/>
+                <a:cs typeface="Calibri"/>
+                <a:sym typeface="Calibri"/>
+              </a:rPr>
+              <a:t>1</a:t>
+            </a:r>
+            <a:endParaRPr b="0" i="0" sz="1400" u="none" cap="none" strike="noStrike">
+              <a:solidFill>
+                <a:schemeClr val="dk1"/>
+              </a:solidFill>
+              <a:latin typeface="Calibri"/>
+              <a:ea typeface="Calibri"/>
+              <a:cs typeface="Calibri"/>
+              <a:sym typeface="Calibri"/>
+            </a:endParaRPr>
+          </a:p>
+        </p:txBody>
+      </p:sp>
+      <p:sp>
+        <p:nvSpPr>
+          <p:cNvPr id="349" name="Google Shape;349;p19"/>
+          <p:cNvSpPr/>
+          <p:nvPr/>
+        </p:nvSpPr>
+        <p:spPr>
+          <a:xfrm>
+            <a:off x="1097280" y="1536192"/>
+            <a:ext cx="7589520" cy="749808"/>
+          </a:xfrm>
+          <a:prstGeom prst="rect">
+            <a:avLst/>
+          </a:prstGeom>
+          <a:solidFill>
+            <a:srgbClr val="CCFBF1"/>
+          </a:solidFill>
+          <a:ln cap="flat" cmpd="sng" w="12700">
+            <a:solidFill>
+              <a:srgbClr val="D1FAE5"/>
+            </a:solidFill>
+            <a:prstDash val="solid"/>
+            <a:round/>
+            <a:headEnd len="sm" w="sm" type="none"/>
+            <a:tailEnd len="sm" w="sm" type="none"/>
+          </a:ln>
+        </p:spPr>
+        <p:txBody>
+          <a:bodyPr anchorCtr="0" anchor="ctr" bIns="91425" lIns="91425" spcFirstLastPara="1" rIns="91425" wrap="square" tIns="91425">
+            <a:noAutofit/>
+          </a:bodyPr>
+          <a:lstStyle/>
+          <a:p>
+            <a:pPr indent="0" lvl="0" marL="0" rtl="0" algn="l">
+              <a:spcBef>
+                <a:spcPts val="0"/>
+              </a:spcBef>
+              <a:spcAft>
+                <a:spcPts val="0"/>
+              </a:spcAft>
+              <a:buNone/>
+            </a:pPr>
+            <a:r>
+              <a:t/>
+            </a:r>
+            <a:endParaRPr/>
+          </a:p>
+        </p:txBody>
+      </p:sp>
+      <p:sp>
+        <p:nvSpPr>
+          <p:cNvPr id="350" name="Google Shape;350;p19"/>
+          <p:cNvSpPr/>
+          <p:nvPr/>
+        </p:nvSpPr>
+        <p:spPr>
+          <a:xfrm>
+            <a:off x="1261872" y="1581912"/>
+            <a:ext cx="7315200" cy="329184"/>
+          </a:xfrm>
+          <a:prstGeom prst="rect">
+            <a:avLst/>
+          </a:prstGeom>
+          <a:noFill/>
+          <a:ln>
+            <a:noFill/>
+          </a:ln>
+        </p:spPr>
+        <p:txBody>
+          <a:bodyPr anchorCtr="0" anchor="ctr" bIns="0" lIns="0" spcFirstLastPara="1" rIns="0" wrap="square" tIns="0">
+            <a:noAutofit/>
+          </a:bodyPr>
+          <a:lstStyle/>
+          <a:p>
+            <a:pPr indent="0" lvl="0" marL="0" marR="0" rtl="0" algn="l">
+              <a:spcBef>
+                <a:spcPts val="0"/>
+              </a:spcBef>
+              <a:spcAft>
+                <a:spcPts val="0"/>
+              </a:spcAft>
+              <a:buClr>
+                <a:srgbClr val="0F766E"/>
+              </a:buClr>
+              <a:buSzPts val="1300"/>
+              <a:buFont typeface="Consolas"/>
+              <a:buNone/>
+            </a:pPr>
+            <a:r>
+              <a:rPr b="1" i="0" lang="en-US" sz="1300" u="none" cap="none" strike="noStrike">
+                <a:solidFill>
+                  <a:srgbClr val="0F766E"/>
+                </a:solidFill>
+                <a:latin typeface="Consolas"/>
+                <a:ea typeface="Consolas"/>
+                <a:cs typeface="Consolas"/>
+                <a:sym typeface="Consolas"/>
+              </a:rPr>
+              <a:t>📤 Notif sortante</a:t>
+            </a:r>
+            <a:endParaRPr b="0" i="0" sz="1300" u="none" cap="none" strike="noStrike">
+              <a:solidFill>
+                <a:schemeClr val="dk1"/>
+              </a:solidFill>
+              <a:latin typeface="Calibri"/>
+              <a:ea typeface="Calibri"/>
+              <a:cs typeface="Calibri"/>
+              <a:sym typeface="Calibri"/>
+            </a:endParaRPr>
+          </a:p>
+        </p:txBody>
+      </p:sp>
+      <p:sp>
+        <p:nvSpPr>
+          <p:cNvPr id="351" name="Google Shape;351;p19"/>
+          <p:cNvSpPr/>
+          <p:nvPr/>
+        </p:nvSpPr>
+        <p:spPr>
+          <a:xfrm>
+            <a:off x="1261872" y="1920240"/>
+            <a:ext cx="7315200" cy="329184"/>
+          </a:xfrm>
+          <a:prstGeom prst="rect">
+            <a:avLst/>
+          </a:prstGeom>
+          <a:noFill/>
+          <a:ln>
+            <a:noFill/>
+          </a:ln>
+        </p:spPr>
+        <p:txBody>
+          <a:bodyPr anchorCtr="0" anchor="ctr" bIns="0" lIns="0" spcFirstLastPara="1" rIns="0" wrap="square" tIns="0">
+            <a:noAutofit/>
+          </a:bodyPr>
+          <a:lstStyle/>
+          <a:p>
+            <a:pPr indent="0" lvl="0" marL="0" marR="0" rtl="0" algn="l">
+              <a:spcBef>
+                <a:spcPts val="0"/>
+              </a:spcBef>
+              <a:spcAft>
+                <a:spcPts val="0"/>
+              </a:spcAft>
+              <a:buClr>
+                <a:srgbClr val="475569"/>
+              </a:buClr>
+              <a:buSzPts val="1300"/>
+              <a:buFont typeface="Calibri"/>
+              <a:buNone/>
+            </a:pPr>
+            <a:r>
+              <a:rPr b="0" i="0" lang="en-US" sz="1300" u="none" cap="none" strike="noStrike">
+                <a:solidFill>
+                  <a:srgbClr val="475569"/>
+                </a:solidFill>
+                <a:latin typeface="Calibri"/>
+                <a:ea typeface="Calibri"/>
+                <a:cs typeface="Calibri"/>
+                <a:sym typeface="Calibri"/>
+              </a:rPr>
+              <a:t>Nouvelle réservation → message automatique dans le groupe du Dr.</a:t>
+            </a:r>
+            <a:endParaRPr b="0" i="0" sz="1300" u="none" cap="none" strike="noStrike">
+              <a:solidFill>
+                <a:schemeClr val="dk1"/>
+              </a:solidFill>
+              <a:latin typeface="Calibri"/>
+              <a:ea typeface="Calibri"/>
+              <a:cs typeface="Calibri"/>
+              <a:sym typeface="Calibri"/>
+            </a:endParaRPr>
+          </a:p>
+        </p:txBody>
+      </p:sp>
+      <p:sp>
+        <p:nvSpPr>
+          <p:cNvPr id="352" name="Google Shape;352;p19"/>
+          <p:cNvSpPr/>
+          <p:nvPr/>
+        </p:nvSpPr>
+        <p:spPr>
+          <a:xfrm>
+            <a:off x="457200" y="2587752"/>
+            <a:ext cx="475488" cy="475488"/>
+          </a:xfrm>
+          <a:prstGeom prst="ellipse">
+            <a:avLst/>
+          </a:prstGeom>
+          <a:solidFill>
+            <a:srgbClr val="134E4A"/>
+          </a:solidFill>
+          <a:ln cap="flat" cmpd="sng" w="12700">
+            <a:solidFill>
+              <a:srgbClr val="134E4A"/>
+            </a:solidFill>
+            <a:prstDash val="solid"/>
+            <a:round/>
+            <a:headEnd len="sm" w="sm" type="none"/>
+            <a:tailEnd len="sm" w="sm" type="none"/>
+          </a:ln>
+        </p:spPr>
+        <p:txBody>
+          <a:bodyPr anchorCtr="0" anchor="ctr" bIns="91425" lIns="91425" spcFirstLastPara="1" rIns="91425" wrap="square" tIns="91425">
+            <a:noAutofit/>
+          </a:bodyPr>
+          <a:lstStyle/>
+          <a:p>
+            <a:pPr indent="0" lvl="0" marL="0" rtl="0" algn="l">
+              <a:spcBef>
+                <a:spcPts val="0"/>
+              </a:spcBef>
+              <a:spcAft>
+                <a:spcPts val="0"/>
+              </a:spcAft>
+              <a:buNone/>
+            </a:pPr>
+            <a:r>
+              <a:t/>
+            </a:r>
+            <a:endParaRPr/>
+          </a:p>
+        </p:txBody>
+      </p:sp>
+      <p:sp>
+        <p:nvSpPr>
+          <p:cNvPr id="353" name="Google Shape;353;p19"/>
+          <p:cNvSpPr/>
+          <p:nvPr/>
+        </p:nvSpPr>
+        <p:spPr>
+          <a:xfrm>
+            <a:off x="457200" y="2587752"/>
+            <a:ext cx="475488" cy="475488"/>
+          </a:xfrm>
+          <a:prstGeom prst="rect">
+            <a:avLst/>
+          </a:prstGeom>
+          <a:noFill/>
+          <a:ln>
+            <a:noFill/>
+          </a:ln>
+        </p:spPr>
+        <p:txBody>
+          <a:bodyPr anchorCtr="0" anchor="ctr" bIns="0" lIns="0" spcFirstLastPara="1" rIns="0" wrap="square" tIns="0">
+            <a:noAutofit/>
+          </a:bodyPr>
+          <a:lstStyle/>
+          <a:p>
+            <a:pPr indent="0" lvl="0" marL="0" marR="0" rtl="0" algn="ctr">
+              <a:spcBef>
+                <a:spcPts val="0"/>
+              </a:spcBef>
+              <a:spcAft>
+                <a:spcPts val="0"/>
+              </a:spcAft>
+              <a:buClr>
+                <a:srgbClr val="FFFFFF"/>
+              </a:buClr>
+              <a:buSzPts val="1400"/>
+              <a:buFont typeface="Calibri"/>
+              <a:buNone/>
+            </a:pPr>
+            <a:r>
+              <a:rPr b="1" i="0" lang="en-US" sz="1400" u="none" cap="none" strike="noStrike">
+                <a:solidFill>
+                  <a:srgbClr val="FFFFFF"/>
+                </a:solidFill>
+                <a:latin typeface="Calibri"/>
+                <a:ea typeface="Calibri"/>
+                <a:cs typeface="Calibri"/>
+                <a:sym typeface="Calibri"/>
+              </a:rPr>
+              <a:t>2</a:t>
+            </a:r>
+            <a:endParaRPr b="0" i="0" sz="1400" u="none" cap="none" strike="noStrike">
+              <a:solidFill>
+                <a:schemeClr val="dk1"/>
+              </a:solidFill>
+              <a:latin typeface="Calibri"/>
+              <a:ea typeface="Calibri"/>
+              <a:cs typeface="Calibri"/>
+              <a:sym typeface="Calibri"/>
+            </a:endParaRPr>
+          </a:p>
+        </p:txBody>
+      </p:sp>
+      <p:sp>
+        <p:nvSpPr>
+          <p:cNvPr id="354" name="Google Shape;354;p19"/>
+          <p:cNvSpPr/>
+          <p:nvPr/>
+        </p:nvSpPr>
+        <p:spPr>
+          <a:xfrm>
+            <a:off x="1097280" y="2496312"/>
+            <a:ext cx="7589520" cy="749808"/>
+          </a:xfrm>
+          <a:prstGeom prst="rect">
+            <a:avLst/>
+          </a:prstGeom>
+          <a:solidFill>
+            <a:srgbClr val="FFFFFF"/>
+          </a:solidFill>
+          <a:ln cap="flat" cmpd="sng" w="12700">
+            <a:solidFill>
+              <a:srgbClr val="D1FAE5"/>
+            </a:solidFill>
+            <a:prstDash val="solid"/>
+            <a:round/>
+            <a:headEnd len="sm" w="sm" type="none"/>
+            <a:tailEnd len="sm" w="sm" type="none"/>
+          </a:ln>
+        </p:spPr>
+        <p:txBody>
+          <a:bodyPr anchorCtr="0" anchor="ctr" bIns="91425" lIns="91425" spcFirstLastPara="1" rIns="91425" wrap="square" tIns="91425">
+            <a:noAutofit/>
+          </a:bodyPr>
+          <a:lstStyle/>
+          <a:p>
+            <a:pPr indent="0" lvl="0" marL="0" rtl="0" algn="l">
+              <a:spcBef>
+                <a:spcPts val="0"/>
+              </a:spcBef>
+              <a:spcAft>
+                <a:spcPts val="0"/>
+              </a:spcAft>
+              <a:buNone/>
+            </a:pPr>
+            <a:r>
+              <a:t/>
+            </a:r>
+            <a:endParaRPr/>
+          </a:p>
+        </p:txBody>
+      </p:sp>
+      <p:sp>
+        <p:nvSpPr>
+          <p:cNvPr id="355" name="Google Shape;355;p19"/>
+          <p:cNvSpPr/>
+          <p:nvPr/>
+        </p:nvSpPr>
+        <p:spPr>
+          <a:xfrm>
+            <a:off x="1261872" y="2542032"/>
+            <a:ext cx="7315200" cy="329184"/>
+          </a:xfrm>
+          <a:prstGeom prst="rect">
+            <a:avLst/>
+          </a:prstGeom>
+          <a:noFill/>
+          <a:ln>
+            <a:noFill/>
+          </a:ln>
+        </p:spPr>
+        <p:txBody>
+          <a:bodyPr anchorCtr="0" anchor="ctr" bIns="0" lIns="0" spcFirstLastPara="1" rIns="0" wrap="square" tIns="0">
+            <a:noAutofit/>
+          </a:bodyPr>
+          <a:lstStyle/>
+          <a:p>
+            <a:pPr indent="0" lvl="0" marL="0" marR="0" rtl="0" algn="l">
+              <a:spcBef>
+                <a:spcPts val="0"/>
+              </a:spcBef>
+              <a:spcAft>
+                <a:spcPts val="0"/>
+              </a:spcAft>
+              <a:buClr>
+                <a:srgbClr val="0F766E"/>
+              </a:buClr>
+              <a:buSzPts val="1300"/>
+              <a:buFont typeface="Consolas"/>
+              <a:buNone/>
+            </a:pPr>
+            <a:r>
+              <a:rPr b="1" i="0" lang="en-US" sz="1300" u="none" cap="none" strike="noStrike">
+                <a:solidFill>
+                  <a:srgbClr val="0F766E"/>
+                </a:solidFill>
+                <a:latin typeface="Consolas"/>
+                <a:ea typeface="Consolas"/>
+                <a:cs typeface="Consolas"/>
+                <a:sym typeface="Consolas"/>
+              </a:rPr>
+              <a:t>📥 Commandes entrantes</a:t>
+            </a:r>
+            <a:endParaRPr b="0" i="0" sz="1300" u="none" cap="none" strike="noStrike">
+              <a:solidFill>
+                <a:schemeClr val="dk1"/>
+              </a:solidFill>
+              <a:latin typeface="Calibri"/>
+              <a:ea typeface="Calibri"/>
+              <a:cs typeface="Calibri"/>
+              <a:sym typeface="Calibri"/>
+            </a:endParaRPr>
+          </a:p>
+        </p:txBody>
+      </p:sp>
+      <p:sp>
+        <p:nvSpPr>
+          <p:cNvPr id="356" name="Google Shape;356;p19"/>
+          <p:cNvSpPr/>
+          <p:nvPr/>
+        </p:nvSpPr>
+        <p:spPr>
+          <a:xfrm>
+            <a:off x="1261872" y="2880360"/>
+            <a:ext cx="7315200" cy="329184"/>
+          </a:xfrm>
+          <a:prstGeom prst="rect">
+            <a:avLst/>
+          </a:prstGeom>
+          <a:noFill/>
+          <a:ln>
+            <a:noFill/>
+          </a:ln>
+        </p:spPr>
+        <p:txBody>
+          <a:bodyPr anchorCtr="0" anchor="ctr" bIns="0" lIns="0" spcFirstLastPara="1" rIns="0" wrap="square" tIns="0">
+            <a:noAutofit/>
+          </a:bodyPr>
+          <a:lstStyle/>
+          <a:p>
+            <a:pPr indent="0" lvl="0" marL="0" marR="0" rtl="0" algn="l">
+              <a:spcBef>
+                <a:spcPts val="0"/>
+              </a:spcBef>
+              <a:spcAft>
+                <a:spcPts val="0"/>
+              </a:spcAft>
+              <a:buClr>
+                <a:srgbClr val="475569"/>
+              </a:buClr>
+              <a:buSzPts val="1300"/>
+              <a:buFont typeface="Calibri"/>
+              <a:buNone/>
+            </a:pPr>
+            <a:r>
+              <a:rPr b="0" i="0" lang="en-US" sz="1300" u="none" cap="none" strike="noStrike">
+                <a:solidFill>
+                  <a:srgbClr val="475569"/>
+                </a:solidFill>
+                <a:latin typeface="Calibri"/>
+                <a:ea typeface="Calibri"/>
+                <a:cs typeface="Calibri"/>
+                <a:sym typeface="Calibri"/>
+              </a:rPr>
+              <a:t>/aide  /rdv_aujourdhui  /rdv_demain  /rdv  + langage naturel via Gemini</a:t>
+            </a:r>
+            <a:endParaRPr b="0" i="0" sz="1300" u="none" cap="none" strike="noStrike">
+              <a:solidFill>
+                <a:schemeClr val="dk1"/>
+              </a:solidFill>
+              <a:latin typeface="Calibri"/>
+              <a:ea typeface="Calibri"/>
+              <a:cs typeface="Calibri"/>
+              <a:sym typeface="Calibri"/>
+            </a:endParaRPr>
+          </a:p>
+        </p:txBody>
+      </p:sp>
+      <p:sp>
+        <p:nvSpPr>
+          <p:cNvPr id="357" name="Google Shape;357;p19"/>
+          <p:cNvSpPr/>
+          <p:nvPr/>
+        </p:nvSpPr>
+        <p:spPr>
+          <a:xfrm>
+            <a:off x="457200" y="3547872"/>
+            <a:ext cx="475488" cy="475488"/>
+          </a:xfrm>
+          <a:prstGeom prst="ellipse">
+            <a:avLst/>
+          </a:prstGeom>
+          <a:solidFill>
+            <a:srgbClr val="134E4A"/>
+          </a:solidFill>
+          <a:ln cap="flat" cmpd="sng" w="12700">
+            <a:solidFill>
+              <a:srgbClr val="134E4A"/>
+            </a:solidFill>
+            <a:prstDash val="solid"/>
+            <a:round/>
+            <a:headEnd len="sm" w="sm" type="none"/>
+            <a:tailEnd len="sm" w="sm" type="none"/>
+          </a:ln>
+        </p:spPr>
+        <p:txBody>
+          <a:bodyPr anchorCtr="0" anchor="ctr" bIns="91425" lIns="91425" spcFirstLastPara="1" rIns="91425" wrap="square" tIns="91425">
+            <a:noAutofit/>
+          </a:bodyPr>
+          <a:lstStyle/>
+          <a:p>
+            <a:pPr indent="0" lvl="0" marL="0" rtl="0" algn="l">
+              <a:spcBef>
+                <a:spcPts val="0"/>
+              </a:spcBef>
+              <a:spcAft>
+                <a:spcPts val="0"/>
+              </a:spcAft>
+              <a:buNone/>
+            </a:pPr>
+            <a:r>
+              <a:t/>
+            </a:r>
+            <a:endParaRPr/>
+          </a:p>
+        </p:txBody>
+      </p:sp>
+      <p:sp>
+        <p:nvSpPr>
+          <p:cNvPr id="358" name="Google Shape;358;p19"/>
+          <p:cNvSpPr/>
+          <p:nvPr/>
+        </p:nvSpPr>
+        <p:spPr>
+          <a:xfrm>
+            <a:off x="457200" y="3547872"/>
+            <a:ext cx="475488" cy="475488"/>
+          </a:xfrm>
+          <a:prstGeom prst="rect">
+            <a:avLst/>
+          </a:prstGeom>
+          <a:noFill/>
+          <a:ln>
+            <a:noFill/>
+          </a:ln>
+        </p:spPr>
+        <p:txBody>
+          <a:bodyPr anchorCtr="0" anchor="ctr" bIns="0" lIns="0" spcFirstLastPara="1" rIns="0" wrap="square" tIns="0">
+            <a:noAutofit/>
+          </a:bodyPr>
+          <a:lstStyle/>
+          <a:p>
+            <a:pPr indent="0" lvl="0" marL="0" marR="0" rtl="0" algn="ctr">
+              <a:spcBef>
+                <a:spcPts val="0"/>
+              </a:spcBef>
+              <a:spcAft>
+                <a:spcPts val="0"/>
+              </a:spcAft>
+              <a:buClr>
+                <a:srgbClr val="FFFFFF"/>
+              </a:buClr>
+              <a:buSzPts val="1400"/>
+              <a:buFont typeface="Calibri"/>
+              <a:buNone/>
+            </a:pPr>
+            <a:r>
+              <a:rPr b="1" i="0" lang="en-US" sz="1400" u="none" cap="none" strike="noStrike">
+                <a:solidFill>
+                  <a:srgbClr val="FFFFFF"/>
+                </a:solidFill>
+                <a:latin typeface="Calibri"/>
+                <a:ea typeface="Calibri"/>
+                <a:cs typeface="Calibri"/>
+                <a:sym typeface="Calibri"/>
+              </a:rPr>
+              <a:t>3</a:t>
+            </a:r>
+            <a:endParaRPr b="0" i="0" sz="1400" u="none" cap="none" strike="noStrike">
+              <a:solidFill>
+                <a:schemeClr val="dk1"/>
+              </a:solidFill>
+              <a:latin typeface="Calibri"/>
+              <a:ea typeface="Calibri"/>
+              <a:cs typeface="Calibri"/>
+              <a:sym typeface="Calibri"/>
+            </a:endParaRPr>
+          </a:p>
+        </p:txBody>
+      </p:sp>
+      <p:sp>
+        <p:nvSpPr>
+          <p:cNvPr id="359" name="Google Shape;359;p19"/>
+          <p:cNvSpPr/>
+          <p:nvPr/>
+        </p:nvSpPr>
+        <p:spPr>
+          <a:xfrm>
+            <a:off x="1097280" y="3456432"/>
+            <a:ext cx="7589520" cy="749808"/>
+          </a:xfrm>
+          <a:prstGeom prst="rect">
+            <a:avLst/>
+          </a:prstGeom>
+          <a:solidFill>
+            <a:srgbClr val="CCFBF1"/>
+          </a:solidFill>
+          <a:ln cap="flat" cmpd="sng" w="12700">
+            <a:solidFill>
+              <a:srgbClr val="D1FAE5"/>
+            </a:solidFill>
+            <a:prstDash val="solid"/>
+            <a:round/>
+            <a:headEnd len="sm" w="sm" type="none"/>
+            <a:tailEnd len="sm" w="sm" type="none"/>
+          </a:ln>
+        </p:spPr>
+        <p:txBody>
+          <a:bodyPr anchorCtr="0" anchor="ctr" bIns="91425" lIns="91425" spcFirstLastPara="1" rIns="91425" wrap="square" tIns="91425">
+            <a:noAutofit/>
+          </a:bodyPr>
+          <a:lstStyle/>
+          <a:p>
+            <a:pPr indent="0" lvl="0" marL="0" rtl="0" algn="l">
+              <a:spcBef>
+                <a:spcPts val="0"/>
+              </a:spcBef>
+              <a:spcAft>
+                <a:spcPts val="0"/>
+              </a:spcAft>
+              <a:buNone/>
+            </a:pPr>
+            <a:r>
+              <a:t/>
+            </a:r>
+            <a:endParaRPr/>
+          </a:p>
+        </p:txBody>
+      </p:sp>
+      <p:sp>
+        <p:nvSpPr>
+          <p:cNvPr id="360" name="Google Shape;360;p19"/>
+          <p:cNvSpPr/>
+          <p:nvPr/>
+        </p:nvSpPr>
+        <p:spPr>
+          <a:xfrm>
+            <a:off x="1261872" y="3502152"/>
+            <a:ext cx="7315200" cy="329184"/>
+          </a:xfrm>
+          <a:prstGeom prst="rect">
+            <a:avLst/>
+          </a:prstGeom>
+          <a:noFill/>
+          <a:ln>
+            <a:noFill/>
+          </a:ln>
+        </p:spPr>
+        <p:txBody>
+          <a:bodyPr anchorCtr="0" anchor="ctr" bIns="0" lIns="0" spcFirstLastPara="1" rIns="0" wrap="square" tIns="0">
+            <a:noAutofit/>
+          </a:bodyPr>
+          <a:lstStyle/>
+          <a:p>
+            <a:pPr indent="0" lvl="0" marL="0" marR="0" rtl="0" algn="l">
+              <a:spcBef>
+                <a:spcPts val="0"/>
+              </a:spcBef>
+              <a:spcAft>
+                <a:spcPts val="0"/>
+              </a:spcAft>
+              <a:buClr>
+                <a:srgbClr val="0F766E"/>
+              </a:buClr>
+              <a:buSzPts val="1300"/>
+              <a:buFont typeface="Consolas"/>
+              <a:buNone/>
+            </a:pPr>
+            <a:r>
+              <a:rPr b="1" i="0" lang="en-US" sz="1300" u="none" cap="none" strike="noStrike">
+                <a:solidFill>
+                  <a:srgbClr val="0F766E"/>
+                </a:solidFill>
+                <a:latin typeface="Consolas"/>
+                <a:ea typeface="Consolas"/>
+                <a:cs typeface="Consolas"/>
+                <a:sym typeface="Consolas"/>
+              </a:rPr>
+              <a:t>🔐 Cloisonnement</a:t>
+            </a:r>
+            <a:endParaRPr b="0" i="0" sz="1300" u="none" cap="none" strike="noStrike">
+              <a:solidFill>
+                <a:schemeClr val="dk1"/>
+              </a:solidFill>
+              <a:latin typeface="Calibri"/>
+              <a:ea typeface="Calibri"/>
+              <a:cs typeface="Calibri"/>
+              <a:sym typeface="Calibri"/>
+            </a:endParaRPr>
+          </a:p>
+        </p:txBody>
+      </p:sp>
+      <p:sp>
+        <p:nvSpPr>
+          <p:cNvPr id="361" name="Google Shape;361;p19"/>
+          <p:cNvSpPr/>
+          <p:nvPr/>
+        </p:nvSpPr>
+        <p:spPr>
+          <a:xfrm>
+            <a:off x="1261872" y="3840480"/>
+            <a:ext cx="7315200" cy="329184"/>
+          </a:xfrm>
+          <a:prstGeom prst="rect">
+            <a:avLst/>
+          </a:prstGeom>
+          <a:noFill/>
+          <a:ln>
+            <a:noFill/>
+          </a:ln>
+        </p:spPr>
+        <p:txBody>
+          <a:bodyPr anchorCtr="0" anchor="ctr" bIns="0" lIns="0" spcFirstLastPara="1" rIns="0" wrap="square" tIns="0">
+            <a:noAutofit/>
+          </a:bodyPr>
+          <a:lstStyle/>
+          <a:p>
+            <a:pPr indent="0" lvl="0" marL="0" marR="0" rtl="0" algn="l">
+              <a:spcBef>
+                <a:spcPts val="0"/>
+              </a:spcBef>
+              <a:spcAft>
+                <a:spcPts val="0"/>
+              </a:spcAft>
+              <a:buClr>
+                <a:srgbClr val="475569"/>
+              </a:buClr>
+              <a:buSzPts val="1300"/>
+              <a:buFont typeface="Calibri"/>
+              <a:buNone/>
+            </a:pPr>
+            <a:r>
+              <a:rPr b="0" i="0" lang="en-US" sz="1300" u="none" cap="none" strike="noStrike">
+                <a:solidFill>
+                  <a:srgbClr val="475569"/>
+                </a:solidFill>
+                <a:latin typeface="Calibri"/>
+                <a:ea typeface="Calibri"/>
+                <a:cs typeface="Calibri"/>
+                <a:sym typeface="Calibri"/>
+              </a:rPr>
+              <a:t>1 groupe Telegram = 1 médecin (mapping Doctor.telegram_chat_id)</a:t>
+            </a:r>
+            <a:endParaRPr b="0" i="0" sz="1300" u="none" cap="none" strike="noStrike">
+              <a:solidFill>
+                <a:schemeClr val="dk1"/>
+              </a:solidFill>
+              <a:latin typeface="Calibri"/>
+              <a:ea typeface="Calibri"/>
+              <a:cs typeface="Calibri"/>
+              <a:sym typeface="Calibri"/>
+            </a:endParaRPr>
+          </a:p>
+        </p:txBody>
+      </p:sp>
+      <p:sp>
+        <p:nvSpPr>
+          <p:cNvPr id="362" name="Google Shape;362;p19"/>
+          <p:cNvSpPr/>
+          <p:nvPr/>
+        </p:nvSpPr>
+        <p:spPr>
+          <a:xfrm>
+            <a:off x="457200" y="4480560"/>
+            <a:ext cx="8229600" cy="320040"/>
+          </a:xfrm>
+          <a:prstGeom prst="rect">
+            <a:avLst/>
+          </a:prstGeom>
+          <a:noFill/>
+          <a:ln>
+            <a:noFill/>
+          </a:ln>
+        </p:spPr>
+        <p:txBody>
+          <a:bodyPr anchorCtr="0" anchor="ctr" bIns="0" lIns="0" spcFirstLastPara="1" rIns="0" wrap="square" tIns="0">
+            <a:noAutofit/>
+          </a:bodyPr>
+          <a:lstStyle/>
+          <a:p>
+            <a:pPr indent="0" lvl="0" marL="0" marR="0" rtl="0" algn="l">
+              <a:spcBef>
+                <a:spcPts val="0"/>
+              </a:spcBef>
+              <a:spcAft>
+                <a:spcPts val="0"/>
+              </a:spcAft>
+              <a:buClr>
+                <a:srgbClr val="94A3B8"/>
+              </a:buClr>
+              <a:buSzPts val="1100"/>
+              <a:buFont typeface="Calibri"/>
+              <a:buNone/>
+            </a:pPr>
+            <a:r>
+              <a:rPr b="0" i="1" lang="en-US" sz="1100" u="none" cap="none" strike="noStrike">
+                <a:solidFill>
+                  <a:srgbClr val="94A3B8"/>
+                </a:solidFill>
+                <a:latin typeface="Calibri"/>
+                <a:ea typeface="Calibri"/>
+                <a:cs typeface="Calibri"/>
+                <a:sym typeface="Calibri"/>
+              </a:rPr>
+              <a:t>Démo SAE : 2 groupes (Dr. Lefebvre, Dr. Benyahia). Infra prête pour N praticiens.</a:t>
+            </a:r>
+            <a:endParaRPr b="0" i="0" sz="1100" u="none" cap="none" strike="noStrike">
+              <a:solidFill>
+                <a:schemeClr val="dk1"/>
+              </a:solidFill>
+              <a:latin typeface="Calibri"/>
+              <a:ea typeface="Calibri"/>
+              <a:cs typeface="Calibri"/>
+              <a:sym typeface="Calibri"/>
+            </a:endParaRPr>
+          </a:p>
+        </p:txBody>
+      </p:sp>
+    </p:spTree>
+  </p:cSld>
+  <p:clrMapOvr>
+    <a:masterClrMapping/>
+  </p:clrMapOvr>
+</p:sld>
+</file>
+
+<file path=ppt/slides/slide21.xml><?xml version="1.0" encoding="utf-8"?>
 <p:sld xmlns:a="http://schemas.openxmlformats.org/drawingml/2006/main" xmlns:r="http://schemas.openxmlformats.org/officeDocument/2006/relationships" xmlns:mc="http://schemas.openxmlformats.org/markup-compatibility/2006" xmlns:mv="urn:schemas-microsoft-com:mac:vml" xmlns:p="http://schemas.openxmlformats.org/presentationml/2006/main" xmlns:c="http://schemas.openxmlformats.org/drawingml/2006/chart" xmlns:dgm="http://schemas.openxmlformats.org/drawingml/2006/diagram" xmlns:o="urn:schemas-microsoft-com:office:office" xmlns:v="urn:schemas-microsoft-com:vml" xmlns:pvml="urn:schemas-microsoft-com:office:powerpoint" xmlns:com="http://schemas.openxmlformats.org/drawingml/2006/compatibility" xmlns:p14="http://schemas.microsoft.com/office/powerpoint/2010/main" xmlns:p15="http://schemas.microsoft.com/office/powerpoint/2012/main" xmlns:ahyp="http://schemas.microsoft.com/office/drawing/2018/hyperlinkcolor">
   <p:cSld>
     <p:bg>
@@ -17837,7 +19129,7 @@
                 <a:cs typeface="Calibri"/>
                 <a:sym typeface="Calibri"/>
               </a:rPr>
-              <a:t>20</a:t>
+              <a:t>21</a:t>
             </a:r>
             <a:endParaRPr b="0" i="0" sz="1000" u="none" cap="none" strike="noStrike">
               <a:solidFill>
@@ -18531,7 +19823,7 @@
 </p:sld>
 </file>
 
-<file path=ppt/slides/slide21.xml><?xml version="1.0" encoding="utf-8"?>
+<file path=ppt/slides/slide22.xml><?xml version="1.0" encoding="utf-8"?>
 <p:sld xmlns:a="http://schemas.openxmlformats.org/drawingml/2006/main" xmlns:r="http://schemas.openxmlformats.org/officeDocument/2006/relationships" xmlns:mc="http://schemas.openxmlformats.org/markup-compatibility/2006" xmlns:mv="urn:schemas-microsoft-com:mac:vml" xmlns:p="http://schemas.openxmlformats.org/presentationml/2006/main" xmlns:c="http://schemas.openxmlformats.org/drawingml/2006/chart" xmlns:dgm="http://schemas.openxmlformats.org/drawingml/2006/diagram" xmlns:o="urn:schemas-microsoft-com:office:office" xmlns:v="urn:schemas-microsoft-com:vml" xmlns:pvml="urn:schemas-microsoft-com:office:powerpoint" xmlns:com="http://schemas.openxmlformats.org/drawingml/2006/compatibility" xmlns:p14="http://schemas.microsoft.com/office/powerpoint/2010/main" xmlns:p15="http://schemas.microsoft.com/office/powerpoint/2012/main" xmlns:ahyp="http://schemas.microsoft.com/office/drawing/2018/hyperlinkcolor">
   <p:cSld>
     <p:bg>
@@ -18828,7 +20120,7 @@
                 <a:cs typeface="Calibri"/>
                 <a:sym typeface="Calibri"/>
               </a:rPr>
-              <a:t>21</a:t>
+              <a:t>22</a:t>
             </a:r>
             <a:endParaRPr b="0" i="0" sz="1000" u="none" cap="none" strike="noStrike">
               <a:solidFill>
@@ -19578,7 +20870,7 @@
 </p:sld>
 </file>
 
-<file path=ppt/slides/slide22.xml><?xml version="1.0" encoding="utf-8"?>
+<file path=ppt/slides/slide23.xml><?xml version="1.0" encoding="utf-8"?>
 <p:sld xmlns:a="http://schemas.openxmlformats.org/drawingml/2006/main" xmlns:p="http://schemas.openxmlformats.org/presentationml/2006/main" xmlns:r="http://schemas.openxmlformats.org/officeDocument/2006/relationships">
   <p:cSld>
     <p:spTree>
@@ -19861,7 +21153,7 @@
                 <a:cs typeface="Calibri"/>
                 <a:sym typeface="Calibri"/>
               </a:rPr>
-              <a:t>22</a:t>
+              <a:t>23</a:t>
             </a:r>
             <a:endParaRPr b="0" i="0" sz="1000" u="none" cap="none" strike="noStrike">
               <a:solidFill>
@@ -20611,7 +21903,7 @@
 </p:sld>
 </file>
 
-<file path=ppt/slides/slide23.xml><?xml version="1.0" encoding="utf-8"?>
+<file path=ppt/slides/slide24.xml><?xml version="1.0" encoding="utf-8"?>
 <p:sld xmlns:a="http://schemas.openxmlformats.org/drawingml/2006/main" xmlns:r="http://schemas.openxmlformats.org/officeDocument/2006/relationships" xmlns:mc="http://schemas.openxmlformats.org/markup-compatibility/2006" xmlns:mv="urn:schemas-microsoft-com:mac:vml" xmlns:p="http://schemas.openxmlformats.org/presentationml/2006/main" xmlns:c="http://schemas.openxmlformats.org/drawingml/2006/chart" xmlns:dgm="http://schemas.openxmlformats.org/drawingml/2006/diagram" xmlns:o="urn:schemas-microsoft-com:office:office" xmlns:v="urn:schemas-microsoft-com:vml" xmlns:pvml="urn:schemas-microsoft-com:office:powerpoint" xmlns:com="http://schemas.openxmlformats.org/drawingml/2006/compatibility" xmlns:p14="http://schemas.microsoft.com/office/powerpoint/2010/main" xmlns:p15="http://schemas.microsoft.com/office/powerpoint/2012/main" xmlns:ahyp="http://schemas.microsoft.com/office/drawing/2018/hyperlinkcolor">
   <p:cSld>
     <p:bg>
@@ -20908,7 +22200,7 @@
                 <a:cs typeface="Calibri"/>
                 <a:sym typeface="Calibri"/>
               </a:rPr>
-              <a:t>23</a:t>
+              <a:t>24</a:t>
             </a:r>
             <a:endParaRPr b="0" i="0" sz="1000" u="none" cap="none" strike="noStrike">
               <a:solidFill>
@@ -21815,7 +23107,7 @@
 </p:sld>
 </file>
 
-<file path=ppt/slides/slide24.xml><?xml version="1.0" encoding="utf-8"?>
+<file path=ppt/slides/slide25.xml><?xml version="1.0" encoding="utf-8"?>
 <p:sld xmlns:a="http://schemas.openxmlformats.org/drawingml/2006/main" xmlns:p="http://schemas.openxmlformats.org/presentationml/2006/main" xmlns:r="http://schemas.openxmlformats.org/officeDocument/2006/relationships">
   <p:cSld>
     <p:spTree>
@@ -22098,7 +23390,7 @@
                 <a:cs typeface="Calibri"/>
                 <a:sym typeface="Calibri"/>
               </a:rPr>
-              <a:t>24</a:t>
+              <a:t>25</a:t>
             </a:r>
             <a:endParaRPr b="0" i="0" sz="1000" u="none" cap="none" strike="noStrike">
               <a:solidFill>
@@ -22848,7 +24140,7 @@
 </p:sld>
 </file>
 
-<file path=ppt/slides/slide25.xml><?xml version="1.0" encoding="utf-8"?>
+<file path=ppt/slides/slide26.xml><?xml version="1.0" encoding="utf-8"?>
 <p:sld xmlns:a="http://schemas.openxmlformats.org/drawingml/2006/main" xmlns:r="http://schemas.openxmlformats.org/officeDocument/2006/relationships" xmlns:mc="http://schemas.openxmlformats.org/markup-compatibility/2006" xmlns:mv="urn:schemas-microsoft-com:mac:vml" xmlns:p="http://schemas.openxmlformats.org/presentationml/2006/main" xmlns:c="http://schemas.openxmlformats.org/drawingml/2006/chart" xmlns:dgm="http://schemas.openxmlformats.org/drawingml/2006/diagram" xmlns:o="urn:schemas-microsoft-com:office:office" xmlns:v="urn:schemas-microsoft-com:vml" xmlns:pvml="urn:schemas-microsoft-com:office:powerpoint" xmlns:com="http://schemas.openxmlformats.org/drawingml/2006/compatibility" xmlns:p14="http://schemas.microsoft.com/office/powerpoint/2010/main" xmlns:p15="http://schemas.microsoft.com/office/powerpoint/2012/main" xmlns:ahyp="http://schemas.microsoft.com/office/drawing/2018/hyperlinkcolor">
   <p:cSld>
     <p:bg>
@@ -23145,7 +24437,7 @@
                 <a:cs typeface="Calibri"/>
                 <a:sym typeface="Calibri"/>
               </a:rPr>
-              <a:t>25</a:t>
+              <a:t>26</a:t>
             </a:r>
             <a:endParaRPr b="0" i="0" sz="1000" u="none" cap="none" strike="noStrike">
               <a:solidFill>
@@ -23895,7 +25187,7 @@
 </p:sld>
 </file>
 
-<file path=ppt/slides/slide26.xml><?xml version="1.0" encoding="utf-8"?>
+<file path=ppt/slides/slide27.xml><?xml version="1.0" encoding="utf-8"?>
 <p:sld xmlns:a="http://schemas.openxmlformats.org/drawingml/2006/main" xmlns:r="http://schemas.openxmlformats.org/officeDocument/2006/relationships" xmlns:mc="http://schemas.openxmlformats.org/markup-compatibility/2006" xmlns:mv="urn:schemas-microsoft-com:mac:vml" xmlns:p="http://schemas.openxmlformats.org/presentationml/2006/main" xmlns:c="http://schemas.openxmlformats.org/drawingml/2006/chart" xmlns:dgm="http://schemas.openxmlformats.org/drawingml/2006/diagram" xmlns:o="urn:schemas-microsoft-com:office:office" xmlns:v="urn:schemas-microsoft-com:vml" xmlns:pvml="urn:schemas-microsoft-com:office:powerpoint" xmlns:com="http://schemas.openxmlformats.org/drawingml/2006/compatibility" xmlns:p14="http://schemas.microsoft.com/office/powerpoint/2010/main" xmlns:p15="http://schemas.microsoft.com/office/powerpoint/2012/main" xmlns:ahyp="http://schemas.microsoft.com/office/drawing/2018/hyperlinkcolor">
   <p:cSld>
     <p:bg>
@@ -24370,1298 +25662,6 @@
               <a:t>https://sae.amanawebagency.com</a:t>
             </a:r>
             <a:endParaRPr b="0" i="0" sz="1200" u="none" cap="none" strike="noStrike">
-              <a:solidFill>
-                <a:schemeClr val="dk1"/>
-              </a:solidFill>
-              <a:latin typeface="Calibri"/>
-              <a:ea typeface="Calibri"/>
-              <a:cs typeface="Calibri"/>
-              <a:sym typeface="Calibri"/>
-            </a:endParaRPr>
-          </a:p>
-        </p:txBody>
-      </p:sp>
-    </p:spTree>
-  </p:cSld>
-  <p:clrMapOvr>
-    <a:masterClrMapping/>
-  </p:clrMapOvr>
-</p:sld>
-</file>
-
-<file path=ppt/slides/slide27.xml><?xml version="1.0" encoding="utf-8"?>
-<p:sld xmlns:a="http://schemas.openxmlformats.org/drawingml/2006/main" xmlns:p="http://schemas.openxmlformats.org/presentationml/2006/main" xmlns:r="http://schemas.openxmlformats.org/officeDocument/2006/relationships">
-  <p:cSld>
-    <p:spTree>
-      <p:nvGrpSpPr>
-        <p:cNvPr id="1" name=""/>
-        <p:cNvGrpSpPr/>
-        <p:nvPr/>
-      </p:nvGrpSpPr>
-      <p:grpSpPr/>
-      <p:sp>
-        <p:nvSpPr>
-          <p:cNvPr id="341" name="Google Shape;341;p19"/>
-          <p:cNvSpPr/>
-          <p:nvPr/>
-        </p:nvSpPr>
-        <p:spPr>
-          <a:xfrm>
-            <a:off x="0" y="0"/>
-            <a:ext cx="9144000" cy="914400"/>
-          </a:xfrm>
-          <a:prstGeom prst="rect">
-            <a:avLst/>
-          </a:prstGeom>
-          <a:solidFill>
-            <a:srgbClr val="134E4A"/>
-          </a:solidFill>
-          <a:ln cap="flat" cmpd="sng" w="12700">
-            <a:solidFill>
-              <a:srgbClr val="134E4A"/>
-            </a:solidFill>
-            <a:prstDash val="solid"/>
-            <a:round/>
-            <a:headEnd len="sm" w="sm" type="none"/>
-            <a:tailEnd len="sm" w="sm" type="none"/>
-          </a:ln>
-        </p:spPr>
-        <p:txBody>
-          <a:bodyPr anchorCtr="0" anchor="ctr" bIns="91425" lIns="91425" spcFirstLastPara="1" rIns="91425" wrap="square" tIns="91425">
-            <a:noAutofit/>
-          </a:bodyPr>
-          <a:lstStyle/>
-          <a:p>
-            <a:pPr indent="0" lvl="0" marL="0" rtl="0" algn="l">
-              <a:spcBef>
-                <a:spcPts val="0"/>
-              </a:spcBef>
-              <a:spcAft>
-                <a:spcPts val="0"/>
-              </a:spcAft>
-              <a:buNone/>
-            </a:pPr>
-            <a:r>
-              <a:t/>
-            </a:r>
-            <a:endParaRPr/>
-          </a:p>
-        </p:txBody>
-      </p:sp>
-      <p:sp>
-        <p:nvSpPr>
-          <p:cNvPr id="342" name="Google Shape;342;p19"/>
-          <p:cNvSpPr/>
-          <p:nvPr/>
-        </p:nvSpPr>
-        <p:spPr>
-          <a:xfrm>
-            <a:off x="0" y="914400"/>
-            <a:ext cx="9144000" cy="45720"/>
-          </a:xfrm>
-          <a:prstGeom prst="rect">
-            <a:avLst/>
-          </a:prstGeom>
-          <a:solidFill>
-            <a:srgbClr val="14B8A6"/>
-          </a:solidFill>
-          <a:ln cap="flat" cmpd="sng" w="12700">
-            <a:solidFill>
-              <a:srgbClr val="14B8A6"/>
-            </a:solidFill>
-            <a:prstDash val="solid"/>
-            <a:round/>
-            <a:headEnd len="sm" w="sm" type="none"/>
-            <a:tailEnd len="sm" w="sm" type="none"/>
-          </a:ln>
-        </p:spPr>
-        <p:txBody>
-          <a:bodyPr anchorCtr="0" anchor="ctr" bIns="91425" lIns="91425" spcFirstLastPara="1" rIns="91425" wrap="square" tIns="91425">
-            <a:noAutofit/>
-          </a:bodyPr>
-          <a:lstStyle/>
-          <a:p>
-            <a:pPr indent="0" lvl="0" marL="0" rtl="0" algn="l">
-              <a:spcBef>
-                <a:spcPts val="0"/>
-              </a:spcBef>
-              <a:spcAft>
-                <a:spcPts val="0"/>
-              </a:spcAft>
-              <a:buNone/>
-            </a:pPr>
-            <a:r>
-              <a:t/>
-            </a:r>
-            <a:endParaRPr/>
-          </a:p>
-        </p:txBody>
-      </p:sp>
-      <p:sp>
-        <p:nvSpPr>
-          <p:cNvPr id="343" name="Google Shape;343;p19"/>
-          <p:cNvSpPr/>
-          <p:nvPr/>
-        </p:nvSpPr>
-        <p:spPr>
-          <a:xfrm>
-            <a:off x="365760" y="54864"/>
-            <a:ext cx="8503920" cy="256032"/>
-          </a:xfrm>
-          <a:prstGeom prst="rect">
-            <a:avLst/>
-          </a:prstGeom>
-          <a:noFill/>
-          <a:ln>
-            <a:noFill/>
-          </a:ln>
-        </p:spPr>
-        <p:txBody>
-          <a:bodyPr anchorCtr="0" anchor="ctr" bIns="0" lIns="0" spcFirstLastPara="1" rIns="0" wrap="square" tIns="0">
-            <a:noAutofit/>
-          </a:bodyPr>
-          <a:lstStyle/>
-          <a:p>
-            <a:pPr indent="0" lvl="0" marL="0" marR="0" rtl="0" algn="r">
-              <a:spcBef>
-                <a:spcPts val="0"/>
-              </a:spcBef>
-              <a:spcAft>
-                <a:spcPts val="0"/>
-              </a:spcAft>
-              <a:buClr>
-                <a:srgbClr val="CCFBF1"/>
-              </a:buClr>
-              <a:buSzPts val="900"/>
-              <a:buFont typeface="Calibri"/>
-              <a:buNone/>
-            </a:pPr>
-            <a:r>
-              <a:rPr b="0" i="0" lang="en-US" sz="900" u="none" cap="none" strike="noStrike">
-                <a:solidFill>
-                  <a:srgbClr val="CCFBF1"/>
-                </a:solidFill>
-                <a:latin typeface="Calibri"/>
-                <a:ea typeface="Calibri"/>
-                <a:cs typeface="Calibri"/>
-                <a:sym typeface="Calibri"/>
-              </a:rPr>
-              <a:t>SAE BUT3 — Chatbot médical RAG</a:t>
-            </a:r>
-            <a:endParaRPr b="0" i="0" sz="900" u="none" cap="none" strike="noStrike">
-              <a:solidFill>
-                <a:schemeClr val="dk1"/>
-              </a:solidFill>
-              <a:latin typeface="Calibri"/>
-              <a:ea typeface="Calibri"/>
-              <a:cs typeface="Calibri"/>
-              <a:sym typeface="Calibri"/>
-            </a:endParaRPr>
-          </a:p>
-        </p:txBody>
-      </p:sp>
-      <p:sp>
-        <p:nvSpPr>
-          <p:cNvPr id="344" name="Google Shape;344;p19"/>
-          <p:cNvSpPr/>
-          <p:nvPr/>
-        </p:nvSpPr>
-        <p:spPr>
-          <a:xfrm>
-            <a:off x="365760" y="256032"/>
-            <a:ext cx="8412480" cy="621792"/>
-          </a:xfrm>
-          <a:prstGeom prst="rect">
-            <a:avLst/>
-          </a:prstGeom>
-          <a:noFill/>
-          <a:ln>
-            <a:noFill/>
-          </a:ln>
-        </p:spPr>
-        <p:txBody>
-          <a:bodyPr anchorCtr="0" anchor="ctr" bIns="0" lIns="0" spcFirstLastPara="1" rIns="0" wrap="square" tIns="0">
-            <a:noAutofit/>
-          </a:bodyPr>
-          <a:lstStyle/>
-          <a:p>
-            <a:pPr indent="0" lvl="0" marL="0" marR="0" rtl="0" algn="l">
-              <a:spcBef>
-                <a:spcPts val="0"/>
-              </a:spcBef>
-              <a:spcAft>
-                <a:spcPts val="0"/>
-              </a:spcAft>
-              <a:buClr>
-                <a:srgbClr val="FFFFFF"/>
-              </a:buClr>
-              <a:buSzPts val="2200"/>
-              <a:buFont typeface="Calibri"/>
-              <a:buNone/>
-            </a:pPr>
-            <a:r>
-              <a:rPr b="1" i="0" lang="en-US" sz="2200" u="none" cap="none" strike="noStrike">
-                <a:solidFill>
-                  <a:srgbClr val="FFFFFF"/>
-                </a:solidFill>
-                <a:latin typeface="Calibri"/>
-                <a:ea typeface="Calibri"/>
-                <a:cs typeface="Calibri"/>
-                <a:sym typeface="Calibri"/>
-              </a:rPr>
-              <a:t>Bonus++ — Hermes côté praticien (Telegram)</a:t>
-            </a:r>
-            <a:endParaRPr b="0" i="0" sz="2200" u="none" cap="none" strike="noStrike">
-              <a:solidFill>
-                <a:schemeClr val="dk1"/>
-              </a:solidFill>
-              <a:latin typeface="Calibri"/>
-              <a:ea typeface="Calibri"/>
-              <a:cs typeface="Calibri"/>
-              <a:sym typeface="Calibri"/>
-            </a:endParaRPr>
-          </a:p>
-        </p:txBody>
-      </p:sp>
-      <p:sp>
-        <p:nvSpPr>
-          <p:cNvPr id="345" name="Google Shape;345;p19"/>
-          <p:cNvSpPr/>
-          <p:nvPr/>
-        </p:nvSpPr>
-        <p:spPr>
-          <a:xfrm>
-            <a:off x="8503920" y="4846320"/>
-            <a:ext cx="502920" cy="228600"/>
-          </a:xfrm>
-          <a:prstGeom prst="rect">
-            <a:avLst/>
-          </a:prstGeom>
-          <a:noFill/>
-          <a:ln>
-            <a:noFill/>
-          </a:ln>
-        </p:spPr>
-        <p:txBody>
-          <a:bodyPr anchorCtr="0" anchor="ctr" bIns="0" lIns="0" spcFirstLastPara="1" rIns="0" wrap="square" tIns="0">
-            <a:noAutofit/>
-          </a:bodyPr>
-          <a:lstStyle/>
-          <a:p>
-            <a:pPr indent="0" lvl="0" marL="0" marR="0" rtl="0" algn="r">
-              <a:spcBef>
-                <a:spcPts val="0"/>
-              </a:spcBef>
-              <a:spcAft>
-                <a:spcPts val="0"/>
-              </a:spcAft>
-              <a:buClr>
-                <a:srgbClr val="14B8A6"/>
-              </a:buClr>
-              <a:buSzPts val="1000"/>
-              <a:buFont typeface="Calibri"/>
-              <a:buNone/>
-            </a:pPr>
-            <a:r>
-              <a:rPr b="0" i="0" lang="en-US" sz="1000" u="none" cap="none" strike="noStrike">
-                <a:solidFill>
-                  <a:srgbClr val="14B8A6"/>
-                </a:solidFill>
-                <a:latin typeface="Calibri"/>
-                <a:ea typeface="Calibri"/>
-                <a:cs typeface="Calibri"/>
-                <a:sym typeface="Calibri"/>
-              </a:rPr>
-              <a:t>21</a:t>
-            </a:r>
-            <a:endParaRPr b="0" i="0" sz="1000" u="none" cap="none" strike="noStrike">
-              <a:solidFill>
-                <a:schemeClr val="dk1"/>
-              </a:solidFill>
-              <a:latin typeface="Calibri"/>
-              <a:ea typeface="Calibri"/>
-              <a:cs typeface="Calibri"/>
-              <a:sym typeface="Calibri"/>
-            </a:endParaRPr>
-          </a:p>
-        </p:txBody>
-      </p:sp>
-      <p:sp>
-        <p:nvSpPr>
-          <p:cNvPr id="346" name="Google Shape;346;p19"/>
-          <p:cNvSpPr/>
-          <p:nvPr/>
-        </p:nvSpPr>
-        <p:spPr>
-          <a:xfrm>
-            <a:off x="457200" y="1051560"/>
-            <a:ext cx="8229600" cy="365760"/>
-          </a:xfrm>
-          <a:prstGeom prst="rect">
-            <a:avLst/>
-          </a:prstGeom>
-          <a:noFill/>
-          <a:ln>
-            <a:noFill/>
-          </a:ln>
-        </p:spPr>
-        <p:txBody>
-          <a:bodyPr anchorCtr="0" anchor="ctr" bIns="0" lIns="0" spcFirstLastPara="1" rIns="0" wrap="square" tIns="0">
-            <a:noAutofit/>
-          </a:bodyPr>
-          <a:lstStyle/>
-          <a:p>
-            <a:pPr indent="0" lvl="0" marL="0" marR="0" rtl="0" algn="l">
-              <a:spcBef>
-                <a:spcPts val="0"/>
-              </a:spcBef>
-              <a:spcAft>
-                <a:spcPts val="0"/>
-              </a:spcAft>
-              <a:buClr>
-                <a:srgbClr val="0F172A"/>
-              </a:buClr>
-              <a:buSzPts val="1500"/>
-              <a:buFont typeface="Calibri"/>
-              <a:buNone/>
-            </a:pPr>
-            <a:r>
-              <a:rPr b="0" i="0" lang="en-US" sz="1500" u="none" cap="none" strike="noStrike">
-                <a:solidFill>
-                  <a:srgbClr val="0F172A"/>
-                </a:solidFill>
-                <a:latin typeface="Calibri"/>
-                <a:ea typeface="Calibri"/>
-                <a:cs typeface="Calibri"/>
-                <a:sym typeface="Calibri"/>
-              </a:rPr>
-              <a:t>Une fois le RDV pris, le praticien reçoit + peut interagir via son groupe Telegram.</a:t>
-            </a:r>
-            <a:endParaRPr b="0" i="0" sz="1500" u="none" cap="none" strike="noStrike">
-              <a:solidFill>
-                <a:schemeClr val="dk1"/>
-              </a:solidFill>
-              <a:latin typeface="Calibri"/>
-              <a:ea typeface="Calibri"/>
-              <a:cs typeface="Calibri"/>
-              <a:sym typeface="Calibri"/>
-            </a:endParaRPr>
-          </a:p>
-        </p:txBody>
-      </p:sp>
-      <p:sp>
-        <p:nvSpPr>
-          <p:cNvPr id="347" name="Google Shape;347;p19"/>
-          <p:cNvSpPr/>
-          <p:nvPr/>
-        </p:nvSpPr>
-        <p:spPr>
-          <a:xfrm>
-            <a:off x="457200" y="1627632"/>
-            <a:ext cx="475488" cy="475488"/>
-          </a:xfrm>
-          <a:prstGeom prst="ellipse">
-            <a:avLst/>
-          </a:prstGeom>
-          <a:solidFill>
-            <a:srgbClr val="134E4A"/>
-          </a:solidFill>
-          <a:ln cap="flat" cmpd="sng" w="12700">
-            <a:solidFill>
-              <a:srgbClr val="134E4A"/>
-            </a:solidFill>
-            <a:prstDash val="solid"/>
-            <a:round/>
-            <a:headEnd len="sm" w="sm" type="none"/>
-            <a:tailEnd len="sm" w="sm" type="none"/>
-          </a:ln>
-        </p:spPr>
-        <p:txBody>
-          <a:bodyPr anchorCtr="0" anchor="ctr" bIns="91425" lIns="91425" spcFirstLastPara="1" rIns="91425" wrap="square" tIns="91425">
-            <a:noAutofit/>
-          </a:bodyPr>
-          <a:lstStyle/>
-          <a:p>
-            <a:pPr indent="0" lvl="0" marL="0" rtl="0" algn="l">
-              <a:spcBef>
-                <a:spcPts val="0"/>
-              </a:spcBef>
-              <a:spcAft>
-                <a:spcPts val="0"/>
-              </a:spcAft>
-              <a:buNone/>
-            </a:pPr>
-            <a:r>
-              <a:t/>
-            </a:r>
-            <a:endParaRPr/>
-          </a:p>
-        </p:txBody>
-      </p:sp>
-      <p:sp>
-        <p:nvSpPr>
-          <p:cNvPr id="348" name="Google Shape;348;p19"/>
-          <p:cNvSpPr/>
-          <p:nvPr/>
-        </p:nvSpPr>
-        <p:spPr>
-          <a:xfrm>
-            <a:off x="457200" y="1627632"/>
-            <a:ext cx="475488" cy="475488"/>
-          </a:xfrm>
-          <a:prstGeom prst="rect">
-            <a:avLst/>
-          </a:prstGeom>
-          <a:noFill/>
-          <a:ln>
-            <a:noFill/>
-          </a:ln>
-        </p:spPr>
-        <p:txBody>
-          <a:bodyPr anchorCtr="0" anchor="ctr" bIns="0" lIns="0" spcFirstLastPara="1" rIns="0" wrap="square" tIns="0">
-            <a:noAutofit/>
-          </a:bodyPr>
-          <a:lstStyle/>
-          <a:p>
-            <a:pPr indent="0" lvl="0" marL="0" marR="0" rtl="0" algn="ctr">
-              <a:spcBef>
-                <a:spcPts val="0"/>
-              </a:spcBef>
-              <a:spcAft>
-                <a:spcPts val="0"/>
-              </a:spcAft>
-              <a:buClr>
-                <a:srgbClr val="FFFFFF"/>
-              </a:buClr>
-              <a:buSzPts val="1400"/>
-              <a:buFont typeface="Calibri"/>
-              <a:buNone/>
-            </a:pPr>
-            <a:r>
-              <a:rPr b="1" i="0" lang="en-US" sz="1400" u="none" cap="none" strike="noStrike">
-                <a:solidFill>
-                  <a:srgbClr val="FFFFFF"/>
-                </a:solidFill>
-                <a:latin typeface="Calibri"/>
-                <a:ea typeface="Calibri"/>
-                <a:cs typeface="Calibri"/>
-                <a:sym typeface="Calibri"/>
-              </a:rPr>
-              <a:t>1</a:t>
-            </a:r>
-            <a:endParaRPr b="0" i="0" sz="1400" u="none" cap="none" strike="noStrike">
-              <a:solidFill>
-                <a:schemeClr val="dk1"/>
-              </a:solidFill>
-              <a:latin typeface="Calibri"/>
-              <a:ea typeface="Calibri"/>
-              <a:cs typeface="Calibri"/>
-              <a:sym typeface="Calibri"/>
-            </a:endParaRPr>
-          </a:p>
-        </p:txBody>
-      </p:sp>
-      <p:sp>
-        <p:nvSpPr>
-          <p:cNvPr id="349" name="Google Shape;349;p19"/>
-          <p:cNvSpPr/>
-          <p:nvPr/>
-        </p:nvSpPr>
-        <p:spPr>
-          <a:xfrm>
-            <a:off x="1097280" y="1536192"/>
-            <a:ext cx="7589520" cy="749808"/>
-          </a:xfrm>
-          <a:prstGeom prst="rect">
-            <a:avLst/>
-          </a:prstGeom>
-          <a:solidFill>
-            <a:srgbClr val="CCFBF1"/>
-          </a:solidFill>
-          <a:ln cap="flat" cmpd="sng" w="12700">
-            <a:solidFill>
-              <a:srgbClr val="D1FAE5"/>
-            </a:solidFill>
-            <a:prstDash val="solid"/>
-            <a:round/>
-            <a:headEnd len="sm" w="sm" type="none"/>
-            <a:tailEnd len="sm" w="sm" type="none"/>
-          </a:ln>
-        </p:spPr>
-        <p:txBody>
-          <a:bodyPr anchorCtr="0" anchor="ctr" bIns="91425" lIns="91425" spcFirstLastPara="1" rIns="91425" wrap="square" tIns="91425">
-            <a:noAutofit/>
-          </a:bodyPr>
-          <a:lstStyle/>
-          <a:p>
-            <a:pPr indent="0" lvl="0" marL="0" rtl="0" algn="l">
-              <a:spcBef>
-                <a:spcPts val="0"/>
-              </a:spcBef>
-              <a:spcAft>
-                <a:spcPts val="0"/>
-              </a:spcAft>
-              <a:buNone/>
-            </a:pPr>
-            <a:r>
-              <a:t/>
-            </a:r>
-            <a:endParaRPr/>
-          </a:p>
-        </p:txBody>
-      </p:sp>
-      <p:sp>
-        <p:nvSpPr>
-          <p:cNvPr id="350" name="Google Shape;350;p19"/>
-          <p:cNvSpPr/>
-          <p:nvPr/>
-        </p:nvSpPr>
-        <p:spPr>
-          <a:xfrm>
-            <a:off x="1261872" y="1581912"/>
-            <a:ext cx="7315200" cy="329184"/>
-          </a:xfrm>
-          <a:prstGeom prst="rect">
-            <a:avLst/>
-          </a:prstGeom>
-          <a:noFill/>
-          <a:ln>
-            <a:noFill/>
-          </a:ln>
-        </p:spPr>
-        <p:txBody>
-          <a:bodyPr anchorCtr="0" anchor="ctr" bIns="0" lIns="0" spcFirstLastPara="1" rIns="0" wrap="square" tIns="0">
-            <a:noAutofit/>
-          </a:bodyPr>
-          <a:lstStyle/>
-          <a:p>
-            <a:pPr indent="0" lvl="0" marL="0" marR="0" rtl="0" algn="l">
-              <a:spcBef>
-                <a:spcPts val="0"/>
-              </a:spcBef>
-              <a:spcAft>
-                <a:spcPts val="0"/>
-              </a:spcAft>
-              <a:buClr>
-                <a:srgbClr val="0F766E"/>
-              </a:buClr>
-              <a:buSzPts val="1300"/>
-              <a:buFont typeface="Consolas"/>
-              <a:buNone/>
-            </a:pPr>
-            <a:r>
-              <a:rPr b="1" i="0" lang="en-US" sz="1300" u="none" cap="none" strike="noStrike">
-                <a:solidFill>
-                  <a:srgbClr val="0F766E"/>
-                </a:solidFill>
-                <a:latin typeface="Consolas"/>
-                <a:ea typeface="Consolas"/>
-                <a:cs typeface="Consolas"/>
-                <a:sym typeface="Consolas"/>
-              </a:rPr>
-              <a:t>📤 Notif sortante</a:t>
-            </a:r>
-            <a:endParaRPr b="0" i="0" sz="1300" u="none" cap="none" strike="noStrike">
-              <a:solidFill>
-                <a:schemeClr val="dk1"/>
-              </a:solidFill>
-              <a:latin typeface="Calibri"/>
-              <a:ea typeface="Calibri"/>
-              <a:cs typeface="Calibri"/>
-              <a:sym typeface="Calibri"/>
-            </a:endParaRPr>
-          </a:p>
-        </p:txBody>
-      </p:sp>
-      <p:sp>
-        <p:nvSpPr>
-          <p:cNvPr id="351" name="Google Shape;351;p19"/>
-          <p:cNvSpPr/>
-          <p:nvPr/>
-        </p:nvSpPr>
-        <p:spPr>
-          <a:xfrm>
-            <a:off x="1261872" y="1920240"/>
-            <a:ext cx="7315200" cy="329184"/>
-          </a:xfrm>
-          <a:prstGeom prst="rect">
-            <a:avLst/>
-          </a:prstGeom>
-          <a:noFill/>
-          <a:ln>
-            <a:noFill/>
-          </a:ln>
-        </p:spPr>
-        <p:txBody>
-          <a:bodyPr anchorCtr="0" anchor="ctr" bIns="0" lIns="0" spcFirstLastPara="1" rIns="0" wrap="square" tIns="0">
-            <a:noAutofit/>
-          </a:bodyPr>
-          <a:lstStyle/>
-          <a:p>
-            <a:pPr indent="0" lvl="0" marL="0" marR="0" rtl="0" algn="l">
-              <a:spcBef>
-                <a:spcPts val="0"/>
-              </a:spcBef>
-              <a:spcAft>
-                <a:spcPts val="0"/>
-              </a:spcAft>
-              <a:buClr>
-                <a:srgbClr val="475569"/>
-              </a:buClr>
-              <a:buSzPts val="1300"/>
-              <a:buFont typeface="Calibri"/>
-              <a:buNone/>
-            </a:pPr>
-            <a:r>
-              <a:rPr b="0" i="0" lang="en-US" sz="1300" u="none" cap="none" strike="noStrike">
-                <a:solidFill>
-                  <a:srgbClr val="475569"/>
-                </a:solidFill>
-                <a:latin typeface="Calibri"/>
-                <a:ea typeface="Calibri"/>
-                <a:cs typeface="Calibri"/>
-                <a:sym typeface="Calibri"/>
-              </a:rPr>
-              <a:t>Nouvelle réservation → message automatique dans le groupe du Dr.</a:t>
-            </a:r>
-            <a:endParaRPr b="0" i="0" sz="1300" u="none" cap="none" strike="noStrike">
-              <a:solidFill>
-                <a:schemeClr val="dk1"/>
-              </a:solidFill>
-              <a:latin typeface="Calibri"/>
-              <a:ea typeface="Calibri"/>
-              <a:cs typeface="Calibri"/>
-              <a:sym typeface="Calibri"/>
-            </a:endParaRPr>
-          </a:p>
-        </p:txBody>
-      </p:sp>
-      <p:sp>
-        <p:nvSpPr>
-          <p:cNvPr id="352" name="Google Shape;352;p19"/>
-          <p:cNvSpPr/>
-          <p:nvPr/>
-        </p:nvSpPr>
-        <p:spPr>
-          <a:xfrm>
-            <a:off x="457200" y="2587752"/>
-            <a:ext cx="475488" cy="475488"/>
-          </a:xfrm>
-          <a:prstGeom prst="ellipse">
-            <a:avLst/>
-          </a:prstGeom>
-          <a:solidFill>
-            <a:srgbClr val="134E4A"/>
-          </a:solidFill>
-          <a:ln cap="flat" cmpd="sng" w="12700">
-            <a:solidFill>
-              <a:srgbClr val="134E4A"/>
-            </a:solidFill>
-            <a:prstDash val="solid"/>
-            <a:round/>
-            <a:headEnd len="sm" w="sm" type="none"/>
-            <a:tailEnd len="sm" w="sm" type="none"/>
-          </a:ln>
-        </p:spPr>
-        <p:txBody>
-          <a:bodyPr anchorCtr="0" anchor="ctr" bIns="91425" lIns="91425" spcFirstLastPara="1" rIns="91425" wrap="square" tIns="91425">
-            <a:noAutofit/>
-          </a:bodyPr>
-          <a:lstStyle/>
-          <a:p>
-            <a:pPr indent="0" lvl="0" marL="0" rtl="0" algn="l">
-              <a:spcBef>
-                <a:spcPts val="0"/>
-              </a:spcBef>
-              <a:spcAft>
-                <a:spcPts val="0"/>
-              </a:spcAft>
-              <a:buNone/>
-            </a:pPr>
-            <a:r>
-              <a:t/>
-            </a:r>
-            <a:endParaRPr/>
-          </a:p>
-        </p:txBody>
-      </p:sp>
-      <p:sp>
-        <p:nvSpPr>
-          <p:cNvPr id="353" name="Google Shape;353;p19"/>
-          <p:cNvSpPr/>
-          <p:nvPr/>
-        </p:nvSpPr>
-        <p:spPr>
-          <a:xfrm>
-            <a:off x="457200" y="2587752"/>
-            <a:ext cx="475488" cy="475488"/>
-          </a:xfrm>
-          <a:prstGeom prst="rect">
-            <a:avLst/>
-          </a:prstGeom>
-          <a:noFill/>
-          <a:ln>
-            <a:noFill/>
-          </a:ln>
-        </p:spPr>
-        <p:txBody>
-          <a:bodyPr anchorCtr="0" anchor="ctr" bIns="0" lIns="0" spcFirstLastPara="1" rIns="0" wrap="square" tIns="0">
-            <a:noAutofit/>
-          </a:bodyPr>
-          <a:lstStyle/>
-          <a:p>
-            <a:pPr indent="0" lvl="0" marL="0" marR="0" rtl="0" algn="ctr">
-              <a:spcBef>
-                <a:spcPts val="0"/>
-              </a:spcBef>
-              <a:spcAft>
-                <a:spcPts val="0"/>
-              </a:spcAft>
-              <a:buClr>
-                <a:srgbClr val="FFFFFF"/>
-              </a:buClr>
-              <a:buSzPts val="1400"/>
-              <a:buFont typeface="Calibri"/>
-              <a:buNone/>
-            </a:pPr>
-            <a:r>
-              <a:rPr b="1" i="0" lang="en-US" sz="1400" u="none" cap="none" strike="noStrike">
-                <a:solidFill>
-                  <a:srgbClr val="FFFFFF"/>
-                </a:solidFill>
-                <a:latin typeface="Calibri"/>
-                <a:ea typeface="Calibri"/>
-                <a:cs typeface="Calibri"/>
-                <a:sym typeface="Calibri"/>
-              </a:rPr>
-              <a:t>2</a:t>
-            </a:r>
-            <a:endParaRPr b="0" i="0" sz="1400" u="none" cap="none" strike="noStrike">
-              <a:solidFill>
-                <a:schemeClr val="dk1"/>
-              </a:solidFill>
-              <a:latin typeface="Calibri"/>
-              <a:ea typeface="Calibri"/>
-              <a:cs typeface="Calibri"/>
-              <a:sym typeface="Calibri"/>
-            </a:endParaRPr>
-          </a:p>
-        </p:txBody>
-      </p:sp>
-      <p:sp>
-        <p:nvSpPr>
-          <p:cNvPr id="354" name="Google Shape;354;p19"/>
-          <p:cNvSpPr/>
-          <p:nvPr/>
-        </p:nvSpPr>
-        <p:spPr>
-          <a:xfrm>
-            <a:off x="1097280" y="2496312"/>
-            <a:ext cx="7589520" cy="749808"/>
-          </a:xfrm>
-          <a:prstGeom prst="rect">
-            <a:avLst/>
-          </a:prstGeom>
-          <a:solidFill>
-            <a:srgbClr val="FFFFFF"/>
-          </a:solidFill>
-          <a:ln cap="flat" cmpd="sng" w="12700">
-            <a:solidFill>
-              <a:srgbClr val="D1FAE5"/>
-            </a:solidFill>
-            <a:prstDash val="solid"/>
-            <a:round/>
-            <a:headEnd len="sm" w="sm" type="none"/>
-            <a:tailEnd len="sm" w="sm" type="none"/>
-          </a:ln>
-        </p:spPr>
-        <p:txBody>
-          <a:bodyPr anchorCtr="0" anchor="ctr" bIns="91425" lIns="91425" spcFirstLastPara="1" rIns="91425" wrap="square" tIns="91425">
-            <a:noAutofit/>
-          </a:bodyPr>
-          <a:lstStyle/>
-          <a:p>
-            <a:pPr indent="0" lvl="0" marL="0" rtl="0" algn="l">
-              <a:spcBef>
-                <a:spcPts val="0"/>
-              </a:spcBef>
-              <a:spcAft>
-                <a:spcPts val="0"/>
-              </a:spcAft>
-              <a:buNone/>
-            </a:pPr>
-            <a:r>
-              <a:t/>
-            </a:r>
-            <a:endParaRPr/>
-          </a:p>
-        </p:txBody>
-      </p:sp>
-      <p:sp>
-        <p:nvSpPr>
-          <p:cNvPr id="355" name="Google Shape;355;p19"/>
-          <p:cNvSpPr/>
-          <p:nvPr/>
-        </p:nvSpPr>
-        <p:spPr>
-          <a:xfrm>
-            <a:off x="1261872" y="2542032"/>
-            <a:ext cx="7315200" cy="329184"/>
-          </a:xfrm>
-          <a:prstGeom prst="rect">
-            <a:avLst/>
-          </a:prstGeom>
-          <a:noFill/>
-          <a:ln>
-            <a:noFill/>
-          </a:ln>
-        </p:spPr>
-        <p:txBody>
-          <a:bodyPr anchorCtr="0" anchor="ctr" bIns="0" lIns="0" spcFirstLastPara="1" rIns="0" wrap="square" tIns="0">
-            <a:noAutofit/>
-          </a:bodyPr>
-          <a:lstStyle/>
-          <a:p>
-            <a:pPr indent="0" lvl="0" marL="0" marR="0" rtl="0" algn="l">
-              <a:spcBef>
-                <a:spcPts val="0"/>
-              </a:spcBef>
-              <a:spcAft>
-                <a:spcPts val="0"/>
-              </a:spcAft>
-              <a:buClr>
-                <a:srgbClr val="0F766E"/>
-              </a:buClr>
-              <a:buSzPts val="1300"/>
-              <a:buFont typeface="Consolas"/>
-              <a:buNone/>
-            </a:pPr>
-            <a:r>
-              <a:rPr b="1" i="0" lang="en-US" sz="1300" u="none" cap="none" strike="noStrike">
-                <a:solidFill>
-                  <a:srgbClr val="0F766E"/>
-                </a:solidFill>
-                <a:latin typeface="Consolas"/>
-                <a:ea typeface="Consolas"/>
-                <a:cs typeface="Consolas"/>
-                <a:sym typeface="Consolas"/>
-              </a:rPr>
-              <a:t>📥 Commandes entrantes</a:t>
-            </a:r>
-            <a:endParaRPr b="0" i="0" sz="1300" u="none" cap="none" strike="noStrike">
-              <a:solidFill>
-                <a:schemeClr val="dk1"/>
-              </a:solidFill>
-              <a:latin typeface="Calibri"/>
-              <a:ea typeface="Calibri"/>
-              <a:cs typeface="Calibri"/>
-              <a:sym typeface="Calibri"/>
-            </a:endParaRPr>
-          </a:p>
-        </p:txBody>
-      </p:sp>
-      <p:sp>
-        <p:nvSpPr>
-          <p:cNvPr id="356" name="Google Shape;356;p19"/>
-          <p:cNvSpPr/>
-          <p:nvPr/>
-        </p:nvSpPr>
-        <p:spPr>
-          <a:xfrm>
-            <a:off x="1261872" y="2880360"/>
-            <a:ext cx="7315200" cy="329184"/>
-          </a:xfrm>
-          <a:prstGeom prst="rect">
-            <a:avLst/>
-          </a:prstGeom>
-          <a:noFill/>
-          <a:ln>
-            <a:noFill/>
-          </a:ln>
-        </p:spPr>
-        <p:txBody>
-          <a:bodyPr anchorCtr="0" anchor="ctr" bIns="0" lIns="0" spcFirstLastPara="1" rIns="0" wrap="square" tIns="0">
-            <a:noAutofit/>
-          </a:bodyPr>
-          <a:lstStyle/>
-          <a:p>
-            <a:pPr indent="0" lvl="0" marL="0" marR="0" rtl="0" algn="l">
-              <a:spcBef>
-                <a:spcPts val="0"/>
-              </a:spcBef>
-              <a:spcAft>
-                <a:spcPts val="0"/>
-              </a:spcAft>
-              <a:buClr>
-                <a:srgbClr val="475569"/>
-              </a:buClr>
-              <a:buSzPts val="1300"/>
-              <a:buFont typeface="Calibri"/>
-              <a:buNone/>
-            </a:pPr>
-            <a:r>
-              <a:rPr b="0" i="0" lang="en-US" sz="1300" u="none" cap="none" strike="noStrike">
-                <a:solidFill>
-                  <a:srgbClr val="475569"/>
-                </a:solidFill>
-                <a:latin typeface="Calibri"/>
-                <a:ea typeface="Calibri"/>
-                <a:cs typeface="Calibri"/>
-                <a:sym typeface="Calibri"/>
-              </a:rPr>
-              <a:t>/aide  /rdv_aujourdhui  /rdv_demain  /rdv  + langage naturel via Gemini</a:t>
-            </a:r>
-            <a:endParaRPr b="0" i="0" sz="1300" u="none" cap="none" strike="noStrike">
-              <a:solidFill>
-                <a:schemeClr val="dk1"/>
-              </a:solidFill>
-              <a:latin typeface="Calibri"/>
-              <a:ea typeface="Calibri"/>
-              <a:cs typeface="Calibri"/>
-              <a:sym typeface="Calibri"/>
-            </a:endParaRPr>
-          </a:p>
-        </p:txBody>
-      </p:sp>
-      <p:sp>
-        <p:nvSpPr>
-          <p:cNvPr id="357" name="Google Shape;357;p19"/>
-          <p:cNvSpPr/>
-          <p:nvPr/>
-        </p:nvSpPr>
-        <p:spPr>
-          <a:xfrm>
-            <a:off x="457200" y="3547872"/>
-            <a:ext cx="475488" cy="475488"/>
-          </a:xfrm>
-          <a:prstGeom prst="ellipse">
-            <a:avLst/>
-          </a:prstGeom>
-          <a:solidFill>
-            <a:srgbClr val="134E4A"/>
-          </a:solidFill>
-          <a:ln cap="flat" cmpd="sng" w="12700">
-            <a:solidFill>
-              <a:srgbClr val="134E4A"/>
-            </a:solidFill>
-            <a:prstDash val="solid"/>
-            <a:round/>
-            <a:headEnd len="sm" w="sm" type="none"/>
-            <a:tailEnd len="sm" w="sm" type="none"/>
-          </a:ln>
-        </p:spPr>
-        <p:txBody>
-          <a:bodyPr anchorCtr="0" anchor="ctr" bIns="91425" lIns="91425" spcFirstLastPara="1" rIns="91425" wrap="square" tIns="91425">
-            <a:noAutofit/>
-          </a:bodyPr>
-          <a:lstStyle/>
-          <a:p>
-            <a:pPr indent="0" lvl="0" marL="0" rtl="0" algn="l">
-              <a:spcBef>
-                <a:spcPts val="0"/>
-              </a:spcBef>
-              <a:spcAft>
-                <a:spcPts val="0"/>
-              </a:spcAft>
-              <a:buNone/>
-            </a:pPr>
-            <a:r>
-              <a:t/>
-            </a:r>
-            <a:endParaRPr/>
-          </a:p>
-        </p:txBody>
-      </p:sp>
-      <p:sp>
-        <p:nvSpPr>
-          <p:cNvPr id="358" name="Google Shape;358;p19"/>
-          <p:cNvSpPr/>
-          <p:nvPr/>
-        </p:nvSpPr>
-        <p:spPr>
-          <a:xfrm>
-            <a:off x="457200" y="3547872"/>
-            <a:ext cx="475488" cy="475488"/>
-          </a:xfrm>
-          <a:prstGeom prst="rect">
-            <a:avLst/>
-          </a:prstGeom>
-          <a:noFill/>
-          <a:ln>
-            <a:noFill/>
-          </a:ln>
-        </p:spPr>
-        <p:txBody>
-          <a:bodyPr anchorCtr="0" anchor="ctr" bIns="0" lIns="0" spcFirstLastPara="1" rIns="0" wrap="square" tIns="0">
-            <a:noAutofit/>
-          </a:bodyPr>
-          <a:lstStyle/>
-          <a:p>
-            <a:pPr indent="0" lvl="0" marL="0" marR="0" rtl="0" algn="ctr">
-              <a:spcBef>
-                <a:spcPts val="0"/>
-              </a:spcBef>
-              <a:spcAft>
-                <a:spcPts val="0"/>
-              </a:spcAft>
-              <a:buClr>
-                <a:srgbClr val="FFFFFF"/>
-              </a:buClr>
-              <a:buSzPts val="1400"/>
-              <a:buFont typeface="Calibri"/>
-              <a:buNone/>
-            </a:pPr>
-            <a:r>
-              <a:rPr b="1" i="0" lang="en-US" sz="1400" u="none" cap="none" strike="noStrike">
-                <a:solidFill>
-                  <a:srgbClr val="FFFFFF"/>
-                </a:solidFill>
-                <a:latin typeface="Calibri"/>
-                <a:ea typeface="Calibri"/>
-                <a:cs typeface="Calibri"/>
-                <a:sym typeface="Calibri"/>
-              </a:rPr>
-              <a:t>3</a:t>
-            </a:r>
-            <a:endParaRPr b="0" i="0" sz="1400" u="none" cap="none" strike="noStrike">
-              <a:solidFill>
-                <a:schemeClr val="dk1"/>
-              </a:solidFill>
-              <a:latin typeface="Calibri"/>
-              <a:ea typeface="Calibri"/>
-              <a:cs typeface="Calibri"/>
-              <a:sym typeface="Calibri"/>
-            </a:endParaRPr>
-          </a:p>
-        </p:txBody>
-      </p:sp>
-      <p:sp>
-        <p:nvSpPr>
-          <p:cNvPr id="359" name="Google Shape;359;p19"/>
-          <p:cNvSpPr/>
-          <p:nvPr/>
-        </p:nvSpPr>
-        <p:spPr>
-          <a:xfrm>
-            <a:off x="1097280" y="3456432"/>
-            <a:ext cx="7589520" cy="749808"/>
-          </a:xfrm>
-          <a:prstGeom prst="rect">
-            <a:avLst/>
-          </a:prstGeom>
-          <a:solidFill>
-            <a:srgbClr val="CCFBF1"/>
-          </a:solidFill>
-          <a:ln cap="flat" cmpd="sng" w="12700">
-            <a:solidFill>
-              <a:srgbClr val="D1FAE5"/>
-            </a:solidFill>
-            <a:prstDash val="solid"/>
-            <a:round/>
-            <a:headEnd len="sm" w="sm" type="none"/>
-            <a:tailEnd len="sm" w="sm" type="none"/>
-          </a:ln>
-        </p:spPr>
-        <p:txBody>
-          <a:bodyPr anchorCtr="0" anchor="ctr" bIns="91425" lIns="91425" spcFirstLastPara="1" rIns="91425" wrap="square" tIns="91425">
-            <a:noAutofit/>
-          </a:bodyPr>
-          <a:lstStyle/>
-          <a:p>
-            <a:pPr indent="0" lvl="0" marL="0" rtl="0" algn="l">
-              <a:spcBef>
-                <a:spcPts val="0"/>
-              </a:spcBef>
-              <a:spcAft>
-                <a:spcPts val="0"/>
-              </a:spcAft>
-              <a:buNone/>
-            </a:pPr>
-            <a:r>
-              <a:t/>
-            </a:r>
-            <a:endParaRPr/>
-          </a:p>
-        </p:txBody>
-      </p:sp>
-      <p:sp>
-        <p:nvSpPr>
-          <p:cNvPr id="360" name="Google Shape;360;p19"/>
-          <p:cNvSpPr/>
-          <p:nvPr/>
-        </p:nvSpPr>
-        <p:spPr>
-          <a:xfrm>
-            <a:off x="1261872" y="3502152"/>
-            <a:ext cx="7315200" cy="329184"/>
-          </a:xfrm>
-          <a:prstGeom prst="rect">
-            <a:avLst/>
-          </a:prstGeom>
-          <a:noFill/>
-          <a:ln>
-            <a:noFill/>
-          </a:ln>
-        </p:spPr>
-        <p:txBody>
-          <a:bodyPr anchorCtr="0" anchor="ctr" bIns="0" lIns="0" spcFirstLastPara="1" rIns="0" wrap="square" tIns="0">
-            <a:noAutofit/>
-          </a:bodyPr>
-          <a:lstStyle/>
-          <a:p>
-            <a:pPr indent="0" lvl="0" marL="0" marR="0" rtl="0" algn="l">
-              <a:spcBef>
-                <a:spcPts val="0"/>
-              </a:spcBef>
-              <a:spcAft>
-                <a:spcPts val="0"/>
-              </a:spcAft>
-              <a:buClr>
-                <a:srgbClr val="0F766E"/>
-              </a:buClr>
-              <a:buSzPts val="1300"/>
-              <a:buFont typeface="Consolas"/>
-              <a:buNone/>
-            </a:pPr>
-            <a:r>
-              <a:rPr b="1" i="0" lang="en-US" sz="1300" u="none" cap="none" strike="noStrike">
-                <a:solidFill>
-                  <a:srgbClr val="0F766E"/>
-                </a:solidFill>
-                <a:latin typeface="Consolas"/>
-                <a:ea typeface="Consolas"/>
-                <a:cs typeface="Consolas"/>
-                <a:sym typeface="Consolas"/>
-              </a:rPr>
-              <a:t>🔐 Cloisonnement</a:t>
-            </a:r>
-            <a:endParaRPr b="0" i="0" sz="1300" u="none" cap="none" strike="noStrike">
-              <a:solidFill>
-                <a:schemeClr val="dk1"/>
-              </a:solidFill>
-              <a:latin typeface="Calibri"/>
-              <a:ea typeface="Calibri"/>
-              <a:cs typeface="Calibri"/>
-              <a:sym typeface="Calibri"/>
-            </a:endParaRPr>
-          </a:p>
-        </p:txBody>
-      </p:sp>
-      <p:sp>
-        <p:nvSpPr>
-          <p:cNvPr id="361" name="Google Shape;361;p19"/>
-          <p:cNvSpPr/>
-          <p:nvPr/>
-        </p:nvSpPr>
-        <p:spPr>
-          <a:xfrm>
-            <a:off x="1261872" y="3840480"/>
-            <a:ext cx="7315200" cy="329184"/>
-          </a:xfrm>
-          <a:prstGeom prst="rect">
-            <a:avLst/>
-          </a:prstGeom>
-          <a:noFill/>
-          <a:ln>
-            <a:noFill/>
-          </a:ln>
-        </p:spPr>
-        <p:txBody>
-          <a:bodyPr anchorCtr="0" anchor="ctr" bIns="0" lIns="0" spcFirstLastPara="1" rIns="0" wrap="square" tIns="0">
-            <a:noAutofit/>
-          </a:bodyPr>
-          <a:lstStyle/>
-          <a:p>
-            <a:pPr indent="0" lvl="0" marL="0" marR="0" rtl="0" algn="l">
-              <a:spcBef>
-                <a:spcPts val="0"/>
-              </a:spcBef>
-              <a:spcAft>
-                <a:spcPts val="0"/>
-              </a:spcAft>
-              <a:buClr>
-                <a:srgbClr val="475569"/>
-              </a:buClr>
-              <a:buSzPts val="1300"/>
-              <a:buFont typeface="Calibri"/>
-              <a:buNone/>
-            </a:pPr>
-            <a:r>
-              <a:rPr b="0" i="0" lang="en-US" sz="1300" u="none" cap="none" strike="noStrike">
-                <a:solidFill>
-                  <a:srgbClr val="475569"/>
-                </a:solidFill>
-                <a:latin typeface="Calibri"/>
-                <a:ea typeface="Calibri"/>
-                <a:cs typeface="Calibri"/>
-                <a:sym typeface="Calibri"/>
-              </a:rPr>
-              <a:t>1 groupe Telegram = 1 médecin (mapping Doctor.telegram_chat_id)</a:t>
-            </a:r>
-            <a:endParaRPr b="0" i="0" sz="1300" u="none" cap="none" strike="noStrike">
-              <a:solidFill>
-                <a:schemeClr val="dk1"/>
-              </a:solidFill>
-              <a:latin typeface="Calibri"/>
-              <a:ea typeface="Calibri"/>
-              <a:cs typeface="Calibri"/>
-              <a:sym typeface="Calibri"/>
-            </a:endParaRPr>
-          </a:p>
-        </p:txBody>
-      </p:sp>
-      <p:sp>
-        <p:nvSpPr>
-          <p:cNvPr id="362" name="Google Shape;362;p19"/>
-          <p:cNvSpPr/>
-          <p:nvPr/>
-        </p:nvSpPr>
-        <p:spPr>
-          <a:xfrm>
-            <a:off x="457200" y="4480560"/>
-            <a:ext cx="8229600" cy="320040"/>
-          </a:xfrm>
-          <a:prstGeom prst="rect">
-            <a:avLst/>
-          </a:prstGeom>
-          <a:noFill/>
-          <a:ln>
-            <a:noFill/>
-          </a:ln>
-        </p:spPr>
-        <p:txBody>
-          <a:bodyPr anchorCtr="0" anchor="ctr" bIns="0" lIns="0" spcFirstLastPara="1" rIns="0" wrap="square" tIns="0">
-            <a:noAutofit/>
-          </a:bodyPr>
-          <a:lstStyle/>
-          <a:p>
-            <a:pPr indent="0" lvl="0" marL="0" marR="0" rtl="0" algn="l">
-              <a:spcBef>
-                <a:spcPts val="0"/>
-              </a:spcBef>
-              <a:spcAft>
-                <a:spcPts val="0"/>
-              </a:spcAft>
-              <a:buClr>
-                <a:srgbClr val="94A3B8"/>
-              </a:buClr>
-              <a:buSzPts val="1100"/>
-              <a:buFont typeface="Calibri"/>
-              <a:buNone/>
-            </a:pPr>
-            <a:r>
-              <a:rPr b="0" i="1" lang="en-US" sz="1100" u="none" cap="none" strike="noStrike">
-                <a:solidFill>
-                  <a:srgbClr val="94A3B8"/>
-                </a:solidFill>
-                <a:latin typeface="Calibri"/>
-                <a:ea typeface="Calibri"/>
-                <a:cs typeface="Calibri"/>
-                <a:sym typeface="Calibri"/>
-              </a:rPr>
-              <a:t>Démo SAE : 2 groupes (Dr. Lefebvre, Dr. Benyahia). Infra prête pour N praticiens.</a:t>
-            </a:r>
-            <a:endParaRPr b="0" i="0" sz="1100" u="none" cap="none" strike="noStrike">
               <a:solidFill>
                 <a:schemeClr val="dk1"/>
               </a:solidFill>

--- a/docs/soutenance.pptx
+++ b/docs/soutenance.pptx
@@ -9,6 +9,7 @@
   </p:notesMasterIdLst>
   <p:sldIdLst>
     <p:sldId id="256" r:id="rId6"/>
+    <p:sldId id="283" r:id="rId34"/>
     <p:sldId id="257" r:id="rId7"/>
     <p:sldId id="258" r:id="rId8"/>
     <p:sldId id="259" r:id="rId9"/>
@@ -1532,19 +1533,24 @@
           </a:bodyPr>
           <a:lstStyle/>
           <a:p>
-            <a:pPr indent="0" lvl="0" marL="0" rtl="0" algn="l">
-              <a:spcBef>
-                <a:spcPts val="0"/>
-              </a:spcBef>
-              <a:spcAft>
-                <a:spcPts val="0"/>
-              </a:spcAft>
-              <a:buNone/>
-            </a:pPr>
-            <a:r>
-              <a:t/>
-            </a:r>
-            <a:endParaRPr/>
+            <a:r>
+              <a:t>Bonjour à tous. Donc voilà, nous c'est Yousra, Imane, Yannis et Grace.</a:t>
+            </a:r>
+          </a:p>
+          <a:p>
+            <a:r>
+              <a:t>On va vous présenter notre projet de SAE : un chatbot médical basé sur une approche RAG.</a:t>
+            </a:r>
+          </a:p>
+          <a:p>
+            <a:r>
+              <a:t>On a 15 minutes pour vous présenter ça, et après on répondra à vos questions.</a:t>
+            </a:r>
+          </a:p>
+          <a:p>
+            <a:r>
+              <a:t>On a tout déployé en prod, vous pouvez tester sur sae.amanawebagency.com ou flasher le QR code à la fin.</a:t>
+            </a:r>
           </a:p>
         </p:txBody>
       </p:sp>
@@ -1689,19 +1695,29 @@
           </a:bodyPr>
           <a:lstStyle/>
           <a:p>
-            <a:pPr indent="0" lvl="0" marL="0" rtl="0" algn="l">
-              <a:spcBef>
-                <a:spcPts val="0"/>
-              </a:spcBef>
-              <a:spcAft>
-                <a:spcPts val="0"/>
-              </a:spcAft>
-              <a:buNone/>
-            </a:pPr>
-            <a:r>
-              <a:t/>
-            </a:r>
-            <a:endParaRPr/>
+            <a:r>
+              <a:t>Et MiniLM dans tout ça, c'est quoi son rôle exactement ?</a:t>
+            </a:r>
+          </a:p>
+          <a:p>
+            <a:r>
+              <a:t>C'est un modèle d'embeddings qui transforme n'importe quel texte en un vecteur de 384 nombres. Et ce vecteur capture le SENS du texte, pas juste les mots.</a:t>
+            </a:r>
+          </a:p>
+          <a:p>
+            <a:r>
+              <a:t>Donc 500 c'est la taille du chunk en caractères, et 384 c'est la taille du vecteur. C'est fixe peu importe la longueur du texte.</a:t>
+            </a:r>
+          </a:p>
+          <a:p>
+            <a:r>
+              <a:t>L'exemple : "fièvre" et "température élevée" donnent des vecteurs proches, parce que sémantiquement c'est la même idée.</a:t>
+            </a:r>
+          </a:p>
+          <a:p>
+            <a:r>
+              <a:t>Et c'est ça qui permet de retrouver les bons passages quand un patient pose une question.</a:t>
+            </a:r>
           </a:p>
         </p:txBody>
       </p:sp>
@@ -1846,19 +1862,29 @@
           </a:bodyPr>
           <a:lstStyle/>
           <a:p>
-            <a:pPr indent="0" lvl="0" marL="0" rtl="0" algn="l">
-              <a:spcBef>
-                <a:spcPts val="0"/>
-              </a:spcBef>
-              <a:spcAft>
-                <a:spcPts val="0"/>
-              </a:spcAft>
-              <a:buNone/>
-            </a:pPr>
-            <a:r>
-              <a:t/>
-            </a:r>
-            <a:endParaRPr/>
+            <a:r>
+              <a:t>Et maintenant l'étape 2 : comment ça marche quand un patient pose une vraie question.</a:t>
+            </a:r>
+          </a:p>
+          <a:p>
+            <a:r>
+              <a:t>La question est convertie en vecteur avec le même MiniLM, c'est important.</a:t>
+            </a:r>
+          </a:p>
+          <a:p>
+            <a:r>
+              <a:t>ChromaDB cherche les 4 chunks les plus proches sémantiquement. Si le score est mauvais, donc si vraiment rien matche, on bascule sur la recherche web. C'est notre bonus.</a:t>
+            </a:r>
+          </a:p>
+          <a:p>
+            <a:r>
+              <a:t>Sinon on assemble un prompt avec le contexte des chunks plus l'historique de la conversation.</a:t>
+            </a:r>
+          </a:p>
+          <a:p>
+            <a:r>
+              <a:t>Et le LLM lit ce prompt et rédige la réponse finale en français.</a:t>
+            </a:r>
           </a:p>
         </p:txBody>
       </p:sp>
@@ -2003,19 +2029,24 @@
           </a:bodyPr>
           <a:lstStyle/>
           <a:p>
-            <a:pPr indent="0" lvl="0" marL="0" rtl="0" algn="l">
-              <a:spcBef>
-                <a:spcPts val="0"/>
-              </a:spcBef>
-              <a:spcAft>
-                <a:spcPts val="0"/>
-              </a:spcAft>
-              <a:buNone/>
-            </a:pPr>
-            <a:r>
-              <a:t/>
-            </a:r>
-            <a:endParaRPr/>
+            <a:r>
+              <a:t>Petit point un peu technique sur la similarité. Comment on compare deux vecteurs en fait ?</a:t>
+            </a:r>
+          </a:p>
+          <a:p>
+            <a:r>
+              <a:t>On utilise la distance L2, c'est la distance euclidienne. Plus le score est BAS, plus c'est pertinent. C'est l'inverse de l'intuition habituelle.</a:t>
+            </a:r>
+          </a:p>
+          <a:p>
+            <a:r>
+              <a:t>On a fixé RELEVANCE_THRESHOLD à 0.9. Au-dessus de ce seuil, on considère qu'aucun chunk est assez pertinent, et là on bascule sur le web pour ne pas répondre à côté.</a:t>
+            </a:r>
+          </a:p>
+          <a:p>
+            <a:r>
+              <a:t>Cette distance L2 c'est juste la racine de la somme des carrés des différences sur les 384 dimensions. C'est de la géométrie classique.</a:t>
+            </a:r>
           </a:p>
         </p:txBody>
       </p:sp>
@@ -2317,19 +2348,19 @@
           </a:bodyPr>
           <a:lstStyle/>
           <a:p>
-            <a:pPr indent="0" lvl="0" marL="0" rtl="0" algn="l">
-              <a:spcBef>
-                <a:spcPts val="0"/>
-              </a:spcBef>
-              <a:spcAft>
-                <a:spcPts val="0"/>
-              </a:spcAft>
-              <a:buNone/>
-            </a:pPr>
-            <a:r>
-              <a:t/>
-            </a:r>
-            <a:endParaRPr/>
+            <a:r>
+              <a:t>Donc moi je prends la suite. On va parler de la comparaison d'encodeurs et du bonus DuckDuckGo.</a:t>
+            </a:r>
+          </a:p>
+          <a:p>
+            <a:r>
+              <a:t>Pourquoi on a comparé plusieurs encodeurs ? Parce que c'est explicitement demandé dans la SAE, et aussi parce que le choix de l'encodeur change vraiment la qualité de la recherche sémantique.</a:t>
+            </a:r>
+          </a:p>
+          <a:p>
+            <a:r>
+              <a:t>On a testé 3 modèles sur les mêmes 5 PDFs : MiniLM en 384 dimensions, CamemBERT en 768 spécialisé français, et mpnet en 768 multilingue haute qualité.</a:t>
+            </a:r>
           </a:p>
         </p:txBody>
       </p:sp>
@@ -2474,19 +2505,24 @@
           </a:bodyPr>
           <a:lstStyle/>
           <a:p>
-            <a:pPr indent="0" lvl="0" marL="0" rtl="0" algn="l">
-              <a:spcBef>
-                <a:spcPts val="0"/>
-              </a:spcBef>
-              <a:spcAft>
-                <a:spcPts val="0"/>
-              </a:spcAft>
-              <a:buNone/>
-            </a:pPr>
-            <a:r>
-              <a:t/>
-            </a:r>
-            <a:endParaRPr/>
+            <a:r>
+              <a:t>Et voilà les résultats. MiniLM est le plus rapide, 71 secondes pour indexer nos 971 chunks. Qualité bonne mais parfois distrait par du bruit, genre des citations bibliographiques.</a:t>
+            </a:r>
+          </a:p>
+          <a:p>
+            <a:r>
+              <a:t>CamemBERT, étant entraîné spécifiquement sur du français, capte mieux le sens médical. Mais c'est 4 fois plus lent à indexer.</a:t>
+            </a:r>
+          </a:p>
+          <a:p>
+            <a:r>
+              <a:t>Et mpnet, c'est le plus pertinent des 3 sur nos questions test, mais aussi long à indexer.</a:t>
+            </a:r>
+          </a:p>
+          <a:p>
+            <a:r>
+              <a:t>On a choisi MiniLM en prod pour la rapidité. Les deux autres sont documentés comme alternatives plus précises.</a:t>
+            </a:r>
           </a:p>
         </p:txBody>
       </p:sp>
@@ -2631,19 +2667,19 @@
           </a:bodyPr>
           <a:lstStyle/>
           <a:p>
-            <a:pPr indent="0" lvl="0" marL="0" rtl="0" algn="l">
-              <a:spcBef>
-                <a:spcPts val="0"/>
-              </a:spcBef>
-              <a:spcAft>
-                <a:spcPts val="0"/>
-              </a:spcAft>
-              <a:buNone/>
-            </a:pPr>
-            <a:r>
-              <a:t/>
-            </a:r>
-            <a:endParaRPr/>
+            <a:r>
+              <a:t>Et maintenant le bonus DuckDuckGo. Quand le RAG ne trouve rien de pertinent — score supérieur à notre seuil — on enrichit la réponse avec une vraie recherche web.</a:t>
+            </a:r>
+          </a:p>
+          <a:p>
+            <a:r>
+              <a:t>Voilà le code, c'est tout simple : on appelle DDGS qui retourne les top 3 résultats, et on injecte titre + extrait + URL dans le prompt.</a:t>
+            </a:r>
+          </a:p>
+          <a:p>
+            <a:r>
+              <a:t>Ce qui est important c'est que le web c'est un FILET DE SÉCURITÉ, jamais une source par défaut. Et le LLM badge explicitement quand l'info vient du web et pas des PDFs officiels — l'utilisateur sait toujours d'où vient la réponse.</a:t>
+            </a:r>
           </a:p>
         </p:txBody>
       </p:sp>
@@ -2788,19 +2824,29 @@
           </a:bodyPr>
           <a:lstStyle/>
           <a:p>
-            <a:pPr indent="0" lvl="0" marL="0" rtl="0" algn="l">
-              <a:spcBef>
-                <a:spcPts val="0"/>
-              </a:spcBef>
-              <a:spcAft>
-                <a:spcPts val="0"/>
-              </a:spcAft>
-              <a:buNone/>
-            </a:pPr>
-            <a:r>
-              <a:t/>
-            </a:r>
-            <a:endParaRPr/>
+            <a:r>
+              <a:t>Petit bug qu'on a rencontré et corrigé, c'est intéressant.</a:t>
+            </a:r>
+          </a:p>
+          <a:p>
+            <a:r>
+              <a:t>Symptôme : quand un patient tapait "j'ai de la fièvre", DuckDuckGo retournait des résultats Reverso et Collins, donc de la traduction. Pas du tout d'info médicale.</a:t>
+            </a:r>
+          </a:p>
+          <a:p>
+            <a:r>
+              <a:t>La cause c'est que la phrase brute du patient ressemble à une phrase de manuel de langue.</a:t>
+            </a:r>
+          </a:p>
+          <a:p>
+            <a:r>
+              <a:t>Le fix qu'on a fait : reformulate_search_query() qui passe d'abord la phrase dans le LLM pour la transformer en requête médicale propre. Donc "j'ai de la fièvre" devient "fievre symptomes causes traitement", et là DuckDuckGo retourne des vrais sites médicaux.</a:t>
+            </a:r>
+          </a:p>
+          <a:p>
+            <a:r>
+              <a:t>Petit détail mais ça montre qu'on a vraiment testé et débogué l'appli.</a:t>
+            </a:r>
           </a:p>
         </p:txBody>
       </p:sp>
@@ -3102,19 +3148,29 @@
           </a:bodyPr>
           <a:lstStyle/>
           <a:p>
-            <a:pPr indent="0" lvl="0" marL="0" rtl="0" algn="l">
-              <a:spcBef>
-                <a:spcPts val="0"/>
-              </a:spcBef>
-              <a:spcAft>
-                <a:spcPts val="0"/>
-              </a:spcAft>
-              <a:buNone/>
-            </a:pPr>
-            <a:r>
-              <a:t/>
-            </a:r>
-            <a:endParaRPr/>
+            <a:r>
+              <a:t>Donc moi je prends la fin. On va parler de Hermes, du déploiement et faire la démo.</a:t>
+            </a:r>
+          </a:p>
+          <a:p>
+            <a:r>
+              <a:t>Hermes c'est notre deuxième bonus, c'est un orchestrateur multi-agents. L'idée : après une réponse du chatbot, le patient peut demander à voir un spécialiste.</a:t>
+            </a:r>
+          </a:p>
+          <a:p>
+            <a:r>
+              <a:t>On a 3 sous-agents : recommend_specialist qui analyse la conversation pour déterminer le type de médecin, list_available_doctors qui liste les créneaux, et book_appointment qui réserve.</a:t>
+            </a:r>
+          </a:p>
+          <a:p>
+            <a:r>
+              <a:t>Hermes 405B via OpenRouter en dev, avec un fallback automatique. En prod, on tombe directement sur Gemini.</a:t>
+            </a:r>
+          </a:p>
+          <a:p>
+            <a:r>
+              <a:t>Ce qui fait Hermes intéressant c'est qu'on va au-delà du simple Q et A : on propose une action concrète après le diagnostic informatif.</a:t>
+            </a:r>
           </a:p>
         </p:txBody>
       </p:sp>
@@ -3259,19 +3315,29 @@
           </a:bodyPr>
           <a:lstStyle/>
           <a:p>
-            <a:pPr indent="0" lvl="0" marL="0" rtl="0" algn="l">
-              <a:spcBef>
-                <a:spcPts val="0"/>
-              </a:spcBef>
-              <a:spcAft>
-                <a:spcPts val="0"/>
-              </a:spcAft>
-              <a:buNone/>
-            </a:pPr>
-            <a:r>
-              <a:t/>
-            </a:r>
-            <a:endParaRPr/>
+            <a:r>
+              <a:t>Donc avant de rentrer dans la technique, on va vite vous expliquer le besoin.</a:t>
+            </a:r>
+          </a:p>
+          <a:p>
+            <a:r>
+              <a:t>L'idée c'est qu'un patient veut une info médicale fiable et rapide.</a:t>
+            </a:r>
+          </a:p>
+          <a:p>
+            <a:r>
+              <a:t>Le problème, c'est qu'un LLM tout seul peut halluciner. Il invente parfois des trucs faux.</a:t>
+            </a:r>
+          </a:p>
+          <a:p>
+            <a:r>
+              <a:t>Donc nous on voulait un chatbot qui réponde uniquement à partir de sources officielles HAS et INCa.</a:t>
+            </a:r>
+          </a:p>
+          <a:p>
+            <a:r>
+              <a:t>Et important : c'est informatif, on fait pas de diagnostic. C'est un choix qu'on assume.</a:t>
+            </a:r>
           </a:p>
         </p:txBody>
       </p:sp>
@@ -3416,19 +3482,24 @@
           </a:bodyPr>
           <a:lstStyle/>
           <a:p>
-            <a:pPr indent="0" lvl="0" marL="0" rtl="0" algn="l">
-              <a:spcBef>
-                <a:spcPts val="0"/>
-              </a:spcBef>
-              <a:spcAft>
-                <a:spcPts val="0"/>
-              </a:spcAft>
-              <a:buNone/>
-            </a:pPr>
-            <a:r>
-              <a:t/>
-            </a:r>
-            <a:endParaRPr/>
+            <a:r>
+              <a:t>Côté sécurité maintenant, on a fait attention à pas faire n'importe quoi.</a:t>
+            </a:r>
+          </a:p>
+          <a:p>
+            <a:r>
+              <a:t>Pas de diagnostic : c'est rappelé dans chaque prompt envoyé au LLM. Le système refuse de poser un diagnostic.</a:t>
+            </a:r>
+          </a:p>
+          <a:p>
+            <a:r>
+              <a:t>Traçabilité : chaque réponse a un badge "documents officiels" ou "web", l'utilisateur sait toujours d'où vient l'info.</a:t>
+            </a:r>
+          </a:p>
+          <a:p>
+            <a:r>
+              <a:t>Les limites qu'on assume : périmètre limité à 3 pathologies pour l'instant, et un quota LLM gratuit d'environ 1000 requêtes par jour. La ChromaDB et la SQLite sont sur un volume Docker persistant, donc pas de perte au redéploiement.</a:t>
+            </a:r>
           </a:p>
         </p:txBody>
       </p:sp>
@@ -3573,19 +3644,29 @@
           </a:bodyPr>
           <a:lstStyle/>
           <a:p>
-            <a:pPr indent="0" lvl="0" marL="0" rtl="0" algn="l">
-              <a:spcBef>
-                <a:spcPts val="0"/>
-              </a:spcBef>
-              <a:spcAft>
-                <a:spcPts val="0"/>
-              </a:spcAft>
-              <a:buNone/>
-            </a:pPr>
-            <a:r>
-              <a:t/>
-            </a:r>
-            <a:endParaRPr/>
+            <a:r>
+              <a:t>Pour le déploiement maintenant. L'URL c'est sae.amanawebagency.com.</a:t>
+            </a:r>
+          </a:p>
+          <a:p>
+            <a:r>
+              <a:t>On a Caddy en reverse proxy avec HTTPS automatique via Let's Encrypt.</a:t>
+            </a:r>
+          </a:p>
+          <a:p>
+            <a:r>
+              <a:t>Derrière Caddy, 3 containers Docker : un nginx qui sert le site landing à la racine, Streamlit qui sert le chatbot sur slash app, et FastAPI qui est totalement interne au réseau Docker — jamais exposé.</a:t>
+            </a:r>
+          </a:p>
+          <a:p>
+            <a:r>
+              <a:t>ChromaDB et SQLite sur un volume persistant.</a:t>
+            </a:r>
+          </a:p>
+          <a:p>
+            <a:r>
+              <a:t>C'est de la VRAIE infra de production, pas un tier gratuit jetable. C'est mutualisé avec les autres services Amana.</a:t>
+            </a:r>
           </a:p>
         </p:txBody>
       </p:sp>
@@ -3730,19 +3811,24 @@
           </a:bodyPr>
           <a:lstStyle/>
           <a:p>
-            <a:pPr indent="0" lvl="0" marL="0" rtl="0" algn="l">
-              <a:spcBef>
-                <a:spcPts val="0"/>
-              </a:spcBef>
-              <a:spcAft>
-                <a:spcPts val="0"/>
-              </a:spcAft>
-              <a:buNone/>
-            </a:pPr>
-            <a:r>
-              <a:t/>
-            </a:r>
-            <a:endParaRPr/>
+            <a:r>
+              <a:t>Et pour la démo, on va vous montrer 3 scénarios.</a:t>
+            </a:r>
+          </a:p>
+          <a:p>
+            <a:r>
+              <a:t>D'abord une question dans le périmètre, par exemple sur le diabète. Vous allez voir la réponse arriver avec le badge "documents officiels".</a:t>
+            </a:r>
+          </a:p>
+          <a:p>
+            <a:r>
+              <a:t>Puis une question hors périmètre, genre la grippe. Là on bascule sur le web, et le badge devient "recherche web" avec les sources citées.</a:t>
+            </a:r>
+          </a:p>
+          <a:p>
+            <a:r>
+              <a:t>Et enfin Hermes — on clique sur le bouton, il recommande un spécialiste, et on peut prendre rendez-vous avec un vrai formulaire détaillé.</a:t>
+            </a:r>
           </a:p>
         </p:txBody>
       </p:sp>
@@ -3887,19 +3973,34 @@
           </a:bodyPr>
           <a:lstStyle/>
           <a:p>
-            <a:pPr indent="0" lvl="0" marL="0" rtl="0" algn="l">
-              <a:spcBef>
-                <a:spcPts val="0"/>
-              </a:spcBef>
-              <a:spcAft>
-                <a:spcPts val="0"/>
-              </a:spcAft>
-              <a:buNone/>
-            </a:pPr>
-            <a:r>
-              <a:t/>
-            </a:r>
-            <a:endParaRPr/>
+            <a:r>
+              <a:t>En résumé, les compétences qu'on a mobilisées :</a:t>
+            </a:r>
+          </a:p>
+          <a:p>
+            <a:r>
+              <a:t>Full stack avec FastAPI, Streamlit, JWT et SQLAlchemy.</a:t>
+            </a:r>
+          </a:p>
+          <a:p>
+            <a:r>
+              <a:t>IA et LLM : RAG, embeddings, prompt engineering, comparaison de modèles.</a:t>
+            </a:r>
+          </a:p>
+          <a:p>
+            <a:r>
+              <a:t>Esprit critique : on a réfléchi aux limites du RAG, au seuil de pertinence, à la sécurité, au fait qu'on ne fait pas de diagnostic.</a:t>
+            </a:r>
+          </a:p>
+          <a:p>
+            <a:r>
+              <a:t>Et DevOps : Docker, reverse proxy Caddy, et un déploiement réel en production, pas une démo jetable.</a:t>
+            </a:r>
+          </a:p>
+          <a:p>
+            <a:r>
+              <a:t>Voilà, c'est tout cohérent et ça tient debout.</a:t>
+            </a:r>
           </a:p>
         </p:txBody>
       </p:sp>
@@ -4044,19 +4145,24 @@
           </a:bodyPr>
           <a:lstStyle/>
           <a:p>
-            <a:pPr indent="0" lvl="0" marL="0" rtl="0" algn="l">
-              <a:spcBef>
-                <a:spcPts val="0"/>
-              </a:spcBef>
-              <a:spcAft>
-                <a:spcPts val="0"/>
-              </a:spcAft>
-              <a:buNone/>
-            </a:pPr>
-            <a:r>
-              <a:t/>
-            </a:r>
-            <a:endParaRPr/>
+            <a:r>
+              <a:t>Voilà, on en a fini. Merci pour votre attention.</a:t>
+            </a:r>
+          </a:p>
+          <a:p>
+            <a:r>
+              <a:t>On reste dispo pour toutes vos questions, chacun sur sa partie.</a:t>
+            </a:r>
+          </a:p>
+          <a:p>
+            <a:r>
+              <a:t>Si vous voulez tester l'appli vous-même pendant les questions, l'URL est là, sae.amanawebagency.com, ou scannez le QR code à droite.</a:t>
+            </a:r>
+          </a:p>
+          <a:p>
+            <a:r>
+              <a:t>Et notre dépôt GitHub est aussi disponible.</a:t>
+            </a:r>
           </a:p>
         </p:txBody>
       </p:sp>
@@ -4103,6 +4209,261 @@
             <a:endParaRPr/>
           </a:p>
         </p:txBody>
+      </p:sp>
+    </p:spTree>
+  </p:cSld>
+  <p:clrMapOvr>
+    <a:masterClrMapping/>
+  </p:clrMapOvr>
+</p:notes>
+</file>
+
+<file path=ppt/notesSlides/notesSlide25.xml><?xml version="1.0" encoding="utf-8"?>
+<p:notes xmlns:a="http://schemas.openxmlformats.org/drawingml/2006/main" xmlns:p="http://schemas.openxmlformats.org/presentationml/2006/main" xmlns:r="http://schemas.openxmlformats.org/officeDocument/2006/relationships">
+  <p:cSld>
+    <p:spTree>
+      <p:nvGrpSpPr>
+        <p:cNvPr id="1" name=""/>
+        <p:cNvGrpSpPr/>
+        <p:nvPr/>
+      </p:nvGrpSpPr>
+      <p:grpSpPr>
+        <a:xfrm>
+          <a:off x="0" y="0"/>
+          <a:ext cx="0" cy="0"/>
+          <a:chOff x="0" y="0"/>
+          <a:chExt cx="0" cy="0"/>
+        </a:xfrm>
+      </p:grpSpPr>
+      <p:sp>
+        <p:nvSpPr>
+          <p:cNvPr id="2" name="Slide Image Placeholder 1"/>
+          <p:cNvSpPr>
+            <a:spLocks noGrp="1"/>
+          </p:cNvSpPr>
+          <p:nvPr>
+            <p:ph type="sldImg" idx="3"/>
+          </p:nvPr>
+        </p:nvSpPr>
+        <p:spPr/>
+      </p:sp>
+      <p:sp>
+        <p:nvSpPr>
+          <p:cNvPr id="3" name="Notes Placeholder 2"/>
+          <p:cNvSpPr>
+            <a:spLocks noGrp="1"/>
+          </p:cNvSpPr>
+          <p:nvPr>
+            <p:ph type="body" idx="1"/>
+          </p:nvPr>
+        </p:nvSpPr>
+        <p:spPr/>
+        <p:txBody>
+          <a:bodyPr/>
+          <a:lstStyle/>
+          <a:p>
+            <a:r>
+              <a:t>Et bonus du bonus : on a poussé Hermes côté praticien aussi.</a:t>
+            </a:r>
+          </a:p>
+          <a:p>
+            <a:r>
+              <a:t>Quand un patient prend un rendez-vous, le médecin reçoit automatiquement une notification dans son groupe Telegram. Et il peut interroger Hermes en retour avec des commandes : /aide, /rdv_aujourdhui, /rdv_demain, ou même en langage naturel via Gemini.</a:t>
+            </a:r>
+          </a:p>
+          <a:p>
+            <a:r>
+              <a:t>Pour la démo on a 2 groupes Telegram : Dr Lefebvre neurologue et Dr Benyahia endocrinologue. Mais l'infra est prête pour N praticiens.</a:t>
+            </a:r>
+          </a:p>
+          <a:p>
+            <a:r>
+              <a:t>Chaque groupe Telegram correspond à un seul médecin via le mapping Doctor.telegram_chat_id. Cloisonnement strict.</a:t>
+            </a:r>
+          </a:p>
+        </p:txBody>
+      </p:sp>
+      <p:sp>
+        <p:nvSpPr>
+          <p:cNvPr id="4" name="Slide Number Placeholder 3"/>
+          <p:cNvSpPr>
+            <a:spLocks noGrp="1"/>
+          </p:cNvSpPr>
+          <p:nvPr>
+            <p:ph type="sldNum" idx="12"/>
+          </p:nvPr>
+        </p:nvSpPr>
+        <p:spPr/>
+      </p:sp>
+    </p:spTree>
+  </p:cSld>
+  <p:clrMapOvr>
+    <a:masterClrMapping/>
+  </p:clrMapOvr>
+</p:notes>
+</file>
+
+<file path=ppt/notesSlides/notesSlide26.xml><?xml version="1.0" encoding="utf-8"?>
+<p:notes xmlns:a="http://schemas.openxmlformats.org/drawingml/2006/main" xmlns:p="http://schemas.openxmlformats.org/presentationml/2006/main" xmlns:r="http://schemas.openxmlformats.org/officeDocument/2006/relationships">
+  <p:cSld>
+    <p:spTree>
+      <p:nvGrpSpPr>
+        <p:cNvPr id="1" name=""/>
+        <p:cNvGrpSpPr/>
+        <p:nvPr/>
+      </p:nvGrpSpPr>
+      <p:grpSpPr>
+        <a:xfrm>
+          <a:off x="0" y="0"/>
+          <a:ext cx="0" cy="0"/>
+          <a:chOff x="0" y="0"/>
+          <a:chExt cx="0" cy="0"/>
+        </a:xfrm>
+      </p:grpSpPr>
+      <p:sp>
+        <p:nvSpPr>
+          <p:cNvPr id="2" name="Slide Image Placeholder 1"/>
+          <p:cNvSpPr>
+            <a:spLocks noGrp="1"/>
+          </p:cNvSpPr>
+          <p:nvPr>
+            <p:ph type="sldImg" idx="3"/>
+          </p:nvPr>
+        </p:nvSpPr>
+        <p:spPr/>
+      </p:sp>
+      <p:sp>
+        <p:nvSpPr>
+          <p:cNvPr id="3" name="Notes Placeholder 2"/>
+          <p:cNvSpPr>
+            <a:spLocks noGrp="1"/>
+          </p:cNvSpPr>
+          <p:nvPr>
+            <p:ph type="body" idx="1"/>
+          </p:nvPr>
+        </p:nvSpPr>
+        <p:spPr/>
+        <p:txBody>
+          <a:bodyPr/>
+          <a:lstStyle/>
+          <a:p>
+            <a:r>
+              <a:t>On a aussi pas voulu balancer Streamlit nu à l'utilisateur. Donc on a fait un site landing MediGuide à la racine, et le chatbot est intégré dedans via une page slash consulter avec iframe.</a:t>
+            </a:r>
+          </a:p>
+          <a:p>
+            <a:r>
+              <a:t>Comme ça l'utilisateur arrive sur un vrai site contextualisé, voit la mission, les sources, le disclaimer, puis lance l'assistant. C'est plus pro qu'un Streamlit qui démarre direct.</a:t>
+            </a:r>
+          </a:p>
+          <a:p>
+            <a:r>
+              <a:t>On a aussi harmonisé tout le visuel — même palette teal, même font Inter — entre le site et le chatbot pour que ça fasse cohérent.</a:t>
+            </a:r>
+          </a:p>
+        </p:txBody>
+      </p:sp>
+      <p:sp>
+        <p:nvSpPr>
+          <p:cNvPr id="4" name="Slide Number Placeholder 3"/>
+          <p:cNvSpPr>
+            <a:spLocks noGrp="1"/>
+          </p:cNvSpPr>
+          <p:nvPr>
+            <p:ph type="sldNum" idx="12"/>
+          </p:nvPr>
+        </p:nvSpPr>
+        <p:spPr/>
+      </p:sp>
+    </p:spTree>
+  </p:cSld>
+  <p:clrMapOvr>
+    <a:masterClrMapping/>
+  </p:clrMapOvr>
+</p:notes>
+</file>
+
+<file path=ppt/notesSlides/notesSlide27.xml><?xml version="1.0" encoding="utf-8"?>
+<p:notes xmlns:a="http://schemas.openxmlformats.org/drawingml/2006/main" xmlns:p="http://schemas.openxmlformats.org/presentationml/2006/main" xmlns:r="http://schemas.openxmlformats.org/officeDocument/2006/relationships">
+  <p:cSld>
+    <p:spTree>
+      <p:nvGrpSpPr>
+        <p:cNvPr id="1" name=""/>
+        <p:cNvGrpSpPr/>
+        <p:nvPr/>
+      </p:nvGrpSpPr>
+      <p:grpSpPr>
+        <a:xfrm>
+          <a:off x="0" y="0"/>
+          <a:ext cx="0" cy="0"/>
+          <a:chOff x="0" y="0"/>
+          <a:chExt cx="0" cy="0"/>
+        </a:xfrm>
+      </p:grpSpPr>
+      <p:sp>
+        <p:nvSpPr>
+          <p:cNvPr id="2" name="Slide Image Placeholder 1"/>
+          <p:cNvSpPr>
+            <a:spLocks noGrp="1"/>
+          </p:cNvSpPr>
+          <p:nvPr>
+            <p:ph type="sldImg" idx="3"/>
+          </p:nvPr>
+        </p:nvSpPr>
+        <p:spPr/>
+      </p:sp>
+      <p:sp>
+        <p:nvSpPr>
+          <p:cNvPr id="3" name="Notes Placeholder 2"/>
+          <p:cNvSpPr>
+            <a:spLocks noGrp="1"/>
+          </p:cNvSpPr>
+          <p:nvPr>
+            <p:ph type="body" idx="1"/>
+          </p:nvPr>
+        </p:nvSpPr>
+        <p:spPr/>
+        <p:txBody>
+          <a:bodyPr/>
+          <a:lstStyle/>
+          <a:p>
+            <a:r>
+              <a:t>Petit récap de la cohérence UX qu'on a soignée.</a:t>
+            </a:r>
+          </a:p>
+          <a:p>
+            <a:r>
+              <a:t>Cohérence visuelle : même palette teal et même font Inter entre site et chatbot.</a:t>
+            </a:r>
+          </a:p>
+          <a:p>
+            <a:r>
+              <a:t>Badges de sources : chaque réponse affiche d'où vient l'info, documents officiels ou recherche web.</a:t>
+            </a:r>
+          </a:p>
+          <a:p>
+            <a:r>
+              <a:t>Mes rendez-vous : section permanente dans la sidebar, l'utilisateur retrouve ses RDV à chaque visite.</a:t>
+            </a:r>
+          </a:p>
+          <a:p>
+            <a:r>
+              <a:t>Et auto-rename des sessions : le titre devient les premiers caractères du message, comme ça la sidebar reste lisible.</a:t>
+            </a:r>
+          </a:p>
+        </p:txBody>
+      </p:sp>
+      <p:sp>
+        <p:nvSpPr>
+          <p:cNvPr id="4" name="Slide Number Placeholder 3"/>
+          <p:cNvSpPr>
+            <a:spLocks noGrp="1"/>
+          </p:cNvSpPr>
+          <p:nvPr>
+            <p:ph type="sldNum" idx="12"/>
+          </p:nvPr>
+        </p:nvSpPr>
+        <p:spPr/>
       </p:sp>
     </p:spTree>
   </p:cSld>
@@ -4201,19 +4562,24 @@
           </a:bodyPr>
           <a:lstStyle/>
           <a:p>
-            <a:pPr indent="0" lvl="0" marL="0" rtl="0" algn="l">
-              <a:spcBef>
-                <a:spcPts val="0"/>
-              </a:spcBef>
-              <a:spcAft>
-                <a:spcPts val="0"/>
-              </a:spcAft>
-              <a:buNone/>
-            </a:pPr>
-            <a:r>
-              <a:t/>
-            </a:r>
-            <a:endParaRPr/>
+            <a:r>
+              <a:t>Petite parenthèse pour répondre à une question qui revient souvent.</a:t>
+            </a:r>
+          </a:p>
+          <a:p>
+            <a:r>
+              <a:t>La SAE elle nous demande pas de créer un LLM from scratch, c'est impossible en BUT 3 de toute façon.</a:t>
+            </a:r>
+          </a:p>
+          <a:p>
+            <a:r>
+              <a:t>L'analogie c'est qu'on réinvente pas le moteur d'une voiture, on construit le châssis autour.</a:t>
+            </a:r>
+          </a:p>
+          <a:p>
+            <a:r>
+              <a:t>Le vrai boulot c'est : le pipeline RAG, l'orchestration du backend, le prompt engineering, la comparaison de modèles. C'est ça la SAE.</a:t>
+            </a:r>
           </a:p>
         </p:txBody>
       </p:sp>
@@ -4358,19 +4724,29 @@
           </a:bodyPr>
           <a:lstStyle/>
           <a:p>
-            <a:pPr indent="0" lvl="0" marL="0" rtl="0" algn="l">
-              <a:spcBef>
-                <a:spcPts val="0"/>
-              </a:spcBef>
-              <a:spcAft>
-                <a:spcPts val="0"/>
-              </a:spcAft>
-              <a:buNone/>
-            </a:pPr>
-            <a:r>
-              <a:t/>
-            </a:r>
-            <a:endParaRPr/>
+            <a:r>
+              <a:t>Voilà le récap de notre stack. Frontend en Streamlit, backend FastAPI avec SQLAlchemy, auth JWT.</a:t>
+            </a:r>
+          </a:p>
+          <a:p>
+            <a:r>
+              <a:t>Pour le RAG on a LangChain comme imposé dans le sujet, et ChromaDB comme base vectorielle.</a:t>
+            </a:r>
+          </a:p>
+          <a:p>
+            <a:r>
+              <a:t>Embeddings avec all-MiniLM-L6-v2 qu'on a comparé à 2 autres.</a:t>
+            </a:r>
+          </a:p>
+          <a:p>
+            <a:r>
+              <a:t>Côté LLM, on utilise Gemini 2.5 Flash en prod, et Mistral via OpenRouter en dev avec un fallback.</a:t>
+            </a:r>
+          </a:p>
+          <a:p>
+            <a:r>
+              <a:t>On a aussi ajouté un fallback DuckDuckGo en bonus, et la base SQLite pour les sessions.</a:t>
+            </a:r>
           </a:p>
         </p:txBody>
       </p:sp>
@@ -4515,19 +4891,29 @@
           </a:bodyPr>
           <a:lstStyle/>
           <a:p>
-            <a:pPr indent="0" lvl="0" marL="0" rtl="0" algn="l">
-              <a:spcBef>
-                <a:spcPts val="0"/>
-              </a:spcBef>
-              <a:spcAft>
-                <a:spcPts val="0"/>
-              </a:spcAft>
-              <a:buNone/>
-            </a:pPr>
-            <a:r>
-              <a:t/>
-            </a:r>
-            <a:endParaRPr/>
+            <a:r>
+              <a:t>Et voilà l'archi générale. Le patient écrit dans Streamlit, ça part vers FastAPI qui gère l'auth et les sessions.</a:t>
+            </a:r>
+          </a:p>
+          <a:p>
+            <a:r>
+              <a:t>Le pipeline RAG va chercher dans ChromaDB qui a indexé tous nos PDFs HAS et INCa.</a:t>
+            </a:r>
+          </a:p>
+          <a:p>
+            <a:r>
+              <a:t>Si le score est mauvais, on bascule sur DuckDuckGo en filet de sécurité — c'est notre premier bonus.</a:t>
+            </a:r>
+          </a:p>
+          <a:p>
+            <a:r>
+              <a:t>Le prompt assemblé part au LLM qui renvoie la réponse. Et après, Hermes peut aussi prendre le relais pour orienter vers un spécialiste, c'est notre deuxième bonus.</a:t>
+            </a:r>
+          </a:p>
+          <a:p>
+            <a:r>
+              <a:t>Important : l'API est jamais exposée publiquement, tout passe par le réseau interne Docker.</a:t>
+            </a:r>
           </a:p>
         </p:txBody>
       </p:sp>
@@ -4986,19 +5372,34 @@
           </a:bodyPr>
           <a:lstStyle/>
           <a:p>
-            <a:pPr indent="0" lvl="0" marL="0" rtl="0" algn="l">
-              <a:spcBef>
-                <a:spcPts val="0"/>
-              </a:spcBef>
-              <a:spcAft>
-                <a:spcPts val="0"/>
-              </a:spcAft>
-              <a:buNone/>
-            </a:pPr>
-            <a:r>
-              <a:t/>
-            </a:r>
-            <a:endParaRPr/>
+            <a:r>
+              <a:t>Donc moi je prends la suite pour vous expliquer comment on traite les PDFs.</a:t>
+            </a:r>
+          </a:p>
+          <a:p>
+            <a:r>
+              <a:t>On a 5 PDFs officiels qui couvrent 3 maladies : le diabète, Alzheimer et le cancer du poumon, tous sourcés HAS et INCa.</a:t>
+            </a:r>
+          </a:p>
+          <a:p>
+            <a:r>
+              <a:t>PyPDFLoader lit page par page. Ensuite on découpe avec RecursiveCharacterTextSplitter en morceaux de 500 caractères avec un chevauchement de 50.</a:t>
+            </a:r>
+          </a:p>
+          <a:p>
+            <a:r>
+              <a:t>Chaque morceau passe par MiniLM qui le transforme en vecteur de 384 nombres.</a:t>
+            </a:r>
+          </a:p>
+          <a:p>
+            <a:r>
+              <a:t>Et on stocke le tout dans ChromaDB. Au total ça fait 971 chunks indexés.</a:t>
+            </a:r>
+          </a:p>
+          <a:p>
+            <a:r>
+              <a:t>Ce qui est important c'est que cette étape se fait une seule fois, au démarrage. Pas à chaque requête.</a:t>
+            </a:r>
           </a:p>
         </p:txBody>
       </p:sp>
@@ -5143,19 +5544,24 @@
           </a:bodyPr>
           <a:lstStyle/>
           <a:p>
-            <a:pPr indent="0" lvl="0" marL="0" rtl="0" algn="l">
-              <a:spcBef>
-                <a:spcPts val="0"/>
-              </a:spcBef>
-              <a:spcAft>
-                <a:spcPts val="0"/>
-              </a:spcAft>
-              <a:buNone/>
-            </a:pPr>
-            <a:r>
-              <a:t/>
-            </a:r>
-            <a:endParaRPr/>
+            <a:r>
+              <a:t>Alors pourquoi 50 caractères de chevauchement ? C'est une question qu'on peut se poser.</a:t>
+            </a:r>
+          </a:p>
+          <a:p>
+            <a:r>
+              <a:t>Sans chevauchement, une phrase clé peut se retrouver coupée en deux entre 2 chunks. Par exemple ici, "repose sur la metfor" / "mine en première intention" — du coup la phrase complète est perdue.</a:t>
+            </a:r>
+          </a:p>
+          <a:p>
+            <a:r>
+              <a:t>Avec 50 caractères de recouvrement, le chunk suivant recule un peu avant de repartir. Comme ça la phrase "repose sur la metformine" se retrouve intacte dans au moins un chunk.</a:t>
+            </a:r>
+          </a:p>
+          <a:p>
+            <a:r>
+              <a:t>C'est un petit détail mais ça change la qualité du retrieval.</a:t>
+            </a:r>
           </a:p>
         </p:txBody>
       </p:sp>
@@ -6441,6 +6847,9 @@
   <p:clrMapOvr>
     <a:masterClrMapping/>
   </p:clrMapOvr>
+  <p:transition spd="med">
+    <p:fade/>
+  </p:transition>
 </p:sld>
 </file>
 
@@ -7678,6 +8087,9 @@
   <p:clrMapOvr>
     <a:masterClrMapping/>
   </p:clrMapOvr>
+  <p:transition spd="med">
+    <p:fade/>
+  </p:transition>
 </p:sld>
 </file>
 
@@ -9221,6 +9633,9 @@
   <p:clrMapOvr>
     <a:masterClrMapping/>
   </p:clrMapOvr>
+  <p:transition spd="med">
+    <p:fade/>
+  </p:transition>
 </p:sld>
 </file>
 
@@ -10216,6 +10631,9 @@
   <p:clrMapOvr>
     <a:masterClrMapping/>
   </p:clrMapOvr>
+  <p:transition spd="med">
+    <p:fade/>
+  </p:transition>
 </p:sld>
 </file>
 
@@ -10623,6 +11041,9 @@
   <p:clrMapOvr>
     <a:masterClrMapping/>
   </p:clrMapOvr>
+  <p:transition spd="med">
+    <p:fade/>
+  </p:transition>
 </p:sld>
 </file>
 
@@ -12015,6 +12436,9 @@
   <p:clrMapOvr>
     <a:masterClrMapping/>
   </p:clrMapOvr>
+  <p:transition spd="med">
+    <p:fade/>
+  </p:transition>
 </p:sld>
 </file>
 
@@ -13402,6 +13826,9 @@
   <p:clrMapOvr>
     <a:masterClrMapping/>
   </p:clrMapOvr>
+  <p:transition spd="med">
+    <p:fade/>
+  </p:transition>
 </p:sld>
 </file>
 
@@ -14351,6 +14778,9 @@
   <p:clrMapOvr>
     <a:masterClrMapping/>
   </p:clrMapOvr>
+  <p:transition spd="med">
+    <p:fade/>
+  </p:transition>
 </p:sld>
 </file>
 
@@ -15454,6 +15884,9 @@
   <p:clrMapOvr>
     <a:masterClrMapping/>
   </p:clrMapOvr>
+  <p:transition spd="med">
+    <p:fade/>
+  </p:transition>
 </p:sld>
 </file>
 
@@ -15861,6 +16294,9 @@
   <p:clrMapOvr>
     <a:masterClrMapping/>
   </p:clrMapOvr>
+  <p:transition spd="med">
+    <p:fade/>
+  </p:transition>
 </p:sld>
 </file>
 
@@ -17167,6 +17603,9 @@
   <p:clrMapOvr>
     <a:masterClrMapping/>
   </p:clrMapOvr>
+  <p:transition spd="med">
+    <p:fade/>
+  </p:transition>
 </p:sld>
 </file>
 
@@ -17537,6 +17976,9 @@
   <p:clrMapOvr>
     <a:masterClrMapping/>
   </p:clrMapOvr>
+  <p:transition spd="med">
+    <p:fade/>
+  </p:transition>
 </p:sld>
 </file>
 
@@ -18829,6 +19271,9 @@
   <p:clrMapOvr>
     <a:masterClrMapping/>
   </p:clrMapOvr>
+  <p:transition spd="med">
+    <p:fade/>
+  </p:transition>
 </p:sld>
 </file>
 
@@ -19820,6 +20265,9 @@
   <p:clrMapOvr>
     <a:masterClrMapping/>
   </p:clrMapOvr>
+  <p:transition spd="med">
+    <p:fade/>
+  </p:transition>
 </p:sld>
 </file>
 
@@ -20867,6 +21315,9 @@
   <p:clrMapOvr>
     <a:masterClrMapping/>
   </p:clrMapOvr>
+  <p:transition spd="med">
+    <p:fade/>
+  </p:transition>
 </p:sld>
 </file>
 
@@ -21900,6 +22351,9 @@
   <p:clrMapOvr>
     <a:masterClrMapping/>
   </p:clrMapOvr>
+  <p:transition spd="med">
+    <p:fade/>
+  </p:transition>
 </p:sld>
 </file>
 
@@ -23104,6 +23558,9 @@
   <p:clrMapOvr>
     <a:masterClrMapping/>
   </p:clrMapOvr>
+  <p:transition spd="med">
+    <p:fade/>
+  </p:transition>
 </p:sld>
 </file>
 
@@ -24137,6 +24594,9 @@
   <p:clrMapOvr>
     <a:masterClrMapping/>
   </p:clrMapOvr>
+  <p:transition spd="med">
+    <p:fade/>
+  </p:transition>
 </p:sld>
 </file>
 
@@ -25184,6 +25644,9 @@
   <p:clrMapOvr>
     <a:masterClrMapping/>
   </p:clrMapOvr>
+  <p:transition spd="med">
+    <p:fade/>
+  </p:transition>
 </p:sld>
 </file>
 
@@ -25673,11 +26136,594 @@
           </a:p>
         </p:txBody>
       </p:sp>
+      <p:pic>
+        <p:nvPicPr>
+          <p:cNvPr id="468" name="Picture 467" descr="qr-mediguide.png"/>
+          <p:cNvPicPr>
+            <a:picLocks noChangeAspect="1"/>
+          </p:cNvPicPr>
+          <p:nvPr/>
+        </p:nvPicPr>
+        <p:blipFill>
+          <a:blip r:embed="rId3"/>
+          <a:stretch>
+            <a:fillRect/>
+          </a:stretch>
+        </p:blipFill>
+        <p:spPr>
+          <a:xfrm>
+            <a:off x="6766560" y="2926080"/>
+            <a:ext cx="1737360" cy="1737360"/>
+          </a:xfrm>
+          <a:prstGeom prst="rect">
+            <a:avLst/>
+          </a:prstGeom>
+        </p:spPr>
+      </p:pic>
+      <p:sp>
+        <p:nvSpPr>
+          <p:cNvPr id="469" name="TextBox 468"/>
+          <p:cNvSpPr txBox="1"/>
+          <p:nvPr/>
+        </p:nvSpPr>
+        <p:spPr>
+          <a:xfrm>
+            <a:off x="6766560" y="4754880"/>
+            <a:ext cx="1737360" cy="274320"/>
+          </a:xfrm>
+          <a:prstGeom prst="rect">
+            <a:avLst/>
+          </a:prstGeom>
+          <a:noFill/>
+        </p:spPr>
+        <p:txBody>
+          <a:bodyPr wrap="none">
+            <a:spAutoFit/>
+          </a:bodyPr>
+          <a:lstStyle/>
+          <a:p>
+            <a:pPr algn="ctr"/>
+            <a:r>
+              <a:rPr sz="1000">
+                <a:solidFill>
+                  <a:srgbClr val="CCFBF1"/>
+                </a:solidFill>
+                <a:latin typeface="Inter"/>
+              </a:rPr>
+              <a:t>Scan → MediGuide</a:t>
+            </a:r>
+          </a:p>
+        </p:txBody>
+      </p:sp>
     </p:spTree>
   </p:cSld>
   <p:clrMapOvr>
     <a:masterClrMapping/>
   </p:clrMapOvr>
+  <p:transition spd="med">
+    <p:fade/>
+  </p:transition>
+</p:sld>
+</file>
+
+<file path=ppt/slides/slide28.xml><?xml version="1.0" encoding="utf-8"?>
+<p:sld xmlns:a="http://schemas.openxmlformats.org/drawingml/2006/main" xmlns:p="http://schemas.openxmlformats.org/presentationml/2006/main" xmlns:r="http://schemas.openxmlformats.org/officeDocument/2006/relationships">
+  <p:cSld>
+    <p:bg>
+      <p:bgPr>
+        <a:solidFill>
+          <a:srgbClr val="134e4a"/>
+        </a:solidFill>
+        <a:effectLst/>
+      </p:bgPr>
+    </p:bg>
+    <p:spTree>
+      <p:nvGrpSpPr>
+        <p:cNvPr id="1" name=""/>
+        <p:cNvGrpSpPr/>
+        <p:nvPr/>
+      </p:nvGrpSpPr>
+      <p:grpSpPr/>
+      <p:sp>
+        <p:nvSpPr>
+          <p:cNvPr id="2" name="TextBox 1"/>
+          <p:cNvSpPr txBox="1"/>
+          <p:nvPr/>
+        </p:nvSpPr>
+        <p:spPr>
+          <a:xfrm>
+            <a:off x="548640" y="457200"/>
+            <a:ext cx="8229600" cy="1097280"/>
+          </a:xfrm>
+          <a:prstGeom prst="rect">
+            <a:avLst/>
+          </a:prstGeom>
+          <a:noFill/>
+        </p:spPr>
+        <p:txBody>
+          <a:bodyPr wrap="square">
+            <a:spAutoFit/>
+          </a:bodyPr>
+          <a:lstStyle/>
+          <a:p>
+            <a:pPr algn="l"/>
+            <a:r>
+              <a:rPr sz="4000" b="1">
+                <a:solidFill>
+                  <a:srgbClr val="FFFFFF"/>
+                </a:solidFill>
+                <a:latin typeface="Inter"/>
+              </a:rPr>
+              <a:t>Sommaire</a:t>
+            </a:r>
+          </a:p>
+          <a:p>
+            <a:pPr algn="l"/>
+            <a:r>
+              <a:rPr sz="1400">
+                <a:solidFill>
+                  <a:srgbClr val="CCFBF1"/>
+                </a:solidFill>
+                <a:latin typeface="Inter"/>
+              </a:rPr>
+              <a:t>Chatbot médical RAG · 15 minutes · 4 intervenants</a:t>
+            </a:r>
+          </a:p>
+        </p:txBody>
+      </p:sp>
+      <p:sp>
+        <p:nvSpPr>
+          <p:cNvPr id="3" name="TextBox 2"/>
+          <p:cNvSpPr txBox="1"/>
+          <p:nvPr/>
+        </p:nvSpPr>
+        <p:spPr>
+          <a:xfrm>
+            <a:off x="548640" y="2011680"/>
+            <a:ext cx="822960" cy="594360"/>
+          </a:xfrm>
+          <a:prstGeom prst="rect">
+            <a:avLst/>
+          </a:prstGeom>
+          <a:noFill/>
+        </p:spPr>
+        <p:txBody>
+          <a:bodyPr wrap="none" lIns="25400" rIns="25400" tIns="25400" bIns="25400">
+            <a:spAutoFit/>
+          </a:bodyPr>
+          <a:lstStyle/>
+          <a:p>
+            <a:pPr algn="l"/>
+            <a:r>
+              <a:rPr sz="2800" b="1">
+                <a:solidFill>
+                  <a:srgbClr val="14B8A6"/>
+                </a:solidFill>
+                <a:latin typeface="Consolas"/>
+              </a:rPr>
+              <a:t>01</a:t>
+            </a:r>
+          </a:p>
+        </p:txBody>
+      </p:sp>
+      <p:sp>
+        <p:nvSpPr>
+          <p:cNvPr id="4" name="TextBox 3"/>
+          <p:cNvSpPr txBox="1"/>
+          <p:nvPr/>
+        </p:nvSpPr>
+        <p:spPr>
+          <a:xfrm>
+            <a:off x="1554480" y="2011680"/>
+            <a:ext cx="7040880" cy="640080"/>
+          </a:xfrm>
+          <a:prstGeom prst="rect">
+            <a:avLst/>
+          </a:prstGeom>
+          <a:noFill/>
+        </p:spPr>
+        <p:txBody>
+          <a:bodyPr wrap="none" lIns="25400" rIns="25400" tIns="25400" bIns="25400">
+            <a:spAutoFit/>
+          </a:bodyPr>
+          <a:lstStyle/>
+          <a:p>
+            <a:pPr algn="l"/>
+            <a:r>
+              <a:rPr sz="1800" b="1">
+                <a:solidFill>
+                  <a:srgbClr val="FFFFFF"/>
+                </a:solidFill>
+                <a:latin typeface="Inter"/>
+              </a:rPr>
+              <a:t>Contexte &amp; Architecture</a:t>
+            </a:r>
+          </a:p>
+          <a:p>
+            <a:pPr algn="l"/>
+            <a:r>
+              <a:rPr sz="1100">
+                <a:solidFill>
+                  <a:srgbClr val="5EEAD4"/>
+                </a:solidFill>
+                <a:latin typeface="Inter"/>
+              </a:rPr>
+              <a:t>Grace · slides 2 à 5</a:t>
+            </a:r>
+          </a:p>
+        </p:txBody>
+      </p:sp>
+      <p:sp>
+        <p:nvSpPr>
+          <p:cNvPr id="5" name="TextBox 4"/>
+          <p:cNvSpPr txBox="1"/>
+          <p:nvPr/>
+        </p:nvSpPr>
+        <p:spPr>
+          <a:xfrm>
+            <a:off x="548640" y="2788920"/>
+            <a:ext cx="822960" cy="594360"/>
+          </a:xfrm>
+          <a:prstGeom prst="rect">
+            <a:avLst/>
+          </a:prstGeom>
+          <a:noFill/>
+        </p:spPr>
+        <p:txBody>
+          <a:bodyPr wrap="none" lIns="25400" rIns="25400" tIns="25400" bIns="25400">
+            <a:spAutoFit/>
+          </a:bodyPr>
+          <a:lstStyle/>
+          <a:p>
+            <a:pPr algn="l"/>
+            <a:r>
+              <a:rPr sz="2800" b="1">
+                <a:solidFill>
+                  <a:srgbClr val="14B8A6"/>
+                </a:solidFill>
+                <a:latin typeface="Consolas"/>
+              </a:rPr>
+              <a:t>02</a:t>
+            </a:r>
+          </a:p>
+        </p:txBody>
+      </p:sp>
+      <p:sp>
+        <p:nvSpPr>
+          <p:cNvPr id="6" name="TextBox 5"/>
+          <p:cNvSpPr txBox="1"/>
+          <p:nvPr/>
+        </p:nvSpPr>
+        <p:spPr>
+          <a:xfrm>
+            <a:off x="1554480" y="2788920"/>
+            <a:ext cx="7040880" cy="640080"/>
+          </a:xfrm>
+          <a:prstGeom prst="rect">
+            <a:avLst/>
+          </a:prstGeom>
+          <a:noFill/>
+        </p:spPr>
+        <p:txBody>
+          <a:bodyPr wrap="none" lIns="25400" rIns="25400" tIns="25400" bIns="25400">
+            <a:spAutoFit/>
+          </a:bodyPr>
+          <a:lstStyle/>
+          <a:p>
+            <a:pPr algn="l"/>
+            <a:r>
+              <a:rPr sz="1800" b="1">
+                <a:solidFill>
+                  <a:srgbClr val="FFFFFF"/>
+                </a:solidFill>
+                <a:latin typeface="Inter"/>
+              </a:rPr>
+              <a:t>Traitement des PDFs &amp; Pipeline RAG</a:t>
+            </a:r>
+          </a:p>
+          <a:p>
+            <a:pPr algn="l"/>
+            <a:r>
+              <a:rPr sz="1100">
+                <a:solidFill>
+                  <a:srgbClr val="5EEAD4"/>
+                </a:solidFill>
+                <a:latin typeface="Inter"/>
+              </a:rPr>
+              <a:t>Yousra · slides 8 à 12</a:t>
+            </a:r>
+          </a:p>
+        </p:txBody>
+      </p:sp>
+      <p:sp>
+        <p:nvSpPr>
+          <p:cNvPr id="7" name="TextBox 6"/>
+          <p:cNvSpPr txBox="1"/>
+          <p:nvPr/>
+        </p:nvSpPr>
+        <p:spPr>
+          <a:xfrm>
+            <a:off x="548640" y="3566160"/>
+            <a:ext cx="822960" cy="594360"/>
+          </a:xfrm>
+          <a:prstGeom prst="rect">
+            <a:avLst/>
+          </a:prstGeom>
+          <a:noFill/>
+        </p:spPr>
+        <p:txBody>
+          <a:bodyPr wrap="none" lIns="25400" rIns="25400" tIns="25400" bIns="25400">
+            <a:spAutoFit/>
+          </a:bodyPr>
+          <a:lstStyle/>
+          <a:p>
+            <a:pPr algn="l"/>
+            <a:r>
+              <a:rPr sz="2800" b="1">
+                <a:solidFill>
+                  <a:srgbClr val="14B8A6"/>
+                </a:solidFill>
+                <a:latin typeface="Consolas"/>
+              </a:rPr>
+              <a:t>03</a:t>
+            </a:r>
+          </a:p>
+        </p:txBody>
+      </p:sp>
+      <p:sp>
+        <p:nvSpPr>
+          <p:cNvPr id="8" name="TextBox 7"/>
+          <p:cNvSpPr txBox="1"/>
+          <p:nvPr/>
+        </p:nvSpPr>
+        <p:spPr>
+          <a:xfrm>
+            <a:off x="1554480" y="3566160"/>
+            <a:ext cx="7040880" cy="640080"/>
+          </a:xfrm>
+          <a:prstGeom prst="rect">
+            <a:avLst/>
+          </a:prstGeom>
+          <a:noFill/>
+        </p:spPr>
+        <p:txBody>
+          <a:bodyPr wrap="none" lIns="25400" rIns="25400" tIns="25400" bIns="25400">
+            <a:spAutoFit/>
+          </a:bodyPr>
+          <a:lstStyle/>
+          <a:p>
+            <a:pPr algn="l"/>
+            <a:r>
+              <a:rPr sz="1800" b="1">
+                <a:solidFill>
+                  <a:srgbClr val="FFFFFF"/>
+                </a:solidFill>
+                <a:latin typeface="Inter"/>
+              </a:rPr>
+              <a:t>Comparaison encodeurs &amp; Bonus DuckDuckGo</a:t>
+            </a:r>
+          </a:p>
+          <a:p>
+            <a:pPr algn="l"/>
+            <a:r>
+              <a:rPr sz="1100">
+                <a:solidFill>
+                  <a:srgbClr val="5EEAD4"/>
+                </a:solidFill>
+                <a:latin typeface="Inter"/>
+              </a:rPr>
+              <a:t>Imane · slides 14 à 17</a:t>
+            </a:r>
+          </a:p>
+        </p:txBody>
+      </p:sp>
+      <p:sp>
+        <p:nvSpPr>
+          <p:cNvPr id="9" name="TextBox 8"/>
+          <p:cNvSpPr txBox="1"/>
+          <p:nvPr/>
+        </p:nvSpPr>
+        <p:spPr>
+          <a:xfrm>
+            <a:off x="548640" y="4343400"/>
+            <a:ext cx="822960" cy="594360"/>
+          </a:xfrm>
+          <a:prstGeom prst="rect">
+            <a:avLst/>
+          </a:prstGeom>
+          <a:noFill/>
+        </p:spPr>
+        <p:txBody>
+          <a:bodyPr wrap="none" lIns="25400" rIns="25400" tIns="25400" bIns="25400">
+            <a:spAutoFit/>
+          </a:bodyPr>
+          <a:lstStyle/>
+          <a:p>
+            <a:pPr algn="l"/>
+            <a:r>
+              <a:rPr sz="2800" b="1">
+                <a:solidFill>
+                  <a:srgbClr val="14B8A6"/>
+                </a:solidFill>
+                <a:latin typeface="Consolas"/>
+              </a:rPr>
+              <a:t>04</a:t>
+            </a:r>
+          </a:p>
+        </p:txBody>
+      </p:sp>
+      <p:sp>
+        <p:nvSpPr>
+          <p:cNvPr id="10" name="TextBox 9"/>
+          <p:cNvSpPr txBox="1"/>
+          <p:nvPr/>
+        </p:nvSpPr>
+        <p:spPr>
+          <a:xfrm>
+            <a:off x="1554480" y="4343400"/>
+            <a:ext cx="7040880" cy="640080"/>
+          </a:xfrm>
+          <a:prstGeom prst="rect">
+            <a:avLst/>
+          </a:prstGeom>
+          <a:noFill/>
+        </p:spPr>
+        <p:txBody>
+          <a:bodyPr wrap="none" lIns="25400" rIns="25400" tIns="25400" bIns="25400">
+            <a:spAutoFit/>
+          </a:bodyPr>
+          <a:lstStyle/>
+          <a:p>
+            <a:pPr algn="l"/>
+            <a:r>
+              <a:rPr sz="1800" b="1">
+                <a:solidFill>
+                  <a:srgbClr val="FFFFFF"/>
+                </a:solidFill>
+                <a:latin typeface="Inter"/>
+              </a:rPr>
+              <a:t>Hermes, Déploiement &amp; Démo</a:t>
+            </a:r>
+          </a:p>
+          <a:p>
+            <a:pPr algn="l"/>
+            <a:r>
+              <a:rPr sz="1100">
+                <a:solidFill>
+                  <a:srgbClr val="5EEAD4"/>
+                </a:solidFill>
+                <a:latin typeface="Inter"/>
+              </a:rPr>
+              <a:t>Yannis · slides 19 à 26</a:t>
+            </a:r>
+          </a:p>
+        </p:txBody>
+      </p:sp>
+      <p:sp>
+        <p:nvSpPr>
+          <p:cNvPr id="11" name="TextBox 10"/>
+          <p:cNvSpPr txBox="1"/>
+          <p:nvPr/>
+        </p:nvSpPr>
+        <p:spPr>
+          <a:xfrm>
+            <a:off x="548640" y="5120640"/>
+            <a:ext cx="822960" cy="594360"/>
+          </a:xfrm>
+          <a:prstGeom prst="rect">
+            <a:avLst/>
+          </a:prstGeom>
+          <a:noFill/>
+        </p:spPr>
+        <p:txBody>
+          <a:bodyPr wrap="none" lIns="25400" rIns="25400" tIns="25400" bIns="25400">
+            <a:spAutoFit/>
+          </a:bodyPr>
+          <a:lstStyle/>
+          <a:p>
+            <a:pPr algn="l"/>
+            <a:r>
+              <a:rPr sz="2800" b="1">
+                <a:solidFill>
+                  <a:srgbClr val="14B8A6"/>
+                </a:solidFill>
+                <a:latin typeface="Consolas"/>
+              </a:rPr>
+              <a:t>05</a:t>
+            </a:r>
+          </a:p>
+        </p:txBody>
+      </p:sp>
+      <p:sp>
+        <p:nvSpPr>
+          <p:cNvPr id="12" name="TextBox 11"/>
+          <p:cNvSpPr txBox="1"/>
+          <p:nvPr/>
+        </p:nvSpPr>
+        <p:spPr>
+          <a:xfrm>
+            <a:off x="1554480" y="5120640"/>
+            <a:ext cx="7040880" cy="640080"/>
+          </a:xfrm>
+          <a:prstGeom prst="rect">
+            <a:avLst/>
+          </a:prstGeom>
+          <a:noFill/>
+        </p:spPr>
+        <p:txBody>
+          <a:bodyPr wrap="none" lIns="25400" rIns="25400" tIns="25400" bIns="25400">
+            <a:spAutoFit/>
+          </a:bodyPr>
+          <a:lstStyle/>
+          <a:p>
+            <a:pPr algn="l"/>
+            <a:r>
+              <a:rPr sz="1800" b="1">
+                <a:solidFill>
+                  <a:srgbClr val="FFFFFF"/>
+                </a:solidFill>
+                <a:latin typeface="Inter"/>
+              </a:rPr>
+              <a:t>Conclusion &amp; Questions</a:t>
+            </a:r>
+          </a:p>
+          <a:p>
+            <a:pPr algn="l"/>
+            <a:r>
+              <a:rPr sz="1100">
+                <a:solidFill>
+                  <a:srgbClr val="5EEAD4"/>
+                </a:solidFill>
+                <a:latin typeface="Inter"/>
+              </a:rPr>
+              <a:t>Tous · slide 28</a:t>
+            </a:r>
+          </a:p>
+        </p:txBody>
+      </p:sp>
+      <p:sp>
+        <p:nvSpPr>
+          <p:cNvPr id="13" name="TextBox 12"/>
+          <p:cNvSpPr txBox="1"/>
+          <p:nvPr/>
+        </p:nvSpPr>
+        <p:spPr>
+          <a:xfrm>
+            <a:off x="548640" y="6400800"/>
+            <a:ext cx="8229600" cy="365760"/>
+          </a:xfrm>
+          <a:prstGeom prst="rect">
+            <a:avLst/>
+          </a:prstGeom>
+          <a:noFill/>
+        </p:spPr>
+        <p:txBody>
+          <a:bodyPr wrap="none">
+            <a:spAutoFit/>
+          </a:bodyPr>
+          <a:lstStyle/>
+          <a:p>
+            <a:pPr algn="l"/>
+            <a:r>
+              <a:rPr sz="1000">
+                <a:solidFill>
+                  <a:srgbClr val="CCFBF1"/>
+                </a:solidFill>
+                <a:latin typeface="Inter"/>
+              </a:rPr>
+              <a:t>Yousra · Imane · Yannis · Grace   ─   sae.amanawebagency.com</a:t>
+            </a:r>
+          </a:p>
+        </p:txBody>
+      </p:sp>
+    </p:spTree>
+  </p:cSld>
+  <p:clrMapOvr>
+    <a:masterClrMapping/>
+  </p:clrMapOvr>
+  <p:transition spd="med">
+    <p:fade/>
+  </p:transition>
 </p:sld>
 </file>
 
@@ -26781,6 +27827,9 @@
   <p:clrMapOvr>
     <a:masterClrMapping/>
   </p:clrMapOvr>
+  <p:transition spd="med">
+    <p:fade/>
+  </p:transition>
 </p:sld>
 </file>
 
@@ -27598,6 +28647,9 @@
   <p:clrMapOvr>
     <a:masterClrMapping/>
   </p:clrMapOvr>
+  <p:transition spd="med">
+    <p:fade/>
+  </p:transition>
 </p:sld>
 </file>
 
@@ -29256,6 +30308,9 @@
   <p:clrMapOvr>
     <a:masterClrMapping/>
   </p:clrMapOvr>
+  <p:transition spd="med">
+    <p:fade/>
+  </p:transition>
 </p:sld>
 </file>
 
@@ -30479,6 +31534,9 @@
   <p:clrMapOvr>
     <a:masterClrMapping/>
   </p:clrMapOvr>
+  <p:transition spd="med">
+    <p:fade/>
+  </p:transition>
 </p:sld>
 </file>
 
@@ -30886,6 +31944,9 @@
   <p:clrMapOvr>
     <a:masterClrMapping/>
   </p:clrMapOvr>
+  <p:transition spd="med">
+    <p:fade/>
+  </p:transition>
 </p:sld>
 </file>
 
@@ -32439,6 +33500,9 @@
   <p:clrMapOvr>
     <a:masterClrMapping/>
   </p:clrMapOvr>
+  <p:transition spd="med">
+    <p:fade/>
+  </p:transition>
 </p:sld>
 </file>
 
@@ -33343,6 +34407,9 @@
   <p:clrMapOvr>
     <a:masterClrMapping/>
   </p:clrMapOvr>
+  <p:transition spd="med">
+    <p:fade/>
+  </p:transition>
 </p:sld>
 </file>
 

--- a/docs/soutenance.pptx
+++ b/docs/soutenance.pptx
@@ -1534,7 +1534,23 @@
           <a:lstStyle/>
           <a:p>
             <a:r>
-              <a:t>Bonjour à tous. Donc voilà, nous c'est Yousra, Imane, Yannis et Grace.</a:t>
+              <a:t>━━━━━━━━━━━━━━━━━━━━━━━━━━━━━━━━</a:t>
+            </a:r>
+          </a:p>
+          <a:p>
+            <a:r>
+              <a:t>🎤  TOUS · Intro  ·  slide 1/28  ·  ~30s</a:t>
+            </a:r>
+          </a:p>
+          <a:p>
+            <a:r>
+              <a:t>━━━━━━━━━━━━━━━━━━━━━━━━━━━━━━━━</a:t>
+            </a:r>
+          </a:p>
+          <a:p/>
+          <a:p>
+            <a:r>
+              <a:t>Bonjour à tous. Nous c'est Yousra, Imane, Yannis et Grace.</a:t>
             </a:r>
           </a:p>
           <a:p>
@@ -1549,7 +1565,13 @@
           </a:p>
           <a:p>
             <a:r>
-              <a:t>On a tout déployé en prod, vous pouvez tester sur sae.amanawebagency.com ou flasher le QR code à la fin.</a:t>
+              <a:t>Tout est déployé en prod, vous pouvez le tester sur sae.amanawebagency.com ou flasher le QR code à la fin.</a:t>
+            </a:r>
+          </a:p>
+          <a:p/>
+          <a:p>
+            <a:r>
+              <a:t>────  🎙  PASSE LA PAROLE À : GRACE  ────</a:t>
             </a:r>
           </a:p>
         </p:txBody>
@@ -1696,27 +1718,38 @@
           <a:lstStyle/>
           <a:p>
             <a:r>
+              <a:t>━━━━━━━━━━━━━━━━━━━━━━━━━━━━━━━━</a:t>
+            </a:r>
+          </a:p>
+          <a:p>
+            <a:r>
+              <a:t>🎤  YOUSRA  ·  slide 11/28  ·  ~35s</a:t>
+            </a:r>
+          </a:p>
+          <a:p>
+            <a:r>
+              <a:t>━━━━━━━━━━━━━━━━━━━━━━━━━━━━━━━━</a:t>
+            </a:r>
+          </a:p>
+          <a:p/>
+          <a:p>
+            <a:r>
               <a:t>Et MiniLM dans tout ça, c'est quoi son rôle exactement ?</a:t>
             </a:r>
           </a:p>
           <a:p>
             <a:r>
-              <a:t>C'est un modèle d'embeddings qui transforme n'importe quel texte en un vecteur de 384 nombres. Et ce vecteur capture le SENS du texte, pas juste les mots.</a:t>
-            </a:r>
-          </a:p>
-          <a:p>
-            <a:r>
-              <a:t>Donc 500 c'est la taille du chunk en caractères, et 384 c'est la taille du vecteur. C'est fixe peu importe la longueur du texte.</a:t>
-            </a:r>
-          </a:p>
-          <a:p>
-            <a:r>
-              <a:t>L'exemple : "fièvre" et "température élevée" donnent des vecteurs proches, parce que sémantiquement c'est la même idée.</a:t>
-            </a:r>
-          </a:p>
-          <a:p>
-            <a:r>
-              <a:t>Et c'est ça qui permet de retrouver les bons passages quand un patient pose une question.</a:t>
+              <a:t>C'est un modèle d'embeddings qui transforme n'importe quel texte en un vecteur de 384 nombres. Ce vecteur capture le SENS du texte, pas juste les mots.</a:t>
+            </a:r>
+          </a:p>
+          <a:p>
+            <a:r>
+              <a:t>500 c'est la taille du chunk en caractères. 384 c'est la taille du vecteur, fixe peu importe la longueur du texte.</a:t>
+            </a:r>
+          </a:p>
+          <a:p>
+            <a:r>
+              <a:t>Exemple : « fièvre » et « température élevée » donnent des vecteurs proches, parce que sémantiquement c'est la même idée.</a:t>
             </a:r>
           </a:p>
         </p:txBody>
@@ -1863,17 +1896,33 @@
           <a:lstStyle/>
           <a:p>
             <a:r>
+              <a:t>━━━━━━━━━━━━━━━━━━━━━━━━━━━━━━━━</a:t>
+            </a:r>
+          </a:p>
+          <a:p>
+            <a:r>
+              <a:t>🎤  YOUSRA  ·  slide 12/28  ·  ~35s</a:t>
+            </a:r>
+          </a:p>
+          <a:p>
+            <a:r>
+              <a:t>━━━━━━━━━━━━━━━━━━━━━━━━━━━━━━━━</a:t>
+            </a:r>
+          </a:p>
+          <a:p/>
+          <a:p>
+            <a:r>
               <a:t>Et maintenant l'étape 2 : comment ça marche quand un patient pose une vraie question.</a:t>
             </a:r>
           </a:p>
           <a:p>
             <a:r>
-              <a:t>La question est convertie en vecteur avec le même MiniLM, c'est important.</a:t>
-            </a:r>
-          </a:p>
-          <a:p>
-            <a:r>
-              <a:t>ChromaDB cherche les 4 chunks les plus proches sémantiquement. Si le score est mauvais, donc si vraiment rien matche, on bascule sur la recherche web. C'est notre bonus.</a:t>
+              <a:t>La question est convertie en vecteur avec le même MiniLM.</a:t>
+            </a:r>
+          </a:p>
+          <a:p>
+            <a:r>
+              <a:t>ChromaDB cherche les 4 chunks les plus proches sémantiquement. Si le score est mauvais, on bascule sur la recherche web (notre bonus).</a:t>
             </a:r>
           </a:p>
           <a:p>
@@ -2030,22 +2079,44 @@
           <a:lstStyle/>
           <a:p>
             <a:r>
-              <a:t>Petit point un peu technique sur la similarité. Comment on compare deux vecteurs en fait ?</a:t>
-            </a:r>
-          </a:p>
-          <a:p>
-            <a:r>
-              <a:t>On utilise la distance L2, c'est la distance euclidienne. Plus le score est BAS, plus c'est pertinent. C'est l'inverse de l'intuition habituelle.</a:t>
-            </a:r>
-          </a:p>
-          <a:p>
-            <a:r>
-              <a:t>On a fixé RELEVANCE_THRESHOLD à 0.9. Au-dessus de ce seuil, on considère qu'aucun chunk est assez pertinent, et là on bascule sur le web pour ne pas répondre à côté.</a:t>
-            </a:r>
-          </a:p>
-          <a:p>
-            <a:r>
-              <a:t>Cette distance L2 c'est juste la racine de la somme des carrés des différences sur les 384 dimensions. C'est de la géométrie classique.</a:t>
+              <a:t>━━━━━━━━━━━━━━━━━━━━━━━━━━━━━━━━</a:t>
+            </a:r>
+          </a:p>
+          <a:p>
+            <a:r>
+              <a:t>🎤  YOUSRA  ·  slide 13/28  ·  ~40s</a:t>
+            </a:r>
+          </a:p>
+          <a:p>
+            <a:r>
+              <a:t>━━━━━━━━━━━━━━━━━━━━━━━━━━━━━━━━</a:t>
+            </a:r>
+          </a:p>
+          <a:p/>
+          <a:p>
+            <a:r>
+              <a:t>Petit point un peu technique sur la similarité. Comment on compare deux vecteurs ?</a:t>
+            </a:r>
+          </a:p>
+          <a:p>
+            <a:r>
+              <a:t>On utilise la distance L2, la distance euclidienne. Plus le score est BAS, plus c'est pertinent. C'est l'inverse de l'intuition habituelle.</a:t>
+            </a:r>
+          </a:p>
+          <a:p>
+            <a:r>
+              <a:t>On a fixé RELEVANCE_THRESHOLD à 0.9. Au-dessus, on considère qu'aucun chunk est assez pertinent, et on bascule sur le web pour ne pas répondre à côté.</a:t>
+            </a:r>
+          </a:p>
+          <a:p>
+            <a:r>
+              <a:t>La distance L2 c'est juste la racine de la somme des carrés des différences sur les 384 dimensions. De la géométrie classique.</a:t>
+            </a:r>
+          </a:p>
+          <a:p/>
+          <a:p>
+            <a:r>
+              <a:t>────  🎙  PASSE LA PAROLE À : IMANE  ────</a:t>
             </a:r>
           </a:p>
         </p:txBody>
@@ -2191,19 +2262,25 @@
           </a:bodyPr>
           <a:lstStyle/>
           <a:p>
-            <a:pPr indent="0" lvl="0" marL="0" rtl="0" algn="l">
-              <a:spcBef>
-                <a:spcPts val="0"/>
-              </a:spcBef>
-              <a:spcAft>
-                <a:spcPts val="0"/>
-              </a:spcAft>
-              <a:buNone/>
-            </a:pPr>
-            <a:r>
-              <a:t/>
-            </a:r>
-            <a:endParaRPr/>
+            <a:r>
+              <a:t>━━━━━━━━━━━━━━━━━━━━━━━━━━━━━━━━</a:t>
+            </a:r>
+          </a:p>
+          <a:p>
+            <a:r>
+              <a:t>🎤  IMANE  ·  slide 14/28  ·  ~10s (transition)</a:t>
+            </a:r>
+          </a:p>
+          <a:p>
+            <a:r>
+              <a:t>━━━━━━━━━━━━━━━━━━━━━━━━━━━━━━━━</a:t>
+            </a:r>
+          </a:p>
+          <a:p/>
+          <a:p>
+            <a:r>
+              <a:t>Slide de transition « Partie 3 — Comparaison encodeurs &amp; Bonus DuckDuckGo ».</a:t>
+            </a:r>
           </a:p>
         </p:txBody>
       </p:sp>
@@ -2349,7 +2426,23 @@
           <a:lstStyle/>
           <a:p>
             <a:r>
-              <a:t>Donc moi je prends la suite. On va parler de la comparaison d'encodeurs et du bonus DuckDuckGo.</a:t>
+              <a:t>━━━━━━━━━━━━━━━━━━━━━━━━━━━━━━━━</a:t>
+            </a:r>
+          </a:p>
+          <a:p>
+            <a:r>
+              <a:t>🎤  IMANE  ·  slide 15/28  ·  ~30s</a:t>
+            </a:r>
+          </a:p>
+          <a:p>
+            <a:r>
+              <a:t>━━━━━━━━━━━━━━━━━━━━━━━━━━━━━━━━</a:t>
+            </a:r>
+          </a:p>
+          <a:p/>
+          <a:p>
+            <a:r>
+              <a:t>Donc moi je prends la suite. Comparaison d'encodeurs et bonus DuckDuckGo.</a:t>
             </a:r>
           </a:p>
           <a:p>
@@ -2359,7 +2452,7 @@
           </a:p>
           <a:p>
             <a:r>
-              <a:t>On a testé 3 modèles sur les mêmes 5 PDFs : MiniLM en 384 dimensions, CamemBERT en 768 spécialisé français, et mpnet en 768 multilingue haute qualité.</a:t>
+              <a:t>On a testé 3 modèles sur les mêmes 5 PDFs : MiniLM en 384 dimensions, CamemBERT en 768 spécialisé français, et mpnet en 768 multilingue.</a:t>
             </a:r>
           </a:p>
         </p:txBody>
@@ -2506,22 +2599,43 @@
           <a:lstStyle/>
           <a:p>
             <a:r>
-              <a:t>Et voilà les résultats. MiniLM est le plus rapide, 71 secondes pour indexer nos 971 chunks. Qualité bonne mais parfois distrait par du bruit, genre des citations bibliographiques.</a:t>
-            </a:r>
-          </a:p>
-          <a:p>
-            <a:r>
-              <a:t>CamemBERT, étant entraîné spécifiquement sur du français, capte mieux le sens médical. Mais c'est 4 fois plus lent à indexer.</a:t>
-            </a:r>
-          </a:p>
-          <a:p>
-            <a:r>
-              <a:t>Et mpnet, c'est le plus pertinent des 3 sur nos questions test, mais aussi long à indexer.</a:t>
-            </a:r>
-          </a:p>
-          <a:p>
-            <a:r>
-              <a:t>On a choisi MiniLM en prod pour la rapidité. Les deux autres sont documentés comme alternatives plus précises.</a:t>
+              <a:t>━━━━━━━━━━━━━━━━━━━━━━━━━━━━━━━━</a:t>
+            </a:r>
+          </a:p>
+          <a:p>
+            <a:r>
+              <a:t>🎤  IMANE  ·  slide 16/28  ·  ~50s</a:t>
+            </a:r>
+          </a:p>
+          <a:p>
+            <a:r>
+              <a:t>━━━━━━━━━━━━━━━━━━━━━━━━━━━━━━━━</a:t>
+            </a:r>
+          </a:p>
+          <a:p/>
+          <a:p>
+            <a:r>
+              <a:t>Et voilà les résultats.</a:t>
+            </a:r>
+          </a:p>
+          <a:p>
+            <a:r>
+              <a:t>MiniLM est le plus rapide, 71 secondes pour indexer nos 971 chunks. Qualité bonne mais parfois distrait par du bruit (citations bibliographiques).</a:t>
+            </a:r>
+          </a:p>
+          <a:p>
+            <a:r>
+              <a:t>CamemBERT, entraîné spécifiquement sur du français, capte mieux le sens médical. Mais 4 fois plus lent à indexer.</a:t>
+            </a:r>
+          </a:p>
+          <a:p>
+            <a:r>
+              <a:t>Mpnet est le plus pertinent des 3 sur nos questions test, aussi long à indexer.</a:t>
+            </a:r>
+          </a:p>
+          <a:p>
+            <a:r>
+              <a:t>On a choisi MiniLM en prod pour la rapidité. Les deux autres documentés comme alternatives plus précises.</a:t>
             </a:r>
           </a:p>
         </p:txBody>
@@ -2668,17 +2782,38 @@
           <a:lstStyle/>
           <a:p>
             <a:r>
-              <a:t>Et maintenant le bonus DuckDuckGo. Quand le RAG ne trouve rien de pertinent — score supérieur à notre seuil — on enrichit la réponse avec une vraie recherche web.</a:t>
-            </a:r>
-          </a:p>
-          <a:p>
-            <a:r>
-              <a:t>Voilà le code, c'est tout simple : on appelle DDGS qui retourne les top 3 résultats, et on injecte titre + extrait + URL dans le prompt.</a:t>
-            </a:r>
-          </a:p>
-          <a:p>
-            <a:r>
-              <a:t>Ce qui est important c'est que le web c'est un FILET DE SÉCURITÉ, jamais une source par défaut. Et le LLM badge explicitement quand l'info vient du web et pas des PDFs officiels — l'utilisateur sait toujours d'où vient la réponse.</a:t>
+              <a:t>━━━━━━━━━━━━━━━━━━━━━━━━━━━━━━━━</a:t>
+            </a:r>
+          </a:p>
+          <a:p>
+            <a:r>
+              <a:t>🎤  IMANE  ·  slide 17/28  ·  ~40s</a:t>
+            </a:r>
+          </a:p>
+          <a:p>
+            <a:r>
+              <a:t>━━━━━━━━━━━━━━━━━━━━━━━━━━━━━━━━</a:t>
+            </a:r>
+          </a:p>
+          <a:p/>
+          <a:p>
+            <a:r>
+              <a:t>Et maintenant le bonus DuckDuckGo.</a:t>
+            </a:r>
+          </a:p>
+          <a:p>
+            <a:r>
+              <a:t>Quand le RAG ne trouve rien de pertinent (score supérieur à notre seuil), on enrichit la réponse avec une recherche web.</a:t>
+            </a:r>
+          </a:p>
+          <a:p>
+            <a:r>
+              <a:t>Code tout simple : on appelle DDGS, on récupère les top 3, on injecte titre + extrait + URL dans le prompt.</a:t>
+            </a:r>
+          </a:p>
+          <a:p>
+            <a:r>
+              <a:t>Le web c'est un FILET DE SÉCURITÉ, jamais une source par défaut. Le LLM badge explicitement quand l'info vient du web — l'utilisateur sait toujours d'où vient la réponse.</a:t>
             </a:r>
           </a:p>
         </p:txBody>
@@ -2825,27 +2960,49 @@
           <a:lstStyle/>
           <a:p>
             <a:r>
-              <a:t>Petit bug qu'on a rencontré et corrigé, c'est intéressant.</a:t>
-            </a:r>
-          </a:p>
-          <a:p>
-            <a:r>
-              <a:t>Symptôme : quand un patient tapait "j'ai de la fièvre", DuckDuckGo retournait des résultats Reverso et Collins, donc de la traduction. Pas du tout d'info médicale.</a:t>
-            </a:r>
-          </a:p>
-          <a:p>
-            <a:r>
-              <a:t>La cause c'est que la phrase brute du patient ressemble à une phrase de manuel de langue.</a:t>
-            </a:r>
-          </a:p>
-          <a:p>
-            <a:r>
-              <a:t>Le fix qu'on a fait : reformulate_search_query() qui passe d'abord la phrase dans le LLM pour la transformer en requête médicale propre. Donc "j'ai de la fièvre" devient "fievre symptomes causes traitement", et là DuckDuckGo retourne des vrais sites médicaux.</a:t>
-            </a:r>
-          </a:p>
-          <a:p>
-            <a:r>
-              <a:t>Petit détail mais ça montre qu'on a vraiment testé et débogué l'appli.</a:t>
+              <a:t>━━━━━━━━━━━━━━━━━━━━━━━━━━━━━━━━</a:t>
+            </a:r>
+          </a:p>
+          <a:p>
+            <a:r>
+              <a:t>🎤  IMANE  ·  slide 18/28  ·  ~35s</a:t>
+            </a:r>
+          </a:p>
+          <a:p>
+            <a:r>
+              <a:t>━━━━━━━━━━━━━━━━━━━━━━━━━━━━━━━━</a:t>
+            </a:r>
+          </a:p>
+          <a:p/>
+          <a:p>
+            <a:r>
+              <a:t>Petit bug qu'on a rencontré et corrigé.</a:t>
+            </a:r>
+          </a:p>
+          <a:p>
+            <a:r>
+              <a:t>Symptôme : un patient tape « j'ai de la fièvre », DuckDuckGo retournait des résultats Reverso et Collins — de la traduction, pas d'info médicale.</a:t>
+            </a:r>
+          </a:p>
+          <a:p>
+            <a:r>
+              <a:t>La cause : la phrase brute du patient ressemble à une phrase de manuel de langue.</a:t>
+            </a:r>
+          </a:p>
+          <a:p>
+            <a:r>
+              <a:t>Fix : reformulate_search_query() qui passe d'abord la phrase dans le LLM pour la transformer en requête médicale propre. « j'ai de la fièvre » devient « fievre symptomes causes traitement ».</a:t>
+            </a:r>
+          </a:p>
+          <a:p>
+            <a:r>
+              <a:t>Petit détail mais ça montre qu'on a vraiment testé et débogué.</a:t>
+            </a:r>
+          </a:p>
+          <a:p/>
+          <a:p>
+            <a:r>
+              <a:t>────  🎙  PASSE LA PAROLE À : YANNIS  ────</a:t>
             </a:r>
           </a:p>
         </p:txBody>
@@ -2991,19 +3148,25 @@
           </a:bodyPr>
           <a:lstStyle/>
           <a:p>
-            <a:pPr indent="0" lvl="0" marL="0" rtl="0" algn="l">
-              <a:spcBef>
-                <a:spcPts val="0"/>
-              </a:spcBef>
-              <a:spcAft>
-                <a:spcPts val="0"/>
-              </a:spcAft>
-              <a:buNone/>
-            </a:pPr>
-            <a:r>
-              <a:t/>
-            </a:r>
-            <a:endParaRPr/>
+            <a:r>
+              <a:t>━━━━━━━━━━━━━━━━━━━━━━━━━━━━━━━━</a:t>
+            </a:r>
+          </a:p>
+          <a:p>
+            <a:r>
+              <a:t>🎤  YANNIS  ·  slide 19/28  ·  ~10s (transition)</a:t>
+            </a:r>
+          </a:p>
+          <a:p>
+            <a:r>
+              <a:t>━━━━━━━━━━━━━━━━━━━━━━━━━━━━━━━━</a:t>
+            </a:r>
+          </a:p>
+          <a:p/>
+          <a:p>
+            <a:r>
+              <a:t>Slide de transition « Partie 4 — Hermes, Déploiement &amp; Démo ».</a:t>
+            </a:r>
           </a:p>
         </p:txBody>
       </p:sp>
@@ -3149,27 +3312,43 @@
           <a:lstStyle/>
           <a:p>
             <a:r>
-              <a:t>Donc moi je prends la fin. On va parler de Hermes, du déploiement et faire la démo.</a:t>
-            </a:r>
-          </a:p>
-          <a:p>
-            <a:r>
-              <a:t>Hermes c'est notre deuxième bonus, c'est un orchestrateur multi-agents. L'idée : après une réponse du chatbot, le patient peut demander à voir un spécialiste.</a:t>
-            </a:r>
-          </a:p>
-          <a:p>
-            <a:r>
-              <a:t>On a 3 sous-agents : recommend_specialist qui analyse la conversation pour déterminer le type de médecin, list_available_doctors qui liste les créneaux, et book_appointment qui réserve.</a:t>
-            </a:r>
-          </a:p>
-          <a:p>
-            <a:r>
-              <a:t>Hermes 405B via OpenRouter en dev, avec un fallback automatique. En prod, on tombe directement sur Gemini.</a:t>
-            </a:r>
-          </a:p>
-          <a:p>
-            <a:r>
-              <a:t>Ce qui fait Hermes intéressant c'est qu'on va au-delà du simple Q et A : on propose une action concrète après le diagnostic informatif.</a:t>
+              <a:t>━━━━━━━━━━━━━━━━━━━━━━━━━━━━━━━━</a:t>
+            </a:r>
+          </a:p>
+          <a:p>
+            <a:r>
+              <a:t>🎤  YANNIS  ·  slide 20/28  ·  ~45s</a:t>
+            </a:r>
+          </a:p>
+          <a:p>
+            <a:r>
+              <a:t>━━━━━━━━━━━━━━━━━━━━━━━━━━━━━━━━</a:t>
+            </a:r>
+          </a:p>
+          <a:p/>
+          <a:p>
+            <a:r>
+              <a:t>Donc moi je prends la fin. Hermes, déploiement, et la démo.</a:t>
+            </a:r>
+          </a:p>
+          <a:p>
+            <a:r>
+              <a:t>Hermes c'est notre deuxième bonus, un orchestrateur multi-agents. Après une réponse du chatbot, le patient peut demander à voir un spécialiste.</a:t>
+            </a:r>
+          </a:p>
+          <a:p>
+            <a:r>
+              <a:t>On a 3 sous-agents : recommend_specialist qui analyse la conversation, list_available_doctors qui liste les créneaux, et book_appointment qui réserve.</a:t>
+            </a:r>
+          </a:p>
+          <a:p>
+            <a:r>
+              <a:t>Modèle Hermes 405B via OpenRouter en dev, fallback automatique. En prod : Gemini.</a:t>
+            </a:r>
+          </a:p>
+          <a:p>
+            <a:r>
+              <a:t>Ce qui rend Hermes intéressant : on va au-delà du Q et A, on propose une action concrète après le diagnostic informatif.</a:t>
             </a:r>
           </a:p>
         </p:txBody>
@@ -3316,27 +3495,23 @@
           <a:lstStyle/>
           <a:p>
             <a:r>
-              <a:t>Donc avant de rentrer dans la technique, on va vite vous expliquer le besoin.</a:t>
-            </a:r>
-          </a:p>
-          <a:p>
-            <a:r>
-              <a:t>L'idée c'est qu'un patient veut une info médicale fiable et rapide.</a:t>
-            </a:r>
-          </a:p>
-          <a:p>
-            <a:r>
-              <a:t>Le problème, c'est qu'un LLM tout seul peut halluciner. Il invente parfois des trucs faux.</a:t>
-            </a:r>
-          </a:p>
-          <a:p>
-            <a:r>
-              <a:t>Donc nous on voulait un chatbot qui réponde uniquement à partir de sources officielles HAS et INCa.</a:t>
-            </a:r>
-          </a:p>
-          <a:p>
-            <a:r>
-              <a:t>Et important : c'est informatif, on fait pas de diagnostic. C'est un choix qu'on assume.</a:t>
+              <a:t>━━━━━━━━━━━━━━━━━━━━━━━━━━━━━━━━</a:t>
+            </a:r>
+          </a:p>
+          <a:p>
+            <a:r>
+              <a:t>🎤  GRACE  ·  slide 3/28  ·  ~10s (transition)</a:t>
+            </a:r>
+          </a:p>
+          <a:p>
+            <a:r>
+              <a:t>━━━━━━━━━━━━━━━━━━━━━━━━━━━━━━━━</a:t>
+            </a:r>
+          </a:p>
+          <a:p/>
+          <a:p>
+            <a:r>
+              <a:t>Slide de transition : « Partie 1 — Contexte &amp; Architecture ». Je laisse 5 secondes au jury pour lire avant de commencer.</a:t>
             </a:r>
           </a:p>
         </p:txBody>
@@ -3483,22 +3658,38 @@
           <a:lstStyle/>
           <a:p>
             <a:r>
-              <a:t>Côté sécurité maintenant, on a fait attention à pas faire n'importe quoi.</a:t>
-            </a:r>
-          </a:p>
-          <a:p>
-            <a:r>
-              <a:t>Pas de diagnostic : c'est rappelé dans chaque prompt envoyé au LLM. Le système refuse de poser un diagnostic.</a:t>
-            </a:r>
-          </a:p>
-          <a:p>
-            <a:r>
-              <a:t>Traçabilité : chaque réponse a un badge "documents officiels" ou "web", l'utilisateur sait toujours d'où vient l'info.</a:t>
-            </a:r>
-          </a:p>
-          <a:p>
-            <a:r>
-              <a:t>Les limites qu'on assume : périmètre limité à 3 pathologies pour l'instant, et un quota LLM gratuit d'environ 1000 requêtes par jour. La ChromaDB et la SQLite sont sur un volume Docker persistant, donc pas de perte au redéploiement.</a:t>
+              <a:t>━━━━━━━━━━━━━━━━━━━━━━━━━━━━━━━━</a:t>
+            </a:r>
+          </a:p>
+          <a:p>
+            <a:r>
+              <a:t>🎤  YANNIS  ·  slide 22/28  ·  ~30s</a:t>
+            </a:r>
+          </a:p>
+          <a:p>
+            <a:r>
+              <a:t>━━━━━━━━━━━━━━━━━━━━━━━━━━━━━━━━</a:t>
+            </a:r>
+          </a:p>
+          <a:p/>
+          <a:p>
+            <a:r>
+              <a:t>Côté sécurité, on a fait attention.</a:t>
+            </a:r>
+          </a:p>
+          <a:p>
+            <a:r>
+              <a:t>Pas de diagnostic : c'est rappelé dans chaque prompt envoyé au LLM.</a:t>
+            </a:r>
+          </a:p>
+          <a:p>
+            <a:r>
+              <a:t>Traçabilité : chaque réponse a un badge « documents officiels » ou « web », l'utilisateur sait toujours d'où vient l'info.</a:t>
+            </a:r>
+          </a:p>
+          <a:p>
+            <a:r>
+              <a:t>Limites assumées : périmètre limité à 3 pathologies, quota LLM gratuit ~1000 req/jour. ChromaDB et SQLite sur volume Docker persistant — pas de perte au redéploiement.</a:t>
             </a:r>
           </a:p>
         </p:txBody>
@@ -3645,27 +3836,43 @@
           <a:lstStyle/>
           <a:p>
             <a:r>
-              <a:t>Pour le déploiement maintenant. L'URL c'est sae.amanawebagency.com.</a:t>
-            </a:r>
-          </a:p>
-          <a:p>
-            <a:r>
-              <a:t>On a Caddy en reverse proxy avec HTTPS automatique via Let's Encrypt.</a:t>
-            </a:r>
-          </a:p>
-          <a:p>
-            <a:r>
-              <a:t>Derrière Caddy, 3 containers Docker : un nginx qui sert le site landing à la racine, Streamlit qui sert le chatbot sur slash app, et FastAPI qui est totalement interne au réseau Docker — jamais exposé.</a:t>
-            </a:r>
-          </a:p>
-          <a:p>
-            <a:r>
-              <a:t>ChromaDB et SQLite sur un volume persistant.</a:t>
-            </a:r>
-          </a:p>
-          <a:p>
-            <a:r>
-              <a:t>C'est de la VRAIE infra de production, pas un tier gratuit jetable. C'est mutualisé avec les autres services Amana.</a:t>
+              <a:t>━━━━━━━━━━━━━━━━━━━━━━━━━━━━━━━━</a:t>
+            </a:r>
+          </a:p>
+          <a:p>
+            <a:r>
+              <a:t>🎤  YANNIS  ·  slide 23/28  ·  ~35s</a:t>
+            </a:r>
+          </a:p>
+          <a:p>
+            <a:r>
+              <a:t>━━━━━━━━━━━━━━━━━━━━━━━━━━━━━━━━</a:t>
+            </a:r>
+          </a:p>
+          <a:p/>
+          <a:p>
+            <a:r>
+              <a:t>Déploiement. L'URL : sae.amanawebagency.com.</a:t>
+            </a:r>
+          </a:p>
+          <a:p>
+            <a:r>
+              <a:t>Caddy en reverse proxy avec HTTPS automatique Let's Encrypt.</a:t>
+            </a:r>
+          </a:p>
+          <a:p>
+            <a:r>
+              <a:t>Derrière Caddy, 3 containers Docker : nginx pour le site landing à la racine, Streamlit pour le chatbot sur /app/, FastAPI totalement interne au réseau Docker — jamais exposé.</a:t>
+            </a:r>
+          </a:p>
+          <a:p>
+            <a:r>
+              <a:t>ChromaDB et SQLite sur volume persistant.</a:t>
+            </a:r>
+          </a:p>
+          <a:p>
+            <a:r>
+              <a:t>C'est de la VRAIE infra de production, pas un tier gratuit jetable. Mutualisé avec les autres services Amana.</a:t>
             </a:r>
           </a:p>
         </p:txBody>
@@ -3812,22 +4019,44 @@
           <a:lstStyle/>
           <a:p>
             <a:r>
-              <a:t>Et pour la démo, on va vous montrer 3 scénarios.</a:t>
-            </a:r>
-          </a:p>
-          <a:p>
-            <a:r>
-              <a:t>D'abord une question dans le périmètre, par exemple sur le diabète. Vous allez voir la réponse arriver avec le badge "documents officiels".</a:t>
-            </a:r>
-          </a:p>
-          <a:p>
-            <a:r>
-              <a:t>Puis une question hors périmètre, genre la grippe. Là on bascule sur le web, et le badge devient "recherche web" avec les sources citées.</a:t>
-            </a:r>
-          </a:p>
-          <a:p>
-            <a:r>
-              <a:t>Et enfin Hermes — on clique sur le bouton, il recommande un spécialiste, et on peut prendre rendez-vous avec un vrai formulaire détaillé.</a:t>
+              <a:t>━━━━━━━━━━━━━━━━━━━━━━━━━━━━━━━━</a:t>
+            </a:r>
+          </a:p>
+          <a:p>
+            <a:r>
+              <a:t>🎤  YANNIS · DÉMO LIVE  ·  slide 25/28  ·  ~90s</a:t>
+            </a:r>
+          </a:p>
+          <a:p>
+            <a:r>
+              <a:t>━━━━━━━━━━━━━━━━━━━━━━━━━━━━━━━━</a:t>
+            </a:r>
+          </a:p>
+          <a:p/>
+          <a:p>
+            <a:r>
+              <a:t>Pour la démo, 3 scénarios.</a:t>
+            </a:r>
+          </a:p>
+          <a:p>
+            <a:r>
+              <a:t>1️⃣ Question dans le périmètre, par exemple sur le diabète. Réponse avec badge « documents officiels ».</a:t>
+            </a:r>
+          </a:p>
+          <a:p>
+            <a:r>
+              <a:t>2️⃣ Question hors périmètre, genre la grippe. Bascule sur le web, badge « recherche web », sources citées.</a:t>
+            </a:r>
+          </a:p>
+          <a:p>
+            <a:r>
+              <a:t>3️⃣ Hermes : on clique sur le bouton, il recommande un spécialiste, on prend rendez-vous avec un vrai formulaire détaillé.</a:t>
+            </a:r>
+          </a:p>
+          <a:p/>
+          <a:p>
+            <a:r>
+              <a:t>→ Préparer les 3 questions à l'avance dans un onglet ouvert. Si la connexion flanche, on a un backup en captures dans le rapport.</a:t>
             </a:r>
           </a:p>
         </p:txBody>
@@ -3974,17 +4203,33 @@
           <a:lstStyle/>
           <a:p>
             <a:r>
-              <a:t>En résumé, les compétences qu'on a mobilisées :</a:t>
-            </a:r>
-          </a:p>
-          <a:p>
-            <a:r>
-              <a:t>Full stack avec FastAPI, Streamlit, JWT et SQLAlchemy.</a:t>
-            </a:r>
-          </a:p>
-          <a:p>
-            <a:r>
-              <a:t>IA et LLM : RAG, embeddings, prompt engineering, comparaison de modèles.</a:t>
+              <a:t>━━━━━━━━━━━━━━━━━━━━━━━━━━━━━━━━</a:t>
+            </a:r>
+          </a:p>
+          <a:p>
+            <a:r>
+              <a:t>🎤  TOUS  ·  slide 27/28  ·  ~30s</a:t>
+            </a:r>
+          </a:p>
+          <a:p>
+            <a:r>
+              <a:t>━━━━━━━━━━━━━━━━━━━━━━━━━━━━━━━━</a:t>
+            </a:r>
+          </a:p>
+          <a:p/>
+          <a:p>
+            <a:r>
+              <a:t>Bilan des compétences mobilisées.</a:t>
+            </a:r>
+          </a:p>
+          <a:p>
+            <a:r>
+              <a:t>Full stack : FastAPI + Streamlit + JWT + SQLAlchemy.</a:t>
+            </a:r>
+          </a:p>
+          <a:p>
+            <a:r>
+              <a:t>IA / LLM : RAG, embeddings, prompt engineering, comparaison de modèles.</a:t>
             </a:r>
           </a:p>
           <a:p>
@@ -3994,12 +4239,7 @@
           </a:p>
           <a:p>
             <a:r>
-              <a:t>Et DevOps : Docker, reverse proxy Caddy, et un déploiement réel en production, pas une démo jetable.</a:t>
-            </a:r>
-          </a:p>
-          <a:p>
-            <a:r>
-              <a:t>Voilà, c'est tout cohérent et ça tient debout.</a:t>
+              <a:t>DevOps : Docker, reverse proxy Caddy, déploiement réel en production.</a:t>
             </a:r>
           </a:p>
         </p:txBody>
@@ -4146,6 +4386,22 @@
           <a:lstStyle/>
           <a:p>
             <a:r>
+              <a:t>━━━━━━━━━━━━━━━━━━━━━━━━━━━━━━━━</a:t>
+            </a:r>
+          </a:p>
+          <a:p>
+            <a:r>
+              <a:t>🎤  TOUS · Merci  ·  slide 28/28  ·  ~30s</a:t>
+            </a:r>
+          </a:p>
+          <a:p>
+            <a:r>
+              <a:t>━━━━━━━━━━━━━━━━━━━━━━━━━━━━━━━━</a:t>
+            </a:r>
+          </a:p>
+          <a:p/>
+          <a:p>
+            <a:r>
               <a:t>Voilà, on en a fini. Merci pour votre attention.</a:t>
             </a:r>
           </a:p>
@@ -4156,12 +4412,12 @@
           </a:p>
           <a:p>
             <a:r>
-              <a:t>Si vous voulez tester l'appli vous-même pendant les questions, l'URL est là, sae.amanawebagency.com, ou scannez le QR code à droite.</a:t>
-            </a:r>
-          </a:p>
-          <a:p>
-            <a:r>
-              <a:t>Et notre dépôt GitHub est aussi disponible.</a:t>
+              <a:t>Si vous voulez tester l'appli vous-même, l'URL est là, sae.amanawebagency.com, ou scannez le QR code à droite.</a:t>
+            </a:r>
+          </a:p>
+          <a:p>
+            <a:r>
+              <a:t>Notre dépôt GitHub est aussi disponible.</a:t>
             </a:r>
           </a:p>
         </p:txBody>
@@ -4263,12 +4519,28 @@
           <a:lstStyle/>
           <a:p>
             <a:r>
-              <a:t>Et bonus du bonus : on a poussé Hermes côté praticien aussi.</a:t>
-            </a:r>
-          </a:p>
-          <a:p>
-            <a:r>
-              <a:t>Quand un patient prend un rendez-vous, le médecin reçoit automatiquement une notification dans son groupe Telegram. Et il peut interroger Hermes en retour avec des commandes : /aide, /rdv_aujourdhui, /rdv_demain, ou même en langage naturel via Gemini.</a:t>
+              <a:t>━━━━━━━━━━━━━━━━━━━━━━━━━━━━━━━━</a:t>
+            </a:r>
+          </a:p>
+          <a:p>
+            <a:r>
+              <a:t>🎤  YANNIS  ·  slide 21/28  ·  ~40s</a:t>
+            </a:r>
+          </a:p>
+          <a:p>
+            <a:r>
+              <a:t>━━━━━━━━━━━━━━━━━━━━━━━━━━━━━━━━</a:t>
+            </a:r>
+          </a:p>
+          <a:p/>
+          <a:p>
+            <a:r>
+              <a:t>Bonus du bonus : Hermes côté praticien aussi.</a:t>
+            </a:r>
+          </a:p>
+          <a:p>
+            <a:r>
+              <a:t>Quand un patient prend rendez-vous, le médecin reçoit automatiquement une notification dans son groupe Telegram. Et il peut interroger Hermes en retour : /aide, /rdv_aujourdhui, /rdv_demain, ou en langage naturel via Gemini.</a:t>
             </a:r>
           </a:p>
           <a:p>
@@ -4278,7 +4550,7 @@
           </a:p>
           <a:p>
             <a:r>
-              <a:t>Chaque groupe Telegram correspond à un seul médecin via le mapping Doctor.telegram_chat_id. Cloisonnement strict.</a:t>
+              <a:t>Cloisonnement strict : chaque groupe Telegram correspond à un seul médecin via le mapping Doctor.telegram_chat_id.</a:t>
             </a:r>
           </a:p>
         </p:txBody>
@@ -4348,17 +4620,38 @@
           <a:lstStyle/>
           <a:p>
             <a:r>
-              <a:t>On a aussi pas voulu balancer Streamlit nu à l'utilisateur. Donc on a fait un site landing MediGuide à la racine, et le chatbot est intégré dedans via une page slash consulter avec iframe.</a:t>
-            </a:r>
-          </a:p>
-          <a:p>
-            <a:r>
-              <a:t>Comme ça l'utilisateur arrive sur un vrai site contextualisé, voit la mission, les sources, le disclaimer, puis lance l'assistant. C'est plus pro qu'un Streamlit qui démarre direct.</a:t>
-            </a:r>
-          </a:p>
-          <a:p>
-            <a:r>
-              <a:t>On a aussi harmonisé tout le visuel — même palette teal, même font Inter — entre le site et le chatbot pour que ça fasse cohérent.</a:t>
+              <a:t>━━━━━━━━━━━━━━━━━━━━━━━━━━━━━━━━</a:t>
+            </a:r>
+          </a:p>
+          <a:p>
+            <a:r>
+              <a:t>🎤  YANNIS  ·  slide 24/28  ·  ~35s</a:t>
+            </a:r>
+          </a:p>
+          <a:p>
+            <a:r>
+              <a:t>━━━━━━━━━━━━━━━━━━━━━━━━━━━━━━━━</a:t>
+            </a:r>
+          </a:p>
+          <a:p/>
+          <a:p>
+            <a:r>
+              <a:t>On a aussi pas voulu balancer Streamlit nu à l'utilisateur.</a:t>
+            </a:r>
+          </a:p>
+          <a:p>
+            <a:r>
+              <a:t>Donc on a fait un site landing MediGuide à la racine, et le chatbot est intégré via une page /consulter avec iframe.</a:t>
+            </a:r>
+          </a:p>
+          <a:p>
+            <a:r>
+              <a:t>L'utilisateur arrive sur un vrai site contextualisé : il voit la mission, les sources, le disclaimer, puis lance l'assistant.</a:t>
+            </a:r>
+          </a:p>
+          <a:p>
+            <a:r>
+              <a:t>On a harmonisé tout le visuel — même palette teal, même font Inter — entre le site et le chatbot pour que ça fasse cohérent.</a:t>
             </a:r>
           </a:p>
         </p:txBody>
@@ -4428,27 +4721,160 @@
           <a:lstStyle/>
           <a:p>
             <a:r>
-              <a:t>Petit récap de la cohérence UX qu'on a soignée.</a:t>
-            </a:r>
-          </a:p>
-          <a:p>
-            <a:r>
-              <a:t>Cohérence visuelle : même palette teal et même font Inter entre site et chatbot.</a:t>
-            </a:r>
-          </a:p>
-          <a:p>
-            <a:r>
-              <a:t>Badges de sources : chaque réponse affiche d'où vient l'info, documents officiels ou recherche web.</a:t>
-            </a:r>
-          </a:p>
-          <a:p>
-            <a:r>
-              <a:t>Mes rendez-vous : section permanente dans la sidebar, l'utilisateur retrouve ses RDV à chaque visite.</a:t>
-            </a:r>
-          </a:p>
-          <a:p>
-            <a:r>
-              <a:t>Et auto-rename des sessions : le titre devient les premiers caractères du message, comme ça la sidebar reste lisible.</a:t>
+              <a:t>━━━━━━━━━━━━━━━━━━━━━━━━━━━━━━━━</a:t>
+            </a:r>
+          </a:p>
+          <a:p>
+            <a:r>
+              <a:t>🎤  YANNIS  ·  slide 26/28  ·  ~30s</a:t>
+            </a:r>
+          </a:p>
+          <a:p>
+            <a:r>
+              <a:t>━━━━━━━━━━━━━━━━━━━━━━━━━━━━━━━━</a:t>
+            </a:r>
+          </a:p>
+          <a:p/>
+          <a:p>
+            <a:r>
+              <a:t>Récap de la cohérence UX qu'on a soignée.</a:t>
+            </a:r>
+          </a:p>
+          <a:p>
+            <a:r>
+              <a:t>Cohérence visuelle : même palette et font partout.</a:t>
+            </a:r>
+          </a:p>
+          <a:p>
+            <a:r>
+              <a:t>Badges de sources sur chaque réponse.</a:t>
+            </a:r>
+          </a:p>
+          <a:p>
+            <a:r>
+              <a:t>Section « Mes rendez-vous » permanente dans la sidebar.</a:t>
+            </a:r>
+          </a:p>
+          <a:p>
+            <a:r>
+              <a:t>Auto-rename des sessions pour s'y retrouver entre plusieurs conversations.</a:t>
+            </a:r>
+          </a:p>
+          <a:p/>
+          <a:p>
+            <a:r>
+              <a:t>────  🎙  PASSE LA PAROLE À : TOUS  ────</a:t>
+            </a:r>
+          </a:p>
+        </p:txBody>
+      </p:sp>
+      <p:sp>
+        <p:nvSpPr>
+          <p:cNvPr id="4" name="Slide Number Placeholder 3"/>
+          <p:cNvSpPr>
+            <a:spLocks noGrp="1"/>
+          </p:cNvSpPr>
+          <p:nvPr>
+            <p:ph type="sldNum" idx="12"/>
+          </p:nvPr>
+        </p:nvSpPr>
+        <p:spPr/>
+      </p:sp>
+    </p:spTree>
+  </p:cSld>
+  <p:clrMapOvr>
+    <a:masterClrMapping/>
+  </p:clrMapOvr>
+</p:notes>
+</file>
+
+<file path=ppt/notesSlides/notesSlide28.xml><?xml version="1.0" encoding="utf-8"?>
+<p:notes xmlns:a="http://schemas.openxmlformats.org/drawingml/2006/main" xmlns:p="http://schemas.openxmlformats.org/presentationml/2006/main" xmlns:r="http://schemas.openxmlformats.org/officeDocument/2006/relationships">
+  <p:cSld>
+    <p:spTree>
+      <p:nvGrpSpPr>
+        <p:cNvPr id="1" name=""/>
+        <p:cNvGrpSpPr/>
+        <p:nvPr/>
+      </p:nvGrpSpPr>
+      <p:grpSpPr>
+        <a:xfrm>
+          <a:off x="0" y="0"/>
+          <a:ext cx="0" cy="0"/>
+          <a:chOff x="0" y="0"/>
+          <a:chExt cx="0" cy="0"/>
+        </a:xfrm>
+      </p:grpSpPr>
+      <p:sp>
+        <p:nvSpPr>
+          <p:cNvPr id="2" name="Slide Image Placeholder 1"/>
+          <p:cNvSpPr>
+            <a:spLocks noGrp="1"/>
+          </p:cNvSpPr>
+          <p:nvPr>
+            <p:ph type="sldImg" idx="3"/>
+          </p:nvPr>
+        </p:nvSpPr>
+        <p:spPr/>
+      </p:sp>
+      <p:sp>
+        <p:nvSpPr>
+          <p:cNvPr id="3" name="Notes Placeholder 2"/>
+          <p:cNvSpPr>
+            <a:spLocks noGrp="1"/>
+          </p:cNvSpPr>
+          <p:nvPr>
+            <p:ph type="body" idx="1"/>
+          </p:nvPr>
+        </p:nvSpPr>
+        <p:spPr/>
+        <p:txBody>
+          <a:bodyPr/>
+          <a:lstStyle/>
+          <a:p>
+            <a:r>
+              <a:t>━━━━━━━━━━━━━━━━━━━━━━━━━━━━━━━━</a:t>
+            </a:r>
+          </a:p>
+          <a:p>
+            <a:r>
+              <a:t>🎤  TOUS · Sommaire  ·  slide 2/28  ·  ~30s</a:t>
+            </a:r>
+          </a:p>
+          <a:p>
+            <a:r>
+              <a:t>━━━━━━━━━━━━━━━━━━━━━━━━━━━━━━━━</a:t>
+            </a:r>
+          </a:p>
+          <a:p/>
+          <a:p>
+            <a:r>
+              <a:t>Voilà ce qu'on va couvrir aujourd'hui en 4 grandes parties.</a:t>
+            </a:r>
+          </a:p>
+          <a:p>
+            <a:r>
+              <a:t>Grace commence avec le contexte et l'architecture.</a:t>
+            </a:r>
+          </a:p>
+          <a:p>
+            <a:r>
+              <a:t>Yousra enchaîne avec le traitement des PDFs et le pipeline RAG.</a:t>
+            </a:r>
+          </a:p>
+          <a:p>
+            <a:r>
+              <a:t>Imane prend ensuite la comparaison d'encodeurs et le bonus DuckDuckGo.</a:t>
+            </a:r>
+          </a:p>
+          <a:p>
+            <a:r>
+              <a:t>Et Yannis finit avec Hermes, le déploiement et la démo live.</a:t>
+            </a:r>
+          </a:p>
+          <a:p>
+            <a:r>
+              <a:t>On revient tous à la fin pour les questions.</a:t>
             </a:r>
           </a:p>
         </p:txBody>
@@ -4563,22 +4989,43 @@
           <a:lstStyle/>
           <a:p>
             <a:r>
-              <a:t>Petite parenthèse pour répondre à une question qui revient souvent.</a:t>
-            </a:r>
-          </a:p>
-          <a:p>
-            <a:r>
-              <a:t>La SAE elle nous demande pas de créer un LLM from scratch, c'est impossible en BUT 3 de toute façon.</a:t>
-            </a:r>
-          </a:p>
-          <a:p>
-            <a:r>
-              <a:t>L'analogie c'est qu'on réinvente pas le moteur d'une voiture, on construit le châssis autour.</a:t>
-            </a:r>
-          </a:p>
-          <a:p>
-            <a:r>
-              <a:t>Le vrai boulot c'est : le pipeline RAG, l'orchestration du backend, le prompt engineering, la comparaison de modèles. C'est ça la SAE.</a:t>
+              <a:t>━━━━━━━━━━━━━━━━━━━━━━━━━━━━━━━━</a:t>
+            </a:r>
+          </a:p>
+          <a:p>
+            <a:r>
+              <a:t>🎤  GRACE  ·  slide 4/28  ·  ~45s</a:t>
+            </a:r>
+          </a:p>
+          <a:p>
+            <a:r>
+              <a:t>━━━━━━━━━━━━━━━━━━━━━━━━━━━━━━━━</a:t>
+            </a:r>
+          </a:p>
+          <a:p/>
+          <a:p>
+            <a:r>
+              <a:t>Avant de rentrer dans la technique, je vais vous expliquer le besoin.</a:t>
+            </a:r>
+          </a:p>
+          <a:p>
+            <a:r>
+              <a:t>L'idée c'est qu'un patient veut une info médicale fiable et rapide.</a:t>
+            </a:r>
+          </a:p>
+          <a:p>
+            <a:r>
+              <a:t>Le problème, c'est qu'un LLM tout seul peut halluciner — il invente parfois des trucs faux.</a:t>
+            </a:r>
+          </a:p>
+          <a:p>
+            <a:r>
+              <a:t>Donc on voulait un chatbot qui réponde uniquement à partir de sources officielles HAS et INCa.</a:t>
+            </a:r>
+          </a:p>
+          <a:p>
+            <a:r>
+              <a:t>Et important : c'est informatif, on fait pas de diagnostic. C'est un choix qu'on assume.</a:t>
             </a:r>
           </a:p>
         </p:txBody>
@@ -4725,27 +5172,38 @@
           <a:lstStyle/>
           <a:p>
             <a:r>
-              <a:t>Voilà le récap de notre stack. Frontend en Streamlit, backend FastAPI avec SQLAlchemy, auth JWT.</a:t>
-            </a:r>
-          </a:p>
-          <a:p>
-            <a:r>
-              <a:t>Pour le RAG on a LangChain comme imposé dans le sujet, et ChromaDB comme base vectorielle.</a:t>
-            </a:r>
-          </a:p>
-          <a:p>
-            <a:r>
-              <a:t>Embeddings avec all-MiniLM-L6-v2 qu'on a comparé à 2 autres.</a:t>
-            </a:r>
-          </a:p>
-          <a:p>
-            <a:r>
-              <a:t>Côté LLM, on utilise Gemini 2.5 Flash en prod, et Mistral via OpenRouter en dev avec un fallback.</a:t>
-            </a:r>
-          </a:p>
-          <a:p>
-            <a:r>
-              <a:t>On a aussi ajouté un fallback DuckDuckGo en bonus, et la base SQLite pour les sessions.</a:t>
+              <a:t>━━━━━━━━━━━━━━━━━━━━━━━━━━━━━━━━</a:t>
+            </a:r>
+          </a:p>
+          <a:p>
+            <a:r>
+              <a:t>🎤  GRACE  ·  slide 5/28  ·  ~45s</a:t>
+            </a:r>
+          </a:p>
+          <a:p>
+            <a:r>
+              <a:t>━━━━━━━━━━━━━━━━━━━━━━━━━━━━━━━━</a:t>
+            </a:r>
+          </a:p>
+          <a:p/>
+          <a:p>
+            <a:r>
+              <a:t>Petite parenthèse pour répondre à une question qui revient souvent.</a:t>
+            </a:r>
+          </a:p>
+          <a:p>
+            <a:r>
+              <a:t>La SAE ne demande pas de créer un LLM from scratch.</a:t>
+            </a:r>
+          </a:p>
+          <a:p>
+            <a:r>
+              <a:t>L'analogie c'est qu'on réinvente pas le moteur d'une voiture, on construit le châssis autour.</a:t>
+            </a:r>
+          </a:p>
+          <a:p>
+            <a:r>
+              <a:t>Le vrai boulot c'est : le pipeline RAG, l'orchestration backend, le prompt engineering, la comparaison de modèles. C'est ça la SAE.</a:t>
             </a:r>
           </a:p>
         </p:txBody>
@@ -4892,27 +5350,48 @@
           <a:lstStyle/>
           <a:p>
             <a:r>
-              <a:t>Et voilà l'archi générale. Le patient écrit dans Streamlit, ça part vers FastAPI qui gère l'auth et les sessions.</a:t>
-            </a:r>
-          </a:p>
-          <a:p>
-            <a:r>
-              <a:t>Le pipeline RAG va chercher dans ChromaDB qui a indexé tous nos PDFs HAS et INCa.</a:t>
-            </a:r>
-          </a:p>
-          <a:p>
-            <a:r>
-              <a:t>Si le score est mauvais, on bascule sur DuckDuckGo en filet de sécurité — c'est notre premier bonus.</a:t>
-            </a:r>
-          </a:p>
-          <a:p>
-            <a:r>
-              <a:t>Le prompt assemblé part au LLM qui renvoie la réponse. Et après, Hermes peut aussi prendre le relais pour orienter vers un spécialiste, c'est notre deuxième bonus.</a:t>
-            </a:r>
-          </a:p>
-          <a:p>
-            <a:r>
-              <a:t>Important : l'API est jamais exposée publiquement, tout passe par le réseau interne Docker.</a:t>
+              <a:t>━━━━━━━━━━━━━━━━━━━━━━━━━━━━━━━━</a:t>
+            </a:r>
+          </a:p>
+          <a:p>
+            <a:r>
+              <a:t>🎤  GRACE  ·  slide 6/28  ·  ~30s</a:t>
+            </a:r>
+          </a:p>
+          <a:p>
+            <a:r>
+              <a:t>━━━━━━━━━━━━━━━━━━━━━━━━━━━━━━━━</a:t>
+            </a:r>
+          </a:p>
+          <a:p/>
+          <a:p>
+            <a:r>
+              <a:t>Voilà le récap de notre stack.</a:t>
+            </a:r>
+          </a:p>
+          <a:p>
+            <a:r>
+              <a:t>Frontend en Streamlit, backend FastAPI avec SQLAlchemy, auth JWT.</a:t>
+            </a:r>
+          </a:p>
+          <a:p>
+            <a:r>
+              <a:t>Pour le RAG on a LangChain comme imposé dans le sujet, et ChromaDB comme base vectorielle.</a:t>
+            </a:r>
+          </a:p>
+          <a:p>
+            <a:r>
+              <a:t>Embeddings avec all-MiniLM-L6-v2 qu'on a comparé à 2 autres.</a:t>
+            </a:r>
+          </a:p>
+          <a:p>
+            <a:r>
+              <a:t>Côté LLM : Gemini 2.5 Flash en prod, Mistral via OpenRouter en dev, avec un fallback.</a:t>
+            </a:r>
+          </a:p>
+          <a:p>
+            <a:r>
+              <a:t>On a aussi DuckDuckGo en bonus, et SQLite pour les sessions.</a:t>
             </a:r>
           </a:p>
         </p:txBody>
@@ -5058,19 +5537,61 @@
           </a:bodyPr>
           <a:lstStyle/>
           <a:p>
-            <a:pPr indent="0" lvl="0" marL="0" rtl="0" algn="l">
-              <a:spcBef>
-                <a:spcPts val="0"/>
-              </a:spcBef>
-              <a:spcAft>
-                <a:spcPts val="0"/>
-              </a:spcAft>
-              <a:buNone/>
-            </a:pPr>
-            <a:r>
-              <a:t/>
-            </a:r>
-            <a:endParaRPr/>
+            <a:r>
+              <a:t>━━━━━━━━━━━━━━━━━━━━━━━━━━━━━━━━</a:t>
+            </a:r>
+          </a:p>
+          <a:p>
+            <a:r>
+              <a:t>🎤  GRACE  ·  slide 7/28  ·  ~45s</a:t>
+            </a:r>
+          </a:p>
+          <a:p>
+            <a:r>
+              <a:t>━━━━━━━━━━━━━━━━━━━━━━━━━━━━━━━━</a:t>
+            </a:r>
+          </a:p>
+          <a:p/>
+          <a:p>
+            <a:r>
+              <a:t>Et voilà l'archi générale.</a:t>
+            </a:r>
+          </a:p>
+          <a:p>
+            <a:r>
+              <a:t>Le patient écrit dans Streamlit, ça part vers FastAPI qui gère l'auth et les sessions.</a:t>
+            </a:r>
+          </a:p>
+          <a:p>
+            <a:r>
+              <a:t>Le pipeline RAG va chercher dans ChromaDB qui a indexé tous nos PDFs HAS et INCa.</a:t>
+            </a:r>
+          </a:p>
+          <a:p>
+            <a:r>
+              <a:t>Si le score est mauvais, on bascule sur DuckDuckGo en filet de sécurité — premier bonus.</a:t>
+            </a:r>
+          </a:p>
+          <a:p>
+            <a:r>
+              <a:t>Le prompt assemblé part au LLM qui renvoie la réponse.</a:t>
+            </a:r>
+          </a:p>
+          <a:p>
+            <a:r>
+              <a:t>Et après, Hermes peut prendre le relais pour orienter vers un spécialiste — deuxième bonus.</a:t>
+            </a:r>
+          </a:p>
+          <a:p>
+            <a:r>
+              <a:t>À noter : l'API n'est jamais exposée publiquement, tout passe par le réseau interne Docker.</a:t>
+            </a:r>
+          </a:p>
+          <a:p/>
+          <a:p>
+            <a:r>
+              <a:t>────  🎙  PASSE LA PAROLE À : YOUSRA  ────</a:t>
+            </a:r>
           </a:p>
         </p:txBody>
       </p:sp>
@@ -5215,19 +5736,25 @@
           </a:bodyPr>
           <a:lstStyle/>
           <a:p>
-            <a:pPr indent="0" lvl="0" marL="0" rtl="0" algn="l">
-              <a:spcBef>
-                <a:spcPts val="0"/>
-              </a:spcBef>
-              <a:spcAft>
-                <a:spcPts val="0"/>
-              </a:spcAft>
-              <a:buNone/>
-            </a:pPr>
-            <a:r>
-              <a:t/>
-            </a:r>
-            <a:endParaRPr/>
+            <a:r>
+              <a:t>━━━━━━━━━━━━━━━━━━━━━━━━━━━━━━━━</a:t>
+            </a:r>
+          </a:p>
+          <a:p>
+            <a:r>
+              <a:t>🎤  YOUSRA  ·  slide 8/28  ·  ~10s (transition)</a:t>
+            </a:r>
+          </a:p>
+          <a:p>
+            <a:r>
+              <a:t>━━━━━━━━━━━━━━━━━━━━━━━━━━━━━━━━</a:t>
+            </a:r>
+          </a:p>
+          <a:p/>
+          <a:p>
+            <a:r>
+              <a:t>Slide de transition « Partie 2 — Traitement des PDFs &amp; Pipeline RAG ».</a:t>
+            </a:r>
           </a:p>
         </p:txBody>
       </p:sp>
@@ -5373,12 +5900,28 @@
           <a:lstStyle/>
           <a:p>
             <a:r>
+              <a:t>━━━━━━━━━━━━━━━━━━━━━━━━━━━━━━━━</a:t>
+            </a:r>
+          </a:p>
+          <a:p>
+            <a:r>
+              <a:t>🎤  YOUSRA  ·  slide 9/28  ·  ~50s</a:t>
+            </a:r>
+          </a:p>
+          <a:p>
+            <a:r>
+              <a:t>━━━━━━━━━━━━━━━━━━━━━━━━━━━━━━━━</a:t>
+            </a:r>
+          </a:p>
+          <a:p/>
+          <a:p>
+            <a:r>
               <a:t>Donc moi je prends la suite pour vous expliquer comment on traite les PDFs.</a:t>
             </a:r>
           </a:p>
           <a:p>
             <a:r>
-              <a:t>On a 5 PDFs officiels qui couvrent 3 maladies : le diabète, Alzheimer et le cancer du poumon, tous sourcés HAS et INCa.</a:t>
+              <a:t>On a 5 PDFs officiels qui couvrent 3 maladies : diabète, Alzheimer et cancer du poumon, sourcés HAS et INCa.</a:t>
             </a:r>
           </a:p>
           <a:p>
@@ -5398,7 +5941,7 @@
           </a:p>
           <a:p>
             <a:r>
-              <a:t>Ce qui est important c'est que cette étape se fait une seule fois, au démarrage. Pas à chaque requête.</a:t>
+              <a:t>Important : cette étape se fait une seule fois, au démarrage. Pas à chaque requête.</a:t>
             </a:r>
           </a:p>
         </p:txBody>
@@ -5545,22 +6088,38 @@
           <a:lstStyle/>
           <a:p>
             <a:r>
-              <a:t>Alors pourquoi 50 caractères de chevauchement ? C'est une question qu'on peut se poser.</a:t>
-            </a:r>
-          </a:p>
-          <a:p>
-            <a:r>
-              <a:t>Sans chevauchement, une phrase clé peut se retrouver coupée en deux entre 2 chunks. Par exemple ici, "repose sur la metfor" / "mine en première intention" — du coup la phrase complète est perdue.</a:t>
-            </a:r>
-          </a:p>
-          <a:p>
-            <a:r>
-              <a:t>Avec 50 caractères de recouvrement, le chunk suivant recule un peu avant de repartir. Comme ça la phrase "repose sur la metformine" se retrouve intacte dans au moins un chunk.</a:t>
-            </a:r>
-          </a:p>
-          <a:p>
-            <a:r>
-              <a:t>C'est un petit détail mais ça change la qualité du retrieval.</a:t>
+              <a:t>━━━━━━━━━━━━━━━━━━━━━━━━━━━━━━━━</a:t>
+            </a:r>
+          </a:p>
+          <a:p>
+            <a:r>
+              <a:t>🎤  YOUSRA  ·  slide 10/28  ·  ~30s</a:t>
+            </a:r>
+          </a:p>
+          <a:p>
+            <a:r>
+              <a:t>━━━━━━━━━━━━━━━━━━━━━━━━━━━━━━━━</a:t>
+            </a:r>
+          </a:p>
+          <a:p/>
+          <a:p>
+            <a:r>
+              <a:t>Alors pourquoi 50 caractères de chevauchement ?</a:t>
+            </a:r>
+          </a:p>
+          <a:p>
+            <a:r>
+              <a:t>Sans chevauchement, une phrase clé peut être coupée en deux entre 2 chunks. Par exemple « repose sur la metfor » / « mine en première intention » — la phrase complète est perdue.</a:t>
+            </a:r>
+          </a:p>
+          <a:p>
+            <a:r>
+              <a:t>Avec 50 caractères de recouvrement, le chunk suivant recule un peu avant de repartir. La phrase « repose sur la metformine » se retrouve intacte dans au moins un chunk.</a:t>
+            </a:r>
+          </a:p>
+          <a:p>
+            <a:r>
+              <a:t>Petit détail mais ça change la qualité du retrieval.</a:t>
             </a:r>
           </a:p>
         </p:txBody>
@@ -6892,7 +7451,7 @@
             <a:avLst/>
           </a:prstGeom>
           <a:solidFill>
-            <a:srgbClr val="134E4A"/>
+            <a:srgbClr val="2563EB"/>
           </a:solidFill>
           <a:ln cap="flat" cmpd="sng" w="12700">
             <a:solidFill>
@@ -7746,49 +8305,6 @@
               <a:cs typeface="Calibri"/>
               <a:sym typeface="Calibri"/>
             </a:endParaRPr>
-          </a:p>
-        </p:txBody>
-      </p:sp>
-      <p:sp>
-        <p:nvSpPr>
-          <p:cNvPr id="174" name="Rectangle 173"/>
-          <p:cNvSpPr/>
-          <p:nvPr/>
-        </p:nvSpPr>
-        <p:spPr>
-          <a:xfrm>
-            <a:off x="0" y="777240"/>
-            <a:ext cx="109728" cy="5989320"/>
-          </a:xfrm>
-          <a:prstGeom prst="rect">
-            <a:avLst/>
-          </a:prstGeom>
-          <a:solidFill>
-            <a:srgbClr val="2563EB"/>
-          </a:solidFill>
-          <a:ln>
-            <a:noFill/>
-          </a:ln>
-        </p:spPr>
-        <p:style>
-          <a:lnRef idx="1">
-            <a:schemeClr val="accent1"/>
-          </a:lnRef>
-          <a:fillRef idx="3">
-            <a:schemeClr val="accent1"/>
-          </a:fillRef>
-          <a:effectRef idx="2">
-            <a:schemeClr val="accent1"/>
-          </a:effectRef>
-          <a:fontRef idx="minor">
-            <a:schemeClr val="lt1"/>
-          </a:fontRef>
-        </p:style>
-        <p:txBody>
-          <a:bodyPr rtlCol="0" anchor="ctr"/>
-          <a:lstStyle/>
-          <a:p>
-            <a:pPr algn="ctr"/>
           </a:p>
         </p:txBody>
       </p:sp>
@@ -7842,7 +8358,7 @@
             <a:avLst/>
           </a:prstGeom>
           <a:solidFill>
-            <a:srgbClr val="134E4A"/>
+            <a:srgbClr val="2563EB"/>
           </a:solidFill>
           <a:ln cap="flat" cmpd="sng" w="12700">
             <a:solidFill>
@@ -9029,49 +9545,6 @@
               <a:cs typeface="Calibri"/>
               <a:sym typeface="Calibri"/>
             </a:endParaRPr>
-          </a:p>
-        </p:txBody>
-      </p:sp>
-      <p:sp>
-        <p:nvSpPr>
-          <p:cNvPr id="197" name="Rectangle 196"/>
-          <p:cNvSpPr/>
-          <p:nvPr/>
-        </p:nvSpPr>
-        <p:spPr>
-          <a:xfrm>
-            <a:off x="0" y="777240"/>
-            <a:ext cx="109728" cy="5989320"/>
-          </a:xfrm>
-          <a:prstGeom prst="rect">
-            <a:avLst/>
-          </a:prstGeom>
-          <a:solidFill>
-            <a:srgbClr val="2563EB"/>
-          </a:solidFill>
-          <a:ln>
-            <a:noFill/>
-          </a:ln>
-        </p:spPr>
-        <p:style>
-          <a:lnRef idx="1">
-            <a:schemeClr val="accent1"/>
-          </a:lnRef>
-          <a:fillRef idx="3">
-            <a:schemeClr val="accent1"/>
-          </a:fillRef>
-          <a:effectRef idx="2">
-            <a:schemeClr val="accent1"/>
-          </a:effectRef>
-          <a:fontRef idx="minor">
-            <a:schemeClr val="lt1"/>
-          </a:fontRef>
-        </p:style>
-        <p:txBody>
-          <a:bodyPr rtlCol="0" anchor="ctr"/>
-          <a:lstStyle/>
-          <a:p>
-            <a:pPr algn="ctr"/>
           </a:p>
         </p:txBody>
       </p:sp>
@@ -9125,7 +9598,7 @@
             <a:avLst/>
           </a:prstGeom>
           <a:solidFill>
-            <a:srgbClr val="134E4A"/>
+            <a:srgbClr val="2563EB"/>
           </a:solidFill>
           <a:ln cap="flat" cmpd="sng" w="12700">
             <a:solidFill>
@@ -9495,7 +9968,7 @@
                 <a:cs typeface="Calibri"/>
                 <a:sym typeface="Calibri"/>
               </a:rPr>
-              <a:t>12</a:t>
+              <a:t>1</a:t>
             </a:r>
             <a:endParaRPr b="0" i="0" sz="1300" u="none" cap="none" strike="noStrike">
               <a:solidFill>
@@ -9745,7 +10218,7 @@
                 <a:cs typeface="Calibri"/>
                 <a:sym typeface="Calibri"/>
               </a:rPr>
-              <a:t>12</a:t>
+              <a:t>2</a:t>
             </a:r>
             <a:endParaRPr b="0" i="0" sz="1300" u="none" cap="none" strike="noStrike">
               <a:solidFill>
@@ -9995,7 +10468,7 @@
                 <a:cs typeface="Calibri"/>
                 <a:sym typeface="Calibri"/>
               </a:rPr>
-              <a:t>12</a:t>
+              <a:t>3</a:t>
             </a:r>
             <a:endParaRPr b="0" i="0" sz="1300" u="none" cap="none" strike="noStrike">
               <a:solidFill>
@@ -10245,7 +10718,7 @@
                 <a:cs typeface="Calibri"/>
                 <a:sym typeface="Calibri"/>
               </a:rPr>
-              <a:t>12</a:t>
+              <a:t>4</a:t>
             </a:r>
             <a:endParaRPr b="0" i="0" sz="1300" u="none" cap="none" strike="noStrike">
               <a:solidFill>
@@ -10495,7 +10968,7 @@
                 <a:cs typeface="Calibri"/>
                 <a:sym typeface="Calibri"/>
               </a:rPr>
-              <a:t>12</a:t>
+              <a:t>5</a:t>
             </a:r>
             <a:endParaRPr b="0" i="0" sz="1300" u="none" cap="none" strike="noStrike">
               <a:solidFill>
@@ -10618,49 +11091,6 @@
               <a:cs typeface="Calibri"/>
               <a:sym typeface="Calibri"/>
             </a:endParaRPr>
-          </a:p>
-        </p:txBody>
-      </p:sp>
-      <p:sp>
-        <p:nvSpPr>
-          <p:cNvPr id="231" name="Rectangle 230"/>
-          <p:cNvSpPr/>
-          <p:nvPr/>
-        </p:nvSpPr>
-        <p:spPr>
-          <a:xfrm>
-            <a:off x="0" y="777240"/>
-            <a:ext cx="109728" cy="5989320"/>
-          </a:xfrm>
-          <a:prstGeom prst="rect">
-            <a:avLst/>
-          </a:prstGeom>
-          <a:solidFill>
-            <a:srgbClr val="2563EB"/>
-          </a:solidFill>
-          <a:ln>
-            <a:noFill/>
-          </a:ln>
-        </p:spPr>
-        <p:style>
-          <a:lnRef idx="1">
-            <a:schemeClr val="accent1"/>
-          </a:lnRef>
-          <a:fillRef idx="3">
-            <a:schemeClr val="accent1"/>
-          </a:fillRef>
-          <a:effectRef idx="2">
-            <a:schemeClr val="accent1"/>
-          </a:effectRef>
-          <a:fontRef idx="minor">
-            <a:schemeClr val="lt1"/>
-          </a:fontRef>
-        </p:style>
-        <p:txBody>
-          <a:bodyPr rtlCol="0" anchor="ctr"/>
-          <a:lstStyle/>
-          <a:p>
-            <a:pPr algn="ctr"/>
           </a:p>
         </p:txBody>
       </p:sp>
@@ -10714,7 +11144,7 @@
             <a:avLst/>
           </a:prstGeom>
           <a:solidFill>
-            <a:srgbClr val="134E4A"/>
+            <a:srgbClr val="2563EB"/>
           </a:solidFill>
           <a:ln cap="flat" cmpd="sng" w="12700">
             <a:solidFill>
@@ -11659,49 +12089,6 @@
               <a:cs typeface="Calibri"/>
               <a:sym typeface="Calibri"/>
             </a:endParaRPr>
-          </a:p>
-        </p:txBody>
-      </p:sp>
-      <p:sp>
-        <p:nvSpPr>
-          <p:cNvPr id="248" name="Rectangle 247"/>
-          <p:cNvSpPr/>
-          <p:nvPr/>
-        </p:nvSpPr>
-        <p:spPr>
-          <a:xfrm>
-            <a:off x="0" y="777240"/>
-            <a:ext cx="109728" cy="5989320"/>
-          </a:xfrm>
-          <a:prstGeom prst="rect">
-            <a:avLst/>
-          </a:prstGeom>
-          <a:solidFill>
-            <a:srgbClr val="2563EB"/>
-          </a:solidFill>
-          <a:ln>
-            <a:noFill/>
-          </a:ln>
-        </p:spPr>
-        <p:style>
-          <a:lnRef idx="1">
-            <a:schemeClr val="accent1"/>
-          </a:lnRef>
-          <a:fillRef idx="3">
-            <a:schemeClr val="accent1"/>
-          </a:fillRef>
-          <a:effectRef idx="2">
-            <a:schemeClr val="accent1"/>
-          </a:effectRef>
-          <a:fontRef idx="minor">
-            <a:schemeClr val="lt1"/>
-          </a:fontRef>
-        </p:style>
-        <p:txBody>
-          <a:bodyPr rtlCol="0" anchor="ctr"/>
-          <a:lstStyle/>
-          <a:p>
-            <a:pPr algn="ctr"/>
           </a:p>
         </p:txBody>
       </p:sp>
@@ -12165,7 +12552,7 @@
             <a:avLst/>
           </a:prstGeom>
           <a:solidFill>
-            <a:srgbClr val="134E4A"/>
+            <a:srgbClr val="7C3AED"/>
           </a:solidFill>
           <a:ln cap="flat" cmpd="sng" w="12700">
             <a:solidFill>
@@ -13510,49 +13897,6 @@
           </a:p>
         </p:txBody>
       </p:sp>
-      <p:sp>
-        <p:nvSpPr>
-          <p:cNvPr id="272" name="Rectangle 271"/>
-          <p:cNvSpPr/>
-          <p:nvPr/>
-        </p:nvSpPr>
-        <p:spPr>
-          <a:xfrm>
-            <a:off x="0" y="777240"/>
-            <a:ext cx="109728" cy="5989320"/>
-          </a:xfrm>
-          <a:prstGeom prst="rect">
-            <a:avLst/>
-          </a:prstGeom>
-          <a:solidFill>
-            <a:srgbClr val="7C3AED"/>
-          </a:solidFill>
-          <a:ln>
-            <a:noFill/>
-          </a:ln>
-        </p:spPr>
-        <p:style>
-          <a:lnRef idx="1">
-            <a:schemeClr val="accent1"/>
-          </a:lnRef>
-          <a:fillRef idx="3">
-            <a:schemeClr val="accent1"/>
-          </a:fillRef>
-          <a:effectRef idx="2">
-            <a:schemeClr val="accent1"/>
-          </a:effectRef>
-          <a:fontRef idx="minor">
-            <a:schemeClr val="lt1"/>
-          </a:fontRef>
-        </p:style>
-        <p:txBody>
-          <a:bodyPr rtlCol="0" anchor="ctr"/>
-          <a:lstStyle/>
-          <a:p>
-            <a:pPr algn="ctr"/>
-          </a:p>
-        </p:txBody>
-      </p:sp>
     </p:spTree>
   </p:cSld>
   <p:clrMapOvr>
@@ -13603,7 +13947,7 @@
             <a:avLst/>
           </a:prstGeom>
           <a:solidFill>
-            <a:srgbClr val="134E4A"/>
+            <a:srgbClr val="7C3AED"/>
           </a:solidFill>
           <a:ln cap="flat" cmpd="sng" w="12700">
             <a:solidFill>
@@ -14943,49 +15287,6 @@
           </a:p>
         </p:txBody>
       </p:sp>
-      <p:sp>
-        <p:nvSpPr>
-          <p:cNvPr id="285" name="Rectangle 284"/>
-          <p:cNvSpPr/>
-          <p:nvPr/>
-        </p:nvSpPr>
-        <p:spPr>
-          <a:xfrm>
-            <a:off x="0" y="777240"/>
-            <a:ext cx="109728" cy="5989320"/>
-          </a:xfrm>
-          <a:prstGeom prst="rect">
-            <a:avLst/>
-          </a:prstGeom>
-          <a:solidFill>
-            <a:srgbClr val="7C3AED"/>
-          </a:solidFill>
-          <a:ln>
-            <a:noFill/>
-          </a:ln>
-        </p:spPr>
-        <p:style>
-          <a:lnRef idx="1">
-            <a:schemeClr val="accent1"/>
-          </a:lnRef>
-          <a:fillRef idx="3">
-            <a:schemeClr val="accent1"/>
-          </a:fillRef>
-          <a:effectRef idx="2">
-            <a:schemeClr val="accent1"/>
-          </a:effectRef>
-          <a:fontRef idx="minor">
-            <a:schemeClr val="lt1"/>
-          </a:fontRef>
-        </p:style>
-        <p:txBody>
-          <a:bodyPr rtlCol="0" anchor="ctr"/>
-          <a:lstStyle/>
-          <a:p>
-            <a:pPr algn="ctr"/>
-          </a:p>
-        </p:txBody>
-      </p:sp>
     </p:spTree>
   </p:cSld>
   <p:clrMapOvr>
@@ -15036,7 +15337,7 @@
             <a:avLst/>
           </a:prstGeom>
           <a:solidFill>
-            <a:srgbClr val="134E4A"/>
+            <a:srgbClr val="7C3AED"/>
           </a:solidFill>
           <a:ln cap="flat" cmpd="sng" w="12700">
             <a:solidFill>
@@ -15935,49 +16236,6 @@
               <a:cs typeface="Calibri"/>
               <a:sym typeface="Calibri"/>
             </a:endParaRPr>
-          </a:p>
-        </p:txBody>
-      </p:sp>
-      <p:sp>
-        <p:nvSpPr>
-          <p:cNvPr id="301" name="Rectangle 300"/>
-          <p:cNvSpPr/>
-          <p:nvPr/>
-        </p:nvSpPr>
-        <p:spPr>
-          <a:xfrm>
-            <a:off x="0" y="777240"/>
-            <a:ext cx="109728" cy="5989320"/>
-          </a:xfrm>
-          <a:prstGeom prst="rect">
-            <a:avLst/>
-          </a:prstGeom>
-          <a:solidFill>
-            <a:srgbClr val="7C3AED"/>
-          </a:solidFill>
-          <a:ln>
-            <a:noFill/>
-          </a:ln>
-        </p:spPr>
-        <p:style>
-          <a:lnRef idx="1">
-            <a:schemeClr val="accent1"/>
-          </a:lnRef>
-          <a:fillRef idx="3">
-            <a:schemeClr val="accent1"/>
-          </a:fillRef>
-          <a:effectRef idx="2">
-            <a:schemeClr val="accent1"/>
-          </a:effectRef>
-          <a:fontRef idx="minor">
-            <a:schemeClr val="lt1"/>
-          </a:fontRef>
-        </p:style>
-        <p:txBody>
-          <a:bodyPr rtlCol="0" anchor="ctr"/>
-          <a:lstStyle/>
-          <a:p>
-            <a:pPr algn="ctr"/>
           </a:p>
         </p:txBody>
       </p:sp>
@@ -16031,7 +16289,7 @@
             <a:avLst/>
           </a:prstGeom>
           <a:solidFill>
-            <a:srgbClr val="134E4A"/>
+            <a:srgbClr val="7C3AED"/>
           </a:solidFill>
           <a:ln cap="flat" cmpd="sng" w="12700">
             <a:solidFill>
@@ -17084,49 +17342,6 @@
               <a:cs typeface="Calibri"/>
               <a:sym typeface="Calibri"/>
             </a:endParaRPr>
-          </a:p>
-        </p:txBody>
-      </p:sp>
-      <p:sp>
-        <p:nvSpPr>
-          <p:cNvPr id="325" name="Rectangle 324"/>
-          <p:cNvSpPr/>
-          <p:nvPr/>
-        </p:nvSpPr>
-        <p:spPr>
-          <a:xfrm>
-            <a:off x="0" y="777240"/>
-            <a:ext cx="109728" cy="5989320"/>
-          </a:xfrm>
-          <a:prstGeom prst="rect">
-            <a:avLst/>
-          </a:prstGeom>
-          <a:solidFill>
-            <a:srgbClr val="7C3AED"/>
-          </a:solidFill>
-          <a:ln>
-            <a:noFill/>
-          </a:ln>
-        </p:spPr>
-        <p:style>
-          <a:lnRef idx="1">
-            <a:schemeClr val="accent1"/>
-          </a:lnRef>
-          <a:fillRef idx="3">
-            <a:schemeClr val="accent1"/>
-          </a:fillRef>
-          <a:effectRef idx="2">
-            <a:schemeClr val="accent1"/>
-          </a:effectRef>
-          <a:fontRef idx="minor">
-            <a:schemeClr val="lt1"/>
-          </a:fontRef>
-        </p:style>
-        <p:txBody>
-          <a:bodyPr rtlCol="0" anchor="ctr"/>
-          <a:lstStyle/>
-          <a:p>
-            <a:pPr algn="ctr"/>
           </a:p>
         </p:txBody>
       </p:sp>
@@ -17645,7 +17860,7 @@
                 </a:solidFill>
                 <a:latin typeface="Consolas"/>
               </a:rPr>
-              <a:t>2</a:t>
+              <a:t>01</a:t>
             </a:r>
           </a:p>
         </p:txBody>
@@ -17696,7 +17911,7 @@
                 </a:solidFill>
                 <a:latin typeface="Inter"/>
               </a:rPr>
-              <a:t>Grace  ·  slides 3 à 5</a:t>
+              <a:t>Grace  ·  slides 3 à 7</a:t>
             </a:r>
           </a:p>
         </p:txBody>
@@ -17731,7 +17946,7 @@
                 </a:solidFill>
                 <a:latin typeface="Consolas"/>
               </a:rPr>
-              <a:t>2</a:t>
+              <a:t>02</a:t>
             </a:r>
           </a:p>
         </p:txBody>
@@ -17782,7 +17997,7 @@
                 </a:solidFill>
                 <a:latin typeface="Inter"/>
               </a:rPr>
-              <a:t>Yousra  ·  slides 9 à 13</a:t>
+              <a:t>Yousra  ·  slides 8 à 13</a:t>
             </a:r>
           </a:p>
         </p:txBody>
@@ -17817,7 +18032,7 @@
                 </a:solidFill>
                 <a:latin typeface="Consolas"/>
               </a:rPr>
-              <a:t>2</a:t>
+              <a:t>03</a:t>
             </a:r>
           </a:p>
         </p:txBody>
@@ -17852,7 +18067,7 @@
                 </a:solidFill>
                 <a:latin typeface="Inter"/>
               </a:rPr>
-              <a:t>Comparaison encodeurs &amp; Bonus DuckDuckGo</a:t>
+              <a:t>Comparaison encodeurs &amp; DuckDuckGo</a:t>
             </a:r>
           </a:p>
           <a:p>
@@ -17868,7 +18083,7 @@
                 </a:solidFill>
                 <a:latin typeface="Inter"/>
               </a:rPr>
-              <a:t>Imane  ·  slides 15 à 18</a:t>
+              <a:t>Imane  ·  slides 14 à 18</a:t>
             </a:r>
           </a:p>
         </p:txBody>
@@ -17903,7 +18118,7 @@
                 </a:solidFill>
                 <a:latin typeface="Consolas"/>
               </a:rPr>
-              <a:t>2</a:t>
+              <a:t>04</a:t>
             </a:r>
           </a:p>
         </p:txBody>
@@ -17954,7 +18169,7 @@
                 </a:solidFill>
                 <a:latin typeface="Inter"/>
               </a:rPr>
-              <a:t>Yannis  ·  slides 20 à 26</a:t>
+              <a:t>Yannis  ·  slides 19 à 26</a:t>
             </a:r>
           </a:p>
         </p:txBody>
@@ -17989,7 +18204,7 @@
                 </a:solidFill>
                 <a:latin typeface="Consolas"/>
               </a:rPr>
-              <a:t>2</a:t>
+              <a:t>05</a:t>
             </a:r>
           </a:p>
         </p:txBody>
@@ -18054,7 +18269,7 @@
         <p:spPr>
           <a:xfrm>
             <a:off x="640080" y="6263640"/>
-            <a:ext cx="8229600" cy="365760"/>
+            <a:ext cx="7315200" cy="365760"/>
           </a:xfrm>
           <a:prstGeom prst="rect">
             <a:avLst/>
@@ -18062,7 +18277,7 @@
           <a:noFill/>
         </p:spPr>
         <p:txBody>
-          <a:bodyPr wrap="none" lIns="0" rIns="0" tIns="0" bIns="0">
+          <a:bodyPr wrap="none" lIns="0" rIns="0">
             <a:spAutoFit/>
           </a:bodyPr>
           <a:lstStyle/>
@@ -18076,41 +18291,6 @@
                 <a:latin typeface="Inter"/>
               </a:rPr>
               <a:t>Yousra · Imane · Yannis · Grace   |   sae.amanawebagency.com</a:t>
-            </a:r>
-          </a:p>
-        </p:txBody>
-      </p:sp>
-      <p:sp>
-        <p:nvSpPr>
-          <p:cNvPr id="14" name="TextBox 13"/>
-          <p:cNvSpPr txBox="1"/>
-          <p:nvPr/>
-        </p:nvSpPr>
-        <p:spPr>
-          <a:xfrm>
-            <a:off x="8229600" y="6263640"/>
-            <a:ext cx="548640" cy="365760"/>
-          </a:xfrm>
-          <a:prstGeom prst="rect">
-            <a:avLst/>
-          </a:prstGeom>
-          <a:noFill/>
-        </p:spPr>
-        <p:txBody>
-          <a:bodyPr wrap="none" lIns="0" rIns="0" tIns="0" bIns="0">
-            <a:spAutoFit/>
-          </a:bodyPr>
-          <a:lstStyle/>
-          <a:p>
-            <a:pPr algn="r"/>
-            <a:r>
-              <a:rPr sz="1000">
-                <a:solidFill>
-                  <a:srgbClr val="CCFBF1"/>
-                </a:solidFill>
-                <a:latin typeface="Inter"/>
-              </a:rPr>
-              <a:t>2</a:t>
             </a:r>
           </a:p>
         </p:txBody>
@@ -18165,7 +18345,7 @@
             <a:avLst/>
           </a:prstGeom>
           <a:solidFill>
-            <a:srgbClr val="134E4A"/>
+            <a:srgbClr val="F59E0B"/>
           </a:solidFill>
           <a:ln cap="flat" cmpd="sng" w="12700">
             <a:solidFill>
@@ -18598,7 +18778,7 @@
                 <a:cs typeface="Calibri"/>
                 <a:sym typeface="Calibri"/>
               </a:rPr>
-              <a:t>20</a:t>
+              <a:t>1</a:t>
             </a:r>
             <a:endParaRPr b="0" i="0" sz="1400" u="none" cap="none" strike="noStrike">
               <a:solidFill>
@@ -18885,7 +19065,7 @@
                 <a:cs typeface="Calibri"/>
                 <a:sym typeface="Calibri"/>
               </a:rPr>
-              <a:t>20</a:t>
+              <a:t>2</a:t>
             </a:r>
             <a:endParaRPr b="0" i="0" sz="1400" u="none" cap="none" strike="noStrike">
               <a:solidFill>
@@ -19172,7 +19352,7 @@
                 <a:cs typeface="Calibri"/>
                 <a:sym typeface="Calibri"/>
               </a:rPr>
-              <a:t>20</a:t>
+              <a:t>3</a:t>
             </a:r>
             <a:endParaRPr b="0" i="0" sz="1400" u="none" cap="none" strike="noStrike">
               <a:solidFill>
@@ -19421,49 +19601,6 @@
               <a:cs typeface="Calibri"/>
               <a:sym typeface="Calibri"/>
             </a:endParaRPr>
-          </a:p>
-        </p:txBody>
-      </p:sp>
-      <p:sp>
-        <p:nvSpPr>
-          <p:cNvPr id="363" name="Rectangle 362"/>
-          <p:cNvSpPr/>
-          <p:nvPr/>
-        </p:nvSpPr>
-        <p:spPr>
-          <a:xfrm>
-            <a:off x="0" y="777240"/>
-            <a:ext cx="109728" cy="5989320"/>
-          </a:xfrm>
-          <a:prstGeom prst="rect">
-            <a:avLst/>
-          </a:prstGeom>
-          <a:solidFill>
-            <a:srgbClr val="F59E0B"/>
-          </a:solidFill>
-          <a:ln>
-            <a:noFill/>
-          </a:ln>
-        </p:spPr>
-        <p:style>
-          <a:lnRef idx="1">
-            <a:schemeClr val="accent1"/>
-          </a:lnRef>
-          <a:fillRef idx="3">
-            <a:schemeClr val="accent1"/>
-          </a:fillRef>
-          <a:effectRef idx="2">
-            <a:schemeClr val="accent1"/>
-          </a:effectRef>
-          <a:fontRef idx="minor">
-            <a:schemeClr val="lt1"/>
-          </a:fontRef>
-        </p:style>
-        <p:txBody>
-          <a:bodyPr rtlCol="0" anchor="ctr"/>
-          <a:lstStyle/>
-          <a:p>
-            <a:pPr algn="ctr"/>
           </a:p>
         </p:txBody>
       </p:sp>
@@ -19503,7 +19640,7 @@
             <a:avLst/>
           </a:prstGeom>
           <a:solidFill>
-            <a:srgbClr val="134E4A"/>
+            <a:srgbClr val="F59E0B"/>
           </a:solidFill>
           <a:ln cap="flat" cmpd="sng" w="12700">
             <a:solidFill>
@@ -19936,7 +20073,7 @@
                 <a:cs typeface="Calibri"/>
                 <a:sym typeface="Calibri"/>
               </a:rPr>
-              <a:t>21</a:t>
+              <a:t>1</a:t>
             </a:r>
             <a:endParaRPr b="0" i="0" sz="1400" u="none" cap="none" strike="noStrike">
               <a:solidFill>
@@ -20223,7 +20360,7 @@
                 <a:cs typeface="Calibri"/>
                 <a:sym typeface="Calibri"/>
               </a:rPr>
-              <a:t>21</a:t>
+              <a:t>2</a:t>
             </a:r>
             <a:endParaRPr b="0" i="0" sz="1400" u="none" cap="none" strike="noStrike">
               <a:solidFill>
@@ -20510,7 +20647,7 @@
                 <a:cs typeface="Calibri"/>
                 <a:sym typeface="Calibri"/>
               </a:rPr>
-              <a:t>21</a:t>
+              <a:t>3</a:t>
             </a:r>
             <a:endParaRPr b="0" i="0" sz="1400" u="none" cap="none" strike="noStrike">
               <a:solidFill>
@@ -20759,49 +20896,6 @@
               <a:cs typeface="Calibri"/>
               <a:sym typeface="Calibri"/>
             </a:endParaRPr>
-          </a:p>
-        </p:txBody>
-      </p:sp>
-      <p:sp>
-        <p:nvSpPr>
-          <p:cNvPr id="363" name="Rectangle 362"/>
-          <p:cNvSpPr/>
-          <p:nvPr/>
-        </p:nvSpPr>
-        <p:spPr>
-          <a:xfrm>
-            <a:off x="0" y="777240"/>
-            <a:ext cx="109728" cy="5989320"/>
-          </a:xfrm>
-          <a:prstGeom prst="rect">
-            <a:avLst/>
-          </a:prstGeom>
-          <a:solidFill>
-            <a:srgbClr val="F59E0B"/>
-          </a:solidFill>
-          <a:ln>
-            <a:noFill/>
-          </a:ln>
-        </p:spPr>
-        <p:style>
-          <a:lnRef idx="1">
-            <a:schemeClr val="accent1"/>
-          </a:lnRef>
-          <a:fillRef idx="3">
-            <a:schemeClr val="accent1"/>
-          </a:fillRef>
-          <a:effectRef idx="2">
-            <a:schemeClr val="accent1"/>
-          </a:effectRef>
-          <a:fontRef idx="minor">
-            <a:schemeClr val="lt1"/>
-          </a:fontRef>
-        </p:style>
-        <p:txBody>
-          <a:bodyPr rtlCol="0" anchor="ctr"/>
-          <a:lstStyle/>
-          <a:p>
-            <a:pPr algn="ctr"/>
           </a:p>
         </p:txBody>
       </p:sp>
@@ -20855,7 +20949,7 @@
             <a:avLst/>
           </a:prstGeom>
           <a:solidFill>
-            <a:srgbClr val="134E4A"/>
+            <a:srgbClr val="F59E0B"/>
           </a:solidFill>
           <a:ln cap="flat" cmpd="sng" w="12700">
             <a:solidFill>
@@ -21796,49 +21890,6 @@
               <a:cs typeface="Calibri"/>
               <a:sym typeface="Calibri"/>
             </a:endParaRPr>
-          </a:p>
-        </p:txBody>
-      </p:sp>
-      <p:sp>
-        <p:nvSpPr>
-          <p:cNvPr id="385" name="Rectangle 384"/>
-          <p:cNvSpPr/>
-          <p:nvPr/>
-        </p:nvSpPr>
-        <p:spPr>
-          <a:xfrm>
-            <a:off x="0" y="777240"/>
-            <a:ext cx="109728" cy="5989320"/>
-          </a:xfrm>
-          <a:prstGeom prst="rect">
-            <a:avLst/>
-          </a:prstGeom>
-          <a:solidFill>
-            <a:srgbClr val="F59E0B"/>
-          </a:solidFill>
-          <a:ln>
-            <a:noFill/>
-          </a:ln>
-        </p:spPr>
-        <p:style>
-          <a:lnRef idx="1">
-            <a:schemeClr val="accent1"/>
-          </a:lnRef>
-          <a:fillRef idx="3">
-            <a:schemeClr val="accent1"/>
-          </a:fillRef>
-          <a:effectRef idx="2">
-            <a:schemeClr val="accent1"/>
-          </a:effectRef>
-          <a:fontRef idx="minor">
-            <a:schemeClr val="lt1"/>
-          </a:fontRef>
-        </p:style>
-        <p:txBody>
-          <a:bodyPr rtlCol="0" anchor="ctr"/>
-          <a:lstStyle/>
-          <a:p>
-            <a:pPr algn="ctr"/>
           </a:p>
         </p:txBody>
       </p:sp>
@@ -21892,7 +21943,7 @@
             <a:avLst/>
           </a:prstGeom>
           <a:solidFill>
-            <a:srgbClr val="134E4A"/>
+            <a:srgbClr val="F59E0B"/>
           </a:solidFill>
           <a:ln cap="flat" cmpd="sng" w="12700">
             <a:solidFill>
@@ -22889,49 +22940,6 @@
               <a:cs typeface="Calibri"/>
               <a:sym typeface="Calibri"/>
             </a:endParaRPr>
-          </a:p>
-        </p:txBody>
-      </p:sp>
-      <p:sp>
-        <p:nvSpPr>
-          <p:cNvPr id="408" name="Rectangle 407"/>
-          <p:cNvSpPr/>
-          <p:nvPr/>
-        </p:nvSpPr>
-        <p:spPr>
-          <a:xfrm>
-            <a:off x="0" y="777240"/>
-            <a:ext cx="109728" cy="5989320"/>
-          </a:xfrm>
-          <a:prstGeom prst="rect">
-            <a:avLst/>
-          </a:prstGeom>
-          <a:solidFill>
-            <a:srgbClr val="F59E0B"/>
-          </a:solidFill>
-          <a:ln>
-            <a:noFill/>
-          </a:ln>
-        </p:spPr>
-        <p:style>
-          <a:lnRef idx="1">
-            <a:schemeClr val="accent1"/>
-          </a:lnRef>
-          <a:fillRef idx="3">
-            <a:schemeClr val="accent1"/>
-          </a:fillRef>
-          <a:effectRef idx="2">
-            <a:schemeClr val="accent1"/>
-          </a:effectRef>
-          <a:fontRef idx="minor">
-            <a:schemeClr val="lt1"/>
-          </a:fontRef>
-        </p:style>
-        <p:txBody>
-          <a:bodyPr rtlCol="0" anchor="ctr"/>
-          <a:lstStyle/>
-          <a:p>
-            <a:pPr algn="ctr"/>
           </a:p>
         </p:txBody>
       </p:sp>
@@ -22971,7 +22979,7 @@
             <a:avLst/>
           </a:prstGeom>
           <a:solidFill>
-            <a:srgbClr val="134E4A"/>
+            <a:srgbClr val="F59E0B"/>
           </a:solidFill>
           <a:ln cap="flat" cmpd="sng" w="12700">
             <a:solidFill>
@@ -23968,49 +23976,6 @@
               <a:cs typeface="Calibri"/>
               <a:sym typeface="Calibri"/>
             </a:endParaRPr>
-          </a:p>
-        </p:txBody>
-      </p:sp>
-      <p:sp>
-        <p:nvSpPr>
-          <p:cNvPr id="408" name="Rectangle 407"/>
-          <p:cNvSpPr/>
-          <p:nvPr/>
-        </p:nvSpPr>
-        <p:spPr>
-          <a:xfrm>
-            <a:off x="0" y="777240"/>
-            <a:ext cx="109728" cy="5989320"/>
-          </a:xfrm>
-          <a:prstGeom prst="rect">
-            <a:avLst/>
-          </a:prstGeom>
-          <a:solidFill>
-            <a:srgbClr val="F59E0B"/>
-          </a:solidFill>
-          <a:ln>
-            <a:noFill/>
-          </a:ln>
-        </p:spPr>
-        <p:style>
-          <a:lnRef idx="1">
-            <a:schemeClr val="accent1"/>
-          </a:lnRef>
-          <a:fillRef idx="3">
-            <a:schemeClr val="accent1"/>
-          </a:fillRef>
-          <a:effectRef idx="2">
-            <a:schemeClr val="accent1"/>
-          </a:effectRef>
-          <a:fontRef idx="minor">
-            <a:schemeClr val="lt1"/>
-          </a:fontRef>
-        </p:style>
-        <p:txBody>
-          <a:bodyPr rtlCol="0" anchor="ctr"/>
-          <a:lstStyle/>
-          <a:p>
-            <a:pPr algn="ctr"/>
           </a:p>
         </p:txBody>
       </p:sp>
@@ -24064,7 +24029,7 @@
             <a:avLst/>
           </a:prstGeom>
           <a:solidFill>
-            <a:srgbClr val="134E4A"/>
+            <a:srgbClr val="F59E0B"/>
           </a:solidFill>
           <a:ln cap="flat" cmpd="sng" w="12700">
             <a:solidFill>
@@ -24434,7 +24399,7 @@
                 <a:cs typeface="Calibri"/>
                 <a:sym typeface="Calibri"/>
               </a:rPr>
-              <a:t>25</a:t>
+              <a:t>1</a:t>
             </a:r>
             <a:endParaRPr b="0" i="0" sz="2200" u="none" cap="none" strike="noStrike">
               <a:solidFill>
@@ -24733,7 +24698,7 @@
                 <a:cs typeface="Calibri"/>
                 <a:sym typeface="Calibri"/>
               </a:rPr>
-              <a:t>25</a:t>
+              <a:t>2</a:t>
             </a:r>
             <a:endParaRPr b="0" i="0" sz="2200" u="none" cap="none" strike="noStrike">
               <a:solidFill>
@@ -25032,7 +24997,7 @@
                 <a:cs typeface="Calibri"/>
                 <a:sym typeface="Calibri"/>
               </a:rPr>
-              <a:t>25</a:t>
+              <a:t>3</a:t>
             </a:r>
             <a:endParaRPr b="0" i="0" sz="2200" u="none" cap="none" strike="noStrike">
               <a:solidFill>
@@ -25218,49 +25183,6 @@
               <a:cs typeface="Calibri"/>
               <a:sym typeface="Calibri"/>
             </a:endParaRPr>
-          </a:p>
-        </p:txBody>
-      </p:sp>
-      <p:sp>
-        <p:nvSpPr>
-          <p:cNvPr id="433" name="Rectangle 432"/>
-          <p:cNvSpPr/>
-          <p:nvPr/>
-        </p:nvSpPr>
-        <p:spPr>
-          <a:xfrm>
-            <a:off x="0" y="777240"/>
-            <a:ext cx="109728" cy="5989320"/>
-          </a:xfrm>
-          <a:prstGeom prst="rect">
-            <a:avLst/>
-          </a:prstGeom>
-          <a:solidFill>
-            <a:srgbClr val="F59E0B"/>
-          </a:solidFill>
-          <a:ln>
-            <a:noFill/>
-          </a:ln>
-        </p:spPr>
-        <p:style>
-          <a:lnRef idx="1">
-            <a:schemeClr val="accent1"/>
-          </a:lnRef>
-          <a:fillRef idx="3">
-            <a:schemeClr val="accent1"/>
-          </a:fillRef>
-          <a:effectRef idx="2">
-            <a:schemeClr val="accent1"/>
-          </a:effectRef>
-          <a:fontRef idx="minor">
-            <a:schemeClr val="lt1"/>
-          </a:fontRef>
-        </p:style>
-        <p:txBody>
-          <a:bodyPr rtlCol="0" anchor="ctr"/>
-          <a:lstStyle/>
-          <a:p>
-            <a:pPr algn="ctr"/>
           </a:p>
         </p:txBody>
       </p:sp>
@@ -25300,7 +25222,7 @@
             <a:avLst/>
           </a:prstGeom>
           <a:solidFill>
-            <a:srgbClr val="134E4A"/>
+            <a:srgbClr val="F59E0B"/>
           </a:solidFill>
           <a:ln cap="flat" cmpd="sng" w="12700">
             <a:solidFill>
@@ -26297,49 +26219,6 @@
               <a:cs typeface="Calibri"/>
               <a:sym typeface="Calibri"/>
             </a:endParaRPr>
-          </a:p>
-        </p:txBody>
-      </p:sp>
-      <p:sp>
-        <p:nvSpPr>
-          <p:cNvPr id="455" name="Rectangle 454"/>
-          <p:cNvSpPr/>
-          <p:nvPr/>
-        </p:nvSpPr>
-        <p:spPr>
-          <a:xfrm>
-            <a:off x="0" y="777240"/>
-            <a:ext cx="109728" cy="5989320"/>
-          </a:xfrm>
-          <a:prstGeom prst="rect">
-            <a:avLst/>
-          </a:prstGeom>
-          <a:solidFill>
-            <a:srgbClr val="F59E0B"/>
-          </a:solidFill>
-          <a:ln>
-            <a:noFill/>
-          </a:ln>
-        </p:spPr>
-        <p:style>
-          <a:lnRef idx="1">
-            <a:schemeClr val="accent1"/>
-          </a:lnRef>
-          <a:fillRef idx="3">
-            <a:schemeClr val="accent1"/>
-          </a:fillRef>
-          <a:effectRef idx="2">
-            <a:schemeClr val="accent1"/>
-          </a:effectRef>
-          <a:fontRef idx="minor">
-            <a:schemeClr val="lt1"/>
-          </a:fontRef>
-        </p:style>
-        <p:txBody>
-          <a:bodyPr rtlCol="0" anchor="ctr"/>
-          <a:lstStyle/>
-          <a:p>
-            <a:pPr algn="ctr"/>
           </a:p>
         </p:txBody>
       </p:sp>
@@ -28372,7 +28251,7 @@
             <a:avLst/>
           </a:prstGeom>
           <a:solidFill>
-            <a:srgbClr val="134E4A"/>
+            <a:srgbClr val="14B8A6"/>
           </a:solidFill>
           <a:ln cap="flat" cmpd="sng" w="12700">
             <a:solidFill>
@@ -28742,7 +28621,7 @@
                 <a:cs typeface="Calibri"/>
                 <a:sym typeface="Calibri"/>
               </a:rPr>
-              <a:t>4</a:t>
+              <a:t>01</a:t>
             </a:r>
             <a:endParaRPr b="0" i="0" sz="1800" u="none" cap="none" strike="noStrike">
               <a:solidFill>
@@ -28966,7 +28845,7 @@
                 <a:cs typeface="Calibri"/>
                 <a:sym typeface="Calibri"/>
               </a:rPr>
-              <a:t>4</a:t>
+              <a:t>02</a:t>
             </a:r>
             <a:endParaRPr b="0" i="0" sz="1800" u="none" cap="none" strike="noStrike">
               <a:solidFill>
@@ -29190,7 +29069,7 @@
                 <a:cs typeface="Calibri"/>
                 <a:sym typeface="Calibri"/>
               </a:rPr>
-              <a:t>4</a:t>
+              <a:t>03</a:t>
             </a:r>
             <a:endParaRPr b="0" i="0" sz="1800" u="none" cap="none" strike="noStrike">
               <a:solidFill>
@@ -29425,49 +29304,6 @@
               <a:cs typeface="Calibri"/>
               <a:sym typeface="Calibri"/>
             </a:endParaRPr>
-          </a:p>
-        </p:txBody>
-      </p:sp>
-      <p:sp>
-        <p:nvSpPr>
-          <p:cNvPr id="59" name="Rectangle 58"/>
-          <p:cNvSpPr/>
-          <p:nvPr/>
-        </p:nvSpPr>
-        <p:spPr>
-          <a:xfrm>
-            <a:off x="0" y="777240"/>
-            <a:ext cx="109728" cy="5989320"/>
-          </a:xfrm>
-          <a:prstGeom prst="rect">
-            <a:avLst/>
-          </a:prstGeom>
-          <a:solidFill>
-            <a:srgbClr val="14B8A6"/>
-          </a:solidFill>
-          <a:ln>
-            <a:noFill/>
-          </a:ln>
-        </p:spPr>
-        <p:style>
-          <a:lnRef idx="1">
-            <a:schemeClr val="accent1"/>
-          </a:lnRef>
-          <a:fillRef idx="3">
-            <a:schemeClr val="accent1"/>
-          </a:fillRef>
-          <a:effectRef idx="2">
-            <a:schemeClr val="accent1"/>
-          </a:effectRef>
-          <a:fontRef idx="minor">
-            <a:schemeClr val="lt1"/>
-          </a:fontRef>
-        </p:style>
-        <p:txBody>
-          <a:bodyPr rtlCol="0" anchor="ctr"/>
-          <a:lstStyle/>
-          <a:p>
-            <a:pPr algn="ctr"/>
           </a:p>
         </p:txBody>
       </p:sp>
@@ -29521,7 +29357,7 @@
             <a:avLst/>
           </a:prstGeom>
           <a:solidFill>
-            <a:srgbClr val="134E4A"/>
+            <a:srgbClr val="14B8A6"/>
           </a:solidFill>
           <a:ln cap="flat" cmpd="sng" w="12700">
             <a:solidFill>
@@ -30288,49 +30124,6 @@
               <a:cs typeface="Calibri"/>
               <a:sym typeface="Calibri"/>
             </a:endParaRPr>
-          </a:p>
-        </p:txBody>
-      </p:sp>
-      <p:sp>
-        <p:nvSpPr>
-          <p:cNvPr id="75" name="Rectangle 74"/>
-          <p:cNvSpPr/>
-          <p:nvPr/>
-        </p:nvSpPr>
-        <p:spPr>
-          <a:xfrm>
-            <a:off x="0" y="777240"/>
-            <a:ext cx="109728" cy="5989320"/>
-          </a:xfrm>
-          <a:prstGeom prst="rect">
-            <a:avLst/>
-          </a:prstGeom>
-          <a:solidFill>
-            <a:srgbClr val="14B8A6"/>
-          </a:solidFill>
-          <a:ln>
-            <a:noFill/>
-          </a:ln>
-        </p:spPr>
-        <p:style>
-          <a:lnRef idx="1">
-            <a:schemeClr val="accent1"/>
-          </a:lnRef>
-          <a:fillRef idx="3">
-            <a:schemeClr val="accent1"/>
-          </a:fillRef>
-          <a:effectRef idx="2">
-            <a:schemeClr val="accent1"/>
-          </a:effectRef>
-          <a:fontRef idx="minor">
-            <a:schemeClr val="lt1"/>
-          </a:fontRef>
-        </p:style>
-        <p:txBody>
-          <a:bodyPr rtlCol="0" anchor="ctr"/>
-          <a:lstStyle/>
-          <a:p>
-            <a:pPr algn="ctr"/>
           </a:p>
         </p:txBody>
       </p:sp>
@@ -30384,7 +30177,7 @@
             <a:avLst/>
           </a:prstGeom>
           <a:solidFill>
-            <a:srgbClr val="134E4A"/>
+            <a:srgbClr val="14B8A6"/>
           </a:solidFill>
           <a:ln cap="flat" cmpd="sng" w="12700">
             <a:solidFill>
@@ -31995,49 +31788,6 @@
           </a:graphicData>
         </a:graphic>
       </p:graphicFrame>
-      <p:sp>
-        <p:nvSpPr>
-          <p:cNvPr id="86" name="Rectangle 85"/>
-          <p:cNvSpPr/>
-          <p:nvPr/>
-        </p:nvSpPr>
-        <p:spPr>
-          <a:xfrm>
-            <a:off x="0" y="777240"/>
-            <a:ext cx="109728" cy="5989320"/>
-          </a:xfrm>
-          <a:prstGeom prst="rect">
-            <a:avLst/>
-          </a:prstGeom>
-          <a:solidFill>
-            <a:srgbClr val="14B8A6"/>
-          </a:solidFill>
-          <a:ln>
-            <a:noFill/>
-          </a:ln>
-        </p:spPr>
-        <p:style>
-          <a:lnRef idx="1">
-            <a:schemeClr val="accent1"/>
-          </a:lnRef>
-          <a:fillRef idx="3">
-            <a:schemeClr val="accent1"/>
-          </a:fillRef>
-          <a:effectRef idx="2">
-            <a:schemeClr val="accent1"/>
-          </a:effectRef>
-          <a:fontRef idx="minor">
-            <a:schemeClr val="lt1"/>
-          </a:fontRef>
-        </p:style>
-        <p:txBody>
-          <a:bodyPr rtlCol="0" anchor="ctr"/>
-          <a:lstStyle/>
-          <a:p>
-            <a:pPr algn="ctr"/>
-          </a:p>
-        </p:txBody>
-      </p:sp>
     </p:spTree>
   </p:cSld>
   <p:clrMapOvr>
@@ -32088,7 +31838,7 @@
             <a:avLst/>
           </a:prstGeom>
           <a:solidFill>
-            <a:srgbClr val="134E4A"/>
+            <a:srgbClr val="14B8A6"/>
           </a:solidFill>
           <a:ln cap="flat" cmpd="sng" w="12700">
             <a:solidFill>
@@ -33264,49 +33014,6 @@
           </a:ln>
         </p:spPr>
       </p:cxnSp>
-      <p:sp>
-        <p:nvSpPr>
-          <p:cNvPr id="113" name="Rectangle 112"/>
-          <p:cNvSpPr/>
-          <p:nvPr/>
-        </p:nvSpPr>
-        <p:spPr>
-          <a:xfrm>
-            <a:off x="0" y="777240"/>
-            <a:ext cx="109728" cy="5989320"/>
-          </a:xfrm>
-          <a:prstGeom prst="rect">
-            <a:avLst/>
-          </a:prstGeom>
-          <a:solidFill>
-            <a:srgbClr val="14B8A6"/>
-          </a:solidFill>
-          <a:ln>
-            <a:noFill/>
-          </a:ln>
-        </p:spPr>
-        <p:style>
-          <a:lnRef idx="1">
-            <a:schemeClr val="accent1"/>
-          </a:lnRef>
-          <a:fillRef idx="3">
-            <a:schemeClr val="accent1"/>
-          </a:fillRef>
-          <a:effectRef idx="2">
-            <a:schemeClr val="accent1"/>
-          </a:effectRef>
-          <a:fontRef idx="minor">
-            <a:schemeClr val="lt1"/>
-          </a:fontRef>
-        </p:style>
-        <p:txBody>
-          <a:bodyPr rtlCol="0" anchor="ctr"/>
-          <a:lstStyle/>
-          <a:p>
-            <a:pPr algn="ctr"/>
-          </a:p>
-        </p:txBody>
-      </p:sp>
     </p:spTree>
   </p:cSld>
   <p:clrMapOvr>
@@ -33767,7 +33474,7 @@
             <a:avLst/>
           </a:prstGeom>
           <a:solidFill>
-            <a:srgbClr val="134E4A"/>
+            <a:srgbClr val="2563EB"/>
           </a:solidFill>
           <a:ln cap="flat" cmpd="sng" w="12700">
             <a:solidFill>
@@ -34349,7 +34056,7 @@
                 <a:cs typeface="Calibri"/>
                 <a:sym typeface="Calibri"/>
               </a:rPr>
-              <a:t>9</a:t>
+              <a:t>01</a:t>
             </a:r>
             <a:endParaRPr b="0" i="0" sz="1200" u="none" cap="none" strike="noStrike">
               <a:solidFill>
@@ -34611,7 +34318,7 @@
                 <a:cs typeface="Calibri"/>
                 <a:sym typeface="Calibri"/>
               </a:rPr>
-              <a:t>9</a:t>
+              <a:t>02</a:t>
             </a:r>
             <a:endParaRPr b="0" i="0" sz="1200" u="none" cap="none" strike="noStrike">
               <a:solidFill>
@@ -34873,7 +34580,7 @@
                 <a:cs typeface="Calibri"/>
                 <a:sym typeface="Calibri"/>
               </a:rPr>
-              <a:t>9</a:t>
+              <a:t>03</a:t>
             </a:r>
             <a:endParaRPr b="0" i="0" sz="1200" u="none" cap="none" strike="noStrike">
               <a:solidFill>
@@ -35135,7 +34842,7 @@
                 <a:cs typeface="Calibri"/>
                 <a:sym typeface="Calibri"/>
               </a:rPr>
-              <a:t>9</a:t>
+              <a:t>04</a:t>
             </a:r>
             <a:endParaRPr b="0" i="0" sz="1200" u="none" cap="none" strike="noStrike">
               <a:solidFill>
@@ -35270,49 +34977,6 @@
               <a:cs typeface="Calibri"/>
               <a:sym typeface="Calibri"/>
             </a:endParaRPr>
-          </a:p>
-        </p:txBody>
-      </p:sp>
-      <p:sp>
-        <p:nvSpPr>
-          <p:cNvPr id="156" name="Rectangle 155"/>
-          <p:cNvSpPr/>
-          <p:nvPr/>
-        </p:nvSpPr>
-        <p:spPr>
-          <a:xfrm>
-            <a:off x="0" y="777240"/>
-            <a:ext cx="109728" cy="5989320"/>
-          </a:xfrm>
-          <a:prstGeom prst="rect">
-            <a:avLst/>
-          </a:prstGeom>
-          <a:solidFill>
-            <a:srgbClr val="2563EB"/>
-          </a:solidFill>
-          <a:ln>
-            <a:noFill/>
-          </a:ln>
-        </p:spPr>
-        <p:style>
-          <a:lnRef idx="1">
-            <a:schemeClr val="accent1"/>
-          </a:lnRef>
-          <a:fillRef idx="3">
-            <a:schemeClr val="accent1"/>
-          </a:fillRef>
-          <a:effectRef idx="2">
-            <a:schemeClr val="accent1"/>
-          </a:effectRef>
-          <a:fontRef idx="minor">
-            <a:schemeClr val="lt1"/>
-          </a:fontRef>
-        </p:style>
-        <p:txBody>
-          <a:bodyPr rtlCol="0" anchor="ctr"/>
-          <a:lstStyle/>
-          <a:p>
-            <a:pPr algn="ctr"/>
           </a:p>
         </p:txBody>
       </p:sp>

--- a/docs/soutenance.pptx
+++ b/docs/soutenance.pptx
@@ -3348,7 +3348,7 @@
           </a:p>
           <a:p>
             <a:r>
-              <a:t>Ce qui rend Hermes intéressant : on va au-delà du Q et A, on propose une action concrète après le diagnostic informatif.</a:t>
+              <a:t>Ce qui rend Hermes intéressant : on va au-delà d'une simple question/réponse, on propose une action concrète après le diagnostic informatif.</a:t>
             </a:r>
           </a:p>
         </p:txBody>
